--- a/ai-terminology-hell.pptx
+++ b/ai-terminology-hell.pptx
@@ -31,8 +31,8 @@
     <p:sldId id="403" r:id="rId22"/>
     <p:sldId id="404" r:id="rId23"/>
     <p:sldId id="381" r:id="rId24"/>
-    <p:sldId id="258" r:id="rId25"/>
-    <p:sldId id="259" r:id="rId26"/>
+    <p:sldId id="405" r:id="rId25"/>
+    <p:sldId id="406" r:id="rId26"/>
     <p:sldId id="260" r:id="rId27"/>
     <p:sldId id="261" r:id="rId28"/>
     <p:sldId id="262" r:id="rId29"/>
@@ -404,7 +404,7 @@
           <a:p>
             <a:r>
               <a:rPr lang="en-US" dirty="0"/>
-              <a:t>Caveat when presenting: the MCP spec moves fast; check current details.</a:t>
+              <a:t>Use this as the anchor diagram for the whole talk.</a:t>
             </a:r>
           </a:p>
         </p:txBody>
@@ -426,7 +426,7 @@
           <a:p>
             <a:fld id="{F7021451-1387-4CA6-816F-3879F97B5CBC}" type="slidenum">
               <a:rPr lang="en-US"/>
-              <a:t>31</a:t>
+              <a:t>32</a:t>
             </a:fld>
             <a:endParaRPr lang="en-US"/>
           </a:p>
@@ -491,7 +491,7 @@
           <a:p>
             <a:r>
               <a:rPr lang="en-US" dirty="0"/>
-              <a:t>Use this as the anchor diagram for the whole talk.</a:t>
+              <a:t>MCP splits an AI system into three roles. The host owns the user experience and permissions, a client holds one connection per server, and each server exposes a focused capability through tools, resources and prompts.</a:t>
             </a:r>
           </a:p>
         </p:txBody>
@@ -513,7 +513,7 @@
           <a:p>
             <a:fld id="{F7021451-1387-4CA6-816F-3879F97B5CBC}" type="slidenum">
               <a:rPr lang="en-US"/>
-              <a:t>32</a:t>
+              <a:t>33</a:t>
             </a:fld>
             <a:endParaRPr lang="en-US"/>
           </a:p>
@@ -578,7 +578,7 @@
           <a:p>
             <a:r>
               <a:rPr lang="en-US" dirty="0"/>
-              <a:t>MCP splits an AI system into three roles. The host owns the user experience and permissions, a client holds one connection per server, and each server exposes a focused capability through tools, resources and prompts.</a:t>
+              <a:t>Close on the engineering and governance implication, not the taxonomy.</a:t>
             </a:r>
           </a:p>
         </p:txBody>
@@ -600,7 +600,7 @@
           <a:p>
             <a:fld id="{F7021451-1387-4CA6-816F-3879F97B5CBC}" type="slidenum">
               <a:rPr lang="en-US"/>
-              <a:t>33</a:t>
+              <a:t>34</a:t>
             </a:fld>
             <a:endParaRPr lang="en-US"/>
           </a:p>
@@ -665,93 +665,6 @@
           <a:p>
             <a:r>
               <a:rPr lang="en-US" dirty="0"/>
-              <a:t>Close on the engineering and governance implication, not the taxonomy.</a:t>
-            </a:r>
-          </a:p>
-        </p:txBody>
-      </p:sp>
-      <p:sp>
-        <p:nvSpPr>
-          <p:cNvPr id="4" name="Slide Number Placeholder 3"/>
-          <p:cNvSpPr>
-            <a:spLocks noGrp="1"/>
-          </p:cNvSpPr>
-          <p:nvPr>
-            <p:ph type="sldNum" sz="quarter" idx="10"/>
-          </p:nvPr>
-        </p:nvSpPr>
-        <p:spPr/>
-        <p:txBody>
-          <a:bodyPr/>
-          <a:lstStyle/>
-          <a:p>
-            <a:fld id="{F7021451-1387-4CA6-816F-3879F97B5CBC}" type="slidenum">
-              <a:rPr lang="en-US"/>
-              <a:t>34</a:t>
-            </a:fld>
-            <a:endParaRPr lang="en-US"/>
-          </a:p>
-        </p:txBody>
-      </p:sp>
-    </p:spTree>
-    <p:extLst>
-      <p:ext uri="{BB962C8B-B14F-4D97-AF65-F5344CB8AC3E}">
-        <p14:creationId xmlns:p14="http://schemas.microsoft.com/office/powerpoint/2010/main" val="1024086991"/>
-      </p:ext>
-    </p:extLst>
-  </p:cSld>
-  <p:clrMapOvr>
-    <a:masterClrMapping/>
-  </p:clrMapOvr>
-</p:notes>
-</file>
-
-<file path=ppt/notesSlides/notesSlide14.xml><?xml version="1.0" encoding="utf-8"?>
-<p:notes xmlns:a="http://schemas.openxmlformats.org/drawingml/2006/main" xmlns:r="http://schemas.openxmlformats.org/officeDocument/2006/relationships" xmlns:p="http://schemas.openxmlformats.org/presentationml/2006/main">
-  <p:cSld>
-    <p:spTree>
-      <p:nvGrpSpPr>
-        <p:cNvPr id="1" name=""/>
-        <p:cNvGrpSpPr/>
-        <p:nvPr/>
-      </p:nvGrpSpPr>
-      <p:grpSpPr>
-        <a:xfrm>
-          <a:off x="0" y="0"/>
-          <a:ext cx="0" cy="0"/>
-          <a:chOff x="0" y="0"/>
-          <a:chExt cx="0" cy="0"/>
-        </a:xfrm>
-      </p:grpSpPr>
-      <p:sp>
-        <p:nvSpPr>
-          <p:cNvPr id="2" name="Slide Image Placeholder 1"/>
-          <p:cNvSpPr>
-            <a:spLocks noGrp="1" noRot="1" noChangeAspect="1"/>
-          </p:cNvSpPr>
-          <p:nvPr>
-            <p:ph type="sldImg"/>
-          </p:nvPr>
-        </p:nvSpPr>
-        <p:spPr/>
-      </p:sp>
-      <p:sp>
-        <p:nvSpPr>
-          <p:cNvPr id="3" name="Notes Placeholder 2"/>
-          <p:cNvSpPr>
-            <a:spLocks noGrp="1"/>
-          </p:cNvSpPr>
-          <p:nvPr>
-            <p:ph type="body" idx="1"/>
-          </p:nvPr>
-        </p:nvSpPr>
-        <p:spPr/>
-        <p:txBody>
-          <a:bodyPr/>
-          <a:lstStyle/>
-          <a:p>
-            <a:r>
-              <a:rPr lang="en-US" dirty="0"/>
               <a:t>Sources slide. The deck references the AI Glossary for LE Teams, Q4 2024, the AI Microlesson Series on the MGF Data learning and development site, and the Merck Data learning resource.</a:t>
             </a:r>
           </a:p>
@@ -880,93 +793,6 @@
 </p:notes>
 </file>
 
-<file path=ppt/notesSlides/notesSlide3.xml><?xml version="1.0" encoding="utf-8"?>
-<p:notes xmlns:a="http://schemas.openxmlformats.org/drawingml/2006/main" xmlns:r="http://schemas.openxmlformats.org/officeDocument/2006/relationships" xmlns:p="http://schemas.openxmlformats.org/presentationml/2006/main">
-  <p:cSld>
-    <p:spTree>
-      <p:nvGrpSpPr>
-        <p:cNvPr id="1" name=""/>
-        <p:cNvGrpSpPr/>
-        <p:nvPr/>
-      </p:nvGrpSpPr>
-      <p:grpSpPr>
-        <a:xfrm>
-          <a:off x="0" y="0"/>
-          <a:ext cx="0" cy="0"/>
-          <a:chOff x="0" y="0"/>
-          <a:chExt cx="0" cy="0"/>
-        </a:xfrm>
-      </p:grpSpPr>
-      <p:sp>
-        <p:nvSpPr>
-          <p:cNvPr id="2" name="Slide Image Placeholder 1"/>
-          <p:cNvSpPr>
-            <a:spLocks noGrp="1" noRot="1" noChangeAspect="1"/>
-          </p:cNvSpPr>
-          <p:nvPr>
-            <p:ph type="sldImg"/>
-          </p:nvPr>
-        </p:nvSpPr>
-        <p:spPr/>
-      </p:sp>
-      <p:sp>
-        <p:nvSpPr>
-          <p:cNvPr id="3" name="Notes Placeholder 2"/>
-          <p:cNvSpPr>
-            <a:spLocks noGrp="1"/>
-          </p:cNvSpPr>
-          <p:nvPr>
-            <p:ph type="body" idx="1"/>
-          </p:nvPr>
-        </p:nvSpPr>
-        <p:spPr/>
-        <p:txBody>
-          <a:bodyPr/>
-          <a:lstStyle/>
-          <a:p>
-            <a:r>
-              <a:rPr lang="en-US" dirty="0"/>
-              <a:t>The prompt itself changes character: from a task on given material to a goal.</a:t>
-            </a:r>
-          </a:p>
-        </p:txBody>
-      </p:sp>
-      <p:sp>
-        <p:nvSpPr>
-          <p:cNvPr id="4" name="Slide Number Placeholder 3"/>
-          <p:cNvSpPr>
-            <a:spLocks noGrp="1"/>
-          </p:cNvSpPr>
-          <p:nvPr>
-            <p:ph type="sldNum" sz="quarter" idx="10"/>
-          </p:nvPr>
-        </p:nvSpPr>
-        <p:spPr/>
-        <p:txBody>
-          <a:bodyPr/>
-          <a:lstStyle/>
-          <a:p>
-            <a:fld id="{F7021451-1387-4CA6-816F-3879F97B5CBC}" type="slidenum">
-              <a:rPr lang="en-US"/>
-              <a:t>24</a:t>
-            </a:fld>
-            <a:endParaRPr lang="en-US"/>
-          </a:p>
-        </p:txBody>
-      </p:sp>
-    </p:spTree>
-    <p:extLst>
-      <p:ext uri="{BB962C8B-B14F-4D97-AF65-F5344CB8AC3E}">
-        <p14:creationId xmlns:p14="http://schemas.microsoft.com/office/powerpoint/2010/main" val="1024086991"/>
-      </p:ext>
-    </p:extLst>
-  </p:cSld>
-  <p:clrMapOvr>
-    <a:masterClrMapping/>
-  </p:clrMapOvr>
-</p:notes>
-</file>
-
 <file path=ppt/notesSlides/notesSlide4.xml><?xml version="1.0" encoding="utf-8"?>
 <p:notes xmlns:a="http://schemas.openxmlformats.org/drawingml/2006/main" xmlns:r="http://schemas.openxmlformats.org/officeDocument/2006/relationships" xmlns:p="http://schemas.openxmlformats.org/presentationml/2006/main">
   <p:cSld>
@@ -1013,7 +839,7 @@
           <a:p>
             <a:r>
               <a:rPr lang="en-US" dirty="0"/>
-              <a:t>Tools and the runtime loop are the two parts the rest of this deck unpacks.</a:t>
+              <a:t>Transition slide. Hand over from taxonomy to mechanics.</a:t>
             </a:r>
           </a:p>
         </p:txBody>
@@ -1035,7 +861,7 @@
           <a:p>
             <a:fld id="{F7021451-1387-4CA6-816F-3879F97B5CBC}" type="slidenum">
               <a:rPr lang="en-US"/>
-              <a:t>25</a:t>
+              <a:t>26</a:t>
             </a:fld>
             <a:endParaRPr lang="en-US"/>
           </a:p>
@@ -1100,7 +926,7 @@
           <a:p>
             <a:r>
               <a:rPr lang="en-US" dirty="0"/>
-              <a:t>Transition slide. Hand over from taxonomy to mechanics.</a:t>
+              <a:t>These four gaps are what everything that follows is answering.</a:t>
             </a:r>
           </a:p>
         </p:txBody>
@@ -1122,7 +948,7 @@
           <a:p>
             <a:fld id="{F7021451-1387-4CA6-816F-3879F97B5CBC}" type="slidenum">
               <a:rPr lang="en-US"/>
-              <a:t>26</a:t>
+              <a:t>27</a:t>
             </a:fld>
             <a:endParaRPr lang="en-US"/>
           </a:p>
@@ -1187,7 +1013,7 @@
           <a:p>
             <a:r>
               <a:rPr lang="en-US" dirty="0"/>
-              <a:t>These four gaps are what everything that follows is answering.</a:t>
+              <a:t>Stress the ordering: RAG first, tool use generalised it, MCP standardised the plumbing.</a:t>
             </a:r>
           </a:p>
         </p:txBody>
@@ -1209,7 +1035,7 @@
           <a:p>
             <a:fld id="{F7021451-1387-4CA6-816F-3879F97B5CBC}" type="slidenum">
               <a:rPr lang="en-US"/>
-              <a:t>27</a:t>
+              <a:t>28</a:t>
             </a:fld>
             <a:endParaRPr lang="en-US"/>
           </a:p>
@@ -1274,7 +1100,7 @@
           <a:p>
             <a:r>
               <a:rPr lang="en-US" dirty="0"/>
-              <a:t>Stress the ordering: RAG first, tool use generalised it, MCP standardised the plumbing.</a:t>
+              <a:t>Key point: in classic RAG the model makes no decision at all.</a:t>
             </a:r>
           </a:p>
         </p:txBody>
@@ -1296,7 +1122,7 @@
           <a:p>
             <a:fld id="{F7021451-1387-4CA6-816F-3879F97B5CBC}" type="slidenum">
               <a:rPr lang="en-US"/>
-              <a:t>28</a:t>
+              <a:t>29</a:t>
             </a:fld>
             <a:endParaRPr lang="en-US"/>
           </a:p>
@@ -1361,7 +1187,7 @@
           <a:p>
             <a:r>
               <a:rPr lang="en-US" dirty="0"/>
-              <a:t>Key point: in classic RAG the model makes no decision at all.</a:t>
+              <a:t>Tool use is itself a learned skill: when to call, which tool, how to shape arguments.</a:t>
             </a:r>
           </a:p>
         </p:txBody>
@@ -1383,7 +1209,7 @@
           <a:p>
             <a:fld id="{F7021451-1387-4CA6-816F-3879F97B5CBC}" type="slidenum">
               <a:rPr lang="en-US"/>
-              <a:t>29</a:t>
+              <a:t>30</a:t>
             </a:fld>
             <a:endParaRPr lang="en-US"/>
           </a:p>
@@ -1448,7 +1274,7 @@
           <a:p>
             <a:r>
               <a:rPr lang="en-US" dirty="0"/>
-              <a:t>Tool use is itself a learned skill: when to call, which tool, how to shape arguments.</a:t>
+              <a:t>Caveat when presenting: the MCP spec moves fast; check current details.</a:t>
             </a:r>
           </a:p>
         </p:txBody>
@@ -1470,7 +1296,7 @@
           <a:p>
             <a:fld id="{F7021451-1387-4CA6-816F-3879F97B5CBC}" type="slidenum">
               <a:rPr lang="en-US"/>
-              <a:t>30</a:t>
+              <a:t>31</a:t>
             </a:fld>
             <a:endParaRPr lang="en-US"/>
           </a:p>
@@ -1559,7 +1385,7 @@
           <a:p>
             <a:fld id="{990A80E8-06B7-46C8-9730-7088A7D38457}" type="datetimeFigureOut">
               <a:rPr lang="en-US" smtClean="0"/>
-              <a:t>9/23/26</a:t>
+              <a:t>9/24/26</a:t>
             </a:fld>
             <a:endParaRPr lang="en-US"/>
           </a:p>
@@ -34445,8 +34271,8 @@
 </file>
 
 <file path=ppt/slides/slide24.xml><?xml version="1.0" encoding="utf-8"?>
-<p:sld xmlns:a="http://schemas.openxmlformats.org/drawingml/2006/main" xmlns:r="http://schemas.openxmlformats.org/officeDocument/2006/relationships" xmlns:p="http://schemas.openxmlformats.org/presentationml/2006/main">
-  <p:cSld name="Slide 3">
+<p:sld xmlns:a="http://schemas.openxmlformats.org/drawingml/2006/main" xmlns:p="http://schemas.openxmlformats.org/presentationml/2006/main" xmlns:r="http://schemas.openxmlformats.org/officeDocument/2006/relationships">
+  <p:cSld>
     <p:bg>
       <p:bgPr>
         <a:solidFill>
@@ -34461,17 +34287,10 @@
         <p:cNvGrpSpPr/>
         <p:nvPr/>
       </p:nvGrpSpPr>
-      <p:grpSpPr>
-        <a:xfrm>
-          <a:off x="0" y="0"/>
-          <a:ext cx="0" cy="0"/>
-          <a:chOff x="0" y="0"/>
-          <a:chExt cx="0" cy="0"/>
-        </a:xfrm>
-      </p:grpSpPr>
-      <p:sp>
-        <p:nvSpPr>
-          <p:cNvPr id="2" name="Shape 0"/>
+      <p:grpSpPr/>
+      <p:sp>
+        <p:nvSpPr>
+          <p:cNvPr id="2" name="Rectangle 1"/>
           <p:cNvSpPr/>
           <p:nvPr/>
         </p:nvSpPr>
@@ -34486,59 +34305,72 @@
           <a:solidFill>
             <a:srgbClr val="0D1B2A"/>
           </a:solidFill>
-          <a:ln/>
-        </p:spPr>
-        <p:txBody>
-          <a:bodyPr/>
-          <a:lstStyle/>
-          <a:p>
-            <a:endParaRPr lang="en-US"/>
-          </a:p>
-        </p:txBody>
-      </p:sp>
-      <p:sp>
-        <p:nvSpPr>
-          <p:cNvPr id="3" name="Text 1"/>
-          <p:cNvSpPr/>
+          <a:ln>
+            <a:noFill/>
+          </a:ln>
+          <a:effectLst/>
+        </p:spPr>
+        <p:style>
+          <a:lnRef idx="1">
+            <a:schemeClr val="accent1"/>
+          </a:lnRef>
+          <a:fillRef idx="3">
+            <a:schemeClr val="accent1"/>
+          </a:fillRef>
+          <a:effectRef idx="2">
+            <a:schemeClr val="accent1"/>
+          </a:effectRef>
+          <a:fontRef idx="minor">
+            <a:schemeClr val="lt1"/>
+          </a:fontRef>
+        </p:style>
+        <p:txBody>
+          <a:bodyPr rtlCol="0" anchor="ctr"/>
+          <a:lstStyle/>
+          <a:p>
+            <a:pPr algn="ctr"/>
+          </a:p>
+        </p:txBody>
+      </p:sp>
+      <p:sp>
+        <p:nvSpPr>
+          <p:cNvPr id="3" name="TextBox 2"/>
+          <p:cNvSpPr txBox="1"/>
           <p:nvPr/>
         </p:nvSpPr>
         <p:spPr>
           <a:xfrm>
             <a:off x="566928" y="329184"/>
-            <a:ext cx="8138160" cy="256032"/>
-          </a:xfrm>
-          <a:prstGeom prst="rect">
-            <a:avLst/>
-          </a:prstGeom>
-          <a:noFill/>
-          <a:ln/>
-        </p:spPr>
-        <p:txBody>
-          <a:bodyPr wrap="square" lIns="0" tIns="0" rIns="0" bIns="0" rtlCol="0" anchor="ctr"/>
-          <a:lstStyle/>
-          <a:p>
-            <a:pPr marL="0" indent="0">
-              <a:buNone/>
-            </a:pPr>
-            <a:r>
-              <a:rPr lang="en-US" sz="1050" kern="0" spc="200" dirty="0">
+            <a:ext cx="8138160" cy="274320"/>
+          </a:xfrm>
+          <a:prstGeom prst="rect">
+            <a:avLst/>
+          </a:prstGeom>
+          <a:noFill/>
+        </p:spPr>
+        <p:txBody>
+          <a:bodyPr wrap="square" anchor="t" lIns="0" rIns="0" tIns="0" bIns="0">
+            <a:spAutoFit/>
+          </a:bodyPr>
+          <a:lstStyle/>
+          <a:p>
+            <a:pPr algn="l"/>
+            <a:r>
+              <a:rPr sz="1100" b="0" spc="300">
                 <a:solidFill>
                   <a:srgbClr val="1B9AAA"/>
                 </a:solidFill>
-                <a:latin typeface="JetBrains Mono" pitchFamily="34" charset="0"/>
-                <a:ea typeface="JetBrains Mono" pitchFamily="34" charset="-122"/>
-                <a:cs typeface="JetBrains Mono" pitchFamily="34" charset="-120"/>
+                <a:latin typeface="JetBrains Mono"/>
               </a:rPr>
               <a:t>THE SHIFT</a:t>
             </a:r>
-            <a:endParaRPr lang="en-US" sz="1050" dirty="0"/>
-          </a:p>
-        </p:txBody>
-      </p:sp>
-      <p:sp>
-        <p:nvSpPr>
-          <p:cNvPr id="4" name="Text 2"/>
-          <p:cNvSpPr/>
+          </a:p>
+        </p:txBody>
+      </p:sp>
+      <p:sp>
+        <p:nvSpPr>
+          <p:cNvPr id="4" name="slide-chatbot-vs-agent"/>
+          <p:cNvSpPr txBox="1"/>
           <p:nvPr/>
         </p:nvSpPr>
         <p:spPr>
@@ -34550,301 +34382,71 @@
             <a:avLst/>
           </a:prstGeom>
           <a:noFill/>
-          <a:ln/>
-        </p:spPr>
-        <p:txBody>
-          <a:bodyPr wrap="square" lIns="0" tIns="0" rIns="0" bIns="0" rtlCol="0" anchor="ctr"/>
-          <a:lstStyle/>
-          <a:p>
-            <a:pPr marL="0" indent="0">
-              <a:buNone/>
-            </a:pPr>
-            <a:r>
-              <a:rPr lang="en-US" sz="3200" dirty="0">
+        </p:spPr>
+        <p:txBody>
+          <a:bodyPr wrap="square" anchor="t" lIns="0" rIns="0" tIns="0" bIns="0">
+            <a:spAutoFit/>
+          </a:bodyPr>
+          <a:lstStyle/>
+          <a:p>
+            <a:pPr algn="l"/>
+            <a:r>
+              <a:rPr sz="3200" b="0">
                 <a:solidFill>
                   <a:srgbClr val="0D1B2A"/>
                 </a:solidFill>
-                <a:latin typeface="Oswald" pitchFamily="34" charset="0"/>
-                <a:ea typeface="Oswald" pitchFamily="34" charset="-122"/>
-                <a:cs typeface="Oswald" pitchFamily="34" charset="-120"/>
-              </a:rPr>
-              <a:t>Passive response, active problem-solving</a:t>
-            </a:r>
-            <a:endParaRPr lang="en-US" sz="3200" dirty="0"/>
-          </a:p>
-        </p:txBody>
-      </p:sp>
-      <p:sp>
-        <p:nvSpPr>
-          <p:cNvPr id="5" name="Text 3"/>
-          <p:cNvSpPr/>
-          <p:nvPr/>
-        </p:nvSpPr>
-        <p:spPr>
-          <a:xfrm>
-            <a:off x="566928" y="1371600"/>
-            <a:ext cx="8138160" cy="292608"/>
-          </a:xfrm>
-          <a:prstGeom prst="rect">
-            <a:avLst/>
-          </a:prstGeom>
-          <a:noFill/>
-          <a:ln/>
-        </p:spPr>
-        <p:txBody>
-          <a:bodyPr wrap="square" lIns="0" tIns="0" rIns="0" bIns="0" rtlCol="0" anchor="ctr"/>
-          <a:lstStyle/>
-          <a:p>
-            <a:pPr marL="0" indent="0">
-              <a:buNone/>
-            </a:pPr>
-            <a:r>
-              <a:rPr lang="en-US" sz="1400" dirty="0">
+                <a:latin typeface="Oswald"/>
+              </a:rPr>
+              <a:t>From just answering to actually doing</a:t>
+            </a:r>
+          </a:p>
+        </p:txBody>
+      </p:sp>
+      <p:sp>
+        <p:nvSpPr>
+          <p:cNvPr id="5" name="TextBox 4"/>
+          <p:cNvSpPr txBox="1"/>
+          <p:nvPr/>
+        </p:nvSpPr>
+        <p:spPr>
+          <a:xfrm>
+            <a:off x="566928" y="1298448"/>
+            <a:ext cx="8138160" cy="457200"/>
+          </a:xfrm>
+          <a:prstGeom prst="rect">
+            <a:avLst/>
+          </a:prstGeom>
+          <a:noFill/>
+        </p:spPr>
+        <p:txBody>
+          <a:bodyPr wrap="square" anchor="t" lIns="0" rIns="0" tIns="0" bIns="0">
+            <a:spAutoFit/>
+          </a:bodyPr>
+          <a:lstStyle/>
+          <a:p>
+            <a:pPr algn="l"/>
+            <a:r>
+              <a:rPr sz="1150" b="0">
                 <a:solidFill>
                   <a:srgbClr val="14293D"/>
                 </a:solidFill>
-                <a:latin typeface="Roboto" pitchFamily="34" charset="0"/>
-                <a:ea typeface="Roboto" pitchFamily="34" charset="-122"/>
-                <a:cs typeface="Roboto" pitchFamily="34" charset="-120"/>
-              </a:rPr>
-              <a:t>LLMs generate text and answer queries. Agents add autonomy and goal-oriented action.</a:t>
-            </a:r>
-            <a:endParaRPr lang="en-US" sz="1400" dirty="0"/>
-          </a:p>
-        </p:txBody>
-      </p:sp>
-      <p:sp>
-        <p:nvSpPr>
-          <p:cNvPr id="6" name="Shape 4"/>
-          <p:cNvSpPr/>
-          <p:nvPr/>
-        </p:nvSpPr>
-        <p:spPr>
-          <a:xfrm>
-            <a:off x="566928" y="1828800"/>
-            <a:ext cx="3931920" cy="420624"/>
-          </a:xfrm>
-          <a:prstGeom prst="rect">
-            <a:avLst/>
-          </a:prstGeom>
-          <a:solidFill>
-            <a:srgbClr val="14293D"/>
-          </a:solidFill>
-          <a:ln/>
-        </p:spPr>
-        <p:txBody>
-          <a:bodyPr/>
-          <a:lstStyle/>
-          <a:p>
-            <a:endParaRPr lang="en-US"/>
-          </a:p>
-        </p:txBody>
-      </p:sp>
-      <p:sp>
-        <p:nvSpPr>
-          <p:cNvPr id="7" name="Text 5"/>
-          <p:cNvSpPr/>
-          <p:nvPr/>
-        </p:nvSpPr>
-        <p:spPr>
-          <a:xfrm>
-            <a:off x="786384" y="1901952"/>
-            <a:ext cx="3566160" cy="274320"/>
-          </a:xfrm>
-          <a:prstGeom prst="rect">
-            <a:avLst/>
-          </a:prstGeom>
-          <a:noFill/>
-          <a:ln/>
-        </p:spPr>
-        <p:txBody>
-          <a:bodyPr wrap="square" lIns="0" tIns="0" rIns="0" bIns="0" rtlCol="0" anchor="ctr"/>
-          <a:lstStyle/>
-          <a:p>
-            <a:pPr marL="0" indent="0">
-              <a:buNone/>
-            </a:pPr>
-            <a:r>
-              <a:rPr lang="en-US" sz="1500" dirty="0">
-                <a:solidFill>
-                  <a:srgbClr val="FFFFFF"/>
-                </a:solidFill>
-                <a:latin typeface="Oswald" pitchFamily="34" charset="0"/>
-                <a:ea typeface="Oswald" pitchFamily="34" charset="-122"/>
-                <a:cs typeface="Oswald" pitchFamily="34" charset="-120"/>
-              </a:rPr>
-              <a:t>Generative AI chatbot</a:t>
-            </a:r>
-            <a:endParaRPr lang="en-US" sz="1500" dirty="0"/>
-          </a:p>
-        </p:txBody>
-      </p:sp>
-      <p:sp>
-        <p:nvSpPr>
-          <p:cNvPr id="8" name="Text 6"/>
-          <p:cNvSpPr/>
-          <p:nvPr/>
-        </p:nvSpPr>
-        <p:spPr>
-          <a:xfrm>
-            <a:off x="868680" y="2377440"/>
-            <a:ext cx="3383280" cy="274320"/>
-          </a:xfrm>
-          <a:prstGeom prst="rect">
-            <a:avLst/>
-          </a:prstGeom>
-          <a:noFill/>
-          <a:ln/>
-        </p:spPr>
-        <p:txBody>
-          <a:bodyPr wrap="square" lIns="0" tIns="0" rIns="0" bIns="0" rtlCol="0" anchor="ctr"/>
-          <a:lstStyle/>
-          <a:p>
-            <a:pPr marL="0" indent="0">
-              <a:buNone/>
-            </a:pPr>
-            <a:r>
-              <a:rPr lang="en-US" sz="1100" dirty="0">
-                <a:solidFill>
-                  <a:srgbClr val="0D1B2A"/>
-                </a:solidFill>
-                <a:latin typeface="JetBrains Mono" pitchFamily="34" charset="0"/>
-                <a:ea typeface="JetBrains Mono" pitchFamily="34" charset="-122"/>
-                <a:cs typeface="JetBrains Mono" pitchFamily="34" charset="-120"/>
-              </a:rPr>
-              <a:t>Prompt  →</a:t>
-            </a:r>
-            <a:endParaRPr lang="en-US" sz="1100" dirty="0"/>
-          </a:p>
-        </p:txBody>
-      </p:sp>
-      <p:sp>
-        <p:nvSpPr>
-          <p:cNvPr id="9" name="Text 7"/>
-          <p:cNvSpPr/>
-          <p:nvPr/>
-        </p:nvSpPr>
-        <p:spPr>
-          <a:xfrm>
-            <a:off x="868680" y="2761488"/>
-            <a:ext cx="3383280" cy="274320"/>
-          </a:xfrm>
-          <a:prstGeom prst="rect">
-            <a:avLst/>
-          </a:prstGeom>
-          <a:noFill/>
-          <a:ln/>
-        </p:spPr>
-        <p:txBody>
-          <a:bodyPr wrap="square" lIns="0" tIns="0" rIns="0" bIns="0" rtlCol="0" anchor="ctr"/>
-          <a:lstStyle/>
-          <a:p>
-            <a:pPr marL="0" indent="0">
-              <a:buNone/>
-            </a:pPr>
-            <a:r>
-              <a:rPr lang="en-US" sz="1100" dirty="0">
-                <a:solidFill>
-                  <a:srgbClr val="6B7B8C"/>
-                </a:solidFill>
-                <a:latin typeface="JetBrains Mono" pitchFamily="34" charset="0"/>
-                <a:ea typeface="JetBrains Mono" pitchFamily="34" charset="-122"/>
-                <a:cs typeface="JetBrains Mono" pitchFamily="34" charset="-120"/>
-              </a:rPr>
-              <a:t>Answer  ←</a:t>
-            </a:r>
-            <a:endParaRPr lang="en-US" sz="1100" dirty="0"/>
-          </a:p>
-        </p:txBody>
-      </p:sp>
-      <p:sp>
-        <p:nvSpPr>
-          <p:cNvPr id="10" name="Text 8"/>
-          <p:cNvSpPr/>
-          <p:nvPr/>
-        </p:nvSpPr>
-        <p:spPr>
-          <a:xfrm>
-            <a:off x="868680" y="3145536"/>
-            <a:ext cx="3383280" cy="274320"/>
-          </a:xfrm>
-          <a:prstGeom prst="rect">
-            <a:avLst/>
-          </a:prstGeom>
-          <a:noFill/>
-          <a:ln/>
-        </p:spPr>
-        <p:txBody>
-          <a:bodyPr wrap="square" lIns="0" tIns="0" rIns="0" bIns="0" rtlCol="0" anchor="ctr"/>
-          <a:lstStyle/>
-          <a:p>
-            <a:pPr marL="0" indent="0">
-              <a:buNone/>
-            </a:pPr>
-            <a:r>
-              <a:rPr lang="en-US" sz="1100" dirty="0">
-                <a:solidFill>
-                  <a:srgbClr val="0D1B2A"/>
-                </a:solidFill>
-                <a:latin typeface="JetBrains Mono" pitchFamily="34" charset="0"/>
-                <a:ea typeface="JetBrains Mono" pitchFamily="34" charset="-122"/>
-                <a:cs typeface="JetBrains Mono" pitchFamily="34" charset="-120"/>
-              </a:rPr>
-              <a:t>Prompt  →</a:t>
-            </a:r>
-            <a:endParaRPr lang="en-US" sz="1100" dirty="0"/>
-          </a:p>
-        </p:txBody>
-      </p:sp>
-      <p:sp>
-        <p:nvSpPr>
-          <p:cNvPr id="11" name="Text 9"/>
-          <p:cNvSpPr/>
-          <p:nvPr/>
-        </p:nvSpPr>
-        <p:spPr>
-          <a:xfrm>
-            <a:off x="868680" y="3529584"/>
-            <a:ext cx="3383280" cy="274320"/>
-          </a:xfrm>
-          <a:prstGeom prst="rect">
-            <a:avLst/>
-          </a:prstGeom>
-          <a:noFill/>
-          <a:ln/>
-        </p:spPr>
-        <p:txBody>
-          <a:bodyPr wrap="square" lIns="0" tIns="0" rIns="0" bIns="0" rtlCol="0" anchor="ctr"/>
-          <a:lstStyle/>
-          <a:p>
-            <a:pPr marL="0" indent="0">
-              <a:buNone/>
-            </a:pPr>
-            <a:r>
-              <a:rPr lang="en-US" sz="1100" dirty="0">
-                <a:solidFill>
-                  <a:srgbClr val="6B7B8C"/>
-                </a:solidFill>
-                <a:latin typeface="JetBrains Mono" pitchFamily="34" charset="0"/>
-                <a:ea typeface="JetBrains Mono" pitchFamily="34" charset="-122"/>
-                <a:cs typeface="JetBrains Mono" pitchFamily="34" charset="-120"/>
-              </a:rPr>
-              <a:t>Answer  ←</a:t>
-            </a:r>
-            <a:endParaRPr lang="en-US" sz="1100" dirty="0"/>
-          </a:p>
-        </p:txBody>
-      </p:sp>
-      <p:sp>
-        <p:nvSpPr>
-          <p:cNvPr id="12" name="Shape 10"/>
-          <p:cNvSpPr/>
-          <p:nvPr/>
-        </p:nvSpPr>
-        <p:spPr>
-          <a:xfrm>
-            <a:off x="566928" y="4023360"/>
-            <a:ext cx="3931920" cy="777240"/>
+                <a:latin typeface="Roboto"/>
+              </a:rPr>
+              <a:t>LLMs generate text and answer queries. AI Agents can set or interpret goals, plan and sequence actions, use tools (like web browsers, code, or APIs), make decisions based on feedback and adapt over time to complete tasks.</a:t>
+            </a:r>
+          </a:p>
+        </p:txBody>
+      </p:sp>
+      <p:sp>
+        <p:nvSpPr>
+          <p:cNvPr id="6" name="Rectangle 5"/>
+          <p:cNvSpPr/>
+          <p:nvPr/>
+        </p:nvSpPr>
+        <p:spPr>
+          <a:xfrm>
+            <a:off x="566928" y="1920240"/>
+            <a:ext cx="4005072" cy="2606040"/>
           </a:xfrm>
           <a:prstGeom prst="rect">
             <a:avLst/>
@@ -34856,422 +34458,1919 @@
             <a:solidFill>
               <a:srgbClr val="DDE5E9"/>
             </a:solidFill>
-            <a:prstDash val="solid"/>
-          </a:ln>
-        </p:spPr>
-        <p:txBody>
-          <a:bodyPr/>
-          <a:lstStyle/>
-          <a:p>
-            <a:endParaRPr lang="en-US"/>
-          </a:p>
-        </p:txBody>
-      </p:sp>
-      <p:sp>
-        <p:nvSpPr>
-          <p:cNvPr id="13" name="Text 11"/>
-          <p:cNvSpPr/>
-          <p:nvPr/>
-        </p:nvSpPr>
-        <p:spPr>
-          <a:xfrm>
-            <a:off x="786384" y="4133088"/>
-            <a:ext cx="3520440" cy="384048"/>
-          </a:xfrm>
-          <a:prstGeom prst="rect">
-            <a:avLst/>
-          </a:prstGeom>
-          <a:noFill/>
-          <a:ln/>
-        </p:spPr>
-        <p:txBody>
-          <a:bodyPr wrap="square" lIns="0" tIns="0" rIns="0" bIns="0" rtlCol="0" anchor="ctr"/>
-          <a:lstStyle/>
-          <a:p>
-            <a:pPr marL="0" indent="0">
-              <a:buNone/>
-            </a:pPr>
-            <a:r>
-              <a:rPr lang="en-US" sz="1100" dirty="0">
+          </a:ln>
+          <a:effectLst/>
+        </p:spPr>
+        <p:style>
+          <a:lnRef idx="1">
+            <a:schemeClr val="accent1"/>
+          </a:lnRef>
+          <a:fillRef idx="3">
+            <a:schemeClr val="accent1"/>
+          </a:fillRef>
+          <a:effectRef idx="2">
+            <a:schemeClr val="accent1"/>
+          </a:effectRef>
+          <a:fontRef idx="minor">
+            <a:schemeClr val="lt1"/>
+          </a:fontRef>
+        </p:style>
+        <p:txBody>
+          <a:bodyPr rtlCol="0" anchor="ctr"/>
+          <a:lstStyle/>
+          <a:p>
+            <a:pPr algn="ctr"/>
+          </a:p>
+        </p:txBody>
+      </p:sp>
+      <p:sp>
+        <p:nvSpPr>
+          <p:cNvPr id="7" name="Rectangle 6"/>
+          <p:cNvSpPr/>
+          <p:nvPr/>
+        </p:nvSpPr>
+        <p:spPr>
+          <a:xfrm>
+            <a:off x="566928" y="1920240"/>
+            <a:ext cx="54864" cy="2606040"/>
+          </a:xfrm>
+          <a:prstGeom prst="rect">
+            <a:avLst/>
+          </a:prstGeom>
+          <a:solidFill>
+            <a:srgbClr val="1B9AAA"/>
+          </a:solidFill>
+          <a:ln>
+            <a:noFill/>
+          </a:ln>
+          <a:effectLst/>
+        </p:spPr>
+        <p:style>
+          <a:lnRef idx="1">
+            <a:schemeClr val="accent1"/>
+          </a:lnRef>
+          <a:fillRef idx="3">
+            <a:schemeClr val="accent1"/>
+          </a:fillRef>
+          <a:effectRef idx="2">
+            <a:schemeClr val="accent1"/>
+          </a:effectRef>
+          <a:fontRef idx="minor">
+            <a:schemeClr val="lt1"/>
+          </a:fontRef>
+        </p:style>
+        <p:txBody>
+          <a:bodyPr rtlCol="0" anchor="ctr"/>
+          <a:lstStyle/>
+          <a:p>
+            <a:pPr algn="ctr"/>
+          </a:p>
+        </p:txBody>
+      </p:sp>
+      <p:sp>
+        <p:nvSpPr>
+          <p:cNvPr id="8" name="TextBox 7"/>
+          <p:cNvSpPr txBox="1"/>
+          <p:nvPr/>
+        </p:nvSpPr>
+        <p:spPr>
+          <a:xfrm>
+            <a:off x="777240" y="2011680"/>
+            <a:ext cx="3639312" cy="274320"/>
+          </a:xfrm>
+          <a:prstGeom prst="rect">
+            <a:avLst/>
+          </a:prstGeom>
+          <a:noFill/>
+        </p:spPr>
+        <p:txBody>
+          <a:bodyPr wrap="square" anchor="t" lIns="0" rIns="0" tIns="0" bIns="0">
+            <a:spAutoFit/>
+          </a:bodyPr>
+          <a:lstStyle/>
+          <a:p>
+            <a:pPr algn="l"/>
+            <a:r>
+              <a:rPr sz="1500" b="0">
+                <a:solidFill>
+                  <a:srgbClr val="0D1B2A"/>
+                </a:solidFill>
+                <a:latin typeface="Oswald"/>
+              </a:rPr>
+              <a:t>Generative AI chatbot</a:t>
+            </a:r>
+          </a:p>
+        </p:txBody>
+      </p:sp>
+      <p:sp>
+        <p:nvSpPr>
+          <p:cNvPr id="9" name="Rectangle 8"/>
+          <p:cNvSpPr/>
+          <p:nvPr/>
+        </p:nvSpPr>
+        <p:spPr>
+          <a:xfrm>
+            <a:off x="4700016" y="1920240"/>
+            <a:ext cx="4005072" cy="2606040"/>
+          </a:xfrm>
+          <a:prstGeom prst="rect">
+            <a:avLst/>
+          </a:prstGeom>
+          <a:solidFill>
+            <a:srgbClr val="FFFFFF"/>
+          </a:solidFill>
+          <a:ln w="9525">
+            <a:solidFill>
+              <a:srgbClr val="DDE5E9"/>
+            </a:solidFill>
+          </a:ln>
+          <a:effectLst/>
+        </p:spPr>
+        <p:style>
+          <a:lnRef idx="1">
+            <a:schemeClr val="accent1"/>
+          </a:lnRef>
+          <a:fillRef idx="3">
+            <a:schemeClr val="accent1"/>
+          </a:fillRef>
+          <a:effectRef idx="2">
+            <a:schemeClr val="accent1"/>
+          </a:effectRef>
+          <a:fontRef idx="minor">
+            <a:schemeClr val="lt1"/>
+          </a:fontRef>
+        </p:style>
+        <p:txBody>
+          <a:bodyPr rtlCol="0" anchor="ctr"/>
+          <a:lstStyle/>
+          <a:p>
+            <a:pPr algn="ctr"/>
+          </a:p>
+        </p:txBody>
+      </p:sp>
+      <p:sp>
+        <p:nvSpPr>
+          <p:cNvPr id="10" name="Rectangle 9"/>
+          <p:cNvSpPr/>
+          <p:nvPr/>
+        </p:nvSpPr>
+        <p:spPr>
+          <a:xfrm>
+            <a:off x="4700016" y="1920240"/>
+            <a:ext cx="54864" cy="2606040"/>
+          </a:xfrm>
+          <a:prstGeom prst="rect">
+            <a:avLst/>
+          </a:prstGeom>
+          <a:solidFill>
+            <a:srgbClr val="06D6A0"/>
+          </a:solidFill>
+          <a:ln>
+            <a:noFill/>
+          </a:ln>
+          <a:effectLst/>
+        </p:spPr>
+        <p:style>
+          <a:lnRef idx="1">
+            <a:schemeClr val="accent1"/>
+          </a:lnRef>
+          <a:fillRef idx="3">
+            <a:schemeClr val="accent1"/>
+          </a:fillRef>
+          <a:effectRef idx="2">
+            <a:schemeClr val="accent1"/>
+          </a:effectRef>
+          <a:fontRef idx="minor">
+            <a:schemeClr val="lt1"/>
+          </a:fontRef>
+        </p:style>
+        <p:txBody>
+          <a:bodyPr rtlCol="0" anchor="ctr"/>
+          <a:lstStyle/>
+          <a:p>
+            <a:pPr algn="ctr"/>
+          </a:p>
+        </p:txBody>
+      </p:sp>
+      <p:sp>
+        <p:nvSpPr>
+          <p:cNvPr id="11" name="TextBox 10"/>
+          <p:cNvSpPr txBox="1"/>
+          <p:nvPr/>
+        </p:nvSpPr>
+        <p:spPr>
+          <a:xfrm>
+            <a:off x="4910328" y="2011680"/>
+            <a:ext cx="3639312" cy="274320"/>
+          </a:xfrm>
+          <a:prstGeom prst="rect">
+            <a:avLst/>
+          </a:prstGeom>
+          <a:noFill/>
+        </p:spPr>
+        <p:txBody>
+          <a:bodyPr wrap="square" anchor="t" lIns="0" rIns="0" tIns="0" bIns="0">
+            <a:spAutoFit/>
+          </a:bodyPr>
+          <a:lstStyle/>
+          <a:p>
+            <a:pPr algn="l"/>
+            <a:r>
+              <a:rPr sz="1500" b="0">
+                <a:solidFill>
+                  <a:srgbClr val="0D1B2A"/>
+                </a:solidFill>
+                <a:latin typeface="Oswald"/>
+              </a:rPr>
+              <a:t>Agentic AI</a:t>
+            </a:r>
+          </a:p>
+        </p:txBody>
+      </p:sp>
+      <p:sp>
+        <p:nvSpPr>
+          <p:cNvPr id="12" name="Rounded Rectangle 11"/>
+          <p:cNvSpPr/>
+          <p:nvPr/>
+        </p:nvSpPr>
+        <p:spPr>
+          <a:xfrm>
+            <a:off x="777240" y="2304288"/>
+            <a:ext cx="3584448" cy="1481328"/>
+          </a:xfrm>
+          <a:prstGeom prst="roundRect">
+            <a:avLst>
+              <a:gd name="adj" fmla="val 6172"/>
+            </a:avLst>
+          </a:prstGeom>
+          <a:solidFill>
+            <a:srgbClr val="FFFFFF"/>
+          </a:solidFill>
+          <a:ln w="9525">
+            <a:solidFill>
+              <a:srgbClr val="DDE5E9"/>
+            </a:solidFill>
+          </a:ln>
+          <a:effectLst/>
+        </p:spPr>
+        <p:style>
+          <a:lnRef idx="1">
+            <a:schemeClr val="accent1"/>
+          </a:lnRef>
+          <a:fillRef idx="3">
+            <a:schemeClr val="accent1"/>
+          </a:fillRef>
+          <a:effectRef idx="2">
+            <a:schemeClr val="accent1"/>
+          </a:effectRef>
+          <a:fontRef idx="minor">
+            <a:schemeClr val="lt1"/>
+          </a:fontRef>
+        </p:style>
+        <p:txBody>
+          <a:bodyPr rtlCol="0" anchor="ctr"/>
+          <a:lstStyle/>
+          <a:p>
+            <a:pPr algn="ctr"/>
+          </a:p>
+        </p:txBody>
+      </p:sp>
+      <p:sp>
+        <p:nvSpPr>
+          <p:cNvPr id="13" name="Rounded Rectangle 12"/>
+          <p:cNvSpPr/>
+          <p:nvPr/>
+        </p:nvSpPr>
+        <p:spPr>
+          <a:xfrm>
+            <a:off x="777240" y="2304288"/>
+            <a:ext cx="3584448" cy="274320"/>
+          </a:xfrm>
+          <a:prstGeom prst="roundRect">
+            <a:avLst>
+              <a:gd name="adj" fmla="val 33333"/>
+            </a:avLst>
+          </a:prstGeom>
+          <a:solidFill>
+            <a:srgbClr val="F4F7F8"/>
+          </a:solidFill>
+          <a:ln>
+            <a:noFill/>
+          </a:ln>
+          <a:effectLst/>
+        </p:spPr>
+        <p:style>
+          <a:lnRef idx="1">
+            <a:schemeClr val="accent1"/>
+          </a:lnRef>
+          <a:fillRef idx="3">
+            <a:schemeClr val="accent1"/>
+          </a:fillRef>
+          <a:effectRef idx="2">
+            <a:schemeClr val="accent1"/>
+          </a:effectRef>
+          <a:fontRef idx="minor">
+            <a:schemeClr val="lt1"/>
+          </a:fontRef>
+        </p:style>
+        <p:txBody>
+          <a:bodyPr rtlCol="0" anchor="ctr"/>
+          <a:lstStyle/>
+          <a:p>
+            <a:pPr algn="ctr"/>
+          </a:p>
+        </p:txBody>
+      </p:sp>
+      <p:sp>
+        <p:nvSpPr>
+          <p:cNvPr id="14" name="Rectangle 13"/>
+          <p:cNvSpPr/>
+          <p:nvPr/>
+        </p:nvSpPr>
+        <p:spPr>
+          <a:xfrm>
+            <a:off x="777240" y="2487168"/>
+            <a:ext cx="3584448" cy="91440"/>
+          </a:xfrm>
+          <a:prstGeom prst="rect">
+            <a:avLst/>
+          </a:prstGeom>
+          <a:solidFill>
+            <a:srgbClr val="F4F7F8"/>
+          </a:solidFill>
+          <a:ln>
+            <a:noFill/>
+          </a:ln>
+          <a:effectLst/>
+        </p:spPr>
+        <p:style>
+          <a:lnRef idx="1">
+            <a:schemeClr val="accent1"/>
+          </a:lnRef>
+          <a:fillRef idx="3">
+            <a:schemeClr val="accent1"/>
+          </a:fillRef>
+          <a:effectRef idx="2">
+            <a:schemeClr val="accent1"/>
+          </a:effectRef>
+          <a:fontRef idx="minor">
+            <a:schemeClr val="lt1"/>
+          </a:fontRef>
+        </p:style>
+        <p:txBody>
+          <a:bodyPr rtlCol="0" anchor="ctr"/>
+          <a:lstStyle/>
+          <a:p>
+            <a:pPr algn="ctr"/>
+          </a:p>
+        </p:txBody>
+      </p:sp>
+      <p:sp>
+        <p:nvSpPr>
+          <p:cNvPr id="15" name="Oval 14"/>
+          <p:cNvSpPr/>
+          <p:nvPr/>
+        </p:nvSpPr>
+        <p:spPr>
+          <a:xfrm>
+            <a:off x="868680" y="2359152"/>
+            <a:ext cx="164592" cy="164592"/>
+          </a:xfrm>
+          <a:prstGeom prst="ellipse">
+            <a:avLst/>
+          </a:prstGeom>
+          <a:solidFill>
+            <a:srgbClr val="1B9AAA">
+              <a:alpha val="100000"/>
+            </a:srgbClr>
+          </a:solidFill>
+          <a:ln w="6350">
+            <a:solidFill>
+              <a:srgbClr val="1B9AAA"/>
+            </a:solidFill>
+          </a:ln>
+          <a:effectLst/>
+        </p:spPr>
+        <p:style>
+          <a:lnRef idx="1">
+            <a:schemeClr val="accent1"/>
+          </a:lnRef>
+          <a:fillRef idx="3">
+            <a:schemeClr val="accent1"/>
+          </a:fillRef>
+          <a:effectRef idx="2">
+            <a:schemeClr val="accent1"/>
+          </a:effectRef>
+          <a:fontRef idx="minor">
+            <a:schemeClr val="lt1"/>
+          </a:fontRef>
+        </p:style>
+        <p:txBody>
+          <a:bodyPr rtlCol="0" anchor="ctr"/>
+          <a:lstStyle/>
+          <a:p>
+            <a:pPr algn="ctr"/>
+          </a:p>
+        </p:txBody>
+      </p:sp>
+      <p:sp>
+        <p:nvSpPr>
+          <p:cNvPr id="16" name="TextBox 15"/>
+          <p:cNvSpPr txBox="1"/>
+          <p:nvPr/>
+        </p:nvSpPr>
+        <p:spPr>
+          <a:xfrm>
+            <a:off x="868680" y="2386584"/>
+            <a:ext cx="164592" cy="128016"/>
+          </a:xfrm>
+          <a:prstGeom prst="rect">
+            <a:avLst/>
+          </a:prstGeom>
+          <a:noFill/>
+        </p:spPr>
+        <p:txBody>
+          <a:bodyPr wrap="square" anchor="t" lIns="0" rIns="0" tIns="0" bIns="0">
+            <a:spAutoFit/>
+          </a:bodyPr>
+          <a:lstStyle/>
+          <a:p>
+            <a:pPr algn="ctr"/>
+            <a:r>
+              <a:rPr sz="600" b="0">
+                <a:solidFill>
+                  <a:srgbClr val="FFFFFF"/>
+                </a:solidFill>
+                <a:latin typeface="JetBrains Mono"/>
+              </a:rPr>
+              <a:t>AI</a:t>
+            </a:r>
+          </a:p>
+        </p:txBody>
+      </p:sp>
+      <p:sp>
+        <p:nvSpPr>
+          <p:cNvPr id="17" name="TextBox 16"/>
+          <p:cNvSpPr txBox="1"/>
+          <p:nvPr/>
+        </p:nvSpPr>
+        <p:spPr>
+          <a:xfrm>
+            <a:off x="1088136" y="2368296"/>
+            <a:ext cx="1463040" cy="164592"/>
+          </a:xfrm>
+          <a:prstGeom prst="rect">
+            <a:avLst/>
+          </a:prstGeom>
+          <a:noFill/>
+        </p:spPr>
+        <p:txBody>
+          <a:bodyPr wrap="square" anchor="t" lIns="0" rIns="0" tIns="0" bIns="0">
+            <a:spAutoFit/>
+          </a:bodyPr>
+          <a:lstStyle/>
+          <a:p>
+            <a:pPr algn="l"/>
+            <a:r>
+              <a:rPr sz="900" b="0">
+                <a:solidFill>
+                  <a:srgbClr val="0D1B2A"/>
+                </a:solidFill>
+                <a:latin typeface="Oswald"/>
+              </a:rPr>
+              <a:t>AI assistant</a:t>
+            </a:r>
+          </a:p>
+        </p:txBody>
+      </p:sp>
+      <p:sp>
+        <p:nvSpPr>
+          <p:cNvPr id="18" name="Rounded Rectangle 17"/>
+          <p:cNvSpPr/>
+          <p:nvPr/>
+        </p:nvSpPr>
+        <p:spPr>
+          <a:xfrm>
+            <a:off x="1344168" y="2688336"/>
+            <a:ext cx="2606040" cy="292608"/>
+          </a:xfrm>
+          <a:prstGeom prst="roundRect">
+            <a:avLst>
+              <a:gd name="adj" fmla="val 18000"/>
+            </a:avLst>
+          </a:prstGeom>
+          <a:solidFill>
+            <a:srgbClr val="CFF5EA"/>
+          </a:solidFill>
+          <a:ln>
+            <a:noFill/>
+          </a:ln>
+          <a:effectLst/>
+        </p:spPr>
+        <p:style>
+          <a:lnRef idx="1">
+            <a:schemeClr val="accent1"/>
+          </a:lnRef>
+          <a:fillRef idx="3">
+            <a:schemeClr val="accent1"/>
+          </a:fillRef>
+          <a:effectRef idx="2">
+            <a:schemeClr val="accent1"/>
+          </a:effectRef>
+          <a:fontRef idx="minor">
+            <a:schemeClr val="lt1"/>
+          </a:fontRef>
+        </p:style>
+        <p:txBody>
+          <a:bodyPr rtlCol="0" anchor="ctr" lIns="0" rIns="0" tIns="0" bIns="0" wrap="none"/>
+          <a:lstStyle/>
+          <a:p>
+            <a:pPr algn="ctr"/>
+            <a:r>
+              <a:rPr sz="850">
+                <a:solidFill>
+                  <a:srgbClr val="0D1B2A"/>
+                </a:solidFill>
+                <a:latin typeface="Roboto"/>
+              </a:rPr>
+              <a:t>Summarize these meeting notes.</a:t>
+            </a:r>
+          </a:p>
+        </p:txBody>
+      </p:sp>
+      <p:sp>
+        <p:nvSpPr>
+          <p:cNvPr id="19" name="Rounded Rectangle 18"/>
+          <p:cNvSpPr/>
+          <p:nvPr/>
+        </p:nvSpPr>
+        <p:spPr>
+          <a:xfrm>
+            <a:off x="1179576" y="3054096"/>
+            <a:ext cx="2606040" cy="292608"/>
+          </a:xfrm>
+          <a:prstGeom prst="roundRect">
+            <a:avLst>
+              <a:gd name="adj" fmla="val 18000"/>
+            </a:avLst>
+          </a:prstGeom>
+          <a:solidFill>
+            <a:srgbClr val="D4ECEF"/>
+          </a:solidFill>
+          <a:ln>
+            <a:noFill/>
+          </a:ln>
+          <a:effectLst/>
+        </p:spPr>
+        <p:style>
+          <a:lnRef idx="1">
+            <a:schemeClr val="accent1"/>
+          </a:lnRef>
+          <a:fillRef idx="3">
+            <a:schemeClr val="accent1"/>
+          </a:fillRef>
+          <a:effectRef idx="2">
+            <a:schemeClr val="accent1"/>
+          </a:effectRef>
+          <a:fontRef idx="minor">
+            <a:schemeClr val="lt1"/>
+          </a:fontRef>
+        </p:style>
+        <p:txBody>
+          <a:bodyPr rtlCol="0" anchor="ctr" lIns="0" rIns="0" tIns="0" bIns="0" wrap="none"/>
+          <a:lstStyle/>
+          <a:p>
+            <a:pPr algn="ctr"/>
+            <a:r>
+              <a:rPr sz="850">
+                <a:solidFill>
+                  <a:srgbClr val="0D1B2A"/>
+                </a:solidFill>
+                <a:latin typeface="Roboto"/>
+              </a:rPr>
+              <a:t>Here are the five key points …</a:t>
+            </a:r>
+          </a:p>
+        </p:txBody>
+      </p:sp>
+      <p:sp>
+        <p:nvSpPr>
+          <p:cNvPr id="20" name="Rounded Rectangle 19"/>
+          <p:cNvSpPr/>
+          <p:nvPr/>
+        </p:nvSpPr>
+        <p:spPr>
+          <a:xfrm>
+            <a:off x="1344168" y="3419856"/>
+            <a:ext cx="2606040" cy="292608"/>
+          </a:xfrm>
+          <a:prstGeom prst="roundRect">
+            <a:avLst>
+              <a:gd name="adj" fmla="val 18000"/>
+            </a:avLst>
+          </a:prstGeom>
+          <a:solidFill>
+            <a:srgbClr val="CFF5EA"/>
+          </a:solidFill>
+          <a:ln>
+            <a:noFill/>
+          </a:ln>
+          <a:effectLst/>
+        </p:spPr>
+        <p:style>
+          <a:lnRef idx="1">
+            <a:schemeClr val="accent1"/>
+          </a:lnRef>
+          <a:fillRef idx="3">
+            <a:schemeClr val="accent1"/>
+          </a:fillRef>
+          <a:effectRef idx="2">
+            <a:schemeClr val="accent1"/>
+          </a:effectRef>
+          <a:fontRef idx="minor">
+            <a:schemeClr val="lt1"/>
+          </a:fontRef>
+        </p:style>
+        <p:txBody>
+          <a:bodyPr rtlCol="0" anchor="ctr" lIns="0" rIns="0" tIns="0" bIns="0" wrap="none"/>
+          <a:lstStyle/>
+          <a:p>
+            <a:pPr algn="ctr"/>
+            <a:r>
+              <a:rPr sz="850">
+                <a:solidFill>
+                  <a:srgbClr val="0D1B2A"/>
+                </a:solidFill>
+                <a:latin typeface="Roboto"/>
+              </a:rPr>
+              <a:t>Now draft the text for an email from it.</a:t>
+            </a:r>
+          </a:p>
+        </p:txBody>
+      </p:sp>
+      <p:sp>
+        <p:nvSpPr>
+          <p:cNvPr id="21" name="TextBox 20"/>
+          <p:cNvSpPr txBox="1"/>
+          <p:nvPr/>
+        </p:nvSpPr>
+        <p:spPr>
+          <a:xfrm>
+            <a:off x="777240" y="3840480"/>
+            <a:ext cx="2286000" cy="182880"/>
+          </a:xfrm>
+          <a:prstGeom prst="rect">
+            <a:avLst/>
+          </a:prstGeom>
+          <a:noFill/>
+        </p:spPr>
+        <p:txBody>
+          <a:bodyPr wrap="square" anchor="t" lIns="0" rIns="0" tIns="0" bIns="0">
+            <a:spAutoFit/>
+          </a:bodyPr>
+          <a:lstStyle/>
+          <a:p>
+            <a:pPr algn="l"/>
+            <a:r>
+              <a:rPr sz="950" b="0">
+                <a:solidFill>
+                  <a:srgbClr val="6B7B8C"/>
+                </a:solidFill>
+                <a:latin typeface="Roboto"/>
+              </a:rPr>
+              <a:t>Every step waits for you.</a:t>
+            </a:r>
+          </a:p>
+        </p:txBody>
+      </p:sp>
+      <p:sp>
+        <p:nvSpPr>
+          <p:cNvPr id="22" name="Rounded Rectangle 21"/>
+          <p:cNvSpPr/>
+          <p:nvPr/>
+        </p:nvSpPr>
+        <p:spPr>
+          <a:xfrm>
+            <a:off x="5989320" y="2267712"/>
+            <a:ext cx="2231136" cy="292608"/>
+          </a:xfrm>
+          <a:prstGeom prst="roundRect">
+            <a:avLst>
+              <a:gd name="adj" fmla="val 18000"/>
+            </a:avLst>
+          </a:prstGeom>
+          <a:solidFill>
+            <a:srgbClr val="CFF5EA"/>
+          </a:solidFill>
+          <a:ln>
+            <a:noFill/>
+          </a:ln>
+          <a:effectLst/>
+        </p:spPr>
+        <p:style>
+          <a:lnRef idx="1">
+            <a:schemeClr val="accent1"/>
+          </a:lnRef>
+          <a:fillRef idx="3">
+            <a:schemeClr val="accent1"/>
+          </a:fillRef>
+          <a:effectRef idx="2">
+            <a:schemeClr val="accent1"/>
+          </a:effectRef>
+          <a:fontRef idx="minor">
+            <a:schemeClr val="lt1"/>
+          </a:fontRef>
+        </p:style>
+        <p:txBody>
+          <a:bodyPr rtlCol="0" anchor="ctr" lIns="0" rIns="0" tIns="0" bIns="0" wrap="none"/>
+          <a:lstStyle/>
+          <a:p>
+            <a:pPr algn="ctr"/>
+            <a:r>
+              <a:rPr sz="850">
+                <a:solidFill>
+                  <a:srgbClr val="0D1B2A"/>
+                </a:solidFill>
+                <a:latin typeface="Roboto"/>
+              </a:rPr>
+              <a:t>Turn these notes into follow-ups.</a:t>
+            </a:r>
+          </a:p>
+        </p:txBody>
+      </p:sp>
+      <p:sp>
+        <p:nvSpPr>
+          <p:cNvPr id="23" name="Rounded Rectangle 22"/>
+          <p:cNvSpPr/>
+          <p:nvPr/>
+        </p:nvSpPr>
+        <p:spPr>
+          <a:xfrm>
+            <a:off x="5184648" y="2615184"/>
+            <a:ext cx="3374136" cy="749808"/>
+          </a:xfrm>
+          <a:prstGeom prst="roundRect">
+            <a:avLst>
+              <a:gd name="adj" fmla="val 9756"/>
+            </a:avLst>
+          </a:prstGeom>
+          <a:solidFill>
+            <a:srgbClr val="F4F7F8"/>
+          </a:solidFill>
+          <a:ln w="9525">
+            <a:solidFill>
+              <a:srgbClr val="1B9AAA"/>
+            </a:solidFill>
+          </a:ln>
+          <a:effectLst/>
+        </p:spPr>
+        <p:style>
+          <a:lnRef idx="1">
+            <a:schemeClr val="accent1"/>
+          </a:lnRef>
+          <a:fillRef idx="3">
+            <a:schemeClr val="accent1"/>
+          </a:fillRef>
+          <a:effectRef idx="2">
+            <a:schemeClr val="accent1"/>
+          </a:effectRef>
+          <a:fontRef idx="minor">
+            <a:schemeClr val="lt1"/>
+          </a:fontRef>
+        </p:style>
+        <p:txBody>
+          <a:bodyPr rtlCol="0" anchor="ctr"/>
+          <a:lstStyle/>
+          <a:p>
+            <a:pPr algn="ctr"/>
+          </a:p>
+        </p:txBody>
+      </p:sp>
+      <p:sp>
+        <p:nvSpPr>
+          <p:cNvPr id="24" name="TextBox 23"/>
+          <p:cNvSpPr txBox="1"/>
+          <p:nvPr/>
+        </p:nvSpPr>
+        <p:spPr>
+          <a:xfrm>
+            <a:off x="5230368" y="2660904"/>
+            <a:ext cx="2377440" cy="182880"/>
+          </a:xfrm>
+          <a:prstGeom prst="rect">
+            <a:avLst/>
+          </a:prstGeom>
+          <a:noFill/>
+        </p:spPr>
+        <p:txBody>
+          <a:bodyPr wrap="square" anchor="t" lIns="0" rIns="0" tIns="0" bIns="0">
+            <a:spAutoFit/>
+          </a:bodyPr>
+          <a:lstStyle/>
+          <a:p>
+            <a:pPr algn="l"/>
+            <a:r>
+              <a:rPr sz="800" b="0" spc="100">
+                <a:solidFill>
+                  <a:srgbClr val="1B9AAA"/>
+                </a:solidFill>
+                <a:latin typeface="JetBrains Mono"/>
+              </a:rPr>
+              <a:t>↻  the agent repeats on its own</a:t>
+            </a:r>
+          </a:p>
+        </p:txBody>
+      </p:sp>
+      <p:sp>
+        <p:nvSpPr>
+          <p:cNvPr id="25" name="Rounded Rectangle 24"/>
+          <p:cNvSpPr/>
+          <p:nvPr/>
+        </p:nvSpPr>
+        <p:spPr>
+          <a:xfrm>
+            <a:off x="5230368" y="2843784"/>
+            <a:ext cx="923544" cy="274320"/>
+          </a:xfrm>
+          <a:prstGeom prst="roundRect">
+            <a:avLst>
+              <a:gd name="adj" fmla="val 18000"/>
+            </a:avLst>
+          </a:prstGeom>
+          <a:solidFill>
+            <a:srgbClr val="FFFFFF"/>
+          </a:solidFill>
+          <a:ln w="9525">
+            <a:solidFill>
+              <a:srgbClr val="DDE5E9"/>
+            </a:solidFill>
+          </a:ln>
+          <a:effectLst/>
+        </p:spPr>
+        <p:style>
+          <a:lnRef idx="1">
+            <a:schemeClr val="accent1"/>
+          </a:lnRef>
+          <a:fillRef idx="3">
+            <a:schemeClr val="accent1"/>
+          </a:fillRef>
+          <a:effectRef idx="2">
+            <a:schemeClr val="accent1"/>
+          </a:effectRef>
+          <a:fontRef idx="minor">
+            <a:schemeClr val="lt1"/>
+          </a:fontRef>
+        </p:style>
+        <p:txBody>
+          <a:bodyPr rtlCol="0" anchor="ctr" lIns="0" rIns="0" tIns="0" bIns="0" wrap="none"/>
+          <a:lstStyle/>
+          <a:p>
+            <a:pPr algn="ctr"/>
+            <a:r>
+              <a:rPr sz="850">
+                <a:solidFill>
+                  <a:srgbClr val="0D1B2A"/>
+                </a:solidFill>
+                <a:latin typeface="Roboto"/>
+              </a:rPr>
+              <a:t>Plans the steps</a:t>
+            </a:r>
+          </a:p>
+        </p:txBody>
+      </p:sp>
+      <p:cxnSp>
+        <p:nvCxnSpPr>
+          <p:cNvPr id="26" name="Connector 25"/>
+          <p:cNvCxnSpPr/>
+          <p:nvPr/>
+        </p:nvCxnSpPr>
+        <p:spPr>
+          <a:xfrm>
+            <a:off x="6190488" y="2980944"/>
+            <a:ext cx="173736" cy="0"/>
+          </a:xfrm>
+          <a:prstGeom prst="line">
+            <a:avLst/>
+          </a:prstGeom>
+          <a:ln w="12700">
+            <a:solidFill>
+              <a:srgbClr val="1B9AAA"/>
+            </a:solidFill>
+            <a:tailEnd type="triangle" w="med" len="med"/>
+          </a:ln>
+        </p:spPr>
+        <p:style>
+          <a:lnRef idx="2">
+            <a:schemeClr val="accent1"/>
+          </a:lnRef>
+          <a:fillRef idx="0">
+            <a:schemeClr val="accent1"/>
+          </a:fillRef>
+          <a:effectRef idx="1">
+            <a:schemeClr val="accent1"/>
+          </a:effectRef>
+          <a:fontRef idx="minor">
+            <a:schemeClr val="tx1"/>
+          </a:fontRef>
+        </p:style>
+      </p:cxnSp>
+      <p:sp>
+        <p:nvSpPr>
+          <p:cNvPr id="27" name="Rounded Rectangle 26"/>
+          <p:cNvSpPr/>
+          <p:nvPr/>
+        </p:nvSpPr>
+        <p:spPr>
+          <a:xfrm>
+            <a:off x="6409944" y="2843784"/>
+            <a:ext cx="923544" cy="274320"/>
+          </a:xfrm>
+          <a:prstGeom prst="roundRect">
+            <a:avLst>
+              <a:gd name="adj" fmla="val 18000"/>
+            </a:avLst>
+          </a:prstGeom>
+          <a:solidFill>
+            <a:srgbClr val="FFFFFF"/>
+          </a:solidFill>
+          <a:ln w="9525">
+            <a:solidFill>
+              <a:srgbClr val="DDE5E9"/>
+            </a:solidFill>
+          </a:ln>
+          <a:effectLst/>
+        </p:spPr>
+        <p:style>
+          <a:lnRef idx="1">
+            <a:schemeClr val="accent1"/>
+          </a:lnRef>
+          <a:fillRef idx="3">
+            <a:schemeClr val="accent1"/>
+          </a:fillRef>
+          <a:effectRef idx="2">
+            <a:schemeClr val="accent1"/>
+          </a:effectRef>
+          <a:fontRef idx="minor">
+            <a:schemeClr val="lt1"/>
+          </a:fontRef>
+        </p:style>
+        <p:txBody>
+          <a:bodyPr rtlCol="0" anchor="ctr" lIns="0" rIns="0" tIns="0" bIns="0" wrap="none"/>
+          <a:lstStyle/>
+          <a:p>
+            <a:pPr algn="ctr"/>
+            <a:r>
+              <a:rPr sz="850">
+                <a:solidFill>
+                  <a:srgbClr val="0D1B2A"/>
+                </a:solidFill>
+                <a:latin typeface="Roboto"/>
+              </a:rPr>
+              <a:t>Uses tools</a:t>
+            </a:r>
+          </a:p>
+        </p:txBody>
+      </p:sp>
+      <p:cxnSp>
+        <p:nvCxnSpPr>
+          <p:cNvPr id="28" name="Connector 27"/>
+          <p:cNvCxnSpPr/>
+          <p:nvPr/>
+        </p:nvCxnSpPr>
+        <p:spPr>
+          <a:xfrm>
+            <a:off x="7370064" y="2980944"/>
+            <a:ext cx="173736" cy="0"/>
+          </a:xfrm>
+          <a:prstGeom prst="line">
+            <a:avLst/>
+          </a:prstGeom>
+          <a:ln w="12700">
+            <a:solidFill>
+              <a:srgbClr val="1B9AAA"/>
+            </a:solidFill>
+            <a:tailEnd type="triangle" w="med" len="med"/>
+          </a:ln>
+        </p:spPr>
+        <p:style>
+          <a:lnRef idx="2">
+            <a:schemeClr val="accent1"/>
+          </a:lnRef>
+          <a:fillRef idx="0">
+            <a:schemeClr val="accent1"/>
+          </a:fillRef>
+          <a:effectRef idx="1">
+            <a:schemeClr val="accent1"/>
+          </a:effectRef>
+          <a:fontRef idx="minor">
+            <a:schemeClr val="tx1"/>
+          </a:fontRef>
+        </p:style>
+      </p:cxnSp>
+      <p:sp>
+        <p:nvSpPr>
+          <p:cNvPr id="29" name="Rounded Rectangle 28"/>
+          <p:cNvSpPr/>
+          <p:nvPr/>
+        </p:nvSpPr>
+        <p:spPr>
+          <a:xfrm>
+            <a:off x="7589520" y="2843784"/>
+            <a:ext cx="923544" cy="274320"/>
+          </a:xfrm>
+          <a:prstGeom prst="roundRect">
+            <a:avLst>
+              <a:gd name="adj" fmla="val 18000"/>
+            </a:avLst>
+          </a:prstGeom>
+          <a:solidFill>
+            <a:srgbClr val="FFFFFF"/>
+          </a:solidFill>
+          <a:ln w="9525">
+            <a:solidFill>
+              <a:srgbClr val="DDE5E9"/>
+            </a:solidFill>
+          </a:ln>
+          <a:effectLst/>
+        </p:spPr>
+        <p:style>
+          <a:lnRef idx="1">
+            <a:schemeClr val="accent1"/>
+          </a:lnRef>
+          <a:fillRef idx="3">
+            <a:schemeClr val="accent1"/>
+          </a:fillRef>
+          <a:effectRef idx="2">
+            <a:schemeClr val="accent1"/>
+          </a:effectRef>
+          <a:fontRef idx="minor">
+            <a:schemeClr val="lt1"/>
+          </a:fontRef>
+        </p:style>
+        <p:txBody>
+          <a:bodyPr rtlCol="0" anchor="ctr" lIns="0" rIns="0" tIns="0" bIns="0" wrap="none"/>
+          <a:lstStyle/>
+          <a:p>
+            <a:pPr algn="ctr"/>
+            <a:r>
+              <a:rPr sz="850">
+                <a:solidFill>
+                  <a:srgbClr val="0D1B2A"/>
+                </a:solidFill>
+                <a:latin typeface="Roboto"/>
+              </a:rPr>
+              <a:t>Checks the result</a:t>
+            </a:r>
+          </a:p>
+        </p:txBody>
+      </p:sp>
+      <p:sp>
+        <p:nvSpPr>
+          <p:cNvPr id="30" name="Rounded Rectangle 29"/>
+          <p:cNvSpPr/>
+          <p:nvPr/>
+        </p:nvSpPr>
+        <p:spPr>
+          <a:xfrm>
+            <a:off x="6300216" y="3145536"/>
+            <a:ext cx="365760" cy="182880"/>
+          </a:xfrm>
+          <a:prstGeom prst="roundRect">
+            <a:avLst>
+              <a:gd name="adj" fmla="val 18000"/>
+            </a:avLst>
+          </a:prstGeom>
+          <a:solidFill>
+            <a:srgbClr val="D4ECEF"/>
+          </a:solidFill>
+          <a:ln>
+            <a:noFill/>
+          </a:ln>
+          <a:effectLst/>
+        </p:spPr>
+        <p:style>
+          <a:lnRef idx="1">
+            <a:schemeClr val="accent1"/>
+          </a:lnRef>
+          <a:fillRef idx="3">
+            <a:schemeClr val="accent1"/>
+          </a:fillRef>
+          <a:effectRef idx="2">
+            <a:schemeClr val="accent1"/>
+          </a:effectRef>
+          <a:fontRef idx="minor">
+            <a:schemeClr val="lt1"/>
+          </a:fontRef>
+        </p:style>
+        <p:txBody>
+          <a:bodyPr rtlCol="0" anchor="ctr" lIns="0" rIns="0" tIns="0" bIns="0" wrap="none"/>
+          <a:lstStyle/>
+          <a:p>
+            <a:pPr algn="ctr"/>
+            <a:r>
+              <a:rPr sz="600">
+                <a:solidFill>
+                  <a:srgbClr val="0D1B2A"/>
+                </a:solidFill>
+                <a:latin typeface="Roboto"/>
+              </a:rPr>
+              <a:t>Outlook</a:t>
+            </a:r>
+          </a:p>
+        </p:txBody>
+      </p:sp>
+      <p:sp>
+        <p:nvSpPr>
+          <p:cNvPr id="31" name="Rounded Rectangle 30"/>
+          <p:cNvSpPr/>
+          <p:nvPr/>
+        </p:nvSpPr>
+        <p:spPr>
+          <a:xfrm>
+            <a:off x="6707124" y="3145536"/>
+            <a:ext cx="365760" cy="182880"/>
+          </a:xfrm>
+          <a:prstGeom prst="roundRect">
+            <a:avLst>
+              <a:gd name="adj" fmla="val 18000"/>
+            </a:avLst>
+          </a:prstGeom>
+          <a:solidFill>
+            <a:srgbClr val="D4ECEF"/>
+          </a:solidFill>
+          <a:ln>
+            <a:noFill/>
+          </a:ln>
+          <a:effectLst/>
+        </p:spPr>
+        <p:style>
+          <a:lnRef idx="1">
+            <a:schemeClr val="accent1"/>
+          </a:lnRef>
+          <a:fillRef idx="3">
+            <a:schemeClr val="accent1"/>
+          </a:fillRef>
+          <a:effectRef idx="2">
+            <a:schemeClr val="accent1"/>
+          </a:effectRef>
+          <a:fontRef idx="minor">
+            <a:schemeClr val="lt1"/>
+          </a:fontRef>
+        </p:style>
+        <p:txBody>
+          <a:bodyPr rtlCol="0" anchor="ctr" lIns="0" rIns="0" tIns="0" bIns="0" wrap="none"/>
+          <a:lstStyle/>
+          <a:p>
+            <a:pPr algn="ctr"/>
+            <a:r>
+              <a:rPr sz="600">
+                <a:solidFill>
+                  <a:srgbClr val="0D1B2A"/>
+                </a:solidFill>
+                <a:latin typeface="Roboto"/>
+              </a:rPr>
+              <a:t>File Sys.</a:t>
+            </a:r>
+          </a:p>
+        </p:txBody>
+      </p:sp>
+      <p:sp>
+        <p:nvSpPr>
+          <p:cNvPr id="32" name="Rounded Rectangle 31"/>
+          <p:cNvSpPr/>
+          <p:nvPr/>
+        </p:nvSpPr>
+        <p:spPr>
+          <a:xfrm>
+            <a:off x="7114031" y="3145536"/>
+            <a:ext cx="365760" cy="182880"/>
+          </a:xfrm>
+          <a:prstGeom prst="roundRect">
+            <a:avLst>
+              <a:gd name="adj" fmla="val 18000"/>
+            </a:avLst>
+          </a:prstGeom>
+          <a:solidFill>
+            <a:srgbClr val="D4ECEF"/>
+          </a:solidFill>
+          <a:ln>
+            <a:noFill/>
+          </a:ln>
+          <a:effectLst/>
+        </p:spPr>
+        <p:style>
+          <a:lnRef idx="1">
+            <a:schemeClr val="accent1"/>
+          </a:lnRef>
+          <a:fillRef idx="3">
+            <a:schemeClr val="accent1"/>
+          </a:fillRef>
+          <a:effectRef idx="2">
+            <a:schemeClr val="accent1"/>
+          </a:effectRef>
+          <a:fontRef idx="minor">
+            <a:schemeClr val="lt1"/>
+          </a:fontRef>
+        </p:style>
+        <p:txBody>
+          <a:bodyPr rtlCol="0" anchor="ctr" lIns="0" rIns="0" tIns="0" bIns="0" wrap="none"/>
+          <a:lstStyle/>
+          <a:p>
+            <a:pPr algn="ctr"/>
+            <a:r>
+              <a:rPr sz="850">
+                <a:solidFill>
+                  <a:srgbClr val="0D1B2A"/>
+                </a:solidFill>
+                <a:latin typeface="Roboto"/>
+              </a:rPr>
+              <a:t>…</a:t>
+            </a:r>
+          </a:p>
+        </p:txBody>
+      </p:sp>
+      <p:sp>
+        <p:nvSpPr>
+          <p:cNvPr id="33" name="Rounded Rectangle 32"/>
+          <p:cNvSpPr/>
+          <p:nvPr/>
+        </p:nvSpPr>
+        <p:spPr>
+          <a:xfrm>
+            <a:off x="5184648" y="3401568"/>
+            <a:ext cx="1764792" cy="548640"/>
+          </a:xfrm>
+          <a:prstGeom prst="roundRect">
+            <a:avLst>
+              <a:gd name="adj" fmla="val 10000"/>
+            </a:avLst>
+          </a:prstGeom>
+          <a:solidFill>
+            <a:srgbClr val="FFFFFF"/>
+          </a:solidFill>
+          <a:ln w="9525">
+            <a:solidFill>
+              <a:srgbClr val="1B9AAA"/>
+            </a:solidFill>
+          </a:ln>
+          <a:effectLst/>
+        </p:spPr>
+        <p:style>
+          <a:lnRef idx="1">
+            <a:schemeClr val="accent1"/>
+          </a:lnRef>
+          <a:fillRef idx="3">
+            <a:schemeClr val="accent1"/>
+          </a:fillRef>
+          <a:effectRef idx="2">
+            <a:schemeClr val="accent1"/>
+          </a:effectRef>
+          <a:fontRef idx="minor">
+            <a:schemeClr val="lt1"/>
+          </a:fontRef>
+        </p:style>
+        <p:txBody>
+          <a:bodyPr rtlCol="0" anchor="ctr"/>
+          <a:lstStyle/>
+          <a:p>
+            <a:pPr algn="ctr"/>
+          </a:p>
+        </p:txBody>
+      </p:sp>
+      <p:sp>
+        <p:nvSpPr>
+          <p:cNvPr id="34" name="TextBox 33"/>
+          <p:cNvSpPr txBox="1"/>
+          <p:nvPr/>
+        </p:nvSpPr>
+        <p:spPr>
+          <a:xfrm>
+            <a:off x="5221224" y="3419856"/>
+            <a:ext cx="182880" cy="164592"/>
+          </a:xfrm>
+          <a:prstGeom prst="rect">
+            <a:avLst/>
+          </a:prstGeom>
+          <a:noFill/>
+        </p:spPr>
+        <p:txBody>
+          <a:bodyPr wrap="square" anchor="t" lIns="0" rIns="0" tIns="0" bIns="0">
+            <a:spAutoFit/>
+          </a:bodyPr>
+          <a:lstStyle/>
+          <a:p>
+            <a:pPr algn="l"/>
+            <a:r>
+              <a:rPr sz="800" b="0">
+                <a:solidFill>
+                  <a:srgbClr val="1B9AAA"/>
+                </a:solidFill>
+                <a:latin typeface="Roboto"/>
+              </a:rPr>
+              <a:t>▾</a:t>
+            </a:r>
+          </a:p>
+        </p:txBody>
+      </p:sp>
+      <p:sp>
+        <p:nvSpPr>
+          <p:cNvPr id="35" name="TextBox 34"/>
+          <p:cNvSpPr txBox="1"/>
+          <p:nvPr/>
+        </p:nvSpPr>
+        <p:spPr>
+          <a:xfrm>
+            <a:off x="5385816" y="3429000"/>
+            <a:ext cx="1463040" cy="109728"/>
+          </a:xfrm>
+          <a:prstGeom prst="rect">
+            <a:avLst/>
+          </a:prstGeom>
+          <a:noFill/>
+        </p:spPr>
+        <p:txBody>
+          <a:bodyPr wrap="square" anchor="t" lIns="0" rIns="0" tIns="0" bIns="0">
+            <a:spAutoFit/>
+          </a:bodyPr>
+          <a:lstStyle/>
+          <a:p>
+            <a:pPr algn="l"/>
+            <a:r>
+              <a:rPr sz="700" b="0" spc="100">
+                <a:solidFill>
+                  <a:srgbClr val="1B9AAA"/>
+                </a:solidFill>
+                <a:latin typeface="JetBrains Mono"/>
+              </a:rPr>
+              <a:t>Executed 3 tasks</a:t>
+            </a:r>
+          </a:p>
+        </p:txBody>
+      </p:sp>
+      <p:cxnSp>
+        <p:nvCxnSpPr>
+          <p:cNvPr id="36" name="Connector 35"/>
+          <p:cNvCxnSpPr/>
+          <p:nvPr/>
+        </p:nvCxnSpPr>
+        <p:spPr>
+          <a:xfrm>
+            <a:off x="5184648" y="3538728"/>
+            <a:ext cx="1755648" cy="0"/>
+          </a:xfrm>
+          <a:prstGeom prst="line">
+            <a:avLst/>
+          </a:prstGeom>
+          <a:ln w="9525">
+            <a:solidFill>
+              <a:srgbClr val="DDE5E9"/>
+            </a:solidFill>
+          </a:ln>
+        </p:spPr>
+        <p:style>
+          <a:lnRef idx="2">
+            <a:schemeClr val="accent1"/>
+          </a:lnRef>
+          <a:fillRef idx="0">
+            <a:schemeClr val="accent1"/>
+          </a:fillRef>
+          <a:effectRef idx="1">
+            <a:schemeClr val="accent1"/>
+          </a:effectRef>
+          <a:fontRef idx="minor">
+            <a:schemeClr val="tx1"/>
+          </a:fontRef>
+        </p:style>
+      </p:cxnSp>
+      <p:sp>
+        <p:nvSpPr>
+          <p:cNvPr id="37" name="TextBox 36"/>
+          <p:cNvSpPr txBox="1"/>
+          <p:nvPr/>
+        </p:nvSpPr>
+        <p:spPr>
+          <a:xfrm>
+            <a:off x="5312664" y="3566160"/>
+            <a:ext cx="1463040" cy="91440"/>
+          </a:xfrm>
+          <a:prstGeom prst="rect">
+            <a:avLst/>
+          </a:prstGeom>
+          <a:noFill/>
+        </p:spPr>
+        <p:txBody>
+          <a:bodyPr wrap="square" anchor="t" lIns="0" rIns="0" tIns="0" bIns="0">
+            <a:spAutoFit/>
+          </a:bodyPr>
+          <a:lstStyle/>
+          <a:p>
+            <a:pPr algn="l"/>
+            <a:r>
+              <a:rPr sz="600" b="0">
+                <a:solidFill>
+                  <a:srgbClr val="1B9AAA"/>
+                </a:solidFill>
+                <a:latin typeface="Roboto"/>
+              </a:rPr>
+              <a:t>✓  Draft email written in Outlook</a:t>
+            </a:r>
+          </a:p>
+        </p:txBody>
+      </p:sp>
+      <p:sp>
+        <p:nvSpPr>
+          <p:cNvPr id="38" name="TextBox 37"/>
+          <p:cNvSpPr txBox="1"/>
+          <p:nvPr/>
+        </p:nvSpPr>
+        <p:spPr>
+          <a:xfrm>
+            <a:off x="5312664" y="3703320"/>
+            <a:ext cx="1463040" cy="91440"/>
+          </a:xfrm>
+          <a:prstGeom prst="rect">
+            <a:avLst/>
+          </a:prstGeom>
+          <a:noFill/>
+        </p:spPr>
+        <p:txBody>
+          <a:bodyPr wrap="square" anchor="t" lIns="0" rIns="0" tIns="0" bIns="0">
+            <a:spAutoFit/>
+          </a:bodyPr>
+          <a:lstStyle/>
+          <a:p>
+            <a:pPr algn="l"/>
+            <a:r>
+              <a:rPr sz="600" b="0">
+                <a:solidFill>
+                  <a:srgbClr val="1B9AAA"/>
+                </a:solidFill>
+                <a:latin typeface="Roboto"/>
+              </a:rPr>
+              <a:t>✓  Schedule follow-up meetings</a:t>
+            </a:r>
+          </a:p>
+        </p:txBody>
+      </p:sp>
+      <p:sp>
+        <p:nvSpPr>
+          <p:cNvPr id="39" name="TextBox 38"/>
+          <p:cNvSpPr txBox="1"/>
+          <p:nvPr/>
+        </p:nvSpPr>
+        <p:spPr>
+          <a:xfrm>
+            <a:off x="5312664" y="3840480"/>
+            <a:ext cx="1463040" cy="91440"/>
+          </a:xfrm>
+          <a:prstGeom prst="rect">
+            <a:avLst/>
+          </a:prstGeom>
+          <a:noFill/>
+        </p:spPr>
+        <p:txBody>
+          <a:bodyPr wrap="square" anchor="t" lIns="0" rIns="0" tIns="0" bIns="0">
+            <a:spAutoFit/>
+          </a:bodyPr>
+          <a:lstStyle/>
+          <a:p>
+            <a:pPr algn="l"/>
+            <a:r>
+              <a:rPr sz="600" b="0">
+                <a:solidFill>
+                  <a:srgbClr val="1B9AAA"/>
+                </a:solidFill>
+                <a:latin typeface="Roboto"/>
+              </a:rPr>
+              <a:t>✓  Store meeting notes on sharepoint</a:t>
+            </a:r>
+          </a:p>
+        </p:txBody>
+      </p:sp>
+      <p:sp>
+        <p:nvSpPr>
+          <p:cNvPr id="40" name="Rounded Rectangle 39"/>
+          <p:cNvSpPr/>
+          <p:nvPr/>
+        </p:nvSpPr>
+        <p:spPr>
+          <a:xfrm>
+            <a:off x="5184648" y="3986784"/>
+            <a:ext cx="3374136" cy="210312"/>
+          </a:xfrm>
+          <a:prstGeom prst="roundRect">
+            <a:avLst>
+              <a:gd name="adj" fmla="val 18000"/>
+            </a:avLst>
+          </a:prstGeom>
+          <a:solidFill>
+            <a:srgbClr val="D4ECEF"/>
+          </a:solidFill>
+          <a:ln>
+            <a:noFill/>
+          </a:ln>
+          <a:effectLst/>
+        </p:spPr>
+        <p:style>
+          <a:lnRef idx="1">
+            <a:schemeClr val="accent1"/>
+          </a:lnRef>
+          <a:fillRef idx="3">
+            <a:schemeClr val="accent1"/>
+          </a:fillRef>
+          <a:effectRef idx="2">
+            <a:schemeClr val="accent1"/>
+          </a:effectRef>
+          <a:fontRef idx="minor">
+            <a:schemeClr val="lt1"/>
+          </a:fontRef>
+        </p:style>
+        <p:txBody>
+          <a:bodyPr rtlCol="0" anchor="ctr" lIns="0" rIns="0" tIns="0" bIns="0" wrap="none"/>
+          <a:lstStyle/>
+          <a:p>
+            <a:pPr algn="ctr"/>
+            <a:r>
+              <a:rPr sz="700">
+                <a:solidFill>
+                  <a:srgbClr val="0D1B2A"/>
+                </a:solidFill>
+                <a:latin typeface="Roboto"/>
+              </a:rPr>
+              <a:t>I have executed all tasks. The draft email is waiting for your approval.</a:t>
+            </a:r>
+          </a:p>
+        </p:txBody>
+      </p:sp>
+      <p:cxnSp>
+        <p:nvCxnSpPr>
+          <p:cNvPr id="41" name="Connector 40"/>
+          <p:cNvCxnSpPr/>
+          <p:nvPr/>
+        </p:nvCxnSpPr>
+        <p:spPr>
+          <a:xfrm>
+            <a:off x="777240" y="4279392"/>
+            <a:ext cx="3584448" cy="0"/>
+          </a:xfrm>
+          <a:prstGeom prst="line">
+            <a:avLst/>
+          </a:prstGeom>
+          <a:ln w="9525">
+            <a:solidFill>
+              <a:srgbClr val="DDE5E9"/>
+            </a:solidFill>
+          </a:ln>
+        </p:spPr>
+        <p:style>
+          <a:lnRef idx="2">
+            <a:schemeClr val="accent1"/>
+          </a:lnRef>
+          <a:fillRef idx="0">
+            <a:schemeClr val="accent1"/>
+          </a:fillRef>
+          <a:effectRef idx="1">
+            <a:schemeClr val="accent1"/>
+          </a:effectRef>
+          <a:fontRef idx="minor">
+            <a:schemeClr val="tx1"/>
+          </a:fontRef>
+        </p:style>
+      </p:cxnSp>
+      <p:sp>
+        <p:nvSpPr>
+          <p:cNvPr id="42" name="TextBox 41"/>
+          <p:cNvSpPr txBox="1"/>
+          <p:nvPr/>
+        </p:nvSpPr>
+        <p:spPr>
+          <a:xfrm>
+            <a:off x="777240" y="4334256"/>
+            <a:ext cx="3593592" cy="182880"/>
+          </a:xfrm>
+          <a:prstGeom prst="rect">
+            <a:avLst/>
+          </a:prstGeom>
+          <a:noFill/>
+        </p:spPr>
+        <p:txBody>
+          <a:bodyPr wrap="square" anchor="t" lIns="0" rIns="0" tIns="0" bIns="0">
+            <a:spAutoFit/>
+          </a:bodyPr>
+          <a:lstStyle/>
+          <a:p>
+            <a:pPr algn="l"/>
+            <a:r>
+              <a:rPr sz="900" b="0">
                 <a:solidFill>
                   <a:srgbClr val="14293D"/>
                 </a:solidFill>
-                <a:latin typeface="Roboto" pitchFamily="34" charset="0"/>
-                <a:ea typeface="Roboto" pitchFamily="34" charset="-122"/>
-                <a:cs typeface="Roboto" pitchFamily="34" charset="-120"/>
-              </a:rPr>
-              <a:t>A structured exchange that needs a human for every decision and every action.</a:t>
-            </a:r>
-            <a:endParaRPr lang="en-US" sz="1100" dirty="0"/>
-          </a:p>
-        </p:txBody>
-      </p:sp>
-      <p:sp>
-        <p:nvSpPr>
-          <p:cNvPr id="14" name="Text 12"/>
-          <p:cNvSpPr/>
-          <p:nvPr/>
-        </p:nvSpPr>
-        <p:spPr>
-          <a:xfrm>
-            <a:off x="786384" y="4517136"/>
-            <a:ext cx="3520440" cy="237744"/>
-          </a:xfrm>
-          <a:prstGeom prst="rect">
-            <a:avLst/>
-          </a:prstGeom>
-          <a:noFill/>
-          <a:ln/>
-        </p:spPr>
-        <p:txBody>
-          <a:bodyPr wrap="square" lIns="0" tIns="0" rIns="0" bIns="0" rtlCol="0" anchor="ctr"/>
-          <a:lstStyle/>
-          <a:p>
-            <a:pPr marL="0" indent="0">
-              <a:buNone/>
-            </a:pPr>
-            <a:r>
-              <a:rPr lang="en-US" sz="950" dirty="0">
-                <a:solidFill>
-                  <a:srgbClr val="1B9AAA"/>
-                </a:solidFill>
-                <a:latin typeface="JetBrains Mono" pitchFamily="34" charset="0"/>
-                <a:ea typeface="JetBrains Mono" pitchFamily="34" charset="-122"/>
-                <a:cs typeface="JetBrains Mono" pitchFamily="34" charset="-120"/>
-              </a:rPr>
-              <a:t>“Summarize these meeting notes.”</a:t>
-            </a:r>
-            <a:endParaRPr lang="en-US" sz="950" dirty="0"/>
-          </a:p>
-        </p:txBody>
-      </p:sp>
-      <p:sp>
-        <p:nvSpPr>
-          <p:cNvPr id="15" name="Shape 13"/>
-          <p:cNvSpPr/>
-          <p:nvPr/>
-        </p:nvSpPr>
-        <p:spPr>
-          <a:xfrm>
-            <a:off x="4754880" y="1828800"/>
-            <a:ext cx="3931920" cy="420624"/>
+                <a:latin typeface="Roboto"/>
+              </a:rPr>
+              <a:t>A structured exchange that needs a human for every decision.</a:t>
+            </a:r>
+          </a:p>
+        </p:txBody>
+      </p:sp>
+      <p:cxnSp>
+        <p:nvCxnSpPr>
+          <p:cNvPr id="43" name="Connector 42"/>
+          <p:cNvCxnSpPr/>
+          <p:nvPr/>
+        </p:nvCxnSpPr>
+        <p:spPr>
+          <a:xfrm>
+            <a:off x="4910328" y="4279392"/>
+            <a:ext cx="3584448" cy="0"/>
+          </a:xfrm>
+          <a:prstGeom prst="line">
+            <a:avLst/>
+          </a:prstGeom>
+          <a:ln w="9525">
+            <a:solidFill>
+              <a:srgbClr val="DDE5E9"/>
+            </a:solidFill>
+          </a:ln>
+        </p:spPr>
+        <p:style>
+          <a:lnRef idx="2">
+            <a:schemeClr val="accent1"/>
+          </a:lnRef>
+          <a:fillRef idx="0">
+            <a:schemeClr val="accent1"/>
+          </a:fillRef>
+          <a:effectRef idx="1">
+            <a:schemeClr val="accent1"/>
+          </a:effectRef>
+          <a:fontRef idx="minor">
+            <a:schemeClr val="tx1"/>
+          </a:fontRef>
+        </p:style>
+      </p:cxnSp>
+      <p:sp>
+        <p:nvSpPr>
+          <p:cNvPr id="44" name="TextBox 43"/>
+          <p:cNvSpPr txBox="1"/>
+          <p:nvPr/>
+        </p:nvSpPr>
+        <p:spPr>
+          <a:xfrm>
+            <a:off x="4910328" y="4334256"/>
+            <a:ext cx="3593592" cy="182880"/>
+          </a:xfrm>
+          <a:prstGeom prst="rect">
+            <a:avLst/>
+          </a:prstGeom>
+          <a:noFill/>
+        </p:spPr>
+        <p:txBody>
+          <a:bodyPr wrap="square" anchor="t" lIns="0" rIns="0" tIns="0" bIns="0">
+            <a:spAutoFit/>
+          </a:bodyPr>
+          <a:lstStyle/>
+          <a:p>
+            <a:pPr algn="l"/>
+            <a:r>
+              <a:rPr sz="900" b="0">
+                <a:solidFill>
+                  <a:srgbClr val="14293D"/>
+                </a:solidFill>
+                <a:latin typeface="Roboto"/>
+              </a:rPr>
+              <a:t>An autonomous system that pursues a goal on its own.</a:t>
+            </a:r>
+          </a:p>
+        </p:txBody>
+      </p:sp>
+      <p:sp>
+        <p:nvSpPr>
+          <p:cNvPr id="45" name="Rectangle 44"/>
+          <p:cNvSpPr/>
+          <p:nvPr/>
+        </p:nvSpPr>
+        <p:spPr>
+          <a:xfrm>
+            <a:off x="566928" y="4681727"/>
+            <a:ext cx="45720" cy="219456"/>
           </a:xfrm>
           <a:prstGeom prst="rect">
             <a:avLst/>
           </a:prstGeom>
           <a:solidFill>
-            <a:srgbClr val="0D1B2A"/>
+            <a:srgbClr val="1B9AAA"/>
           </a:solidFill>
-          <a:ln/>
-        </p:spPr>
-        <p:txBody>
-          <a:bodyPr/>
-          <a:lstStyle/>
-          <a:p>
-            <a:endParaRPr lang="en-US"/>
-          </a:p>
-        </p:txBody>
-      </p:sp>
-      <p:sp>
-        <p:nvSpPr>
-          <p:cNvPr id="16" name="Text 14"/>
-          <p:cNvSpPr/>
-          <p:nvPr/>
-        </p:nvSpPr>
-        <p:spPr>
-          <a:xfrm>
-            <a:off x="4974336" y="1901952"/>
-            <a:ext cx="3566160" cy="274320"/>
-          </a:xfrm>
-          <a:prstGeom prst="rect">
-            <a:avLst/>
-          </a:prstGeom>
-          <a:noFill/>
-          <a:ln/>
-        </p:spPr>
-        <p:txBody>
-          <a:bodyPr wrap="square" lIns="0" tIns="0" rIns="0" bIns="0" rtlCol="0" anchor="ctr"/>
-          <a:lstStyle/>
-          <a:p>
-            <a:pPr marL="0" indent="0">
-              <a:buNone/>
-            </a:pPr>
-            <a:r>
-              <a:rPr lang="en-US" sz="1500" dirty="0">
-                <a:solidFill>
-                  <a:srgbClr val="06D6A0"/>
-                </a:solidFill>
-                <a:latin typeface="Oswald" pitchFamily="34" charset="0"/>
-                <a:ea typeface="Oswald" pitchFamily="34" charset="-122"/>
-                <a:cs typeface="Oswald" pitchFamily="34" charset="-120"/>
-              </a:rPr>
-              <a:t>Agentic AI</a:t>
-            </a:r>
-            <a:endParaRPr lang="en-US" sz="1500" dirty="0"/>
-          </a:p>
-        </p:txBody>
-      </p:sp>
-      <p:sp>
-        <p:nvSpPr>
-          <p:cNvPr id="17" name="Text 15"/>
-          <p:cNvSpPr/>
-          <p:nvPr/>
-        </p:nvSpPr>
-        <p:spPr>
-          <a:xfrm>
-            <a:off x="5056632" y="2377440"/>
-            <a:ext cx="3474720" cy="274320"/>
-          </a:xfrm>
-          <a:prstGeom prst="rect">
-            <a:avLst/>
-          </a:prstGeom>
-          <a:noFill/>
-          <a:ln/>
-        </p:spPr>
-        <p:txBody>
-          <a:bodyPr wrap="square" lIns="0" tIns="0" rIns="0" bIns="0" rtlCol="0" anchor="ctr"/>
-          <a:lstStyle/>
-          <a:p>
-            <a:pPr marL="0" indent="0">
-              <a:buNone/>
-            </a:pPr>
-            <a:r>
-              <a:rPr lang="en-US" sz="1100" dirty="0">
+          <a:ln>
+            <a:noFill/>
+          </a:ln>
+          <a:effectLst/>
+        </p:spPr>
+        <p:style>
+          <a:lnRef idx="1">
+            <a:schemeClr val="accent1"/>
+          </a:lnRef>
+          <a:fillRef idx="3">
+            <a:schemeClr val="accent1"/>
+          </a:fillRef>
+          <a:effectRef idx="2">
+            <a:schemeClr val="accent1"/>
+          </a:effectRef>
+          <a:fontRef idx="minor">
+            <a:schemeClr val="lt1"/>
+          </a:fontRef>
+        </p:style>
+        <p:txBody>
+          <a:bodyPr rtlCol="0" anchor="ctr"/>
+          <a:lstStyle/>
+          <a:p>
+            <a:pPr algn="ctr"/>
+          </a:p>
+        </p:txBody>
+      </p:sp>
+      <p:sp>
+        <p:nvSpPr>
+          <p:cNvPr id="46" name="TextBox 45"/>
+          <p:cNvSpPr txBox="1"/>
+          <p:nvPr/>
+        </p:nvSpPr>
+        <p:spPr>
+          <a:xfrm>
+            <a:off x="713232" y="4663440"/>
+            <a:ext cx="7991856" cy="274320"/>
+          </a:xfrm>
+          <a:prstGeom prst="rect">
+            <a:avLst/>
+          </a:prstGeom>
+          <a:noFill/>
+        </p:spPr>
+        <p:txBody>
+          <a:bodyPr wrap="square" anchor="t" lIns="0" rIns="0" tIns="0" bIns="0">
+            <a:spAutoFit/>
+          </a:bodyPr>
+          <a:lstStyle/>
+          <a:p>
+            <a:pPr algn="l"/>
+            <a:r>
+              <a:rPr sz="1200" b="0">
                 <a:solidFill>
                   <a:srgbClr val="0D1B2A"/>
                 </a:solidFill>
-                <a:latin typeface="JetBrains Mono" pitchFamily="34" charset="0"/>
-                <a:ea typeface="JetBrains Mono" pitchFamily="34" charset="-122"/>
-                <a:cs typeface="JetBrains Mono" pitchFamily="34" charset="-120"/>
-              </a:rPr>
-              <a:t>Prompt  →</a:t>
-            </a:r>
-            <a:endParaRPr lang="en-US" sz="1100" dirty="0"/>
-          </a:p>
-        </p:txBody>
-      </p:sp>
-      <p:sp>
-        <p:nvSpPr>
-          <p:cNvPr id="18" name="Text 16"/>
-          <p:cNvSpPr/>
-          <p:nvPr/>
-        </p:nvSpPr>
-        <p:spPr>
-          <a:xfrm>
-            <a:off x="5056632" y="2761488"/>
-            <a:ext cx="3474720" cy="274320"/>
-          </a:xfrm>
-          <a:prstGeom prst="rect">
-            <a:avLst/>
-          </a:prstGeom>
-          <a:noFill/>
-          <a:ln/>
-        </p:spPr>
-        <p:txBody>
-          <a:bodyPr wrap="square" lIns="0" tIns="0" rIns="0" bIns="0" rtlCol="0" anchor="ctr"/>
-          <a:lstStyle/>
-          <a:p>
-            <a:pPr marL="0" indent="0">
-              <a:buNone/>
-            </a:pPr>
-            <a:r>
-              <a:rPr lang="en-US" sz="1100" dirty="0">
-                <a:solidFill>
-                  <a:srgbClr val="1B9AAA"/>
-                </a:solidFill>
-                <a:latin typeface="JetBrains Mono" pitchFamily="34" charset="0"/>
-                <a:ea typeface="JetBrains Mono" pitchFamily="34" charset="-122"/>
-                <a:cs typeface="JetBrains Mono" pitchFamily="34" charset="-120"/>
-              </a:rPr>
-              <a:t>Uses  ·  planning, memory, tools</a:t>
-            </a:r>
-            <a:endParaRPr lang="en-US" sz="1100" dirty="0"/>
-          </a:p>
-        </p:txBody>
-      </p:sp>
-      <p:sp>
-        <p:nvSpPr>
-          <p:cNvPr id="19" name="Text 17"/>
-          <p:cNvSpPr/>
-          <p:nvPr/>
-        </p:nvSpPr>
-        <p:spPr>
-          <a:xfrm>
-            <a:off x="5056632" y="3145536"/>
-            <a:ext cx="3474720" cy="274320"/>
-          </a:xfrm>
-          <a:prstGeom prst="rect">
-            <a:avLst/>
-          </a:prstGeom>
-          <a:noFill/>
-          <a:ln/>
-        </p:spPr>
-        <p:txBody>
-          <a:bodyPr wrap="square" lIns="0" tIns="0" rIns="0" bIns="0" rtlCol="0" anchor="ctr"/>
-          <a:lstStyle/>
-          <a:p>
-            <a:pPr marL="0" indent="0">
-              <a:buNone/>
-            </a:pPr>
-            <a:r>
-              <a:rPr lang="en-US" sz="1100" dirty="0">
-                <a:solidFill>
-                  <a:srgbClr val="1B9AAA"/>
-                </a:solidFill>
-                <a:latin typeface="JetBrains Mono" pitchFamily="34" charset="0"/>
-                <a:ea typeface="JetBrains Mono" pitchFamily="34" charset="-122"/>
-                <a:cs typeface="JetBrains Mono" pitchFamily="34" charset="-120"/>
-              </a:rPr>
-              <a:t>Decides  ↻  observes, revises</a:t>
-            </a:r>
-            <a:endParaRPr lang="en-US" sz="1100" dirty="0"/>
-          </a:p>
-        </p:txBody>
-      </p:sp>
-      <p:sp>
-        <p:nvSpPr>
-          <p:cNvPr id="20" name="Text 18"/>
-          <p:cNvSpPr/>
-          <p:nvPr/>
-        </p:nvSpPr>
-        <p:spPr>
-          <a:xfrm>
-            <a:off x="5056632" y="3529584"/>
-            <a:ext cx="3474720" cy="274320"/>
-          </a:xfrm>
-          <a:prstGeom prst="rect">
-            <a:avLst/>
-          </a:prstGeom>
-          <a:noFill/>
-          <a:ln/>
-        </p:spPr>
-        <p:txBody>
-          <a:bodyPr wrap="square" lIns="0" tIns="0" rIns="0" bIns="0" rtlCol="0" anchor="ctr"/>
-          <a:lstStyle/>
-          <a:p>
-            <a:pPr marL="0" indent="0">
-              <a:buNone/>
-            </a:pPr>
-            <a:r>
-              <a:rPr lang="en-US" sz="1100" dirty="0">
-                <a:solidFill>
-                  <a:srgbClr val="0D1B2A"/>
-                </a:solidFill>
-                <a:latin typeface="JetBrains Mono" pitchFamily="34" charset="0"/>
-                <a:ea typeface="JetBrains Mono" pitchFamily="34" charset="-122"/>
-                <a:cs typeface="JetBrains Mono" pitchFamily="34" charset="-120"/>
-              </a:rPr>
-              <a:t>Answer  ←</a:t>
-            </a:r>
-            <a:endParaRPr lang="en-US" sz="1100" dirty="0"/>
-          </a:p>
-        </p:txBody>
-      </p:sp>
-      <p:sp>
-        <p:nvSpPr>
-          <p:cNvPr id="21" name="Shape 19"/>
-          <p:cNvSpPr/>
-          <p:nvPr/>
-        </p:nvSpPr>
-        <p:spPr>
-          <a:xfrm>
-            <a:off x="4754880" y="4023360"/>
-            <a:ext cx="3931920" cy="777240"/>
-          </a:xfrm>
-          <a:prstGeom prst="rect">
-            <a:avLst/>
-          </a:prstGeom>
-          <a:solidFill>
-            <a:srgbClr val="0D1B2A"/>
-          </a:solidFill>
-          <a:ln/>
-        </p:spPr>
-        <p:txBody>
-          <a:bodyPr/>
-          <a:lstStyle/>
-          <a:p>
-            <a:endParaRPr lang="en-US"/>
-          </a:p>
-        </p:txBody>
-      </p:sp>
-      <p:sp>
-        <p:nvSpPr>
-          <p:cNvPr id="22" name="Text 20"/>
-          <p:cNvSpPr/>
-          <p:nvPr/>
-        </p:nvSpPr>
-        <p:spPr>
-          <a:xfrm>
-            <a:off x="4974336" y="4133088"/>
-            <a:ext cx="3520440" cy="384048"/>
-          </a:xfrm>
-          <a:prstGeom prst="rect">
-            <a:avLst/>
-          </a:prstGeom>
-          <a:noFill/>
-          <a:ln/>
-        </p:spPr>
-        <p:txBody>
-          <a:bodyPr wrap="square" lIns="0" tIns="0" rIns="0" bIns="0" rtlCol="0" anchor="ctr"/>
-          <a:lstStyle/>
-          <a:p>
-            <a:pPr marL="0" indent="0">
-              <a:buNone/>
-            </a:pPr>
-            <a:r>
-              <a:rPr lang="en-US" sz="1100" dirty="0">
-                <a:solidFill>
-                  <a:srgbClr val="C9D9E1"/>
-                </a:solidFill>
-                <a:latin typeface="Roboto" pitchFamily="34" charset="0"/>
-                <a:ea typeface="Roboto" pitchFamily="34" charset="-122"/>
-                <a:cs typeface="Roboto" pitchFamily="34" charset="-120"/>
-              </a:rPr>
-              <a:t>An autonomous system making self-directed decisions and pursuing a goal iteratively.</a:t>
-            </a:r>
-            <a:endParaRPr lang="en-US" sz="1100" dirty="0"/>
-          </a:p>
-        </p:txBody>
-      </p:sp>
-      <p:sp>
-        <p:nvSpPr>
-          <p:cNvPr id="23" name="Text 21"/>
-          <p:cNvSpPr/>
-          <p:nvPr/>
-        </p:nvSpPr>
-        <p:spPr>
-          <a:xfrm>
-            <a:off x="4974336" y="4517136"/>
-            <a:ext cx="3520440" cy="237744"/>
-          </a:xfrm>
-          <a:prstGeom prst="rect">
-            <a:avLst/>
-          </a:prstGeom>
-          <a:noFill/>
-          <a:ln/>
-        </p:spPr>
-        <p:txBody>
-          <a:bodyPr wrap="square" lIns="0" tIns="0" rIns="0" bIns="0" rtlCol="0" anchor="ctr"/>
-          <a:lstStyle/>
-          <a:p>
-            <a:pPr marL="0" indent="0">
-              <a:buNone/>
-            </a:pPr>
-            <a:r>
-              <a:rPr lang="en-US" sz="950" dirty="0">
-                <a:solidFill>
-                  <a:srgbClr val="06D6A0"/>
-                </a:solidFill>
-                <a:latin typeface="JetBrains Mono" pitchFamily="34" charset="0"/>
-                <a:ea typeface="JetBrains Mono" pitchFamily="34" charset="-122"/>
-                <a:cs typeface="JetBrains Mono" pitchFamily="34" charset="-120"/>
-              </a:rPr>
-              <a:t>“Create a new website landing page.”</a:t>
-            </a:r>
-            <a:endParaRPr lang="en-US" sz="950" dirty="0"/>
-          </a:p>
-        </p:txBody>
-      </p:sp>
+                <a:latin typeface="Roboto"/>
+              </a:rPr>
+              <a:t>The chatbot waits for your next instruction. The agent decides the next step itself.</a:t>
+            </a:r>
+          </a:p>
+        </p:txBody>
+      </p:sp>
+      <p:pic>
+        <p:nvPicPr>
+          <p:cNvPr id="47" name="Picture 47"/>
+          <p:cNvPicPr>
+            <a:picLocks noChangeAspect="1"/>
+          </p:cNvPicPr>
+          <p:nvPr/>
+        </p:nvPicPr>
+        <p:blipFill>
+          <a:blip>
+            <a:extLst>
+              <a:ext uri="{96DAC541-7B7A-43D3-8B79-37D633B846F1}">
+                <asvg:svgBlip xmlns:asvg="http://schemas.microsoft.com/office/drawing/2016/SVG/main" r:embed="rId2"/>
+              </a:ext>
+            </a:extLst>
+          </a:blip>
+          <a:stretch>
+            <a:fillRect/>
+          </a:stretch>
+        </p:blipFill>
+        <p:spPr>
+          <a:xfrm>
+            <a:off x="4014215" y="2679192"/>
+            <a:ext cx="310896" cy="310896"/>
+          </a:xfrm>
+          <a:prstGeom prst="rect">
+            <a:avLst/>
+          </a:prstGeom>
+        </p:spPr>
+      </p:pic>
+      <p:pic>
+        <p:nvPicPr>
+          <p:cNvPr id="48" name="Picture 48"/>
+          <p:cNvPicPr>
+            <a:picLocks noChangeAspect="1"/>
+          </p:cNvPicPr>
+          <p:nvPr/>
+        </p:nvPicPr>
+        <p:blipFill>
+          <a:blip>
+            <a:extLst>
+              <a:ext uri="{96DAC541-7B7A-43D3-8B79-37D633B846F1}">
+                <asvg:svgBlip xmlns:asvg="http://schemas.microsoft.com/office/drawing/2016/SVG/main" r:embed="rId3"/>
+              </a:ext>
+            </a:extLst>
+          </a:blip>
+          <a:stretch>
+            <a:fillRect/>
+          </a:stretch>
+        </p:blipFill>
+        <p:spPr>
+          <a:xfrm>
+            <a:off x="850392" y="3044952"/>
+            <a:ext cx="310896" cy="310896"/>
+          </a:xfrm>
+          <a:prstGeom prst="rect">
+            <a:avLst/>
+          </a:prstGeom>
+        </p:spPr>
+      </p:pic>
+      <p:pic>
+        <p:nvPicPr>
+          <p:cNvPr id="49" name="Picture 49"/>
+          <p:cNvPicPr>
+            <a:picLocks noChangeAspect="1"/>
+          </p:cNvPicPr>
+          <p:nvPr/>
+        </p:nvPicPr>
+        <p:blipFill>
+          <a:blip>
+            <a:extLst>
+              <a:ext uri="{96DAC541-7B7A-43D3-8B79-37D633B846F1}">
+                <asvg:svgBlip xmlns:asvg="http://schemas.microsoft.com/office/drawing/2016/SVG/main" r:embed="rId4"/>
+              </a:ext>
+            </a:extLst>
+          </a:blip>
+          <a:stretch>
+            <a:fillRect/>
+          </a:stretch>
+        </p:blipFill>
+        <p:spPr>
+          <a:xfrm>
+            <a:off x="4014215" y="3410712"/>
+            <a:ext cx="310896" cy="310896"/>
+          </a:xfrm>
+          <a:prstGeom prst="rect">
+            <a:avLst/>
+          </a:prstGeom>
+        </p:spPr>
+      </p:pic>
+      <p:pic>
+        <p:nvPicPr>
+          <p:cNvPr id="50" name="Picture 50"/>
+          <p:cNvPicPr>
+            <a:picLocks noChangeAspect="1"/>
+          </p:cNvPicPr>
+          <p:nvPr/>
+        </p:nvPicPr>
+        <p:blipFill>
+          <a:blip>
+            <a:extLst>
+              <a:ext uri="{96DAC541-7B7A-43D3-8B79-37D633B846F1}">
+                <asvg:svgBlip xmlns:asvg="http://schemas.microsoft.com/office/drawing/2016/SVG/main" r:embed="rId5"/>
+              </a:ext>
+            </a:extLst>
+          </a:blip>
+          <a:stretch>
+            <a:fillRect/>
+          </a:stretch>
+        </p:blipFill>
+        <p:spPr>
+          <a:xfrm>
+            <a:off x="8266175" y="2258568"/>
+            <a:ext cx="310896" cy="310896"/>
+          </a:xfrm>
+          <a:prstGeom prst="rect">
+            <a:avLst/>
+          </a:prstGeom>
+        </p:spPr>
+      </p:pic>
+      <p:pic>
+        <p:nvPicPr>
+          <p:cNvPr id="51" name="Picture 51"/>
+          <p:cNvPicPr>
+            <a:picLocks noChangeAspect="1"/>
+          </p:cNvPicPr>
+          <p:nvPr/>
+        </p:nvPicPr>
+        <p:blipFill>
+          <a:blip>
+            <a:extLst>
+              <a:ext uri="{96DAC541-7B7A-43D3-8B79-37D633B846F1}">
+                <asvg:svgBlip xmlns:asvg="http://schemas.microsoft.com/office/drawing/2016/SVG/main" r:embed="rId6"/>
+              </a:ext>
+            </a:extLst>
+          </a:blip>
+          <a:stretch>
+            <a:fillRect/>
+          </a:stretch>
+        </p:blipFill>
+        <p:spPr>
+          <a:xfrm>
+            <a:off x="4855464" y="3218688"/>
+            <a:ext cx="310896" cy="310896"/>
+          </a:xfrm>
+          <a:prstGeom prst="rect">
+            <a:avLst/>
+          </a:prstGeom>
+        </p:spPr>
+      </p:pic>
     </p:spTree>
   </p:cSld>
   <p:clrMapOvr>
@@ -35281,992 +36380,6 @@
 </file>
 
 <file path=ppt/slides/slide25.xml><?xml version="1.0" encoding="utf-8"?>
-<p:sld xmlns:a="http://schemas.openxmlformats.org/drawingml/2006/main" xmlns:r="http://schemas.openxmlformats.org/officeDocument/2006/relationships" xmlns:p="http://schemas.openxmlformats.org/presentationml/2006/main">
-  <p:cSld name="Slide 4">
-    <p:bg>
-      <p:bgPr>
-        <a:solidFill>
-          <a:srgbClr val="F4F7F8"/>
-        </a:solidFill>
-        <a:effectLst/>
-      </p:bgPr>
-    </p:bg>
-    <p:spTree>
-      <p:nvGrpSpPr>
-        <p:cNvPr id="1" name=""/>
-        <p:cNvGrpSpPr/>
-        <p:nvPr/>
-      </p:nvGrpSpPr>
-      <p:grpSpPr>
-        <a:xfrm>
-          <a:off x="0" y="0"/>
-          <a:ext cx="0" cy="0"/>
-          <a:chOff x="0" y="0"/>
-          <a:chExt cx="0" cy="0"/>
-        </a:xfrm>
-      </p:grpSpPr>
-      <p:sp>
-        <p:nvSpPr>
-          <p:cNvPr id="2" name="Shape 0"/>
-          <p:cNvSpPr/>
-          <p:nvPr/>
-        </p:nvSpPr>
-        <p:spPr>
-          <a:xfrm>
-            <a:off x="0" y="0"/>
-            <a:ext cx="201168" cy="5143500"/>
-          </a:xfrm>
-          <a:prstGeom prst="rect">
-            <a:avLst/>
-          </a:prstGeom>
-          <a:solidFill>
-            <a:srgbClr val="0D1B2A"/>
-          </a:solidFill>
-          <a:ln/>
-        </p:spPr>
-        <p:txBody>
-          <a:bodyPr/>
-          <a:lstStyle/>
-          <a:p>
-            <a:endParaRPr lang="en-US"/>
-          </a:p>
-        </p:txBody>
-      </p:sp>
-      <p:sp>
-        <p:nvSpPr>
-          <p:cNvPr id="3" name="Text 1"/>
-          <p:cNvSpPr/>
-          <p:nvPr/>
-        </p:nvSpPr>
-        <p:spPr>
-          <a:xfrm>
-            <a:off x="566928" y="329184"/>
-            <a:ext cx="8138160" cy="256032"/>
-          </a:xfrm>
-          <a:prstGeom prst="rect">
-            <a:avLst/>
-          </a:prstGeom>
-          <a:noFill/>
-          <a:ln/>
-        </p:spPr>
-        <p:txBody>
-          <a:bodyPr wrap="square" lIns="0" tIns="0" rIns="0" bIns="0" rtlCol="0" anchor="ctr"/>
-          <a:lstStyle/>
-          <a:p>
-            <a:pPr marL="0" indent="0">
-              <a:buNone/>
-            </a:pPr>
-            <a:r>
-              <a:rPr lang="en-US" sz="1050" kern="0" spc="200" dirty="0">
-                <a:solidFill>
-                  <a:srgbClr val="1B9AAA"/>
-                </a:solidFill>
-                <a:latin typeface="JetBrains Mono" pitchFamily="34" charset="0"/>
-                <a:ea typeface="JetBrains Mono" pitchFamily="34" charset="-122"/>
-                <a:cs typeface="JetBrains Mono" pitchFamily="34" charset="-120"/>
-              </a:rPr>
-              <a:t>ANATOMY</a:t>
-            </a:r>
-            <a:endParaRPr lang="en-US" sz="1050" dirty="0"/>
-          </a:p>
-        </p:txBody>
-      </p:sp>
-      <p:sp>
-        <p:nvSpPr>
-          <p:cNvPr id="4" name="Text 2"/>
-          <p:cNvSpPr/>
-          <p:nvPr/>
-        </p:nvSpPr>
-        <p:spPr>
-          <a:xfrm>
-            <a:off x="566928" y="603504"/>
-            <a:ext cx="8138160" cy="658368"/>
-          </a:xfrm>
-          <a:prstGeom prst="rect">
-            <a:avLst/>
-          </a:prstGeom>
-          <a:noFill/>
-          <a:ln/>
-        </p:spPr>
-        <p:txBody>
-          <a:bodyPr wrap="square" lIns="0" tIns="0" rIns="0" bIns="0" rtlCol="0" anchor="ctr"/>
-          <a:lstStyle/>
-          <a:p>
-            <a:pPr marL="0" indent="0">
-              <a:buNone/>
-            </a:pPr>
-            <a:r>
-              <a:rPr lang="en-US" sz="3200" dirty="0">
-                <a:solidFill>
-                  <a:srgbClr val="0D1B2A"/>
-                </a:solidFill>
-                <a:latin typeface="Oswald" pitchFamily="34" charset="0"/>
-                <a:ea typeface="Oswald" pitchFamily="34" charset="-122"/>
-                <a:cs typeface="Oswald" pitchFamily="34" charset="-120"/>
-              </a:rPr>
-              <a:t>What an agent is made of</a:t>
-            </a:r>
-            <a:endParaRPr lang="en-US" sz="3200" dirty="0"/>
-          </a:p>
-        </p:txBody>
-      </p:sp>
-      <p:sp>
-        <p:nvSpPr>
-          <p:cNvPr id="5" name="Text 3"/>
-          <p:cNvSpPr/>
-          <p:nvPr/>
-        </p:nvSpPr>
-        <p:spPr>
-          <a:xfrm>
-            <a:off x="566928" y="1417320"/>
-            <a:ext cx="3246120" cy="457200"/>
-          </a:xfrm>
-          <a:prstGeom prst="rect">
-            <a:avLst/>
-          </a:prstGeom>
-          <a:noFill/>
-          <a:ln/>
-        </p:spPr>
-        <p:txBody>
-          <a:bodyPr wrap="square" lIns="0" tIns="0" rIns="0" bIns="0" rtlCol="0" anchor="ctr"/>
-          <a:lstStyle/>
-          <a:p>
-            <a:pPr marL="0" indent="0">
-              <a:buNone/>
-            </a:pPr>
-            <a:r>
-              <a:rPr lang="en-US" sz="3000" dirty="0">
-                <a:solidFill>
-                  <a:srgbClr val="0D1B2A"/>
-                </a:solidFill>
-                <a:latin typeface="Oswald" pitchFamily="34" charset="0"/>
-                <a:ea typeface="Oswald" pitchFamily="34" charset="-122"/>
-                <a:cs typeface="Oswald" pitchFamily="34" charset="-120"/>
-              </a:rPr>
-              <a:t>Agent  =</a:t>
-            </a:r>
-            <a:endParaRPr lang="en-US" sz="3000" dirty="0"/>
-          </a:p>
-        </p:txBody>
-      </p:sp>
-      <p:sp>
-        <p:nvSpPr>
-          <p:cNvPr id="6" name="Shape 4"/>
-          <p:cNvSpPr/>
-          <p:nvPr/>
-        </p:nvSpPr>
-        <p:spPr>
-          <a:xfrm>
-            <a:off x="566928" y="2011680"/>
-            <a:ext cx="3246120" cy="2286000"/>
-          </a:xfrm>
-          <a:prstGeom prst="rect">
-            <a:avLst/>
-          </a:prstGeom>
-          <a:solidFill>
-            <a:srgbClr val="0D1B2A"/>
-          </a:solidFill>
-          <a:ln/>
-        </p:spPr>
-        <p:txBody>
-          <a:bodyPr/>
-          <a:lstStyle/>
-          <a:p>
-            <a:endParaRPr lang="en-US"/>
-          </a:p>
-        </p:txBody>
-      </p:sp>
-      <p:sp>
-        <p:nvSpPr>
-          <p:cNvPr id="7" name="Text 5"/>
-          <p:cNvSpPr/>
-          <p:nvPr/>
-        </p:nvSpPr>
-        <p:spPr>
-          <a:xfrm>
-            <a:off x="804672" y="2240280"/>
-            <a:ext cx="2788920" cy="1828800"/>
-          </a:xfrm>
-          <a:prstGeom prst="rect">
-            <a:avLst/>
-          </a:prstGeom>
-          <a:noFill/>
-          <a:ln/>
-        </p:spPr>
-        <p:txBody>
-          <a:bodyPr wrap="square" lIns="0" tIns="0" rIns="0" bIns="0" rtlCol="0" anchor="ctr"/>
-          <a:lstStyle/>
-          <a:p>
-            <a:pPr marL="0" indent="0">
-              <a:buNone/>
-            </a:pPr>
-            <a:r>
-              <a:rPr lang="en-US" sz="1250" dirty="0">
-                <a:solidFill>
-                  <a:srgbClr val="D7E3E9"/>
-                </a:solidFill>
-                <a:latin typeface="Roboto" pitchFamily="34" charset="0"/>
-                <a:ea typeface="Roboto" pitchFamily="34" charset="-122"/>
-                <a:cs typeface="Roboto" pitchFamily="34" charset="-120"/>
-              </a:rPr>
-              <a:t>“An AI application consisting of a model equipped with instructions that guide its behavior, access to tools that extend its capabilities, encapsulated in a runtime with a dynamic lifecycle.”</a:t>
-            </a:r>
-            <a:endParaRPr lang="en-US" sz="1250" dirty="0"/>
-          </a:p>
-        </p:txBody>
-      </p:sp>
-      <p:sp>
-        <p:nvSpPr>
-          <p:cNvPr id="8" name="Text 6"/>
-          <p:cNvSpPr/>
-          <p:nvPr/>
-        </p:nvSpPr>
-        <p:spPr>
-          <a:xfrm>
-            <a:off x="566928" y="4434840"/>
-            <a:ext cx="3246120" cy="274320"/>
-          </a:xfrm>
-          <a:prstGeom prst="rect">
-            <a:avLst/>
-          </a:prstGeom>
-          <a:noFill/>
-          <a:ln/>
-        </p:spPr>
-        <p:txBody>
-          <a:bodyPr wrap="square" lIns="0" tIns="0" rIns="0" bIns="0" rtlCol="0" anchor="ctr"/>
-          <a:lstStyle/>
-          <a:p>
-            <a:pPr marL="0" indent="0">
-              <a:buNone/>
-            </a:pPr>
-            <a:r>
-              <a:rPr lang="en-US" sz="900" dirty="0">
-                <a:solidFill>
-                  <a:srgbClr val="6B7B8C"/>
-                </a:solidFill>
-                <a:latin typeface="JetBrains Mono" pitchFamily="34" charset="0"/>
-                <a:ea typeface="JetBrains Mono" pitchFamily="34" charset="-122"/>
-                <a:cs typeface="JetBrains Mono" pitchFamily="34" charset="-120"/>
-              </a:rPr>
-              <a:t>Source: OpenAI definition</a:t>
-            </a:r>
-            <a:endParaRPr lang="en-US" sz="900" dirty="0"/>
-          </a:p>
-        </p:txBody>
-      </p:sp>
-      <p:sp>
-        <p:nvSpPr>
-          <p:cNvPr id="9" name="Shape 7"/>
-          <p:cNvSpPr/>
-          <p:nvPr/>
-        </p:nvSpPr>
-        <p:spPr>
-          <a:xfrm>
-            <a:off x="4114800" y="1463040"/>
-            <a:ext cx="4572000" cy="731520"/>
-          </a:xfrm>
-          <a:prstGeom prst="rect">
-            <a:avLst/>
-          </a:prstGeom>
-          <a:solidFill>
-            <a:srgbClr val="FFFFFF"/>
-          </a:solidFill>
-          <a:ln w="9525">
-            <a:solidFill>
-              <a:srgbClr val="DDE5E9"/>
-            </a:solidFill>
-            <a:prstDash val="solid"/>
-          </a:ln>
-        </p:spPr>
-        <p:txBody>
-          <a:bodyPr/>
-          <a:lstStyle/>
-          <a:p>
-            <a:endParaRPr lang="en-US"/>
-          </a:p>
-        </p:txBody>
-      </p:sp>
-      <p:sp>
-        <p:nvSpPr>
-          <p:cNvPr id="10" name="Shape 8"/>
-          <p:cNvSpPr/>
-          <p:nvPr/>
-        </p:nvSpPr>
-        <p:spPr>
-          <a:xfrm>
-            <a:off x="4114800" y="1463040"/>
-            <a:ext cx="64008" cy="731520"/>
-          </a:xfrm>
-          <a:prstGeom prst="rect">
-            <a:avLst/>
-          </a:prstGeom>
-          <a:solidFill>
-            <a:srgbClr val="1B9AAA"/>
-          </a:solidFill>
-          <a:ln/>
-        </p:spPr>
-        <p:txBody>
-          <a:bodyPr/>
-          <a:lstStyle/>
-          <a:p>
-            <a:endParaRPr lang="en-US"/>
-          </a:p>
-        </p:txBody>
-      </p:sp>
-      <p:sp>
-        <p:nvSpPr>
-          <p:cNvPr id="11" name="Text 9"/>
-          <p:cNvSpPr/>
-          <p:nvPr/>
-        </p:nvSpPr>
-        <p:spPr>
-          <a:xfrm>
-            <a:off x="4279392" y="1591056"/>
-            <a:ext cx="274320" cy="310896"/>
-          </a:xfrm>
-          <a:prstGeom prst="rect">
-            <a:avLst/>
-          </a:prstGeom>
-          <a:noFill/>
-          <a:ln/>
-        </p:spPr>
-        <p:txBody>
-          <a:bodyPr wrap="square" lIns="0" tIns="0" rIns="0" bIns="0" rtlCol="0" anchor="ctr"/>
-          <a:lstStyle/>
-          <a:p>
-            <a:pPr marL="0" indent="0">
-              <a:buNone/>
-            </a:pPr>
-            <a:r>
-              <a:rPr lang="en-US" sz="2000" dirty="0">
-                <a:solidFill>
-                  <a:srgbClr val="1B9AAA"/>
-                </a:solidFill>
-                <a:latin typeface="Oswald" pitchFamily="34" charset="0"/>
-                <a:ea typeface="Oswald" pitchFamily="34" charset="-122"/>
-                <a:cs typeface="Oswald" pitchFamily="34" charset="-120"/>
-              </a:rPr>
-              <a:t>+</a:t>
-            </a:r>
-            <a:endParaRPr lang="en-US" sz="2000" dirty="0"/>
-          </a:p>
-        </p:txBody>
-      </p:sp>
-      <p:sp>
-        <p:nvSpPr>
-          <p:cNvPr id="12" name="Text 10"/>
-          <p:cNvSpPr/>
-          <p:nvPr/>
-        </p:nvSpPr>
-        <p:spPr>
-          <a:xfrm>
-            <a:off x="4572000" y="1581912"/>
-            <a:ext cx="1463040" cy="292608"/>
-          </a:xfrm>
-          <a:prstGeom prst="rect">
-            <a:avLst/>
-          </a:prstGeom>
-          <a:noFill/>
-          <a:ln/>
-        </p:spPr>
-        <p:txBody>
-          <a:bodyPr wrap="square" lIns="0" tIns="0" rIns="0" bIns="0" rtlCol="0" anchor="ctr"/>
-          <a:lstStyle/>
-          <a:p>
-            <a:pPr marL="0" indent="0">
-              <a:buNone/>
-            </a:pPr>
-            <a:r>
-              <a:rPr lang="en-US" sz="1700" dirty="0">
-                <a:solidFill>
-                  <a:srgbClr val="0D1B2A"/>
-                </a:solidFill>
-                <a:latin typeface="Oswald" pitchFamily="34" charset="0"/>
-                <a:ea typeface="Oswald" pitchFamily="34" charset="-122"/>
-                <a:cs typeface="Oswald" pitchFamily="34" charset="-120"/>
-              </a:rPr>
-              <a:t>Model</a:t>
-            </a:r>
-            <a:endParaRPr lang="en-US" sz="1700" dirty="0"/>
-          </a:p>
-        </p:txBody>
-      </p:sp>
-      <p:sp>
-        <p:nvSpPr>
-          <p:cNvPr id="13" name="Text 11"/>
-          <p:cNvSpPr/>
-          <p:nvPr/>
-        </p:nvSpPr>
-        <p:spPr>
-          <a:xfrm>
-            <a:off x="6035040" y="1572768"/>
-            <a:ext cx="2514600" cy="548640"/>
-          </a:xfrm>
-          <a:prstGeom prst="rect">
-            <a:avLst/>
-          </a:prstGeom>
-          <a:noFill/>
-          <a:ln/>
-        </p:spPr>
-        <p:txBody>
-          <a:bodyPr wrap="square" lIns="0" tIns="0" rIns="0" bIns="0" rtlCol="0" anchor="ctr"/>
-          <a:lstStyle/>
-          <a:p>
-            <a:pPr marL="0" indent="0">
-              <a:buNone/>
-            </a:pPr>
-            <a:r>
-              <a:rPr lang="en-US" sz="950" dirty="0">
-                <a:solidFill>
-                  <a:srgbClr val="6B7B8C"/>
-                </a:solidFill>
-                <a:latin typeface="Roboto" pitchFamily="34" charset="0"/>
-                <a:ea typeface="Roboto" pitchFamily="34" charset="-122"/>
-                <a:cs typeface="Roboto" pitchFamily="34" charset="-120"/>
-              </a:rPr>
-              <a:t>Core capabilities: observing, understanding, planning, deciding.</a:t>
-            </a:r>
-            <a:endParaRPr lang="en-US" sz="950" dirty="0"/>
-          </a:p>
-        </p:txBody>
-      </p:sp>
-      <p:sp>
-        <p:nvSpPr>
-          <p:cNvPr id="14" name="Shape 12"/>
-          <p:cNvSpPr/>
-          <p:nvPr/>
-        </p:nvSpPr>
-        <p:spPr>
-          <a:xfrm>
-            <a:off x="4114800" y="2304288"/>
-            <a:ext cx="4572000" cy="731520"/>
-          </a:xfrm>
-          <a:prstGeom prst="rect">
-            <a:avLst/>
-          </a:prstGeom>
-          <a:solidFill>
-            <a:srgbClr val="FFFFFF"/>
-          </a:solidFill>
-          <a:ln w="9525">
-            <a:solidFill>
-              <a:srgbClr val="DDE5E9"/>
-            </a:solidFill>
-            <a:prstDash val="solid"/>
-          </a:ln>
-        </p:spPr>
-        <p:txBody>
-          <a:bodyPr/>
-          <a:lstStyle/>
-          <a:p>
-            <a:endParaRPr lang="en-US"/>
-          </a:p>
-        </p:txBody>
-      </p:sp>
-      <p:sp>
-        <p:nvSpPr>
-          <p:cNvPr id="15" name="Shape 13"/>
-          <p:cNvSpPr/>
-          <p:nvPr/>
-        </p:nvSpPr>
-        <p:spPr>
-          <a:xfrm>
-            <a:off x="4114800" y="2304288"/>
-            <a:ext cx="64008" cy="731520"/>
-          </a:xfrm>
-          <a:prstGeom prst="rect">
-            <a:avLst/>
-          </a:prstGeom>
-          <a:solidFill>
-            <a:srgbClr val="1B9AAA"/>
-          </a:solidFill>
-          <a:ln/>
-        </p:spPr>
-        <p:txBody>
-          <a:bodyPr/>
-          <a:lstStyle/>
-          <a:p>
-            <a:endParaRPr lang="en-US"/>
-          </a:p>
-        </p:txBody>
-      </p:sp>
-      <p:sp>
-        <p:nvSpPr>
-          <p:cNvPr id="16" name="Text 14"/>
-          <p:cNvSpPr/>
-          <p:nvPr/>
-        </p:nvSpPr>
-        <p:spPr>
-          <a:xfrm>
-            <a:off x="4279392" y="2432304"/>
-            <a:ext cx="274320" cy="310896"/>
-          </a:xfrm>
-          <a:prstGeom prst="rect">
-            <a:avLst/>
-          </a:prstGeom>
-          <a:noFill/>
-          <a:ln/>
-        </p:spPr>
-        <p:txBody>
-          <a:bodyPr wrap="square" lIns="0" tIns="0" rIns="0" bIns="0" rtlCol="0" anchor="ctr"/>
-          <a:lstStyle/>
-          <a:p>
-            <a:pPr marL="0" indent="0">
-              <a:buNone/>
-            </a:pPr>
-            <a:r>
-              <a:rPr lang="en-US" sz="2000" dirty="0">
-                <a:solidFill>
-                  <a:srgbClr val="1B9AAA"/>
-                </a:solidFill>
-                <a:latin typeface="Oswald" pitchFamily="34" charset="0"/>
-                <a:ea typeface="Oswald" pitchFamily="34" charset="-122"/>
-                <a:cs typeface="Oswald" pitchFamily="34" charset="-120"/>
-              </a:rPr>
-              <a:t>+</a:t>
-            </a:r>
-            <a:endParaRPr lang="en-US" sz="2000" dirty="0"/>
-          </a:p>
-        </p:txBody>
-      </p:sp>
-      <p:sp>
-        <p:nvSpPr>
-          <p:cNvPr id="17" name="Text 15"/>
-          <p:cNvSpPr/>
-          <p:nvPr/>
-        </p:nvSpPr>
-        <p:spPr>
-          <a:xfrm>
-            <a:off x="4572000" y="2423160"/>
-            <a:ext cx="1463040" cy="292608"/>
-          </a:xfrm>
-          <a:prstGeom prst="rect">
-            <a:avLst/>
-          </a:prstGeom>
-          <a:noFill/>
-          <a:ln/>
-        </p:spPr>
-        <p:txBody>
-          <a:bodyPr wrap="square" lIns="0" tIns="0" rIns="0" bIns="0" rtlCol="0" anchor="ctr"/>
-          <a:lstStyle/>
-          <a:p>
-            <a:pPr marL="0" indent="0">
-              <a:buNone/>
-            </a:pPr>
-            <a:r>
-              <a:rPr lang="en-US" sz="1700" dirty="0">
-                <a:solidFill>
-                  <a:srgbClr val="0D1B2A"/>
-                </a:solidFill>
-                <a:latin typeface="Oswald" pitchFamily="34" charset="0"/>
-                <a:ea typeface="Oswald" pitchFamily="34" charset="-122"/>
-                <a:cs typeface="Oswald" pitchFamily="34" charset="-120"/>
-              </a:rPr>
-              <a:t>Instructions</a:t>
-            </a:r>
-            <a:endParaRPr lang="en-US" sz="1700" dirty="0"/>
-          </a:p>
-        </p:txBody>
-      </p:sp>
-      <p:sp>
-        <p:nvSpPr>
-          <p:cNvPr id="18" name="Text 16"/>
-          <p:cNvSpPr/>
-          <p:nvPr/>
-        </p:nvSpPr>
-        <p:spPr>
-          <a:xfrm>
-            <a:off x="6035040" y="2414016"/>
-            <a:ext cx="2514600" cy="548640"/>
-          </a:xfrm>
-          <a:prstGeom prst="rect">
-            <a:avLst/>
-          </a:prstGeom>
-          <a:noFill/>
-          <a:ln/>
-        </p:spPr>
-        <p:txBody>
-          <a:bodyPr wrap="square" lIns="0" tIns="0" rIns="0" bIns="0" rtlCol="0" anchor="ctr"/>
-          <a:lstStyle/>
-          <a:p>
-            <a:pPr marL="0" indent="0">
-              <a:buNone/>
-            </a:pPr>
-            <a:r>
-              <a:rPr lang="en-US" sz="950" dirty="0">
-                <a:solidFill>
-                  <a:srgbClr val="6B7B8C"/>
-                </a:solidFill>
-                <a:latin typeface="Roboto" pitchFamily="34" charset="0"/>
-                <a:ea typeface="Roboto" pitchFamily="34" charset="-122"/>
-                <a:cs typeface="Roboto" pitchFamily="34" charset="-120"/>
-              </a:rPr>
-              <a:t>Define the goals and behavior that steer actions toward the intended outcome.</a:t>
-            </a:r>
-            <a:endParaRPr lang="en-US" sz="950" dirty="0"/>
-          </a:p>
-        </p:txBody>
-      </p:sp>
-      <p:sp>
-        <p:nvSpPr>
-          <p:cNvPr id="19" name="Shape 17"/>
-          <p:cNvSpPr/>
-          <p:nvPr/>
-        </p:nvSpPr>
-        <p:spPr>
-          <a:xfrm>
-            <a:off x="4114800" y="3145536"/>
-            <a:ext cx="4572000" cy="731520"/>
-          </a:xfrm>
-          <a:prstGeom prst="rect">
-            <a:avLst/>
-          </a:prstGeom>
-          <a:solidFill>
-            <a:srgbClr val="FFFFFF"/>
-          </a:solidFill>
-          <a:ln w="9525">
-            <a:solidFill>
-              <a:srgbClr val="DDE5E9"/>
-            </a:solidFill>
-            <a:prstDash val="solid"/>
-          </a:ln>
-        </p:spPr>
-        <p:txBody>
-          <a:bodyPr/>
-          <a:lstStyle/>
-          <a:p>
-            <a:endParaRPr lang="en-US"/>
-          </a:p>
-        </p:txBody>
-      </p:sp>
-      <p:sp>
-        <p:nvSpPr>
-          <p:cNvPr id="20" name="Shape 18"/>
-          <p:cNvSpPr/>
-          <p:nvPr/>
-        </p:nvSpPr>
-        <p:spPr>
-          <a:xfrm>
-            <a:off x="4114800" y="3145536"/>
-            <a:ext cx="64008" cy="731520"/>
-          </a:xfrm>
-          <a:prstGeom prst="rect">
-            <a:avLst/>
-          </a:prstGeom>
-          <a:solidFill>
-            <a:srgbClr val="1B9AAA"/>
-          </a:solidFill>
-          <a:ln/>
-        </p:spPr>
-        <p:txBody>
-          <a:bodyPr/>
-          <a:lstStyle/>
-          <a:p>
-            <a:endParaRPr lang="en-US"/>
-          </a:p>
-        </p:txBody>
-      </p:sp>
-      <p:sp>
-        <p:nvSpPr>
-          <p:cNvPr id="21" name="Text 19"/>
-          <p:cNvSpPr/>
-          <p:nvPr/>
-        </p:nvSpPr>
-        <p:spPr>
-          <a:xfrm>
-            <a:off x="4279392" y="3273552"/>
-            <a:ext cx="274320" cy="310896"/>
-          </a:xfrm>
-          <a:prstGeom prst="rect">
-            <a:avLst/>
-          </a:prstGeom>
-          <a:noFill/>
-          <a:ln/>
-        </p:spPr>
-        <p:txBody>
-          <a:bodyPr wrap="square" lIns="0" tIns="0" rIns="0" bIns="0" rtlCol="0" anchor="ctr"/>
-          <a:lstStyle/>
-          <a:p>
-            <a:pPr marL="0" indent="0">
-              <a:buNone/>
-            </a:pPr>
-            <a:r>
-              <a:rPr lang="en-US" sz="2000" dirty="0">
-                <a:solidFill>
-                  <a:srgbClr val="1B9AAA"/>
-                </a:solidFill>
-                <a:latin typeface="Oswald" pitchFamily="34" charset="0"/>
-                <a:ea typeface="Oswald" pitchFamily="34" charset="-122"/>
-                <a:cs typeface="Oswald" pitchFamily="34" charset="-120"/>
-              </a:rPr>
-              <a:t>+</a:t>
-            </a:r>
-            <a:endParaRPr lang="en-US" sz="2000" dirty="0"/>
-          </a:p>
-        </p:txBody>
-      </p:sp>
-      <p:sp>
-        <p:nvSpPr>
-          <p:cNvPr id="22" name="Text 20"/>
-          <p:cNvSpPr/>
-          <p:nvPr/>
-        </p:nvSpPr>
-        <p:spPr>
-          <a:xfrm>
-            <a:off x="4572000" y="3264408"/>
-            <a:ext cx="1463040" cy="292608"/>
-          </a:xfrm>
-          <a:prstGeom prst="rect">
-            <a:avLst/>
-          </a:prstGeom>
-          <a:noFill/>
-          <a:ln/>
-        </p:spPr>
-        <p:txBody>
-          <a:bodyPr wrap="square" lIns="0" tIns="0" rIns="0" bIns="0" rtlCol="0" anchor="ctr"/>
-          <a:lstStyle/>
-          <a:p>
-            <a:pPr marL="0" indent="0">
-              <a:buNone/>
-            </a:pPr>
-            <a:r>
-              <a:rPr lang="en-US" sz="1700" dirty="0">
-                <a:solidFill>
-                  <a:srgbClr val="0D1B2A"/>
-                </a:solidFill>
-                <a:latin typeface="Oswald" pitchFamily="34" charset="0"/>
-                <a:ea typeface="Oswald" pitchFamily="34" charset="-122"/>
-                <a:cs typeface="Oswald" pitchFamily="34" charset="-120"/>
-              </a:rPr>
-              <a:t>Tools</a:t>
-            </a:r>
-            <a:endParaRPr lang="en-US" sz="1700" dirty="0"/>
-          </a:p>
-        </p:txBody>
-      </p:sp>
-      <p:sp>
-        <p:nvSpPr>
-          <p:cNvPr id="23" name="Text 21"/>
-          <p:cNvSpPr/>
-          <p:nvPr/>
-        </p:nvSpPr>
-        <p:spPr>
-          <a:xfrm>
-            <a:off x="6035040" y="3255264"/>
-            <a:ext cx="2514600" cy="548640"/>
-          </a:xfrm>
-          <a:prstGeom prst="rect">
-            <a:avLst/>
-          </a:prstGeom>
-          <a:noFill/>
-          <a:ln/>
-        </p:spPr>
-        <p:txBody>
-          <a:bodyPr wrap="square" lIns="0" tIns="0" rIns="0" bIns="0" rtlCol="0" anchor="ctr"/>
-          <a:lstStyle/>
-          <a:p>
-            <a:pPr marL="0" indent="0">
-              <a:buNone/>
-            </a:pPr>
-            <a:r>
-              <a:rPr lang="en-US" sz="950" dirty="0">
-                <a:solidFill>
-                  <a:srgbClr val="6B7B8C"/>
-                </a:solidFill>
-                <a:latin typeface="Roboto" pitchFamily="34" charset="0"/>
-                <a:ea typeface="Roboto" pitchFamily="34" charset="-122"/>
-                <a:cs typeface="Roboto" pitchFamily="34" charset="-120"/>
-              </a:rPr>
-              <a:t>Extend capability beyond the model: browsing, calling APIs, operating software.</a:t>
-            </a:r>
-            <a:endParaRPr lang="en-US" sz="950" dirty="0"/>
-          </a:p>
-        </p:txBody>
-      </p:sp>
-      <p:sp>
-        <p:nvSpPr>
-          <p:cNvPr id="24" name="Shape 22"/>
-          <p:cNvSpPr/>
-          <p:nvPr/>
-        </p:nvSpPr>
-        <p:spPr>
-          <a:xfrm>
-            <a:off x="4114800" y="3986784"/>
-            <a:ext cx="4572000" cy="731520"/>
-          </a:xfrm>
-          <a:prstGeom prst="rect">
-            <a:avLst/>
-          </a:prstGeom>
-          <a:solidFill>
-            <a:srgbClr val="FFFFFF"/>
-          </a:solidFill>
-          <a:ln w="9525">
-            <a:solidFill>
-              <a:srgbClr val="DDE5E9"/>
-            </a:solidFill>
-            <a:prstDash val="solid"/>
-          </a:ln>
-        </p:spPr>
-        <p:txBody>
-          <a:bodyPr/>
-          <a:lstStyle/>
-          <a:p>
-            <a:endParaRPr lang="en-US"/>
-          </a:p>
-        </p:txBody>
-      </p:sp>
-      <p:sp>
-        <p:nvSpPr>
-          <p:cNvPr id="25" name="Shape 23"/>
-          <p:cNvSpPr/>
-          <p:nvPr/>
-        </p:nvSpPr>
-        <p:spPr>
-          <a:xfrm>
-            <a:off x="4114800" y="3986784"/>
-            <a:ext cx="64008" cy="731520"/>
-          </a:xfrm>
-          <a:prstGeom prst="rect">
-            <a:avLst/>
-          </a:prstGeom>
-          <a:solidFill>
-            <a:srgbClr val="06D6A0"/>
-          </a:solidFill>
-          <a:ln/>
-        </p:spPr>
-        <p:txBody>
-          <a:bodyPr/>
-          <a:lstStyle/>
-          <a:p>
-            <a:endParaRPr lang="en-US"/>
-          </a:p>
-        </p:txBody>
-      </p:sp>
-      <p:sp>
-        <p:nvSpPr>
-          <p:cNvPr id="26" name="Text 24"/>
-          <p:cNvSpPr/>
-          <p:nvPr/>
-        </p:nvSpPr>
-        <p:spPr>
-          <a:xfrm>
-            <a:off x="4279392" y="4114800"/>
-            <a:ext cx="274320" cy="310896"/>
-          </a:xfrm>
-          <a:prstGeom prst="rect">
-            <a:avLst/>
-          </a:prstGeom>
-          <a:noFill/>
-          <a:ln/>
-        </p:spPr>
-        <p:txBody>
-          <a:bodyPr wrap="square" lIns="0" tIns="0" rIns="0" bIns="0" rtlCol="0" anchor="ctr"/>
-          <a:lstStyle/>
-          <a:p>
-            <a:pPr marL="0" indent="0">
-              <a:buNone/>
-            </a:pPr>
-            <a:r>
-              <a:rPr lang="en-US" sz="2000" dirty="0">
-                <a:solidFill>
-                  <a:srgbClr val="1B9AAA"/>
-                </a:solidFill>
-                <a:latin typeface="Oswald" pitchFamily="34" charset="0"/>
-                <a:ea typeface="Oswald" pitchFamily="34" charset="-122"/>
-                <a:cs typeface="Oswald" pitchFamily="34" charset="-120"/>
-              </a:rPr>
-              <a:t>+</a:t>
-            </a:r>
-            <a:endParaRPr lang="en-US" sz="2000" dirty="0"/>
-          </a:p>
-        </p:txBody>
-      </p:sp>
-      <p:sp>
-        <p:nvSpPr>
-          <p:cNvPr id="27" name="Text 25"/>
-          <p:cNvSpPr/>
-          <p:nvPr/>
-        </p:nvSpPr>
-        <p:spPr>
-          <a:xfrm>
-            <a:off x="4572000" y="4105656"/>
-            <a:ext cx="1463040" cy="292608"/>
-          </a:xfrm>
-          <a:prstGeom prst="rect">
-            <a:avLst/>
-          </a:prstGeom>
-          <a:noFill/>
-          <a:ln/>
-        </p:spPr>
-        <p:txBody>
-          <a:bodyPr wrap="square" lIns="0" tIns="0" rIns="0" bIns="0" rtlCol="0" anchor="ctr"/>
-          <a:lstStyle/>
-          <a:p>
-            <a:pPr marL="0" indent="0">
-              <a:buNone/>
-            </a:pPr>
-            <a:r>
-              <a:rPr lang="en-US" sz="1700" dirty="0">
-                <a:solidFill>
-                  <a:srgbClr val="0D1B2A"/>
-                </a:solidFill>
-                <a:latin typeface="Oswald" pitchFamily="34" charset="0"/>
-                <a:ea typeface="Oswald" pitchFamily="34" charset="-122"/>
-                <a:cs typeface="Oswald" pitchFamily="34" charset="-120"/>
-              </a:rPr>
-              <a:t>Runtime</a:t>
-            </a:r>
-            <a:endParaRPr lang="en-US" sz="1700" dirty="0"/>
-          </a:p>
-        </p:txBody>
-      </p:sp>
-      <p:sp>
-        <p:nvSpPr>
-          <p:cNvPr id="28" name="Text 26"/>
-          <p:cNvSpPr/>
-          <p:nvPr/>
-        </p:nvSpPr>
-        <p:spPr>
-          <a:xfrm>
-            <a:off x="6035040" y="4096512"/>
-            <a:ext cx="2514600" cy="548640"/>
-          </a:xfrm>
-          <a:prstGeom prst="rect">
-            <a:avLst/>
-          </a:prstGeom>
-          <a:noFill/>
-          <a:ln/>
-        </p:spPr>
-        <p:txBody>
-          <a:bodyPr wrap="square" lIns="0" tIns="0" rIns="0" bIns="0" rtlCol="0" anchor="ctr"/>
-          <a:lstStyle/>
-          <a:p>
-            <a:pPr marL="0" indent="0">
-              <a:buNone/>
-            </a:pPr>
-            <a:r>
-              <a:rPr lang="en-US" sz="950" dirty="0">
-                <a:solidFill>
-                  <a:srgbClr val="6B7B8C"/>
-                </a:solidFill>
-                <a:latin typeface="Roboto" pitchFamily="34" charset="0"/>
-                <a:ea typeface="Roboto" pitchFamily="34" charset="-122"/>
-                <a:cs typeface="Roboto" pitchFamily="34" charset="-120"/>
-              </a:rPr>
-              <a:t>Manages the execution loop — plan, act, observe, iterate toward the objective.</a:t>
-            </a:r>
-            <a:endParaRPr lang="en-US" sz="950" dirty="0"/>
-          </a:p>
-        </p:txBody>
-      </p:sp>
-    </p:spTree>
-  </p:cSld>
-  <p:clrMapOvr>
-    <a:masterClrMapping/>
-  </p:clrMapOvr>
-</p:sld>
-</file>
-
-<file path=ppt/slides/slide26.xml><?xml version="1.0" encoding="utf-8"?>
 <p:sld xmlns:a="http://schemas.openxmlformats.org/drawingml/2006/main" xmlns:r="http://schemas.openxmlformats.org/officeDocument/2006/relationships" xmlns:p="http://schemas.openxmlformats.org/presentationml/2006/main">
   <p:cSld name="Slide 5">
     <p:bg>
@@ -36460,7 +36573,7 @@
 </p:sld>
 </file>
 
-<file path=ppt/slides/slide27.xml><?xml version="1.0" encoding="utf-8"?>
+<file path=ppt/slides/slide26.xml><?xml version="1.0" encoding="utf-8"?>
 <p:sld xmlns:a="http://schemas.openxmlformats.org/drawingml/2006/main" xmlns:r="http://schemas.openxmlformats.org/officeDocument/2006/relationships" xmlns:p="http://schemas.openxmlformats.org/presentationml/2006/main">
   <p:cSld name="Slide 6">
     <p:bg>
@@ -37146,7 +37259,7 @@
 </p:sld>
 </file>
 
-<file path=ppt/slides/slide28.xml><?xml version="1.0" encoding="utf-8"?>
+<file path=ppt/slides/slide27.xml><?xml version="1.0" encoding="utf-8"?>
 <p:sld xmlns:a="http://schemas.openxmlformats.org/drawingml/2006/main" xmlns:r="http://schemas.openxmlformats.org/officeDocument/2006/relationships" xmlns:p="http://schemas.openxmlformats.org/presentationml/2006/main">
   <p:cSld name="Slide 7">
     <p:bg>
@@ -37994,7 +38107,7 @@
 </p:sld>
 </file>
 
-<file path=ppt/slides/slide29.xml><?xml version="1.0" encoding="utf-8"?>
+<file path=ppt/slides/slide28.xml><?xml version="1.0" encoding="utf-8"?>
 <p:sld xmlns:a="http://schemas.openxmlformats.org/drawingml/2006/main" xmlns:r="http://schemas.openxmlformats.org/officeDocument/2006/relationships" xmlns:p="http://schemas.openxmlformats.org/presentationml/2006/main">
   <p:cSld name="Slide 8">
     <p:bg>
@@ -38665,6 +38778,743 @@
                 <a:cs typeface="Roboto" pitchFamily="34" charset="-120"/>
               </a:rPr>
               <a:t>Unconditional. The engineer decides when to retrieve.</a:t>
+            </a:r>
+            <a:endParaRPr lang="en-US" sz="1050" dirty="0"/>
+          </a:p>
+        </p:txBody>
+      </p:sp>
+    </p:spTree>
+  </p:cSld>
+  <p:clrMapOvr>
+    <a:masterClrMapping/>
+  </p:clrMapOvr>
+</p:sld>
+</file>
+
+<file path=ppt/slides/slide29.xml><?xml version="1.0" encoding="utf-8"?>
+<p:sld xmlns:a="http://schemas.openxmlformats.org/drawingml/2006/main" xmlns:r="http://schemas.openxmlformats.org/officeDocument/2006/relationships" xmlns:p="http://schemas.openxmlformats.org/presentationml/2006/main">
+  <p:cSld name="Slide 9">
+    <p:bg>
+      <p:bgPr>
+        <a:solidFill>
+          <a:srgbClr val="F4F7F8"/>
+        </a:solidFill>
+        <a:effectLst/>
+      </p:bgPr>
+    </p:bg>
+    <p:spTree>
+      <p:nvGrpSpPr>
+        <p:cNvPr id="1" name=""/>
+        <p:cNvGrpSpPr/>
+        <p:nvPr/>
+      </p:nvGrpSpPr>
+      <p:grpSpPr>
+        <a:xfrm>
+          <a:off x="0" y="0"/>
+          <a:ext cx="0" cy="0"/>
+          <a:chOff x="0" y="0"/>
+          <a:chExt cx="0" cy="0"/>
+        </a:xfrm>
+      </p:grpSpPr>
+      <p:sp>
+        <p:nvSpPr>
+          <p:cNvPr id="2" name="Shape 0"/>
+          <p:cNvSpPr/>
+          <p:nvPr/>
+        </p:nvSpPr>
+        <p:spPr>
+          <a:xfrm>
+            <a:off x="0" y="0"/>
+            <a:ext cx="201168" cy="5143500"/>
+          </a:xfrm>
+          <a:prstGeom prst="rect">
+            <a:avLst/>
+          </a:prstGeom>
+          <a:solidFill>
+            <a:srgbClr val="0D1B2A"/>
+          </a:solidFill>
+          <a:ln/>
+        </p:spPr>
+        <p:txBody>
+          <a:bodyPr/>
+          <a:lstStyle/>
+          <a:p>
+            <a:endParaRPr lang="en-US"/>
+          </a:p>
+        </p:txBody>
+      </p:sp>
+      <p:sp>
+        <p:nvSpPr>
+          <p:cNvPr id="3" name="Text 1"/>
+          <p:cNvSpPr/>
+          <p:nvPr/>
+        </p:nvSpPr>
+        <p:spPr>
+          <a:xfrm>
+            <a:off x="566928" y="329184"/>
+            <a:ext cx="8138160" cy="256032"/>
+          </a:xfrm>
+          <a:prstGeom prst="rect">
+            <a:avLst/>
+          </a:prstGeom>
+          <a:noFill/>
+          <a:ln/>
+        </p:spPr>
+        <p:txBody>
+          <a:bodyPr wrap="square" lIns="0" tIns="0" rIns="0" bIns="0" rtlCol="0" anchor="ctr"/>
+          <a:lstStyle/>
+          <a:p>
+            <a:pPr marL="0" indent="0">
+              <a:buNone/>
+            </a:pPr>
+            <a:r>
+              <a:rPr lang="en-US" sz="1050" kern="0" spc="200" dirty="0">
+                <a:solidFill>
+                  <a:srgbClr val="1B9AAA"/>
+                </a:solidFill>
+                <a:latin typeface="JetBrains Mono" pitchFamily="34" charset="0"/>
+                <a:ea typeface="JetBrains Mono" pitchFamily="34" charset="-122"/>
+                <a:cs typeface="JetBrains Mono" pitchFamily="34" charset="-120"/>
+              </a:rPr>
+              <a:t>2021–2023 · TOOL USE</a:t>
+            </a:r>
+            <a:endParaRPr lang="en-US" sz="1050" dirty="0"/>
+          </a:p>
+        </p:txBody>
+      </p:sp>
+      <p:sp>
+        <p:nvSpPr>
+          <p:cNvPr id="4" name="Text 2"/>
+          <p:cNvSpPr/>
+          <p:nvPr/>
+        </p:nvSpPr>
+        <p:spPr>
+          <a:xfrm>
+            <a:off x="566928" y="603504"/>
+            <a:ext cx="8138160" cy="658368"/>
+          </a:xfrm>
+          <a:prstGeom prst="rect">
+            <a:avLst/>
+          </a:prstGeom>
+          <a:noFill/>
+          <a:ln/>
+        </p:spPr>
+        <p:txBody>
+          <a:bodyPr wrap="square" lIns="0" tIns="0" rIns="0" bIns="0" rtlCol="0" anchor="ctr"/>
+          <a:lstStyle/>
+          <a:p>
+            <a:pPr marL="0" indent="0">
+              <a:buNone/>
+            </a:pPr>
+            <a:r>
+              <a:rPr lang="en-US" sz="3200" dirty="0">
+                <a:solidFill>
+                  <a:srgbClr val="0D1B2A"/>
+                </a:solidFill>
+                <a:latin typeface="Oswald" pitchFamily="34" charset="0"/>
+                <a:ea typeface="Oswald" pitchFamily="34" charset="-122"/>
+                <a:cs typeface="Oswald" pitchFamily="34" charset="-120"/>
+              </a:rPr>
+              <a:t>From knowledge to capability</a:t>
+            </a:r>
+            <a:endParaRPr lang="en-US" sz="3200" dirty="0"/>
+          </a:p>
+        </p:txBody>
+      </p:sp>
+      <p:sp>
+        <p:nvSpPr>
+          <p:cNvPr id="5" name="Text 3"/>
+          <p:cNvSpPr/>
+          <p:nvPr/>
+        </p:nvSpPr>
+        <p:spPr>
+          <a:xfrm>
+            <a:off x="566928" y="1389888"/>
+            <a:ext cx="8138160" cy="457200"/>
+          </a:xfrm>
+          <a:prstGeom prst="rect">
+            <a:avLst/>
+          </a:prstGeom>
+          <a:noFill/>
+          <a:ln/>
+        </p:spPr>
+        <p:txBody>
+          <a:bodyPr wrap="square" lIns="0" tIns="0" rIns="0" bIns="0" rtlCol="0" anchor="ctr"/>
+          <a:lstStyle/>
+          <a:p>
+            <a:pPr marL="0" indent="0">
+              <a:buNone/>
+            </a:pPr>
+            <a:r>
+              <a:rPr lang="en-US" sz="1400" dirty="0">
+                <a:solidFill>
+                  <a:srgbClr val="14293D"/>
+                </a:solidFill>
+                <a:latin typeface="Roboto" pitchFamily="34" charset="0"/>
+                <a:ea typeface="Roboto" pitchFamily="34" charset="-122"/>
+                <a:cs typeface="Roboto" pitchFamily="34" charset="-120"/>
+              </a:rPr>
+              <a:t>A control-flow answer to an action problem: let the model decide when to reach outside itself — and let it reach for anything, not just documents.</a:t>
+            </a:r>
+            <a:endParaRPr lang="en-US" sz="1400" dirty="0"/>
+          </a:p>
+        </p:txBody>
+      </p:sp>
+      <p:sp>
+        <p:nvSpPr>
+          <p:cNvPr id="6" name="Shape 4"/>
+          <p:cNvSpPr/>
+          <p:nvPr/>
+        </p:nvSpPr>
+        <p:spPr>
+          <a:xfrm>
+            <a:off x="566928" y="2011680"/>
+            <a:ext cx="3931920" cy="2514600"/>
+          </a:xfrm>
+          <a:prstGeom prst="rect">
+            <a:avLst/>
+          </a:prstGeom>
+          <a:solidFill>
+            <a:srgbClr val="FFFFFF"/>
+          </a:solidFill>
+          <a:ln w="9525">
+            <a:solidFill>
+              <a:srgbClr val="DDE5E9"/>
+            </a:solidFill>
+            <a:prstDash val="solid"/>
+          </a:ln>
+        </p:spPr>
+        <p:txBody>
+          <a:bodyPr/>
+          <a:lstStyle/>
+          <a:p>
+            <a:endParaRPr lang="en-US"/>
+          </a:p>
+        </p:txBody>
+      </p:sp>
+      <p:sp>
+        <p:nvSpPr>
+          <p:cNvPr id="7" name="Text 5"/>
+          <p:cNvSpPr/>
+          <p:nvPr/>
+        </p:nvSpPr>
+        <p:spPr>
+          <a:xfrm>
+            <a:off x="822960" y="2212848"/>
+            <a:ext cx="3474720" cy="274320"/>
+          </a:xfrm>
+          <a:prstGeom prst="rect">
+            <a:avLst/>
+          </a:prstGeom>
+          <a:noFill/>
+          <a:ln/>
+        </p:spPr>
+        <p:txBody>
+          <a:bodyPr wrap="square" lIns="0" tIns="0" rIns="0" bIns="0" rtlCol="0" anchor="ctr"/>
+          <a:lstStyle/>
+          <a:p>
+            <a:pPr marL="0" indent="0">
+              <a:buNone/>
+            </a:pPr>
+            <a:r>
+              <a:rPr lang="en-US" sz="1600" dirty="0">
+                <a:solidFill>
+                  <a:srgbClr val="0D1B2A"/>
+                </a:solidFill>
+                <a:latin typeface="Oswald" pitchFamily="34" charset="0"/>
+                <a:ea typeface="Oswald" pitchFamily="34" charset="-122"/>
+                <a:cs typeface="Oswald" pitchFamily="34" charset="-120"/>
+              </a:rPr>
+              <a:t>What it unlocks</a:t>
+            </a:r>
+            <a:endParaRPr lang="en-US" sz="1600" dirty="0"/>
+          </a:p>
+        </p:txBody>
+      </p:sp>
+      <p:sp>
+        <p:nvSpPr>
+          <p:cNvPr id="8" name="Text 6"/>
+          <p:cNvSpPr/>
+          <p:nvPr/>
+        </p:nvSpPr>
+        <p:spPr>
+          <a:xfrm>
+            <a:off x="822960" y="2578608"/>
+            <a:ext cx="3474720" cy="1783080"/>
+          </a:xfrm>
+          <a:prstGeom prst="rect">
+            <a:avLst/>
+          </a:prstGeom>
+          <a:noFill/>
+          <a:ln/>
+        </p:spPr>
+        <p:txBody>
+          <a:bodyPr wrap="square" rtlCol="0" anchor="ctr"/>
+          <a:lstStyle/>
+          <a:p>
+            <a:pPr marL="342900" indent="-342900">
+              <a:spcAft>
+                <a:spcPts val="700"/>
+              </a:spcAft>
+              <a:buSzPct val="100000"/>
+              <a:buChar char="•"/>
+            </a:pPr>
+            <a:r>
+              <a:rPr lang="en-US" sz="1250" dirty="0">
+                <a:solidFill>
+                  <a:srgbClr val="14293D"/>
+                </a:solidFill>
+                <a:latin typeface="Roboto" pitchFamily="34" charset="0"/>
+                <a:ea typeface="Roboto" pitchFamily="34" charset="-122"/>
+                <a:cs typeface="Roboto" pitchFamily="34" charset="-120"/>
+              </a:rPr>
+              <a:t>Deterministic computation, done deterministically</a:t>
+            </a:r>
+            <a:endParaRPr lang="en-US" sz="1250" dirty="0"/>
+          </a:p>
+          <a:p>
+            <a:pPr marL="342900" indent="-342900">
+              <a:spcAft>
+                <a:spcPts val="700"/>
+              </a:spcAft>
+              <a:buSzPct val="100000"/>
+              <a:buChar char="•"/>
+            </a:pPr>
+            <a:r>
+              <a:rPr lang="en-US" sz="1250" dirty="0">
+                <a:solidFill>
+                  <a:srgbClr val="14293D"/>
+                </a:solidFill>
+                <a:latin typeface="Roboto" pitchFamily="34" charset="0"/>
+                <a:ea typeface="Roboto" pitchFamily="34" charset="-122"/>
+                <a:cs typeface="Roboto" pitchFamily="34" charset="-120"/>
+              </a:rPr>
+              <a:t>Reads from systems of record</a:t>
+            </a:r>
+            <a:endParaRPr lang="en-US" sz="1250" dirty="0"/>
+          </a:p>
+          <a:p>
+            <a:pPr marL="342900" indent="-342900">
+              <a:spcAft>
+                <a:spcPts val="700"/>
+              </a:spcAft>
+              <a:buSzPct val="100000"/>
+              <a:buChar char="•"/>
+            </a:pPr>
+            <a:r>
+              <a:rPr lang="en-US" sz="1250" dirty="0">
+                <a:solidFill>
+                  <a:srgbClr val="14293D"/>
+                </a:solidFill>
+                <a:latin typeface="Roboto" pitchFamily="34" charset="0"/>
+                <a:ea typeface="Roboto" pitchFamily="34" charset="-122"/>
+                <a:cs typeface="Roboto" pitchFamily="34" charset="-120"/>
+              </a:rPr>
+              <a:t>Side effects — writes, sends, bookings</a:t>
+            </a:r>
+            <a:endParaRPr lang="en-US" sz="1250" dirty="0"/>
+          </a:p>
+          <a:p>
+            <a:pPr marL="342900" indent="-342900">
+              <a:spcAft>
+                <a:spcPts val="700"/>
+              </a:spcAft>
+              <a:buSzPct val="100000"/>
+              <a:buChar char="•"/>
+            </a:pPr>
+            <a:r>
+              <a:rPr lang="en-US" sz="1250" dirty="0">
+                <a:solidFill>
+                  <a:srgbClr val="14293D"/>
+                </a:solidFill>
+                <a:latin typeface="Roboto" pitchFamily="34" charset="0"/>
+                <a:ea typeface="Roboto" pitchFamily="34" charset="-122"/>
+                <a:cs typeface="Roboto" pitchFamily="34" charset="-120"/>
+              </a:rPr>
+              <a:t>Loggable, permissioned, auditable actions</a:t>
+            </a:r>
+            <a:endParaRPr lang="en-US" sz="1250" dirty="0"/>
+          </a:p>
+        </p:txBody>
+      </p:sp>
+      <p:sp>
+        <p:nvSpPr>
+          <p:cNvPr id="9" name="Shape 7"/>
+          <p:cNvSpPr/>
+          <p:nvPr/>
+        </p:nvSpPr>
+        <p:spPr>
+          <a:xfrm>
+            <a:off x="4754880" y="2011680"/>
+            <a:ext cx="3840480" cy="2514600"/>
+          </a:xfrm>
+          <a:prstGeom prst="rect">
+            <a:avLst/>
+          </a:prstGeom>
+          <a:solidFill>
+            <a:srgbClr val="FFFFFF"/>
+          </a:solidFill>
+          <a:ln w="9525">
+            <a:solidFill>
+              <a:srgbClr val="DDE5E9"/>
+            </a:solidFill>
+            <a:prstDash val="solid"/>
+          </a:ln>
+        </p:spPr>
+        <p:txBody>
+          <a:bodyPr/>
+          <a:lstStyle/>
+          <a:p>
+            <a:endParaRPr lang="en-US"/>
+          </a:p>
+        </p:txBody>
+      </p:sp>
+      <p:sp>
+        <p:nvSpPr>
+          <p:cNvPr id="10" name="Text 8"/>
+          <p:cNvSpPr/>
+          <p:nvPr/>
+        </p:nvSpPr>
+        <p:spPr>
+          <a:xfrm>
+            <a:off x="5010912" y="2212848"/>
+            <a:ext cx="3383280" cy="274320"/>
+          </a:xfrm>
+          <a:prstGeom prst="rect">
+            <a:avLst/>
+          </a:prstGeom>
+          <a:noFill/>
+          <a:ln/>
+        </p:spPr>
+        <p:txBody>
+          <a:bodyPr wrap="square" lIns="0" tIns="0" rIns="0" bIns="0" rtlCol="0" anchor="ctr"/>
+          <a:lstStyle/>
+          <a:p>
+            <a:pPr marL="0" indent="0">
+              <a:buNone/>
+            </a:pPr>
+            <a:r>
+              <a:rPr lang="en-US" sz="1600" dirty="0">
+                <a:solidFill>
+                  <a:srgbClr val="0D1B2A"/>
+                </a:solidFill>
+                <a:latin typeface="Oswald" pitchFamily="34" charset="0"/>
+                <a:ea typeface="Oswald" pitchFamily="34" charset="-122"/>
+                <a:cs typeface="Oswald" pitchFamily="34" charset="-120"/>
+              </a:rPr>
+              <a:t>Naming it</a:t>
+            </a:r>
+            <a:endParaRPr lang="en-US" sz="1600" dirty="0"/>
+          </a:p>
+        </p:txBody>
+      </p:sp>
+      <p:sp>
+        <p:nvSpPr>
+          <p:cNvPr id="11" name="Text 9"/>
+          <p:cNvSpPr/>
+          <p:nvPr/>
+        </p:nvSpPr>
+        <p:spPr>
+          <a:xfrm>
+            <a:off x="5010912" y="2606040"/>
+            <a:ext cx="1874520" cy="274320"/>
+          </a:xfrm>
+          <a:prstGeom prst="rect">
+            <a:avLst/>
+          </a:prstGeom>
+          <a:noFill/>
+          <a:ln/>
+        </p:spPr>
+        <p:txBody>
+          <a:bodyPr wrap="square" lIns="0" tIns="0" rIns="0" bIns="0" rtlCol="0" anchor="ctr"/>
+          <a:lstStyle/>
+          <a:p>
+            <a:pPr marL="0" indent="0">
+              <a:buNone/>
+            </a:pPr>
+            <a:r>
+              <a:rPr lang="en-US" sz="1100" dirty="0">
+                <a:solidFill>
+                  <a:srgbClr val="1B9AAA"/>
+                </a:solidFill>
+                <a:latin typeface="JetBrains Mono" pitchFamily="34" charset="0"/>
+                <a:ea typeface="JetBrains Mono" pitchFamily="34" charset="-122"/>
+                <a:cs typeface="JetBrains Mono" pitchFamily="34" charset="-120"/>
+              </a:rPr>
+              <a:t>tool use / tool calling</a:t>
+            </a:r>
+            <a:endParaRPr lang="en-US" sz="1100" dirty="0"/>
+          </a:p>
+        </p:txBody>
+      </p:sp>
+      <p:sp>
+        <p:nvSpPr>
+          <p:cNvPr id="12" name="Text 10"/>
+          <p:cNvSpPr/>
+          <p:nvPr/>
+        </p:nvSpPr>
+        <p:spPr>
+          <a:xfrm>
+            <a:off x="6903720" y="2606040"/>
+            <a:ext cx="1600200" cy="384048"/>
+          </a:xfrm>
+          <a:prstGeom prst="rect">
+            <a:avLst/>
+          </a:prstGeom>
+          <a:noFill/>
+          <a:ln/>
+        </p:spPr>
+        <p:txBody>
+          <a:bodyPr wrap="square" lIns="0" tIns="0" rIns="0" bIns="0" rtlCol="0" anchor="ctr"/>
+          <a:lstStyle/>
+          <a:p>
+            <a:pPr marL="0" indent="0">
+              <a:buNone/>
+            </a:pPr>
+            <a:r>
+              <a:rPr lang="en-US" sz="1050" dirty="0">
+                <a:solidFill>
+                  <a:srgbClr val="6B7B8C"/>
+                </a:solidFill>
+                <a:latin typeface="Roboto" pitchFamily="34" charset="0"/>
+                <a:ea typeface="Roboto" pitchFamily="34" charset="-122"/>
+                <a:cs typeface="Roboto" pitchFamily="34" charset="-120"/>
+              </a:rPr>
+              <a:t>the category term — use this</a:t>
+            </a:r>
+            <a:endParaRPr lang="en-US" sz="1050" dirty="0"/>
+          </a:p>
+        </p:txBody>
+      </p:sp>
+      <p:sp>
+        <p:nvSpPr>
+          <p:cNvPr id="13" name="Text 11"/>
+          <p:cNvSpPr/>
+          <p:nvPr/>
+        </p:nvSpPr>
+        <p:spPr>
+          <a:xfrm>
+            <a:off x="5010912" y="3063240"/>
+            <a:ext cx="1874520" cy="274320"/>
+          </a:xfrm>
+          <a:prstGeom prst="rect">
+            <a:avLst/>
+          </a:prstGeom>
+          <a:noFill/>
+          <a:ln/>
+        </p:spPr>
+        <p:txBody>
+          <a:bodyPr wrap="square" lIns="0" tIns="0" rIns="0" bIns="0" rtlCol="0" anchor="ctr"/>
+          <a:lstStyle/>
+          <a:p>
+            <a:pPr marL="0" indent="0">
+              <a:buNone/>
+            </a:pPr>
+            <a:r>
+              <a:rPr lang="en-US" sz="1100" dirty="0">
+                <a:solidFill>
+                  <a:srgbClr val="0D1B2A"/>
+                </a:solidFill>
+                <a:latin typeface="JetBrains Mono" pitchFamily="34" charset="0"/>
+                <a:ea typeface="JetBrains Mono" pitchFamily="34" charset="-122"/>
+                <a:cs typeface="JetBrains Mono" pitchFamily="34" charset="-120"/>
+              </a:rPr>
+              <a:t>function calling</a:t>
+            </a:r>
+            <a:endParaRPr lang="en-US" sz="1100" dirty="0"/>
+          </a:p>
+        </p:txBody>
+      </p:sp>
+      <p:sp>
+        <p:nvSpPr>
+          <p:cNvPr id="14" name="Text 12"/>
+          <p:cNvSpPr/>
+          <p:nvPr/>
+        </p:nvSpPr>
+        <p:spPr>
+          <a:xfrm>
+            <a:off x="6903720" y="3063240"/>
+            <a:ext cx="1600200" cy="384048"/>
+          </a:xfrm>
+          <a:prstGeom prst="rect">
+            <a:avLst/>
+          </a:prstGeom>
+          <a:noFill/>
+          <a:ln/>
+        </p:spPr>
+        <p:txBody>
+          <a:bodyPr wrap="square" lIns="0" tIns="0" rIns="0" bIns="0" rtlCol="0" anchor="ctr"/>
+          <a:lstStyle/>
+          <a:p>
+            <a:pPr marL="0" indent="0">
+              <a:buNone/>
+            </a:pPr>
+            <a:r>
+              <a:rPr lang="en-US" sz="1050" dirty="0">
+                <a:solidFill>
+                  <a:srgbClr val="6B7B8C"/>
+                </a:solidFill>
+                <a:latin typeface="Roboto" pitchFamily="34" charset="0"/>
+                <a:ea typeface="Roboto" pitchFamily="34" charset="-122"/>
+                <a:cs typeface="Roboto" pitchFamily="34" charset="-120"/>
+              </a:rPr>
+              <a:t>the concrete API mechanism</a:t>
+            </a:r>
+            <a:endParaRPr lang="en-US" sz="1050" dirty="0"/>
+          </a:p>
+        </p:txBody>
+      </p:sp>
+      <p:sp>
+        <p:nvSpPr>
+          <p:cNvPr id="15" name="Text 13"/>
+          <p:cNvSpPr/>
+          <p:nvPr/>
+        </p:nvSpPr>
+        <p:spPr>
+          <a:xfrm>
+            <a:off x="5010912" y="3520440"/>
+            <a:ext cx="1874520" cy="274320"/>
+          </a:xfrm>
+          <a:prstGeom prst="rect">
+            <a:avLst/>
+          </a:prstGeom>
+          <a:noFill/>
+          <a:ln/>
+        </p:spPr>
+        <p:txBody>
+          <a:bodyPr wrap="square" lIns="0" tIns="0" rIns="0" bIns="0" rtlCol="0" anchor="ctr"/>
+          <a:lstStyle/>
+          <a:p>
+            <a:pPr marL="0" indent="0">
+              <a:buNone/>
+            </a:pPr>
+            <a:r>
+              <a:rPr lang="en-US" sz="1100" dirty="0">
+                <a:solidFill>
+                  <a:srgbClr val="0D1B2A"/>
+                </a:solidFill>
+                <a:latin typeface="JetBrains Mono" pitchFamily="34" charset="0"/>
+                <a:ea typeface="JetBrains Mono" pitchFamily="34" charset="-122"/>
+                <a:cs typeface="JetBrains Mono" pitchFamily="34" charset="-120"/>
+              </a:rPr>
+              <a:t>tool-augmented LLMs</a:t>
+            </a:r>
+            <a:endParaRPr lang="en-US" sz="1100" dirty="0"/>
+          </a:p>
+        </p:txBody>
+      </p:sp>
+      <p:sp>
+        <p:nvSpPr>
+          <p:cNvPr id="16" name="Text 14"/>
+          <p:cNvSpPr/>
+          <p:nvPr/>
+        </p:nvSpPr>
+        <p:spPr>
+          <a:xfrm>
+            <a:off x="6903720" y="3520440"/>
+            <a:ext cx="1600200" cy="384048"/>
+          </a:xfrm>
+          <a:prstGeom prst="rect">
+            <a:avLst/>
+          </a:prstGeom>
+          <a:noFill/>
+          <a:ln/>
+        </p:spPr>
+        <p:txBody>
+          <a:bodyPr wrap="square" lIns="0" tIns="0" rIns="0" bIns="0" rtlCol="0" anchor="ctr"/>
+          <a:lstStyle/>
+          <a:p>
+            <a:pPr marL="0" indent="0">
+              <a:buNone/>
+            </a:pPr>
+            <a:r>
+              <a:rPr lang="en-US" sz="1050" dirty="0">
+                <a:solidFill>
+                  <a:srgbClr val="6B7B8C"/>
+                </a:solidFill>
+                <a:latin typeface="Roboto" pitchFamily="34" charset="0"/>
+                <a:ea typeface="Roboto" pitchFamily="34" charset="-122"/>
+                <a:cs typeface="Roboto" pitchFamily="34" charset="-120"/>
+              </a:rPr>
+              <a:t>the academic register</a:t>
+            </a:r>
+            <a:endParaRPr lang="en-US" sz="1050" dirty="0"/>
+          </a:p>
+        </p:txBody>
+      </p:sp>
+      <p:sp>
+        <p:nvSpPr>
+          <p:cNvPr id="17" name="Text 15"/>
+          <p:cNvSpPr/>
+          <p:nvPr/>
+        </p:nvSpPr>
+        <p:spPr>
+          <a:xfrm>
+            <a:off x="5010912" y="3977640"/>
+            <a:ext cx="1874520" cy="274320"/>
+          </a:xfrm>
+          <a:prstGeom prst="rect">
+            <a:avLst/>
+          </a:prstGeom>
+          <a:noFill/>
+          <a:ln/>
+        </p:spPr>
+        <p:txBody>
+          <a:bodyPr wrap="square" lIns="0" tIns="0" rIns="0" bIns="0" rtlCol="0" anchor="ctr"/>
+          <a:lstStyle/>
+          <a:p>
+            <a:pPr marL="0" indent="0">
+              <a:buNone/>
+            </a:pPr>
+            <a:r>
+              <a:rPr lang="en-US" sz="1100" dirty="0">
+                <a:solidFill>
+                  <a:srgbClr val="0D1B2A"/>
+                </a:solidFill>
+                <a:latin typeface="JetBrains Mono" pitchFamily="34" charset="0"/>
+                <a:ea typeface="JetBrains Mono" pitchFamily="34" charset="-122"/>
+                <a:cs typeface="JetBrains Mono" pitchFamily="34" charset="-120"/>
+              </a:rPr>
+              <a:t>grounding</a:t>
+            </a:r>
+            <a:endParaRPr lang="en-US" sz="1100" dirty="0"/>
+          </a:p>
+        </p:txBody>
+      </p:sp>
+      <p:sp>
+        <p:nvSpPr>
+          <p:cNvPr id="18" name="Text 16"/>
+          <p:cNvSpPr/>
+          <p:nvPr/>
+        </p:nvSpPr>
+        <p:spPr>
+          <a:xfrm>
+            <a:off x="6903720" y="3977640"/>
+            <a:ext cx="1600200" cy="384048"/>
+          </a:xfrm>
+          <a:prstGeom prst="rect">
+            <a:avLst/>
+          </a:prstGeom>
+          <a:noFill/>
+          <a:ln/>
+        </p:spPr>
+        <p:txBody>
+          <a:bodyPr wrap="square" lIns="0" tIns="0" rIns="0" bIns="0" rtlCol="0" anchor="ctr"/>
+          <a:lstStyle/>
+          <a:p>
+            <a:pPr marL="0" indent="0">
+              <a:buNone/>
+            </a:pPr>
+            <a:r>
+              <a:rPr lang="en-US" sz="1050" dirty="0">
+                <a:solidFill>
+                  <a:srgbClr val="6B7B8C"/>
+                </a:solidFill>
+                <a:latin typeface="Roboto" pitchFamily="34" charset="0"/>
+                <a:ea typeface="Roboto" pitchFamily="34" charset="-122"/>
+                <a:cs typeface="Roboto" pitchFamily="34" charset="-120"/>
+              </a:rPr>
+              <a:t>tying output to external state</a:t>
             </a:r>
             <a:endParaRPr lang="en-US" sz="1050" dirty="0"/>
           </a:p>
@@ -39903,743 +40753,6 @@
 
 <file path=ppt/slides/slide30.xml><?xml version="1.0" encoding="utf-8"?>
 <p:sld xmlns:a="http://schemas.openxmlformats.org/drawingml/2006/main" xmlns:r="http://schemas.openxmlformats.org/officeDocument/2006/relationships" xmlns:p="http://schemas.openxmlformats.org/presentationml/2006/main">
-  <p:cSld name="Slide 9">
-    <p:bg>
-      <p:bgPr>
-        <a:solidFill>
-          <a:srgbClr val="F4F7F8"/>
-        </a:solidFill>
-        <a:effectLst/>
-      </p:bgPr>
-    </p:bg>
-    <p:spTree>
-      <p:nvGrpSpPr>
-        <p:cNvPr id="1" name=""/>
-        <p:cNvGrpSpPr/>
-        <p:nvPr/>
-      </p:nvGrpSpPr>
-      <p:grpSpPr>
-        <a:xfrm>
-          <a:off x="0" y="0"/>
-          <a:ext cx="0" cy="0"/>
-          <a:chOff x="0" y="0"/>
-          <a:chExt cx="0" cy="0"/>
-        </a:xfrm>
-      </p:grpSpPr>
-      <p:sp>
-        <p:nvSpPr>
-          <p:cNvPr id="2" name="Shape 0"/>
-          <p:cNvSpPr/>
-          <p:nvPr/>
-        </p:nvSpPr>
-        <p:spPr>
-          <a:xfrm>
-            <a:off x="0" y="0"/>
-            <a:ext cx="201168" cy="5143500"/>
-          </a:xfrm>
-          <a:prstGeom prst="rect">
-            <a:avLst/>
-          </a:prstGeom>
-          <a:solidFill>
-            <a:srgbClr val="0D1B2A"/>
-          </a:solidFill>
-          <a:ln/>
-        </p:spPr>
-        <p:txBody>
-          <a:bodyPr/>
-          <a:lstStyle/>
-          <a:p>
-            <a:endParaRPr lang="en-US"/>
-          </a:p>
-        </p:txBody>
-      </p:sp>
-      <p:sp>
-        <p:nvSpPr>
-          <p:cNvPr id="3" name="Text 1"/>
-          <p:cNvSpPr/>
-          <p:nvPr/>
-        </p:nvSpPr>
-        <p:spPr>
-          <a:xfrm>
-            <a:off x="566928" y="329184"/>
-            <a:ext cx="8138160" cy="256032"/>
-          </a:xfrm>
-          <a:prstGeom prst="rect">
-            <a:avLst/>
-          </a:prstGeom>
-          <a:noFill/>
-          <a:ln/>
-        </p:spPr>
-        <p:txBody>
-          <a:bodyPr wrap="square" lIns="0" tIns="0" rIns="0" bIns="0" rtlCol="0" anchor="ctr"/>
-          <a:lstStyle/>
-          <a:p>
-            <a:pPr marL="0" indent="0">
-              <a:buNone/>
-            </a:pPr>
-            <a:r>
-              <a:rPr lang="en-US" sz="1050" kern="0" spc="200" dirty="0">
-                <a:solidFill>
-                  <a:srgbClr val="1B9AAA"/>
-                </a:solidFill>
-                <a:latin typeface="JetBrains Mono" pitchFamily="34" charset="0"/>
-                <a:ea typeface="JetBrains Mono" pitchFamily="34" charset="-122"/>
-                <a:cs typeface="JetBrains Mono" pitchFamily="34" charset="-120"/>
-              </a:rPr>
-              <a:t>2021–2023 · TOOL USE</a:t>
-            </a:r>
-            <a:endParaRPr lang="en-US" sz="1050" dirty="0"/>
-          </a:p>
-        </p:txBody>
-      </p:sp>
-      <p:sp>
-        <p:nvSpPr>
-          <p:cNvPr id="4" name="Text 2"/>
-          <p:cNvSpPr/>
-          <p:nvPr/>
-        </p:nvSpPr>
-        <p:spPr>
-          <a:xfrm>
-            <a:off x="566928" y="603504"/>
-            <a:ext cx="8138160" cy="658368"/>
-          </a:xfrm>
-          <a:prstGeom prst="rect">
-            <a:avLst/>
-          </a:prstGeom>
-          <a:noFill/>
-          <a:ln/>
-        </p:spPr>
-        <p:txBody>
-          <a:bodyPr wrap="square" lIns="0" tIns="0" rIns="0" bIns="0" rtlCol="0" anchor="ctr"/>
-          <a:lstStyle/>
-          <a:p>
-            <a:pPr marL="0" indent="0">
-              <a:buNone/>
-            </a:pPr>
-            <a:r>
-              <a:rPr lang="en-US" sz="3200" dirty="0">
-                <a:solidFill>
-                  <a:srgbClr val="0D1B2A"/>
-                </a:solidFill>
-                <a:latin typeface="Oswald" pitchFamily="34" charset="0"/>
-                <a:ea typeface="Oswald" pitchFamily="34" charset="-122"/>
-                <a:cs typeface="Oswald" pitchFamily="34" charset="-120"/>
-              </a:rPr>
-              <a:t>From knowledge to capability</a:t>
-            </a:r>
-            <a:endParaRPr lang="en-US" sz="3200" dirty="0"/>
-          </a:p>
-        </p:txBody>
-      </p:sp>
-      <p:sp>
-        <p:nvSpPr>
-          <p:cNvPr id="5" name="Text 3"/>
-          <p:cNvSpPr/>
-          <p:nvPr/>
-        </p:nvSpPr>
-        <p:spPr>
-          <a:xfrm>
-            <a:off x="566928" y="1389888"/>
-            <a:ext cx="8138160" cy="457200"/>
-          </a:xfrm>
-          <a:prstGeom prst="rect">
-            <a:avLst/>
-          </a:prstGeom>
-          <a:noFill/>
-          <a:ln/>
-        </p:spPr>
-        <p:txBody>
-          <a:bodyPr wrap="square" lIns="0" tIns="0" rIns="0" bIns="0" rtlCol="0" anchor="ctr"/>
-          <a:lstStyle/>
-          <a:p>
-            <a:pPr marL="0" indent="0">
-              <a:buNone/>
-            </a:pPr>
-            <a:r>
-              <a:rPr lang="en-US" sz="1400" dirty="0">
-                <a:solidFill>
-                  <a:srgbClr val="14293D"/>
-                </a:solidFill>
-                <a:latin typeface="Roboto" pitchFamily="34" charset="0"/>
-                <a:ea typeface="Roboto" pitchFamily="34" charset="-122"/>
-                <a:cs typeface="Roboto" pitchFamily="34" charset="-120"/>
-              </a:rPr>
-              <a:t>A control-flow answer to an action problem: let the model decide when to reach outside itself — and let it reach for anything, not just documents.</a:t>
-            </a:r>
-            <a:endParaRPr lang="en-US" sz="1400" dirty="0"/>
-          </a:p>
-        </p:txBody>
-      </p:sp>
-      <p:sp>
-        <p:nvSpPr>
-          <p:cNvPr id="6" name="Shape 4"/>
-          <p:cNvSpPr/>
-          <p:nvPr/>
-        </p:nvSpPr>
-        <p:spPr>
-          <a:xfrm>
-            <a:off x="566928" y="2011680"/>
-            <a:ext cx="3931920" cy="2514600"/>
-          </a:xfrm>
-          <a:prstGeom prst="rect">
-            <a:avLst/>
-          </a:prstGeom>
-          <a:solidFill>
-            <a:srgbClr val="FFFFFF"/>
-          </a:solidFill>
-          <a:ln w="9525">
-            <a:solidFill>
-              <a:srgbClr val="DDE5E9"/>
-            </a:solidFill>
-            <a:prstDash val="solid"/>
-          </a:ln>
-        </p:spPr>
-        <p:txBody>
-          <a:bodyPr/>
-          <a:lstStyle/>
-          <a:p>
-            <a:endParaRPr lang="en-US"/>
-          </a:p>
-        </p:txBody>
-      </p:sp>
-      <p:sp>
-        <p:nvSpPr>
-          <p:cNvPr id="7" name="Text 5"/>
-          <p:cNvSpPr/>
-          <p:nvPr/>
-        </p:nvSpPr>
-        <p:spPr>
-          <a:xfrm>
-            <a:off x="822960" y="2212848"/>
-            <a:ext cx="3474720" cy="274320"/>
-          </a:xfrm>
-          <a:prstGeom prst="rect">
-            <a:avLst/>
-          </a:prstGeom>
-          <a:noFill/>
-          <a:ln/>
-        </p:spPr>
-        <p:txBody>
-          <a:bodyPr wrap="square" lIns="0" tIns="0" rIns="0" bIns="0" rtlCol="0" anchor="ctr"/>
-          <a:lstStyle/>
-          <a:p>
-            <a:pPr marL="0" indent="0">
-              <a:buNone/>
-            </a:pPr>
-            <a:r>
-              <a:rPr lang="en-US" sz="1600" dirty="0">
-                <a:solidFill>
-                  <a:srgbClr val="0D1B2A"/>
-                </a:solidFill>
-                <a:latin typeface="Oswald" pitchFamily="34" charset="0"/>
-                <a:ea typeface="Oswald" pitchFamily="34" charset="-122"/>
-                <a:cs typeface="Oswald" pitchFamily="34" charset="-120"/>
-              </a:rPr>
-              <a:t>What it unlocks</a:t>
-            </a:r>
-            <a:endParaRPr lang="en-US" sz="1600" dirty="0"/>
-          </a:p>
-        </p:txBody>
-      </p:sp>
-      <p:sp>
-        <p:nvSpPr>
-          <p:cNvPr id="8" name="Text 6"/>
-          <p:cNvSpPr/>
-          <p:nvPr/>
-        </p:nvSpPr>
-        <p:spPr>
-          <a:xfrm>
-            <a:off x="822960" y="2578608"/>
-            <a:ext cx="3474720" cy="1783080"/>
-          </a:xfrm>
-          <a:prstGeom prst="rect">
-            <a:avLst/>
-          </a:prstGeom>
-          <a:noFill/>
-          <a:ln/>
-        </p:spPr>
-        <p:txBody>
-          <a:bodyPr wrap="square" rtlCol="0" anchor="ctr"/>
-          <a:lstStyle/>
-          <a:p>
-            <a:pPr marL="342900" indent="-342900">
-              <a:spcAft>
-                <a:spcPts val="700"/>
-              </a:spcAft>
-              <a:buSzPct val="100000"/>
-              <a:buChar char="•"/>
-            </a:pPr>
-            <a:r>
-              <a:rPr lang="en-US" sz="1250" dirty="0">
-                <a:solidFill>
-                  <a:srgbClr val="14293D"/>
-                </a:solidFill>
-                <a:latin typeface="Roboto" pitchFamily="34" charset="0"/>
-                <a:ea typeface="Roboto" pitchFamily="34" charset="-122"/>
-                <a:cs typeface="Roboto" pitchFamily="34" charset="-120"/>
-              </a:rPr>
-              <a:t>Deterministic computation, done deterministically</a:t>
-            </a:r>
-            <a:endParaRPr lang="en-US" sz="1250" dirty="0"/>
-          </a:p>
-          <a:p>
-            <a:pPr marL="342900" indent="-342900">
-              <a:spcAft>
-                <a:spcPts val="700"/>
-              </a:spcAft>
-              <a:buSzPct val="100000"/>
-              <a:buChar char="•"/>
-            </a:pPr>
-            <a:r>
-              <a:rPr lang="en-US" sz="1250" dirty="0">
-                <a:solidFill>
-                  <a:srgbClr val="14293D"/>
-                </a:solidFill>
-                <a:latin typeface="Roboto" pitchFamily="34" charset="0"/>
-                <a:ea typeface="Roboto" pitchFamily="34" charset="-122"/>
-                <a:cs typeface="Roboto" pitchFamily="34" charset="-120"/>
-              </a:rPr>
-              <a:t>Reads from systems of record</a:t>
-            </a:r>
-            <a:endParaRPr lang="en-US" sz="1250" dirty="0"/>
-          </a:p>
-          <a:p>
-            <a:pPr marL="342900" indent="-342900">
-              <a:spcAft>
-                <a:spcPts val="700"/>
-              </a:spcAft>
-              <a:buSzPct val="100000"/>
-              <a:buChar char="•"/>
-            </a:pPr>
-            <a:r>
-              <a:rPr lang="en-US" sz="1250" dirty="0">
-                <a:solidFill>
-                  <a:srgbClr val="14293D"/>
-                </a:solidFill>
-                <a:latin typeface="Roboto" pitchFamily="34" charset="0"/>
-                <a:ea typeface="Roboto" pitchFamily="34" charset="-122"/>
-                <a:cs typeface="Roboto" pitchFamily="34" charset="-120"/>
-              </a:rPr>
-              <a:t>Side effects — writes, sends, bookings</a:t>
-            </a:r>
-            <a:endParaRPr lang="en-US" sz="1250" dirty="0"/>
-          </a:p>
-          <a:p>
-            <a:pPr marL="342900" indent="-342900">
-              <a:spcAft>
-                <a:spcPts val="700"/>
-              </a:spcAft>
-              <a:buSzPct val="100000"/>
-              <a:buChar char="•"/>
-            </a:pPr>
-            <a:r>
-              <a:rPr lang="en-US" sz="1250" dirty="0">
-                <a:solidFill>
-                  <a:srgbClr val="14293D"/>
-                </a:solidFill>
-                <a:latin typeface="Roboto" pitchFamily="34" charset="0"/>
-                <a:ea typeface="Roboto" pitchFamily="34" charset="-122"/>
-                <a:cs typeface="Roboto" pitchFamily="34" charset="-120"/>
-              </a:rPr>
-              <a:t>Loggable, permissioned, auditable actions</a:t>
-            </a:r>
-            <a:endParaRPr lang="en-US" sz="1250" dirty="0"/>
-          </a:p>
-        </p:txBody>
-      </p:sp>
-      <p:sp>
-        <p:nvSpPr>
-          <p:cNvPr id="9" name="Shape 7"/>
-          <p:cNvSpPr/>
-          <p:nvPr/>
-        </p:nvSpPr>
-        <p:spPr>
-          <a:xfrm>
-            <a:off x="4754880" y="2011680"/>
-            <a:ext cx="3840480" cy="2514600"/>
-          </a:xfrm>
-          <a:prstGeom prst="rect">
-            <a:avLst/>
-          </a:prstGeom>
-          <a:solidFill>
-            <a:srgbClr val="FFFFFF"/>
-          </a:solidFill>
-          <a:ln w="9525">
-            <a:solidFill>
-              <a:srgbClr val="DDE5E9"/>
-            </a:solidFill>
-            <a:prstDash val="solid"/>
-          </a:ln>
-        </p:spPr>
-        <p:txBody>
-          <a:bodyPr/>
-          <a:lstStyle/>
-          <a:p>
-            <a:endParaRPr lang="en-US"/>
-          </a:p>
-        </p:txBody>
-      </p:sp>
-      <p:sp>
-        <p:nvSpPr>
-          <p:cNvPr id="10" name="Text 8"/>
-          <p:cNvSpPr/>
-          <p:nvPr/>
-        </p:nvSpPr>
-        <p:spPr>
-          <a:xfrm>
-            <a:off x="5010912" y="2212848"/>
-            <a:ext cx="3383280" cy="274320"/>
-          </a:xfrm>
-          <a:prstGeom prst="rect">
-            <a:avLst/>
-          </a:prstGeom>
-          <a:noFill/>
-          <a:ln/>
-        </p:spPr>
-        <p:txBody>
-          <a:bodyPr wrap="square" lIns="0" tIns="0" rIns="0" bIns="0" rtlCol="0" anchor="ctr"/>
-          <a:lstStyle/>
-          <a:p>
-            <a:pPr marL="0" indent="0">
-              <a:buNone/>
-            </a:pPr>
-            <a:r>
-              <a:rPr lang="en-US" sz="1600" dirty="0">
-                <a:solidFill>
-                  <a:srgbClr val="0D1B2A"/>
-                </a:solidFill>
-                <a:latin typeface="Oswald" pitchFamily="34" charset="0"/>
-                <a:ea typeface="Oswald" pitchFamily="34" charset="-122"/>
-                <a:cs typeface="Oswald" pitchFamily="34" charset="-120"/>
-              </a:rPr>
-              <a:t>Naming it</a:t>
-            </a:r>
-            <a:endParaRPr lang="en-US" sz="1600" dirty="0"/>
-          </a:p>
-        </p:txBody>
-      </p:sp>
-      <p:sp>
-        <p:nvSpPr>
-          <p:cNvPr id="11" name="Text 9"/>
-          <p:cNvSpPr/>
-          <p:nvPr/>
-        </p:nvSpPr>
-        <p:spPr>
-          <a:xfrm>
-            <a:off x="5010912" y="2606040"/>
-            <a:ext cx="1874520" cy="274320"/>
-          </a:xfrm>
-          <a:prstGeom prst="rect">
-            <a:avLst/>
-          </a:prstGeom>
-          <a:noFill/>
-          <a:ln/>
-        </p:spPr>
-        <p:txBody>
-          <a:bodyPr wrap="square" lIns="0" tIns="0" rIns="0" bIns="0" rtlCol="0" anchor="ctr"/>
-          <a:lstStyle/>
-          <a:p>
-            <a:pPr marL="0" indent="0">
-              <a:buNone/>
-            </a:pPr>
-            <a:r>
-              <a:rPr lang="en-US" sz="1100" dirty="0">
-                <a:solidFill>
-                  <a:srgbClr val="1B9AAA"/>
-                </a:solidFill>
-                <a:latin typeface="JetBrains Mono" pitchFamily="34" charset="0"/>
-                <a:ea typeface="JetBrains Mono" pitchFamily="34" charset="-122"/>
-                <a:cs typeface="JetBrains Mono" pitchFamily="34" charset="-120"/>
-              </a:rPr>
-              <a:t>tool use / tool calling</a:t>
-            </a:r>
-            <a:endParaRPr lang="en-US" sz="1100" dirty="0"/>
-          </a:p>
-        </p:txBody>
-      </p:sp>
-      <p:sp>
-        <p:nvSpPr>
-          <p:cNvPr id="12" name="Text 10"/>
-          <p:cNvSpPr/>
-          <p:nvPr/>
-        </p:nvSpPr>
-        <p:spPr>
-          <a:xfrm>
-            <a:off x="6903720" y="2606040"/>
-            <a:ext cx="1600200" cy="384048"/>
-          </a:xfrm>
-          <a:prstGeom prst="rect">
-            <a:avLst/>
-          </a:prstGeom>
-          <a:noFill/>
-          <a:ln/>
-        </p:spPr>
-        <p:txBody>
-          <a:bodyPr wrap="square" lIns="0" tIns="0" rIns="0" bIns="0" rtlCol="0" anchor="ctr"/>
-          <a:lstStyle/>
-          <a:p>
-            <a:pPr marL="0" indent="0">
-              <a:buNone/>
-            </a:pPr>
-            <a:r>
-              <a:rPr lang="en-US" sz="1050" dirty="0">
-                <a:solidFill>
-                  <a:srgbClr val="6B7B8C"/>
-                </a:solidFill>
-                <a:latin typeface="Roboto" pitchFamily="34" charset="0"/>
-                <a:ea typeface="Roboto" pitchFamily="34" charset="-122"/>
-                <a:cs typeface="Roboto" pitchFamily="34" charset="-120"/>
-              </a:rPr>
-              <a:t>the category term — use this</a:t>
-            </a:r>
-            <a:endParaRPr lang="en-US" sz="1050" dirty="0"/>
-          </a:p>
-        </p:txBody>
-      </p:sp>
-      <p:sp>
-        <p:nvSpPr>
-          <p:cNvPr id="13" name="Text 11"/>
-          <p:cNvSpPr/>
-          <p:nvPr/>
-        </p:nvSpPr>
-        <p:spPr>
-          <a:xfrm>
-            <a:off x="5010912" y="3063240"/>
-            <a:ext cx="1874520" cy="274320"/>
-          </a:xfrm>
-          <a:prstGeom prst="rect">
-            <a:avLst/>
-          </a:prstGeom>
-          <a:noFill/>
-          <a:ln/>
-        </p:spPr>
-        <p:txBody>
-          <a:bodyPr wrap="square" lIns="0" tIns="0" rIns="0" bIns="0" rtlCol="0" anchor="ctr"/>
-          <a:lstStyle/>
-          <a:p>
-            <a:pPr marL="0" indent="0">
-              <a:buNone/>
-            </a:pPr>
-            <a:r>
-              <a:rPr lang="en-US" sz="1100" dirty="0">
-                <a:solidFill>
-                  <a:srgbClr val="0D1B2A"/>
-                </a:solidFill>
-                <a:latin typeface="JetBrains Mono" pitchFamily="34" charset="0"/>
-                <a:ea typeface="JetBrains Mono" pitchFamily="34" charset="-122"/>
-                <a:cs typeface="JetBrains Mono" pitchFamily="34" charset="-120"/>
-              </a:rPr>
-              <a:t>function calling</a:t>
-            </a:r>
-            <a:endParaRPr lang="en-US" sz="1100" dirty="0"/>
-          </a:p>
-        </p:txBody>
-      </p:sp>
-      <p:sp>
-        <p:nvSpPr>
-          <p:cNvPr id="14" name="Text 12"/>
-          <p:cNvSpPr/>
-          <p:nvPr/>
-        </p:nvSpPr>
-        <p:spPr>
-          <a:xfrm>
-            <a:off x="6903720" y="3063240"/>
-            <a:ext cx="1600200" cy="384048"/>
-          </a:xfrm>
-          <a:prstGeom prst="rect">
-            <a:avLst/>
-          </a:prstGeom>
-          <a:noFill/>
-          <a:ln/>
-        </p:spPr>
-        <p:txBody>
-          <a:bodyPr wrap="square" lIns="0" tIns="0" rIns="0" bIns="0" rtlCol="0" anchor="ctr"/>
-          <a:lstStyle/>
-          <a:p>
-            <a:pPr marL="0" indent="0">
-              <a:buNone/>
-            </a:pPr>
-            <a:r>
-              <a:rPr lang="en-US" sz="1050" dirty="0">
-                <a:solidFill>
-                  <a:srgbClr val="6B7B8C"/>
-                </a:solidFill>
-                <a:latin typeface="Roboto" pitchFamily="34" charset="0"/>
-                <a:ea typeface="Roboto" pitchFamily="34" charset="-122"/>
-                <a:cs typeface="Roboto" pitchFamily="34" charset="-120"/>
-              </a:rPr>
-              <a:t>the concrete API mechanism</a:t>
-            </a:r>
-            <a:endParaRPr lang="en-US" sz="1050" dirty="0"/>
-          </a:p>
-        </p:txBody>
-      </p:sp>
-      <p:sp>
-        <p:nvSpPr>
-          <p:cNvPr id="15" name="Text 13"/>
-          <p:cNvSpPr/>
-          <p:nvPr/>
-        </p:nvSpPr>
-        <p:spPr>
-          <a:xfrm>
-            <a:off x="5010912" y="3520440"/>
-            <a:ext cx="1874520" cy="274320"/>
-          </a:xfrm>
-          <a:prstGeom prst="rect">
-            <a:avLst/>
-          </a:prstGeom>
-          <a:noFill/>
-          <a:ln/>
-        </p:spPr>
-        <p:txBody>
-          <a:bodyPr wrap="square" lIns="0" tIns="0" rIns="0" bIns="0" rtlCol="0" anchor="ctr"/>
-          <a:lstStyle/>
-          <a:p>
-            <a:pPr marL="0" indent="0">
-              <a:buNone/>
-            </a:pPr>
-            <a:r>
-              <a:rPr lang="en-US" sz="1100" dirty="0">
-                <a:solidFill>
-                  <a:srgbClr val="0D1B2A"/>
-                </a:solidFill>
-                <a:latin typeface="JetBrains Mono" pitchFamily="34" charset="0"/>
-                <a:ea typeface="JetBrains Mono" pitchFamily="34" charset="-122"/>
-                <a:cs typeface="JetBrains Mono" pitchFamily="34" charset="-120"/>
-              </a:rPr>
-              <a:t>tool-augmented LLMs</a:t>
-            </a:r>
-            <a:endParaRPr lang="en-US" sz="1100" dirty="0"/>
-          </a:p>
-        </p:txBody>
-      </p:sp>
-      <p:sp>
-        <p:nvSpPr>
-          <p:cNvPr id="16" name="Text 14"/>
-          <p:cNvSpPr/>
-          <p:nvPr/>
-        </p:nvSpPr>
-        <p:spPr>
-          <a:xfrm>
-            <a:off x="6903720" y="3520440"/>
-            <a:ext cx="1600200" cy="384048"/>
-          </a:xfrm>
-          <a:prstGeom prst="rect">
-            <a:avLst/>
-          </a:prstGeom>
-          <a:noFill/>
-          <a:ln/>
-        </p:spPr>
-        <p:txBody>
-          <a:bodyPr wrap="square" lIns="0" tIns="0" rIns="0" bIns="0" rtlCol="0" anchor="ctr"/>
-          <a:lstStyle/>
-          <a:p>
-            <a:pPr marL="0" indent="0">
-              <a:buNone/>
-            </a:pPr>
-            <a:r>
-              <a:rPr lang="en-US" sz="1050" dirty="0">
-                <a:solidFill>
-                  <a:srgbClr val="6B7B8C"/>
-                </a:solidFill>
-                <a:latin typeface="Roboto" pitchFamily="34" charset="0"/>
-                <a:ea typeface="Roboto" pitchFamily="34" charset="-122"/>
-                <a:cs typeface="Roboto" pitchFamily="34" charset="-120"/>
-              </a:rPr>
-              <a:t>the academic register</a:t>
-            </a:r>
-            <a:endParaRPr lang="en-US" sz="1050" dirty="0"/>
-          </a:p>
-        </p:txBody>
-      </p:sp>
-      <p:sp>
-        <p:nvSpPr>
-          <p:cNvPr id="17" name="Text 15"/>
-          <p:cNvSpPr/>
-          <p:nvPr/>
-        </p:nvSpPr>
-        <p:spPr>
-          <a:xfrm>
-            <a:off x="5010912" y="3977640"/>
-            <a:ext cx="1874520" cy="274320"/>
-          </a:xfrm>
-          <a:prstGeom prst="rect">
-            <a:avLst/>
-          </a:prstGeom>
-          <a:noFill/>
-          <a:ln/>
-        </p:spPr>
-        <p:txBody>
-          <a:bodyPr wrap="square" lIns="0" tIns="0" rIns="0" bIns="0" rtlCol="0" anchor="ctr"/>
-          <a:lstStyle/>
-          <a:p>
-            <a:pPr marL="0" indent="0">
-              <a:buNone/>
-            </a:pPr>
-            <a:r>
-              <a:rPr lang="en-US" sz="1100" dirty="0">
-                <a:solidFill>
-                  <a:srgbClr val="0D1B2A"/>
-                </a:solidFill>
-                <a:latin typeface="JetBrains Mono" pitchFamily="34" charset="0"/>
-                <a:ea typeface="JetBrains Mono" pitchFamily="34" charset="-122"/>
-                <a:cs typeface="JetBrains Mono" pitchFamily="34" charset="-120"/>
-              </a:rPr>
-              <a:t>grounding</a:t>
-            </a:r>
-            <a:endParaRPr lang="en-US" sz="1100" dirty="0"/>
-          </a:p>
-        </p:txBody>
-      </p:sp>
-      <p:sp>
-        <p:nvSpPr>
-          <p:cNvPr id="18" name="Text 16"/>
-          <p:cNvSpPr/>
-          <p:nvPr/>
-        </p:nvSpPr>
-        <p:spPr>
-          <a:xfrm>
-            <a:off x="6903720" y="3977640"/>
-            <a:ext cx="1600200" cy="384048"/>
-          </a:xfrm>
-          <a:prstGeom prst="rect">
-            <a:avLst/>
-          </a:prstGeom>
-          <a:noFill/>
-          <a:ln/>
-        </p:spPr>
-        <p:txBody>
-          <a:bodyPr wrap="square" lIns="0" tIns="0" rIns="0" bIns="0" rtlCol="0" anchor="ctr"/>
-          <a:lstStyle/>
-          <a:p>
-            <a:pPr marL="0" indent="0">
-              <a:buNone/>
-            </a:pPr>
-            <a:r>
-              <a:rPr lang="en-US" sz="1050" dirty="0">
-                <a:solidFill>
-                  <a:srgbClr val="6B7B8C"/>
-                </a:solidFill>
-                <a:latin typeface="Roboto" pitchFamily="34" charset="0"/>
-                <a:ea typeface="Roboto" pitchFamily="34" charset="-122"/>
-                <a:cs typeface="Roboto" pitchFamily="34" charset="-120"/>
-              </a:rPr>
-              <a:t>tying output to external state</a:t>
-            </a:r>
-            <a:endParaRPr lang="en-US" sz="1050" dirty="0"/>
-          </a:p>
-        </p:txBody>
-      </p:sp>
-    </p:spTree>
-  </p:cSld>
-  <p:clrMapOvr>
-    <a:masterClrMapping/>
-  </p:clrMapOvr>
-</p:sld>
-</file>
-
-<file path=ppt/slides/slide31.xml><?xml version="1.0" encoding="utf-8"?>
-<p:sld xmlns:a="http://schemas.openxmlformats.org/drawingml/2006/main" xmlns:r="http://schemas.openxmlformats.org/officeDocument/2006/relationships" xmlns:p="http://schemas.openxmlformats.org/presentationml/2006/main">
   <p:cSld name="Slide 10">
     <p:bg>
       <p:bgPr>
@@ -40991,7 +41104,7 @@
 </p:sld>
 </file>
 
-<file path=ppt/slides/slide32.xml><?xml version="1.0" encoding="utf-8"?>
+<file path=ppt/slides/slide31.xml><?xml version="1.0" encoding="utf-8"?>
 <p:sld xmlns:a="http://schemas.openxmlformats.org/drawingml/2006/main" xmlns:r="http://schemas.openxmlformats.org/officeDocument/2006/relationships" xmlns:p="http://schemas.openxmlformats.org/presentationml/2006/main">
   <p:cSld name="Slide 11">
     <p:bg>
@@ -41872,7 +41985,7 @@
 </p:sld>
 </file>
 
-<file path=ppt/slides/slide33.xml><?xml version="1.0" encoding="utf-8"?>
+<file path=ppt/slides/slide32.xml><?xml version="1.0" encoding="utf-8"?>
 <p:sld xmlns:a="http://schemas.openxmlformats.org/drawingml/2006/main" xmlns:r="http://schemas.openxmlformats.org/officeDocument/2006/relationships" xmlns:p="http://schemas.openxmlformats.org/presentationml/2006/main">
   <p:cSld>
     <p:spTree>
@@ -42956,7 +43069,7 @@
 </p:sld>
 </file>
 
-<file path=ppt/slides/slide34.xml><?xml version="1.0" encoding="utf-8"?>
+<file path=ppt/slides/slide33.xml><?xml version="1.0" encoding="utf-8"?>
 <p:sld xmlns:a="http://schemas.openxmlformats.org/drawingml/2006/main" xmlns:r="http://schemas.openxmlformats.org/officeDocument/2006/relationships" xmlns:p="http://schemas.openxmlformats.org/presentationml/2006/main">
   <p:cSld name="Slide 14">
     <p:bg>
@@ -43223,7 +43336,7 @@
 </p:sld>
 </file>
 
-<file path=ppt/slides/slide35.xml><?xml version="1.0" encoding="utf-8"?>
+<file path=ppt/slides/slide34.xml><?xml version="1.0" encoding="utf-8"?>
 <p:sld xmlns:a="http://schemas.openxmlformats.org/drawingml/2006/main" xmlns:r="http://schemas.openxmlformats.org/officeDocument/2006/relationships" xmlns:p="http://schemas.openxmlformats.org/presentationml/2006/main">
   <p:cSld>
     <p:spTree>
@@ -43919,6 +44032,1315 @@
               <a:t>https://evarooms.merckgroup.com/Topic/MerckData/learn</a:t>
             </a:r>
             <a:endParaRPr lang="en-US" sz="740" dirty="0"/>
+          </a:p>
+        </p:txBody>
+      </p:sp>
+    </p:spTree>
+  </p:cSld>
+  <p:clrMapOvr>
+    <a:masterClrMapping/>
+  </p:clrMapOvr>
+</p:sld>
+</file>
+
+<file path=ppt/slides/slide35.xml><?xml version="1.0" encoding="utf-8"?>
+<p:sld xmlns:a="http://schemas.openxmlformats.org/drawingml/2006/main" xmlns:p="http://schemas.openxmlformats.org/presentationml/2006/main" xmlns:r="http://schemas.openxmlformats.org/officeDocument/2006/relationships">
+  <p:cSld>
+    <p:bg>
+      <p:bgPr>
+        <a:solidFill>
+          <a:srgbClr val="F4F7F8"/>
+        </a:solidFill>
+        <a:effectLst/>
+      </p:bgPr>
+    </p:bg>
+    <p:spTree>
+      <p:nvGrpSpPr>
+        <p:cNvPr id="1" name=""/>
+        <p:cNvGrpSpPr/>
+        <p:nvPr/>
+      </p:nvGrpSpPr>
+      <p:grpSpPr/>
+      <p:sp>
+        <p:nvSpPr>
+          <p:cNvPr id="2" name="Rectangle 1"/>
+          <p:cNvSpPr/>
+          <p:nvPr/>
+        </p:nvSpPr>
+        <p:spPr>
+          <a:xfrm>
+            <a:off x="0" y="0"/>
+            <a:ext cx="201168" cy="5143500"/>
+          </a:xfrm>
+          <a:prstGeom prst="rect">
+            <a:avLst/>
+          </a:prstGeom>
+          <a:solidFill>
+            <a:srgbClr val="0D1B2A"/>
+          </a:solidFill>
+          <a:ln>
+            <a:noFill/>
+          </a:ln>
+          <a:effectLst/>
+        </p:spPr>
+        <p:style>
+          <a:lnRef idx="1">
+            <a:schemeClr val="accent1"/>
+          </a:lnRef>
+          <a:fillRef idx="3">
+            <a:schemeClr val="accent1"/>
+          </a:fillRef>
+          <a:effectRef idx="2">
+            <a:schemeClr val="accent1"/>
+          </a:effectRef>
+          <a:fontRef idx="minor">
+            <a:schemeClr val="lt1"/>
+          </a:fontRef>
+        </p:style>
+        <p:txBody>
+          <a:bodyPr rtlCol="0" anchor="ctr"/>
+          <a:lstStyle/>
+          <a:p>
+            <a:pPr algn="ctr"/>
+          </a:p>
+        </p:txBody>
+      </p:sp>
+      <p:sp>
+        <p:nvSpPr>
+          <p:cNvPr id="3" name="TextBox 2"/>
+          <p:cNvSpPr txBox="1"/>
+          <p:nvPr/>
+        </p:nvSpPr>
+        <p:spPr>
+          <a:xfrm>
+            <a:off x="566928" y="329184"/>
+            <a:ext cx="8138160" cy="274320"/>
+          </a:xfrm>
+          <a:prstGeom prst="rect">
+            <a:avLst/>
+          </a:prstGeom>
+          <a:noFill/>
+        </p:spPr>
+        <p:txBody>
+          <a:bodyPr wrap="square" anchor="t" lIns="0" rIns="0" tIns="0" bIns="0">
+            <a:spAutoFit/>
+          </a:bodyPr>
+          <a:lstStyle/>
+          <a:p>
+            <a:pPr algn="l"/>
+            <a:r>
+              <a:rPr sz="1100" b="0" spc="300">
+                <a:solidFill>
+                  <a:srgbClr val="1B9AAA"/>
+                </a:solidFill>
+                <a:latin typeface="JetBrains Mono"/>
+              </a:rPr>
+              <a:t>PART 5 · ANATOMY</a:t>
+            </a:r>
+          </a:p>
+        </p:txBody>
+      </p:sp>
+      <p:sp>
+        <p:nvSpPr>
+          <p:cNvPr id="4" name="slide-agent-anatomy"/>
+          <p:cNvSpPr txBox="1"/>
+          <p:nvPr/>
+        </p:nvSpPr>
+        <p:spPr>
+          <a:xfrm>
+            <a:off x="566928" y="603504"/>
+            <a:ext cx="8138160" cy="658368"/>
+          </a:xfrm>
+          <a:prstGeom prst="rect">
+            <a:avLst/>
+          </a:prstGeom>
+          <a:noFill/>
+        </p:spPr>
+        <p:txBody>
+          <a:bodyPr wrap="square" anchor="t" lIns="0" rIns="0" tIns="0" bIns="0">
+            <a:spAutoFit/>
+          </a:bodyPr>
+          <a:lstStyle/>
+          <a:p>
+            <a:pPr algn="l"/>
+            <a:r>
+              <a:rPr sz="3200" b="0">
+                <a:solidFill>
+                  <a:srgbClr val="0D1B2A"/>
+                </a:solidFill>
+                <a:latin typeface="Oswald"/>
+              </a:rPr>
+              <a:t>What an agent is made of</a:t>
+            </a:r>
+          </a:p>
+        </p:txBody>
+      </p:sp>
+      <p:sp>
+        <p:nvSpPr>
+          <p:cNvPr id="5" name="TextBox 4"/>
+          <p:cNvSpPr txBox="1"/>
+          <p:nvPr/>
+        </p:nvSpPr>
+        <p:spPr>
+          <a:xfrm>
+            <a:off x="566928" y="1298448"/>
+            <a:ext cx="8138160" cy="457200"/>
+          </a:xfrm>
+          <a:prstGeom prst="rect">
+            <a:avLst/>
+          </a:prstGeom>
+          <a:noFill/>
+        </p:spPr>
+        <p:txBody>
+          <a:bodyPr wrap="square" anchor="t" lIns="0" rIns="0" tIns="0" bIns="0">
+            <a:spAutoFit/>
+          </a:bodyPr>
+          <a:lstStyle/>
+          <a:p>
+            <a:pPr algn="l"/>
+            <a:r>
+              <a:rPr sz="1150" b="0">
+                <a:solidFill>
+                  <a:srgbClr val="14293D"/>
+                </a:solidFill>
+                <a:latin typeface="Roboto"/>
+              </a:rPr>
+              <a:t>“An AI application consisting of a model equipped with instructions that guide its behavior, access to tools that extend its capabilities, encapsulated in a runtime with a dynamic lifecycle.”   — OpenAI definition</a:t>
+            </a:r>
+          </a:p>
+        </p:txBody>
+      </p:sp>
+      <p:sp>
+        <p:nvSpPr>
+          <p:cNvPr id="6" name="Rounded Rectangle 5"/>
+          <p:cNvSpPr/>
+          <p:nvPr/>
+        </p:nvSpPr>
+        <p:spPr>
+          <a:xfrm>
+            <a:off x="566928" y="1783080"/>
+            <a:ext cx="914400" cy="384048"/>
+          </a:xfrm>
+          <a:prstGeom prst="roundRect">
+            <a:avLst>
+              <a:gd name="adj" fmla="val 18000"/>
+            </a:avLst>
+          </a:prstGeom>
+          <a:solidFill>
+            <a:srgbClr val="0D1B2A"/>
+          </a:solidFill>
+          <a:ln>
+            <a:noFill/>
+          </a:ln>
+          <a:effectLst/>
+        </p:spPr>
+        <p:style>
+          <a:lnRef idx="1">
+            <a:schemeClr val="accent1"/>
+          </a:lnRef>
+          <a:fillRef idx="3">
+            <a:schemeClr val="accent1"/>
+          </a:fillRef>
+          <a:effectRef idx="2">
+            <a:schemeClr val="accent1"/>
+          </a:effectRef>
+          <a:fontRef idx="minor">
+            <a:schemeClr val="lt1"/>
+          </a:fontRef>
+        </p:style>
+        <p:txBody>
+          <a:bodyPr rtlCol="0" anchor="ctr" lIns="0" rIns="0" tIns="0" bIns="0" wrap="none"/>
+          <a:lstStyle/>
+          <a:p>
+            <a:pPr algn="ctr"/>
+            <a:r>
+              <a:rPr sz="1300">
+                <a:solidFill>
+                  <a:srgbClr val="FFFFFF"/>
+                </a:solidFill>
+                <a:latin typeface="Oswald"/>
+              </a:rPr>
+              <a:t>Agent</a:t>
+            </a:r>
+          </a:p>
+        </p:txBody>
+      </p:sp>
+      <p:sp>
+        <p:nvSpPr>
+          <p:cNvPr id="7" name="TextBox 6"/>
+          <p:cNvSpPr txBox="1"/>
+          <p:nvPr/>
+        </p:nvSpPr>
+        <p:spPr>
+          <a:xfrm>
+            <a:off x="1536192" y="1828800"/>
+            <a:ext cx="274320" cy="274320"/>
+          </a:xfrm>
+          <a:prstGeom prst="rect">
+            <a:avLst/>
+          </a:prstGeom>
+          <a:noFill/>
+        </p:spPr>
+        <p:txBody>
+          <a:bodyPr wrap="square" anchor="t" lIns="0" rIns="0" tIns="0" bIns="0">
+            <a:spAutoFit/>
+          </a:bodyPr>
+          <a:lstStyle/>
+          <a:p>
+            <a:pPr algn="ctr"/>
+            <a:r>
+              <a:rPr sz="1500" b="0">
+                <a:solidFill>
+                  <a:srgbClr val="6B7B8C"/>
+                </a:solidFill>
+                <a:latin typeface="Oswald"/>
+              </a:rPr>
+              <a:t>=</a:t>
+            </a:r>
+          </a:p>
+        </p:txBody>
+      </p:sp>
+      <p:sp>
+        <p:nvSpPr>
+          <p:cNvPr id="8" name="Rounded Rectangle 7"/>
+          <p:cNvSpPr/>
+          <p:nvPr/>
+        </p:nvSpPr>
+        <p:spPr>
+          <a:xfrm>
+            <a:off x="1865376" y="1783080"/>
+            <a:ext cx="841247" cy="384048"/>
+          </a:xfrm>
+          <a:prstGeom prst="roundRect">
+            <a:avLst>
+              <a:gd name="adj" fmla="val 18000"/>
+            </a:avLst>
+          </a:prstGeom>
+          <a:solidFill>
+            <a:srgbClr val="D4ECEF"/>
+          </a:solidFill>
+          <a:ln>
+            <a:noFill/>
+          </a:ln>
+          <a:effectLst/>
+        </p:spPr>
+        <p:style>
+          <a:lnRef idx="1">
+            <a:schemeClr val="accent1"/>
+          </a:lnRef>
+          <a:fillRef idx="3">
+            <a:schemeClr val="accent1"/>
+          </a:fillRef>
+          <a:effectRef idx="2">
+            <a:schemeClr val="accent1"/>
+          </a:effectRef>
+          <a:fontRef idx="minor">
+            <a:schemeClr val="lt1"/>
+          </a:fontRef>
+        </p:style>
+        <p:txBody>
+          <a:bodyPr rtlCol="0" anchor="ctr" lIns="0" rIns="0" tIns="0" bIns="0" wrap="none"/>
+          <a:lstStyle/>
+          <a:p>
+            <a:pPr algn="ctr"/>
+            <a:r>
+              <a:rPr sz="1200">
+                <a:solidFill>
+                  <a:srgbClr val="0D1B2A"/>
+                </a:solidFill>
+                <a:latin typeface="Oswald"/>
+              </a:rPr>
+              <a:t>Model</a:t>
+            </a:r>
+          </a:p>
+        </p:txBody>
+      </p:sp>
+      <p:sp>
+        <p:nvSpPr>
+          <p:cNvPr id="9" name="TextBox 8"/>
+          <p:cNvSpPr txBox="1"/>
+          <p:nvPr/>
+        </p:nvSpPr>
+        <p:spPr>
+          <a:xfrm>
+            <a:off x="2761488" y="1828800"/>
+            <a:ext cx="274320" cy="274320"/>
+          </a:xfrm>
+          <a:prstGeom prst="rect">
+            <a:avLst/>
+          </a:prstGeom>
+          <a:noFill/>
+        </p:spPr>
+        <p:txBody>
+          <a:bodyPr wrap="square" anchor="t" lIns="0" rIns="0" tIns="0" bIns="0">
+            <a:spAutoFit/>
+          </a:bodyPr>
+          <a:lstStyle/>
+          <a:p>
+            <a:pPr algn="ctr"/>
+            <a:r>
+              <a:rPr sz="1500" b="0">
+                <a:solidFill>
+                  <a:srgbClr val="6B7B8C"/>
+                </a:solidFill>
+                <a:latin typeface="Oswald"/>
+              </a:rPr>
+              <a:t>+</a:t>
+            </a:r>
+          </a:p>
+        </p:txBody>
+      </p:sp>
+      <p:sp>
+        <p:nvSpPr>
+          <p:cNvPr id="10" name="Rounded Rectangle 9"/>
+          <p:cNvSpPr/>
+          <p:nvPr/>
+        </p:nvSpPr>
+        <p:spPr>
+          <a:xfrm>
+            <a:off x="3090672" y="1783080"/>
+            <a:ext cx="1481328" cy="384048"/>
+          </a:xfrm>
+          <a:prstGeom prst="roundRect">
+            <a:avLst>
+              <a:gd name="adj" fmla="val 18000"/>
+            </a:avLst>
+          </a:prstGeom>
+          <a:solidFill>
+            <a:srgbClr val="D4ECEF"/>
+          </a:solidFill>
+          <a:ln>
+            <a:noFill/>
+          </a:ln>
+          <a:effectLst/>
+        </p:spPr>
+        <p:style>
+          <a:lnRef idx="1">
+            <a:schemeClr val="accent1"/>
+          </a:lnRef>
+          <a:fillRef idx="3">
+            <a:schemeClr val="accent1"/>
+          </a:fillRef>
+          <a:effectRef idx="2">
+            <a:schemeClr val="accent1"/>
+          </a:effectRef>
+          <a:fontRef idx="minor">
+            <a:schemeClr val="lt1"/>
+          </a:fontRef>
+        </p:style>
+        <p:txBody>
+          <a:bodyPr rtlCol="0" anchor="ctr" lIns="0" rIns="0" tIns="0" bIns="0" wrap="none"/>
+          <a:lstStyle/>
+          <a:p>
+            <a:pPr algn="ctr"/>
+            <a:r>
+              <a:rPr sz="1200">
+                <a:solidFill>
+                  <a:srgbClr val="0D1B2A"/>
+                </a:solidFill>
+                <a:latin typeface="Oswald"/>
+              </a:rPr>
+              <a:t>Instructions</a:t>
+            </a:r>
+          </a:p>
+        </p:txBody>
+      </p:sp>
+      <p:sp>
+        <p:nvSpPr>
+          <p:cNvPr id="11" name="TextBox 10"/>
+          <p:cNvSpPr txBox="1"/>
+          <p:nvPr/>
+        </p:nvSpPr>
+        <p:spPr>
+          <a:xfrm>
+            <a:off x="4626864" y="1828800"/>
+            <a:ext cx="274320" cy="274320"/>
+          </a:xfrm>
+          <a:prstGeom prst="rect">
+            <a:avLst/>
+          </a:prstGeom>
+          <a:noFill/>
+        </p:spPr>
+        <p:txBody>
+          <a:bodyPr wrap="square" anchor="t" lIns="0" rIns="0" tIns="0" bIns="0">
+            <a:spAutoFit/>
+          </a:bodyPr>
+          <a:lstStyle/>
+          <a:p>
+            <a:pPr algn="ctr"/>
+            <a:r>
+              <a:rPr sz="1500" b="0">
+                <a:solidFill>
+                  <a:srgbClr val="6B7B8C"/>
+                </a:solidFill>
+                <a:latin typeface="Oswald"/>
+              </a:rPr>
+              <a:t>+</a:t>
+            </a:r>
+          </a:p>
+        </p:txBody>
+      </p:sp>
+      <p:sp>
+        <p:nvSpPr>
+          <p:cNvPr id="12" name="Rounded Rectangle 11"/>
+          <p:cNvSpPr/>
+          <p:nvPr/>
+        </p:nvSpPr>
+        <p:spPr>
+          <a:xfrm>
+            <a:off x="4956048" y="1783080"/>
+            <a:ext cx="841247" cy="384048"/>
+          </a:xfrm>
+          <a:prstGeom prst="roundRect">
+            <a:avLst>
+              <a:gd name="adj" fmla="val 18000"/>
+            </a:avLst>
+          </a:prstGeom>
+          <a:solidFill>
+            <a:srgbClr val="D4ECEF"/>
+          </a:solidFill>
+          <a:ln>
+            <a:noFill/>
+          </a:ln>
+          <a:effectLst/>
+        </p:spPr>
+        <p:style>
+          <a:lnRef idx="1">
+            <a:schemeClr val="accent1"/>
+          </a:lnRef>
+          <a:fillRef idx="3">
+            <a:schemeClr val="accent1"/>
+          </a:fillRef>
+          <a:effectRef idx="2">
+            <a:schemeClr val="accent1"/>
+          </a:effectRef>
+          <a:fontRef idx="minor">
+            <a:schemeClr val="lt1"/>
+          </a:fontRef>
+        </p:style>
+        <p:txBody>
+          <a:bodyPr rtlCol="0" anchor="ctr" lIns="0" rIns="0" tIns="0" bIns="0" wrap="none"/>
+          <a:lstStyle/>
+          <a:p>
+            <a:pPr algn="ctr"/>
+            <a:r>
+              <a:rPr sz="1200">
+                <a:solidFill>
+                  <a:srgbClr val="0D1B2A"/>
+                </a:solidFill>
+                <a:latin typeface="Oswald"/>
+              </a:rPr>
+              <a:t>Tools</a:t>
+            </a:r>
+          </a:p>
+        </p:txBody>
+      </p:sp>
+      <p:sp>
+        <p:nvSpPr>
+          <p:cNvPr id="13" name="TextBox 12"/>
+          <p:cNvSpPr txBox="1"/>
+          <p:nvPr/>
+        </p:nvSpPr>
+        <p:spPr>
+          <a:xfrm>
+            <a:off x="5852159" y="1828800"/>
+            <a:ext cx="274320" cy="274320"/>
+          </a:xfrm>
+          <a:prstGeom prst="rect">
+            <a:avLst/>
+          </a:prstGeom>
+          <a:noFill/>
+        </p:spPr>
+        <p:txBody>
+          <a:bodyPr wrap="square" anchor="t" lIns="0" rIns="0" tIns="0" bIns="0">
+            <a:spAutoFit/>
+          </a:bodyPr>
+          <a:lstStyle/>
+          <a:p>
+            <a:pPr algn="ctr"/>
+            <a:r>
+              <a:rPr sz="1500" b="0">
+                <a:solidFill>
+                  <a:srgbClr val="6B7B8C"/>
+                </a:solidFill>
+                <a:latin typeface="Oswald"/>
+              </a:rPr>
+              <a:t>+</a:t>
+            </a:r>
+          </a:p>
+        </p:txBody>
+      </p:sp>
+      <p:sp>
+        <p:nvSpPr>
+          <p:cNvPr id="14" name="Rounded Rectangle 13"/>
+          <p:cNvSpPr/>
+          <p:nvPr/>
+        </p:nvSpPr>
+        <p:spPr>
+          <a:xfrm>
+            <a:off x="6181344" y="1783080"/>
+            <a:ext cx="1024128" cy="384048"/>
+          </a:xfrm>
+          <a:prstGeom prst="roundRect">
+            <a:avLst>
+              <a:gd name="adj" fmla="val 18000"/>
+            </a:avLst>
+          </a:prstGeom>
+          <a:solidFill>
+            <a:srgbClr val="D4ECEF"/>
+          </a:solidFill>
+          <a:ln>
+            <a:noFill/>
+          </a:ln>
+          <a:effectLst/>
+        </p:spPr>
+        <p:style>
+          <a:lnRef idx="1">
+            <a:schemeClr val="accent1"/>
+          </a:lnRef>
+          <a:fillRef idx="3">
+            <a:schemeClr val="accent1"/>
+          </a:fillRef>
+          <a:effectRef idx="2">
+            <a:schemeClr val="accent1"/>
+          </a:effectRef>
+          <a:fontRef idx="minor">
+            <a:schemeClr val="lt1"/>
+          </a:fontRef>
+        </p:style>
+        <p:txBody>
+          <a:bodyPr rtlCol="0" anchor="ctr" lIns="0" rIns="0" tIns="0" bIns="0" wrap="none"/>
+          <a:lstStyle/>
+          <a:p>
+            <a:pPr algn="ctr"/>
+            <a:r>
+              <a:rPr sz="1200">
+                <a:solidFill>
+                  <a:srgbClr val="0D1B2A"/>
+                </a:solidFill>
+                <a:latin typeface="Oswald"/>
+              </a:rPr>
+              <a:t>Runtime</a:t>
+            </a:r>
+          </a:p>
+        </p:txBody>
+      </p:sp>
+      <p:sp>
+        <p:nvSpPr>
+          <p:cNvPr id="15" name="Rectangle 14"/>
+          <p:cNvSpPr/>
+          <p:nvPr/>
+        </p:nvSpPr>
+        <p:spPr>
+          <a:xfrm>
+            <a:off x="566928" y="2432304"/>
+            <a:ext cx="4005072" cy="969264"/>
+          </a:xfrm>
+          <a:prstGeom prst="rect">
+            <a:avLst/>
+          </a:prstGeom>
+          <a:solidFill>
+            <a:srgbClr val="FFFFFF"/>
+          </a:solidFill>
+          <a:ln w="9525">
+            <a:solidFill>
+              <a:srgbClr val="DDE5E9"/>
+            </a:solidFill>
+          </a:ln>
+          <a:effectLst/>
+        </p:spPr>
+        <p:style>
+          <a:lnRef idx="1">
+            <a:schemeClr val="accent1"/>
+          </a:lnRef>
+          <a:fillRef idx="3">
+            <a:schemeClr val="accent1"/>
+          </a:fillRef>
+          <a:effectRef idx="2">
+            <a:schemeClr val="accent1"/>
+          </a:effectRef>
+          <a:fontRef idx="minor">
+            <a:schemeClr val="lt1"/>
+          </a:fontRef>
+        </p:style>
+        <p:txBody>
+          <a:bodyPr rtlCol="0" anchor="ctr"/>
+          <a:lstStyle/>
+          <a:p>
+            <a:pPr algn="ctr"/>
+          </a:p>
+        </p:txBody>
+      </p:sp>
+      <p:sp>
+        <p:nvSpPr>
+          <p:cNvPr id="16" name="Rectangle 15"/>
+          <p:cNvSpPr/>
+          <p:nvPr/>
+        </p:nvSpPr>
+        <p:spPr>
+          <a:xfrm>
+            <a:off x="566928" y="2432304"/>
+            <a:ext cx="54864" cy="969264"/>
+          </a:xfrm>
+          <a:prstGeom prst="rect">
+            <a:avLst/>
+          </a:prstGeom>
+          <a:solidFill>
+            <a:srgbClr val="1B9AAA"/>
+          </a:solidFill>
+          <a:ln>
+            <a:noFill/>
+          </a:ln>
+          <a:effectLst/>
+        </p:spPr>
+        <p:style>
+          <a:lnRef idx="1">
+            <a:schemeClr val="accent1"/>
+          </a:lnRef>
+          <a:fillRef idx="3">
+            <a:schemeClr val="accent1"/>
+          </a:fillRef>
+          <a:effectRef idx="2">
+            <a:schemeClr val="accent1"/>
+          </a:effectRef>
+          <a:fontRef idx="minor">
+            <a:schemeClr val="lt1"/>
+          </a:fontRef>
+        </p:style>
+        <p:txBody>
+          <a:bodyPr rtlCol="0" anchor="ctr"/>
+          <a:lstStyle/>
+          <a:p>
+            <a:pPr algn="ctr"/>
+          </a:p>
+        </p:txBody>
+      </p:sp>
+      <p:sp>
+        <p:nvSpPr>
+          <p:cNvPr id="17" name="TextBox 16"/>
+          <p:cNvSpPr txBox="1"/>
+          <p:nvPr/>
+        </p:nvSpPr>
+        <p:spPr>
+          <a:xfrm>
+            <a:off x="777240" y="2542032"/>
+            <a:ext cx="3593591" cy="274320"/>
+          </a:xfrm>
+          <a:prstGeom prst="rect">
+            <a:avLst/>
+          </a:prstGeom>
+          <a:noFill/>
+        </p:spPr>
+        <p:txBody>
+          <a:bodyPr wrap="square" anchor="t" lIns="0" rIns="0" tIns="0" bIns="0">
+            <a:spAutoFit/>
+          </a:bodyPr>
+          <a:lstStyle/>
+          <a:p>
+            <a:pPr algn="l"/>
+            <a:r>
+              <a:rPr sz="1500" b="0">
+                <a:solidFill>
+                  <a:srgbClr val="0D1B2A"/>
+                </a:solidFill>
+                <a:latin typeface="Oswald"/>
+              </a:rPr>
+              <a:t>Model</a:t>
+            </a:r>
+          </a:p>
+        </p:txBody>
+      </p:sp>
+      <p:sp>
+        <p:nvSpPr>
+          <p:cNvPr id="18" name="TextBox 17"/>
+          <p:cNvSpPr txBox="1"/>
+          <p:nvPr/>
+        </p:nvSpPr>
+        <p:spPr>
+          <a:xfrm>
+            <a:off x="777240" y="2834640"/>
+            <a:ext cx="3593591" cy="365760"/>
+          </a:xfrm>
+          <a:prstGeom prst="rect">
+            <a:avLst/>
+          </a:prstGeom>
+          <a:noFill/>
+        </p:spPr>
+        <p:txBody>
+          <a:bodyPr wrap="square" anchor="t" lIns="0" rIns="0" tIns="0" bIns="0">
+            <a:spAutoFit/>
+          </a:bodyPr>
+          <a:lstStyle/>
+          <a:p>
+            <a:pPr algn="l"/>
+            <a:r>
+              <a:rPr sz="1000" b="0">
+                <a:solidFill>
+                  <a:srgbClr val="6B7B8C"/>
+                </a:solidFill>
+                <a:latin typeface="Roboto"/>
+              </a:rPr>
+              <a:t>Usually an LLM. Core capabilities: observing, understanding, planning, deciding.</a:t>
+            </a:r>
+          </a:p>
+        </p:txBody>
+      </p:sp>
+      <p:sp>
+        <p:nvSpPr>
+          <p:cNvPr id="19" name="Rectangle 18"/>
+          <p:cNvSpPr/>
+          <p:nvPr/>
+        </p:nvSpPr>
+        <p:spPr>
+          <a:xfrm>
+            <a:off x="4736592" y="2432304"/>
+            <a:ext cx="4005072" cy="969264"/>
+          </a:xfrm>
+          <a:prstGeom prst="rect">
+            <a:avLst/>
+          </a:prstGeom>
+          <a:solidFill>
+            <a:srgbClr val="FFFFFF"/>
+          </a:solidFill>
+          <a:ln w="9525">
+            <a:solidFill>
+              <a:srgbClr val="DDE5E9"/>
+            </a:solidFill>
+          </a:ln>
+          <a:effectLst/>
+        </p:spPr>
+        <p:style>
+          <a:lnRef idx="1">
+            <a:schemeClr val="accent1"/>
+          </a:lnRef>
+          <a:fillRef idx="3">
+            <a:schemeClr val="accent1"/>
+          </a:fillRef>
+          <a:effectRef idx="2">
+            <a:schemeClr val="accent1"/>
+          </a:effectRef>
+          <a:fontRef idx="minor">
+            <a:schemeClr val="lt1"/>
+          </a:fontRef>
+        </p:style>
+        <p:txBody>
+          <a:bodyPr rtlCol="0" anchor="ctr"/>
+          <a:lstStyle/>
+          <a:p>
+            <a:pPr algn="ctr"/>
+          </a:p>
+        </p:txBody>
+      </p:sp>
+      <p:sp>
+        <p:nvSpPr>
+          <p:cNvPr id="20" name="Rectangle 19"/>
+          <p:cNvSpPr/>
+          <p:nvPr/>
+        </p:nvSpPr>
+        <p:spPr>
+          <a:xfrm>
+            <a:off x="4736592" y="2432304"/>
+            <a:ext cx="54864" cy="969264"/>
+          </a:xfrm>
+          <a:prstGeom prst="rect">
+            <a:avLst/>
+          </a:prstGeom>
+          <a:solidFill>
+            <a:srgbClr val="06D6A0"/>
+          </a:solidFill>
+          <a:ln>
+            <a:noFill/>
+          </a:ln>
+          <a:effectLst/>
+        </p:spPr>
+        <p:style>
+          <a:lnRef idx="1">
+            <a:schemeClr val="accent1"/>
+          </a:lnRef>
+          <a:fillRef idx="3">
+            <a:schemeClr val="accent1"/>
+          </a:fillRef>
+          <a:effectRef idx="2">
+            <a:schemeClr val="accent1"/>
+          </a:effectRef>
+          <a:fontRef idx="minor">
+            <a:schemeClr val="lt1"/>
+          </a:fontRef>
+        </p:style>
+        <p:txBody>
+          <a:bodyPr rtlCol="0" anchor="ctr"/>
+          <a:lstStyle/>
+          <a:p>
+            <a:pPr algn="ctr"/>
+          </a:p>
+        </p:txBody>
+      </p:sp>
+      <p:sp>
+        <p:nvSpPr>
+          <p:cNvPr id="21" name="TextBox 20"/>
+          <p:cNvSpPr txBox="1"/>
+          <p:nvPr/>
+        </p:nvSpPr>
+        <p:spPr>
+          <a:xfrm>
+            <a:off x="4946904" y="2542032"/>
+            <a:ext cx="3593591" cy="274320"/>
+          </a:xfrm>
+          <a:prstGeom prst="rect">
+            <a:avLst/>
+          </a:prstGeom>
+          <a:noFill/>
+        </p:spPr>
+        <p:txBody>
+          <a:bodyPr wrap="square" anchor="t" lIns="0" rIns="0" tIns="0" bIns="0">
+            <a:spAutoFit/>
+          </a:bodyPr>
+          <a:lstStyle/>
+          <a:p>
+            <a:pPr algn="l"/>
+            <a:r>
+              <a:rPr sz="1500" b="0">
+                <a:solidFill>
+                  <a:srgbClr val="0D1B2A"/>
+                </a:solidFill>
+                <a:latin typeface="Oswald"/>
+              </a:rPr>
+              <a:t>Instructions</a:t>
+            </a:r>
+          </a:p>
+        </p:txBody>
+      </p:sp>
+      <p:sp>
+        <p:nvSpPr>
+          <p:cNvPr id="22" name="TextBox 21"/>
+          <p:cNvSpPr txBox="1"/>
+          <p:nvPr/>
+        </p:nvSpPr>
+        <p:spPr>
+          <a:xfrm>
+            <a:off x="4946904" y="2834640"/>
+            <a:ext cx="3593591" cy="365760"/>
+          </a:xfrm>
+          <a:prstGeom prst="rect">
+            <a:avLst/>
+          </a:prstGeom>
+          <a:noFill/>
+        </p:spPr>
+        <p:txBody>
+          <a:bodyPr wrap="square" anchor="t" lIns="0" rIns="0" tIns="0" bIns="0">
+            <a:spAutoFit/>
+          </a:bodyPr>
+          <a:lstStyle/>
+          <a:p>
+            <a:pPr algn="l"/>
+            <a:r>
+              <a:rPr sz="1000" b="0">
+                <a:solidFill>
+                  <a:srgbClr val="6B7B8C"/>
+                </a:solidFill>
+                <a:latin typeface="Roboto"/>
+              </a:rPr>
+              <a:t>Define the goals and behaviour that steer actions toward the intended outcome.</a:t>
+            </a:r>
+          </a:p>
+        </p:txBody>
+      </p:sp>
+      <p:sp>
+        <p:nvSpPr>
+          <p:cNvPr id="23" name="Rectangle 22"/>
+          <p:cNvSpPr/>
+          <p:nvPr/>
+        </p:nvSpPr>
+        <p:spPr>
+          <a:xfrm>
+            <a:off x="566928" y="3566160"/>
+            <a:ext cx="4005072" cy="969264"/>
+          </a:xfrm>
+          <a:prstGeom prst="rect">
+            <a:avLst/>
+          </a:prstGeom>
+          <a:solidFill>
+            <a:srgbClr val="FFFFFF"/>
+          </a:solidFill>
+          <a:ln w="9525">
+            <a:solidFill>
+              <a:srgbClr val="DDE5E9"/>
+            </a:solidFill>
+          </a:ln>
+          <a:effectLst/>
+        </p:spPr>
+        <p:style>
+          <a:lnRef idx="1">
+            <a:schemeClr val="accent1"/>
+          </a:lnRef>
+          <a:fillRef idx="3">
+            <a:schemeClr val="accent1"/>
+          </a:fillRef>
+          <a:effectRef idx="2">
+            <a:schemeClr val="accent1"/>
+          </a:effectRef>
+          <a:fontRef idx="minor">
+            <a:schemeClr val="lt1"/>
+          </a:fontRef>
+        </p:style>
+        <p:txBody>
+          <a:bodyPr rtlCol="0" anchor="ctr"/>
+          <a:lstStyle/>
+          <a:p>
+            <a:pPr algn="ctr"/>
+          </a:p>
+        </p:txBody>
+      </p:sp>
+      <p:sp>
+        <p:nvSpPr>
+          <p:cNvPr id="24" name="Rectangle 23"/>
+          <p:cNvSpPr/>
+          <p:nvPr/>
+        </p:nvSpPr>
+        <p:spPr>
+          <a:xfrm>
+            <a:off x="566928" y="3566160"/>
+            <a:ext cx="54864" cy="969264"/>
+          </a:xfrm>
+          <a:prstGeom prst="rect">
+            <a:avLst/>
+          </a:prstGeom>
+          <a:solidFill>
+            <a:srgbClr val="1B9AAA"/>
+          </a:solidFill>
+          <a:ln>
+            <a:noFill/>
+          </a:ln>
+          <a:effectLst/>
+        </p:spPr>
+        <p:style>
+          <a:lnRef idx="1">
+            <a:schemeClr val="accent1"/>
+          </a:lnRef>
+          <a:fillRef idx="3">
+            <a:schemeClr val="accent1"/>
+          </a:fillRef>
+          <a:effectRef idx="2">
+            <a:schemeClr val="accent1"/>
+          </a:effectRef>
+          <a:fontRef idx="minor">
+            <a:schemeClr val="lt1"/>
+          </a:fontRef>
+        </p:style>
+        <p:txBody>
+          <a:bodyPr rtlCol="0" anchor="ctr"/>
+          <a:lstStyle/>
+          <a:p>
+            <a:pPr algn="ctr"/>
+          </a:p>
+        </p:txBody>
+      </p:sp>
+      <p:sp>
+        <p:nvSpPr>
+          <p:cNvPr id="25" name="TextBox 24"/>
+          <p:cNvSpPr txBox="1"/>
+          <p:nvPr/>
+        </p:nvSpPr>
+        <p:spPr>
+          <a:xfrm>
+            <a:off x="777240" y="3675888"/>
+            <a:ext cx="3593591" cy="274320"/>
+          </a:xfrm>
+          <a:prstGeom prst="rect">
+            <a:avLst/>
+          </a:prstGeom>
+          <a:noFill/>
+        </p:spPr>
+        <p:txBody>
+          <a:bodyPr wrap="square" anchor="t" lIns="0" rIns="0" tIns="0" bIns="0">
+            <a:spAutoFit/>
+          </a:bodyPr>
+          <a:lstStyle/>
+          <a:p>
+            <a:pPr algn="l"/>
+            <a:r>
+              <a:rPr sz="1500" b="0">
+                <a:solidFill>
+                  <a:srgbClr val="0D1B2A"/>
+                </a:solidFill>
+                <a:latin typeface="Oswald"/>
+              </a:rPr>
+              <a:t>Tools</a:t>
+            </a:r>
+          </a:p>
+        </p:txBody>
+      </p:sp>
+      <p:sp>
+        <p:nvSpPr>
+          <p:cNvPr id="26" name="TextBox 25"/>
+          <p:cNvSpPr txBox="1"/>
+          <p:nvPr/>
+        </p:nvSpPr>
+        <p:spPr>
+          <a:xfrm>
+            <a:off x="777240" y="3968496"/>
+            <a:ext cx="3593591" cy="365760"/>
+          </a:xfrm>
+          <a:prstGeom prst="rect">
+            <a:avLst/>
+          </a:prstGeom>
+          <a:noFill/>
+        </p:spPr>
+        <p:txBody>
+          <a:bodyPr wrap="square" anchor="t" lIns="0" rIns="0" tIns="0" bIns="0">
+            <a:spAutoFit/>
+          </a:bodyPr>
+          <a:lstStyle/>
+          <a:p>
+            <a:pPr algn="l"/>
+            <a:r>
+              <a:rPr sz="1000" b="0">
+                <a:solidFill>
+                  <a:srgbClr val="6B7B8C"/>
+                </a:solidFill>
+                <a:latin typeface="Roboto"/>
+              </a:rPr>
+              <a:t>Extend capability beyond the model: browsing, calling APIs, operating software.</a:t>
+            </a:r>
+          </a:p>
+        </p:txBody>
+      </p:sp>
+      <p:sp>
+        <p:nvSpPr>
+          <p:cNvPr id="27" name="Rectangle 26"/>
+          <p:cNvSpPr/>
+          <p:nvPr/>
+        </p:nvSpPr>
+        <p:spPr>
+          <a:xfrm>
+            <a:off x="4736592" y="3566160"/>
+            <a:ext cx="4005072" cy="969264"/>
+          </a:xfrm>
+          <a:prstGeom prst="rect">
+            <a:avLst/>
+          </a:prstGeom>
+          <a:solidFill>
+            <a:srgbClr val="FFFFFF"/>
+          </a:solidFill>
+          <a:ln w="9525">
+            <a:solidFill>
+              <a:srgbClr val="DDE5E9"/>
+            </a:solidFill>
+          </a:ln>
+          <a:effectLst/>
+        </p:spPr>
+        <p:style>
+          <a:lnRef idx="1">
+            <a:schemeClr val="accent1"/>
+          </a:lnRef>
+          <a:fillRef idx="3">
+            <a:schemeClr val="accent1"/>
+          </a:fillRef>
+          <a:effectRef idx="2">
+            <a:schemeClr val="accent1"/>
+          </a:effectRef>
+          <a:fontRef idx="minor">
+            <a:schemeClr val="lt1"/>
+          </a:fontRef>
+        </p:style>
+        <p:txBody>
+          <a:bodyPr rtlCol="0" anchor="ctr"/>
+          <a:lstStyle/>
+          <a:p>
+            <a:pPr algn="ctr"/>
+          </a:p>
+        </p:txBody>
+      </p:sp>
+      <p:sp>
+        <p:nvSpPr>
+          <p:cNvPr id="28" name="Rectangle 27"/>
+          <p:cNvSpPr/>
+          <p:nvPr/>
+        </p:nvSpPr>
+        <p:spPr>
+          <a:xfrm>
+            <a:off x="4736592" y="3566160"/>
+            <a:ext cx="54864" cy="969264"/>
+          </a:xfrm>
+          <a:prstGeom prst="rect">
+            <a:avLst/>
+          </a:prstGeom>
+          <a:solidFill>
+            <a:srgbClr val="06D6A0"/>
+          </a:solidFill>
+          <a:ln>
+            <a:noFill/>
+          </a:ln>
+          <a:effectLst/>
+        </p:spPr>
+        <p:style>
+          <a:lnRef idx="1">
+            <a:schemeClr val="accent1"/>
+          </a:lnRef>
+          <a:fillRef idx="3">
+            <a:schemeClr val="accent1"/>
+          </a:fillRef>
+          <a:effectRef idx="2">
+            <a:schemeClr val="accent1"/>
+          </a:effectRef>
+          <a:fontRef idx="minor">
+            <a:schemeClr val="lt1"/>
+          </a:fontRef>
+        </p:style>
+        <p:txBody>
+          <a:bodyPr rtlCol="0" anchor="ctr"/>
+          <a:lstStyle/>
+          <a:p>
+            <a:pPr algn="ctr"/>
+          </a:p>
+        </p:txBody>
+      </p:sp>
+      <p:sp>
+        <p:nvSpPr>
+          <p:cNvPr id="29" name="TextBox 28"/>
+          <p:cNvSpPr txBox="1"/>
+          <p:nvPr/>
+        </p:nvSpPr>
+        <p:spPr>
+          <a:xfrm>
+            <a:off x="4946904" y="3675888"/>
+            <a:ext cx="3593591" cy="274320"/>
+          </a:xfrm>
+          <a:prstGeom prst="rect">
+            <a:avLst/>
+          </a:prstGeom>
+          <a:noFill/>
+        </p:spPr>
+        <p:txBody>
+          <a:bodyPr wrap="square" anchor="t" lIns="0" rIns="0" tIns="0" bIns="0">
+            <a:spAutoFit/>
+          </a:bodyPr>
+          <a:lstStyle/>
+          <a:p>
+            <a:pPr algn="l"/>
+            <a:r>
+              <a:rPr sz="1500" b="0">
+                <a:solidFill>
+                  <a:srgbClr val="0D1B2A"/>
+                </a:solidFill>
+                <a:latin typeface="Oswald"/>
+              </a:rPr>
+              <a:t>Runtime</a:t>
+            </a:r>
+          </a:p>
+        </p:txBody>
+      </p:sp>
+      <p:sp>
+        <p:nvSpPr>
+          <p:cNvPr id="30" name="TextBox 29"/>
+          <p:cNvSpPr txBox="1"/>
+          <p:nvPr/>
+        </p:nvSpPr>
+        <p:spPr>
+          <a:xfrm>
+            <a:off x="4946904" y="3968496"/>
+            <a:ext cx="3593591" cy="365760"/>
+          </a:xfrm>
+          <a:prstGeom prst="rect">
+            <a:avLst/>
+          </a:prstGeom>
+          <a:noFill/>
+        </p:spPr>
+        <p:txBody>
+          <a:bodyPr wrap="square" anchor="t" lIns="0" rIns="0" tIns="0" bIns="0">
+            <a:spAutoFit/>
+          </a:bodyPr>
+          <a:lstStyle/>
+          <a:p>
+            <a:pPr algn="l"/>
+            <a:r>
+              <a:rPr sz="1000" b="0">
+                <a:solidFill>
+                  <a:srgbClr val="6B7B8C"/>
+                </a:solidFill>
+                <a:latin typeface="Roboto"/>
+              </a:rPr>
+              <a:t>Manages the execution loop — plan, act, observe, iterate toward the objective.</a:t>
+            </a:r>
+          </a:p>
+        </p:txBody>
+      </p:sp>
+      <p:sp>
+        <p:nvSpPr>
+          <p:cNvPr id="31" name="Rectangle 30"/>
+          <p:cNvSpPr/>
+          <p:nvPr/>
+        </p:nvSpPr>
+        <p:spPr>
+          <a:xfrm>
+            <a:off x="566928" y="4681727"/>
+            <a:ext cx="45720" cy="219456"/>
+          </a:xfrm>
+          <a:prstGeom prst="rect">
+            <a:avLst/>
+          </a:prstGeom>
+          <a:solidFill>
+            <a:srgbClr val="1B9AAA"/>
+          </a:solidFill>
+          <a:ln>
+            <a:noFill/>
+          </a:ln>
+          <a:effectLst/>
+        </p:spPr>
+        <p:style>
+          <a:lnRef idx="1">
+            <a:schemeClr val="accent1"/>
+          </a:lnRef>
+          <a:fillRef idx="3">
+            <a:schemeClr val="accent1"/>
+          </a:fillRef>
+          <a:effectRef idx="2">
+            <a:schemeClr val="accent1"/>
+          </a:effectRef>
+          <a:fontRef idx="minor">
+            <a:schemeClr val="lt1"/>
+          </a:fontRef>
+        </p:style>
+        <p:txBody>
+          <a:bodyPr rtlCol="0" anchor="ctr"/>
+          <a:lstStyle/>
+          <a:p>
+            <a:pPr algn="ctr"/>
+          </a:p>
+        </p:txBody>
+      </p:sp>
+      <p:sp>
+        <p:nvSpPr>
+          <p:cNvPr id="32" name="TextBox 31"/>
+          <p:cNvSpPr txBox="1"/>
+          <p:nvPr/>
+        </p:nvSpPr>
+        <p:spPr>
+          <a:xfrm>
+            <a:off x="713232" y="4663440"/>
+            <a:ext cx="7991856" cy="274320"/>
+          </a:xfrm>
+          <a:prstGeom prst="rect">
+            <a:avLst/>
+          </a:prstGeom>
+          <a:noFill/>
+        </p:spPr>
+        <p:txBody>
+          <a:bodyPr wrap="square" anchor="t" lIns="0" rIns="0" tIns="0" bIns="0">
+            <a:spAutoFit/>
+          </a:bodyPr>
+          <a:lstStyle/>
+          <a:p>
+            <a:pPr algn="l"/>
+            <a:r>
+              <a:rPr sz="1200" b="0">
+                <a:solidFill>
+                  <a:srgbClr val="0D1B2A"/>
+                </a:solidFill>
+                <a:latin typeface="Roboto"/>
+              </a:rPr>
+              <a:t>A model alone is not an agent: instructions, tools and a runtime make it one.</a:t>
+            </a:r>
           </a:p>
         </p:txBody>
       </p:sp>

--- a/ai-terminology-hell.pptx
+++ b/ai-terminology-hell.pptx
@@ -10,7 +10,7 @@
   <p:sldIdLst>
     <p:sldId id="256" r:id="rId2"/>
     <p:sldId id="336" r:id="rId3"/>
-    <p:sldId id="257" r:id="rId4"/>
+    <p:sldId id="437" r:id="rId4"/>
     <p:sldId id="421" r:id="rId5"/>
     <p:sldId id="422" r:id="rId6"/>
     <p:sldId id="355" r:id="rId7"/>
@@ -31,17 +31,17 @@
     <p:sldId id="403" r:id="rId22"/>
     <p:sldId id="404" r:id="rId23"/>
     <p:sldId id="426" r:id="rId24"/>
-    <p:sldId id="405" r:id="rId25"/>
+    <p:sldId id="442" r:id="rId25"/>
     <p:sldId id="431" r:id="rId26"/>
-    <p:sldId id="407" r:id="rId27"/>
+    <p:sldId id="438" r:id="rId27"/>
     <p:sldId id="430" r:id="rId28"/>
-    <p:sldId id="413" r:id="rId29"/>
+    <p:sldId id="441" r:id="rId29"/>
     <p:sldId id="432" r:id="rId30"/>
     <p:sldId id="427" r:id="rId31"/>
     <p:sldId id="433" r:id="rId32"/>
     <p:sldId id="416" r:id="rId33"/>
     <p:sldId id="435" r:id="rId34"/>
-    <p:sldId id="436" r:id="rId35"/>
+    <p:sldId id="440" r:id="rId35"/>
     <p:sldId id="419" r:id="rId36"/>
     <p:sldId id="434" r:id="rId37"/>
     <p:sldId id="429" r:id="rId38"/>
@@ -342,93 +342,6 @@
             <a:fld id="{F7021451-1387-4CA6-816F-3879F97B5CBC}" type="slidenum">
               <a:rPr lang="en-US"/>
               <a:t>1</a:t>
-            </a:fld>
-            <a:endParaRPr lang="en-US"/>
-          </a:p>
-        </p:txBody>
-      </p:sp>
-    </p:spTree>
-    <p:extLst>
-      <p:ext uri="{BB962C8B-B14F-4D97-AF65-F5344CB8AC3E}">
-        <p14:creationId xmlns:p14="http://schemas.microsoft.com/office/powerpoint/2010/main" val="1024086991"/>
-      </p:ext>
-    </p:extLst>
-  </p:cSld>
-  <p:clrMapOvr>
-    <a:masterClrMapping/>
-  </p:clrMapOvr>
-</p:notes>
-</file>
-
-<file path=ppt/notesSlides/notesSlide2.xml><?xml version="1.0" encoding="utf-8"?>
-<p:notes xmlns:a="http://schemas.openxmlformats.org/drawingml/2006/main" xmlns:r="http://schemas.openxmlformats.org/officeDocument/2006/relationships" xmlns:p="http://schemas.openxmlformats.org/presentationml/2006/main">
-  <p:cSld>
-    <p:spTree>
-      <p:nvGrpSpPr>
-        <p:cNvPr id="1" name=""/>
-        <p:cNvGrpSpPr/>
-        <p:nvPr/>
-      </p:nvGrpSpPr>
-      <p:grpSpPr>
-        <a:xfrm>
-          <a:off x="0" y="0"/>
-          <a:ext cx="0" cy="0"/>
-          <a:chOff x="0" y="0"/>
-          <a:chExt cx="0" cy="0"/>
-        </a:xfrm>
-      </p:grpSpPr>
-      <p:sp>
-        <p:nvSpPr>
-          <p:cNvPr id="2" name="Slide Image Placeholder 1"/>
-          <p:cNvSpPr>
-            <a:spLocks noGrp="1" noRot="1" noChangeAspect="1"/>
-          </p:cNvSpPr>
-          <p:nvPr>
-            <p:ph type="sldImg"/>
-          </p:nvPr>
-        </p:nvSpPr>
-        <p:spPr/>
-      </p:sp>
-      <p:sp>
-        <p:nvSpPr>
-          <p:cNvPr id="3" name="Notes Placeholder 2"/>
-          <p:cNvSpPr>
-            <a:spLocks noGrp="1"/>
-          </p:cNvSpPr>
-          <p:nvPr>
-            <p:ph type="body" idx="1"/>
-          </p:nvPr>
-        </p:nvSpPr>
-        <p:spPr/>
-        <p:txBody>
-          <a:bodyPr/>
-          <a:lstStyle/>
-          <a:p>
-            <a:r>
-              <a:rPr lang="en-US" dirty="0"/>
-              <a:t>Foundations. Note that only the last step is not a pure subset relationship.</a:t>
-            </a:r>
-          </a:p>
-        </p:txBody>
-      </p:sp>
-      <p:sp>
-        <p:nvSpPr>
-          <p:cNvPr id="4" name="Slide Number Placeholder 3"/>
-          <p:cNvSpPr>
-            <a:spLocks noGrp="1"/>
-          </p:cNvSpPr>
-          <p:nvPr>
-            <p:ph type="sldNum" sz="quarter" idx="10"/>
-          </p:nvPr>
-        </p:nvSpPr>
-        <p:spPr/>
-        <p:txBody>
-          <a:bodyPr/>
-          <a:lstStyle/>
-          <a:p>
-            <a:fld id="{F7021451-1387-4CA6-816F-3879F97B5CBC}" type="slidenum">
-              <a:rPr lang="en-US"/>
-              <a:t>3</a:t>
             </a:fld>
             <a:endParaRPr lang="en-US"/>
           </a:p>
@@ -15517,7 +15430,7 @@
           <a:p>
             <a:pPr algn="l"/>
             <a:r>
-              <a:rPr sz="900" b="0">
+              <a:rPr sz="900" b="0" dirty="0">
                 <a:solidFill>
                   <a:srgbClr val="6B7B8C"/>
                 </a:solidFill>
@@ -15536,8 +15449,8 @@
         </p:nvSpPr>
         <p:spPr>
           <a:xfrm>
-            <a:off x="841248" y="4297680"/>
-            <a:ext cx="4754880" cy="201168"/>
+            <a:off x="713232" y="4319147"/>
+            <a:ext cx="5010912" cy="138499"/>
           </a:xfrm>
           <a:prstGeom prst="rect">
             <a:avLst/>
@@ -15552,7 +15465,7 @@
           <a:p>
             <a:pPr algn="l"/>
             <a:r>
-              <a:rPr sz="900" b="0">
+              <a:rPr sz="900" b="0" dirty="0">
                 <a:solidFill>
                   <a:srgbClr val="6B7B8C"/>
                 </a:solidFill>
@@ -33390,156 +33303,6 @@
       </p:grpSpPr>
       <p:sp>
         <p:nvSpPr>
-          <p:cNvPr id="2" name="Rectangle 1"/>
-          <p:cNvSpPr/>
-          <p:nvPr/>
-        </p:nvSpPr>
-        <p:spPr>
-          <a:xfrm>
-            <a:off x="0" y="0"/>
-            <a:ext cx="201168" cy="5143500"/>
-          </a:xfrm>
-          <a:prstGeom prst="rect">
-            <a:avLst/>
-          </a:prstGeom>
-          <a:solidFill>
-            <a:srgbClr val="0D1B2A"/>
-          </a:solidFill>
-          <a:ln>
-            <a:noFill/>
-          </a:ln>
-          <a:effectLst/>
-        </p:spPr>
-        <p:style>
-          <a:lnRef idx="1">
-            <a:schemeClr val="accent1"/>
-          </a:lnRef>
-          <a:fillRef idx="3">
-            <a:schemeClr val="accent1"/>
-          </a:fillRef>
-          <a:effectRef idx="2">
-            <a:schemeClr val="accent1"/>
-          </a:effectRef>
-          <a:fontRef idx="minor">
-            <a:schemeClr val="lt1"/>
-          </a:fontRef>
-        </p:style>
-        <p:txBody>
-          <a:bodyPr rtlCol="0" anchor="ctr"/>
-          <a:lstStyle/>
-          <a:p>
-            <a:pPr algn="ctr"/>
-            <a:endParaRPr/>
-          </a:p>
-        </p:txBody>
-      </p:sp>
-      <p:sp>
-        <p:nvSpPr>
-          <p:cNvPr id="3" name="TextBox 2"/>
-          <p:cNvSpPr txBox="1"/>
-          <p:nvPr/>
-        </p:nvSpPr>
-        <p:spPr>
-          <a:xfrm>
-            <a:off x="566928" y="329184"/>
-            <a:ext cx="8138160" cy="274320"/>
-          </a:xfrm>
-          <a:prstGeom prst="rect">
-            <a:avLst/>
-          </a:prstGeom>
-          <a:noFill/>
-        </p:spPr>
-        <p:txBody>
-          <a:bodyPr wrap="square" lIns="0" tIns="0" rIns="0" bIns="0" anchor="t">
-            <a:spAutoFit/>
-          </a:bodyPr>
-          <a:lstStyle/>
-          <a:p>
-            <a:pPr algn="l"/>
-            <a:r>
-              <a:rPr sz="1100" b="0" spc="300">
-                <a:solidFill>
-                  <a:srgbClr val="1B9AAA"/>
-                </a:solidFill>
-                <a:latin typeface="JetBrains Mono"/>
-              </a:rPr>
-              <a:t>THE SHIFT</a:t>
-            </a:r>
-          </a:p>
-        </p:txBody>
-      </p:sp>
-      <p:sp>
-        <p:nvSpPr>
-          <p:cNvPr id="4" name="slide-chatbot-vs-agent"/>
-          <p:cNvSpPr txBox="1"/>
-          <p:nvPr/>
-        </p:nvSpPr>
-        <p:spPr>
-          <a:xfrm>
-            <a:off x="566928" y="603504"/>
-            <a:ext cx="8138160" cy="658368"/>
-          </a:xfrm>
-          <a:prstGeom prst="rect">
-            <a:avLst/>
-          </a:prstGeom>
-          <a:noFill/>
-        </p:spPr>
-        <p:txBody>
-          <a:bodyPr wrap="square" lIns="0" tIns="0" rIns="0" bIns="0" anchor="t">
-            <a:spAutoFit/>
-          </a:bodyPr>
-          <a:lstStyle/>
-          <a:p>
-            <a:pPr algn="l"/>
-            <a:r>
-              <a:rPr sz="3200" b="0">
-                <a:solidFill>
-                  <a:srgbClr val="0D1B2A"/>
-                </a:solidFill>
-                <a:latin typeface="Oswald"/>
-              </a:rPr>
-              <a:t>From just answering to actually doing</a:t>
-            </a:r>
-          </a:p>
-        </p:txBody>
-      </p:sp>
-      <p:sp>
-        <p:nvSpPr>
-          <p:cNvPr id="5" name="TextBox 4"/>
-          <p:cNvSpPr txBox="1"/>
-          <p:nvPr/>
-        </p:nvSpPr>
-        <p:spPr>
-          <a:xfrm>
-            <a:off x="566928" y="1298448"/>
-            <a:ext cx="8138160" cy="457200"/>
-          </a:xfrm>
-          <a:prstGeom prst="rect">
-            <a:avLst/>
-          </a:prstGeom>
-          <a:noFill/>
-        </p:spPr>
-        <p:txBody>
-          <a:bodyPr wrap="square" lIns="0" tIns="0" rIns="0" bIns="0" anchor="t">
-            <a:spAutoFit/>
-          </a:bodyPr>
-          <a:lstStyle/>
-          <a:p>
-            <a:pPr algn="l"/>
-            <a:r>
-              <a:rPr sz="1150" b="0">
-                <a:solidFill>
-                  <a:srgbClr val="14293D"/>
-                </a:solidFill>
-                <a:latin typeface="Roboto"/>
-              </a:rPr>
-              <a:t>LLMs generate text and answer queries. AI Agents can set or interpret goals, plan and sequence actions, use tools (like web browsers, code, or APIs), make decisions based on feedback and adapt over time to complete tasks.</a:t>
-            </a:r>
-          </a:p>
-        </p:txBody>
-      </p:sp>
-      <p:sp>
-        <p:nvSpPr>
           <p:cNvPr id="6" name="Rectangle 5"/>
           <p:cNvSpPr/>
           <p:nvPr/>
@@ -33587,23 +33350,30 @@
       </p:sp>
       <p:sp>
         <p:nvSpPr>
-          <p:cNvPr id="7" name="Rectangle 6"/>
+          <p:cNvPr id="12" name="Rounded Rectangle 11"/>
           <p:cNvSpPr/>
           <p:nvPr/>
         </p:nvSpPr>
         <p:spPr>
           <a:xfrm>
-            <a:off x="566928" y="1920240"/>
-            <a:ext cx="54864" cy="2606040"/>
-          </a:xfrm>
-          <a:prstGeom prst="rect">
-            <a:avLst/>
+            <a:off x="777240" y="2312517"/>
+            <a:ext cx="3584448" cy="1856231"/>
+          </a:xfrm>
+          <a:prstGeom prst="roundRect">
+            <a:avLst>
+              <a:gd name="adj" fmla="val 6172"/>
+            </a:avLst>
           </a:prstGeom>
           <a:solidFill>
-            <a:srgbClr val="1B9AAA"/>
+            <a:srgbClr val="FFFFFF"/>
           </a:solidFill>
-          <a:ln>
-            <a:noFill/>
+          <a:ln w="9525">
+            <a:solidFill>
+              <a:schemeClr val="tx1">
+                <a:lumMod val="95000"/>
+                <a:lumOff val="5000"/>
+              </a:schemeClr>
+            </a:solidFill>
           </a:ln>
           <a:effectLst/>
         </p:spPr>
@@ -33632,36 +33402,54 @@
       </p:sp>
       <p:sp>
         <p:nvSpPr>
-          <p:cNvPr id="8" name="TextBox 7"/>
-          <p:cNvSpPr txBox="1"/>
-          <p:nvPr/>
-        </p:nvSpPr>
-        <p:spPr>
-          <a:xfrm>
-            <a:off x="777240" y="2011680"/>
-            <a:ext cx="3639312" cy="274320"/>
-          </a:xfrm>
-          <a:prstGeom prst="rect">
-            <a:avLst/>
-          </a:prstGeom>
-          <a:noFill/>
-        </p:spPr>
-        <p:txBody>
-          <a:bodyPr wrap="square" lIns="0" tIns="0" rIns="0" bIns="0" anchor="t">
-            <a:spAutoFit/>
-          </a:bodyPr>
-          <a:lstStyle/>
-          <a:p>
-            <a:pPr algn="l"/>
-            <a:r>
-              <a:rPr sz="1500" b="0">
-                <a:solidFill>
-                  <a:srgbClr val="0D1B2A"/>
-                </a:solidFill>
-                <a:latin typeface="Oswald"/>
-              </a:rPr>
-              <a:t>Generative AI chatbot</a:t>
-            </a:r>
+          <p:cNvPr id="13" name="Round Same Side Corner Rectangle 12"/>
+          <p:cNvSpPr/>
+          <p:nvPr/>
+        </p:nvSpPr>
+        <p:spPr>
+          <a:xfrm>
+            <a:off x="777240" y="2312517"/>
+            <a:ext cx="3584448" cy="292608"/>
+          </a:xfrm>
+          <a:prstGeom prst="round2SameRect">
+            <a:avLst>
+              <a:gd name="adj1" fmla="val 25934"/>
+              <a:gd name="adj2" fmla="val 0"/>
+            </a:avLst>
+          </a:prstGeom>
+          <a:solidFill>
+            <a:srgbClr val="F4F7F8"/>
+          </a:solidFill>
+          <a:ln w="9525">
+            <a:solidFill>
+              <a:schemeClr val="tx1">
+                <a:lumMod val="95000"/>
+                <a:lumOff val="5000"/>
+              </a:schemeClr>
+            </a:solidFill>
+          </a:ln>
+          <a:effectLst/>
+        </p:spPr>
+        <p:style>
+          <a:lnRef idx="1">
+            <a:schemeClr val="accent1"/>
+          </a:lnRef>
+          <a:fillRef idx="3">
+            <a:schemeClr val="accent1"/>
+          </a:fillRef>
+          <a:effectRef idx="2">
+            <a:schemeClr val="accent1"/>
+          </a:effectRef>
+          <a:fontRef idx="minor">
+            <a:schemeClr val="lt1"/>
+          </a:fontRef>
+        </p:style>
+        <p:txBody>
+          <a:bodyPr rtlCol="0" anchor="ctr"/>
+          <a:lstStyle/>
+          <a:p>
+            <a:pPr algn="ctr"/>
+            <a:endParaRPr/>
           </a:p>
         </p:txBody>
       </p:sp>
@@ -33714,6 +33502,341 @@
       </p:sp>
       <p:sp>
         <p:nvSpPr>
+          <p:cNvPr id="17" name="Rounded Rectangle 16"/>
+          <p:cNvSpPr/>
+          <p:nvPr/>
+        </p:nvSpPr>
+        <p:spPr>
+          <a:xfrm>
+            <a:off x="4910328" y="2312517"/>
+            <a:ext cx="3584448" cy="1856231"/>
+          </a:xfrm>
+          <a:prstGeom prst="roundRect">
+            <a:avLst>
+              <a:gd name="adj" fmla="val 6172"/>
+            </a:avLst>
+          </a:prstGeom>
+          <a:solidFill>
+            <a:srgbClr val="FFFFFF"/>
+          </a:solidFill>
+          <a:ln w="9525">
+            <a:solidFill>
+              <a:schemeClr val="tx1">
+                <a:lumMod val="95000"/>
+                <a:lumOff val="5000"/>
+              </a:schemeClr>
+            </a:solidFill>
+          </a:ln>
+          <a:effectLst/>
+        </p:spPr>
+        <p:style>
+          <a:lnRef idx="1">
+            <a:schemeClr val="accent1"/>
+          </a:lnRef>
+          <a:fillRef idx="3">
+            <a:schemeClr val="accent1"/>
+          </a:fillRef>
+          <a:effectRef idx="2">
+            <a:schemeClr val="accent1"/>
+          </a:effectRef>
+          <a:fontRef idx="minor">
+            <a:schemeClr val="lt1"/>
+          </a:fontRef>
+        </p:style>
+        <p:txBody>
+          <a:bodyPr rtlCol="0" anchor="ctr"/>
+          <a:lstStyle/>
+          <a:p>
+            <a:pPr algn="ctr"/>
+            <a:endParaRPr/>
+          </a:p>
+        </p:txBody>
+      </p:sp>
+      <p:sp>
+        <p:nvSpPr>
+          <p:cNvPr id="18" name="Round Same Side Corner Rectangle 17"/>
+          <p:cNvSpPr/>
+          <p:nvPr/>
+        </p:nvSpPr>
+        <p:spPr>
+          <a:xfrm>
+            <a:off x="4910328" y="2312517"/>
+            <a:ext cx="3584448" cy="292608"/>
+          </a:xfrm>
+          <a:prstGeom prst="round2SameRect">
+            <a:avLst>
+              <a:gd name="adj1" fmla="val 25934"/>
+              <a:gd name="adj2" fmla="val 0"/>
+            </a:avLst>
+          </a:prstGeom>
+          <a:solidFill>
+            <a:srgbClr val="F4F7F8"/>
+          </a:solidFill>
+          <a:ln w="9525">
+            <a:solidFill>
+              <a:schemeClr val="tx1">
+                <a:lumMod val="95000"/>
+                <a:lumOff val="5000"/>
+              </a:schemeClr>
+            </a:solidFill>
+          </a:ln>
+          <a:effectLst/>
+        </p:spPr>
+        <p:style>
+          <a:lnRef idx="1">
+            <a:schemeClr val="accent1"/>
+          </a:lnRef>
+          <a:fillRef idx="3">
+            <a:schemeClr val="accent1"/>
+          </a:fillRef>
+          <a:effectRef idx="2">
+            <a:schemeClr val="accent1"/>
+          </a:effectRef>
+          <a:fontRef idx="minor">
+            <a:schemeClr val="lt1"/>
+          </a:fontRef>
+        </p:style>
+        <p:txBody>
+          <a:bodyPr rtlCol="0" anchor="ctr"/>
+          <a:lstStyle/>
+          <a:p>
+            <a:pPr algn="ctr"/>
+            <a:endParaRPr/>
+          </a:p>
+        </p:txBody>
+      </p:sp>
+      <p:sp>
+        <p:nvSpPr>
+          <p:cNvPr id="2" name="Rectangle 1"/>
+          <p:cNvSpPr/>
+          <p:nvPr/>
+        </p:nvSpPr>
+        <p:spPr>
+          <a:xfrm>
+            <a:off x="0" y="0"/>
+            <a:ext cx="201168" cy="5143500"/>
+          </a:xfrm>
+          <a:prstGeom prst="rect">
+            <a:avLst/>
+          </a:prstGeom>
+          <a:solidFill>
+            <a:srgbClr val="0D1B2A"/>
+          </a:solidFill>
+          <a:ln>
+            <a:noFill/>
+          </a:ln>
+          <a:effectLst/>
+        </p:spPr>
+        <p:style>
+          <a:lnRef idx="1">
+            <a:schemeClr val="accent1"/>
+          </a:lnRef>
+          <a:fillRef idx="3">
+            <a:schemeClr val="accent1"/>
+          </a:fillRef>
+          <a:effectRef idx="2">
+            <a:schemeClr val="accent1"/>
+          </a:effectRef>
+          <a:fontRef idx="minor">
+            <a:schemeClr val="lt1"/>
+          </a:fontRef>
+        </p:style>
+        <p:txBody>
+          <a:bodyPr rtlCol="0" anchor="ctr"/>
+          <a:lstStyle/>
+          <a:p>
+            <a:pPr algn="ctr"/>
+            <a:endParaRPr/>
+          </a:p>
+        </p:txBody>
+      </p:sp>
+      <p:sp>
+        <p:nvSpPr>
+          <p:cNvPr id="3" name="TextBox 2"/>
+          <p:cNvSpPr txBox="1"/>
+          <p:nvPr/>
+        </p:nvSpPr>
+        <p:spPr>
+          <a:xfrm>
+            <a:off x="566928" y="329184"/>
+            <a:ext cx="8138160" cy="274320"/>
+          </a:xfrm>
+          <a:prstGeom prst="rect">
+            <a:avLst/>
+          </a:prstGeom>
+          <a:noFill/>
+        </p:spPr>
+        <p:txBody>
+          <a:bodyPr wrap="square" lIns="0" tIns="0" rIns="0" bIns="0" anchor="t">
+            <a:spAutoFit/>
+          </a:bodyPr>
+          <a:lstStyle/>
+          <a:p>
+            <a:pPr algn="l"/>
+            <a:r>
+              <a:rPr sz="1100" b="0" spc="300">
+                <a:solidFill>
+                  <a:srgbClr val="1B9AAA"/>
+                </a:solidFill>
+                <a:latin typeface="JetBrains Mono"/>
+              </a:rPr>
+              <a:t>THE SHIFT</a:t>
+            </a:r>
+          </a:p>
+        </p:txBody>
+      </p:sp>
+      <p:sp>
+        <p:nvSpPr>
+          <p:cNvPr id="4" name="slide-chatbot-vs-agent"/>
+          <p:cNvSpPr txBox="1"/>
+          <p:nvPr/>
+        </p:nvSpPr>
+        <p:spPr>
+          <a:xfrm>
+            <a:off x="566928" y="603504"/>
+            <a:ext cx="8138160" cy="658368"/>
+          </a:xfrm>
+          <a:prstGeom prst="rect">
+            <a:avLst/>
+          </a:prstGeom>
+          <a:noFill/>
+        </p:spPr>
+        <p:txBody>
+          <a:bodyPr wrap="square" lIns="0" tIns="0" rIns="0" bIns="0" anchor="t">
+            <a:spAutoFit/>
+          </a:bodyPr>
+          <a:lstStyle/>
+          <a:p>
+            <a:pPr algn="l"/>
+            <a:r>
+              <a:rPr sz="3200" b="0">
+                <a:solidFill>
+                  <a:srgbClr val="0D1B2A"/>
+                </a:solidFill>
+                <a:latin typeface="Oswald"/>
+              </a:rPr>
+              <a:t>From just answering to actually doing</a:t>
+            </a:r>
+          </a:p>
+        </p:txBody>
+      </p:sp>
+      <p:sp>
+        <p:nvSpPr>
+          <p:cNvPr id="5" name="TextBox 4"/>
+          <p:cNvSpPr txBox="1"/>
+          <p:nvPr/>
+        </p:nvSpPr>
+        <p:spPr>
+          <a:xfrm>
+            <a:off x="566928" y="1298448"/>
+            <a:ext cx="8138160" cy="457200"/>
+          </a:xfrm>
+          <a:prstGeom prst="rect">
+            <a:avLst/>
+          </a:prstGeom>
+          <a:noFill/>
+        </p:spPr>
+        <p:txBody>
+          <a:bodyPr wrap="square" lIns="0" tIns="0" rIns="0" bIns="0" anchor="t">
+            <a:spAutoFit/>
+          </a:bodyPr>
+          <a:lstStyle/>
+          <a:p>
+            <a:pPr algn="l"/>
+            <a:r>
+              <a:rPr sz="1150" b="0">
+                <a:solidFill>
+                  <a:srgbClr val="14293D"/>
+                </a:solidFill>
+                <a:latin typeface="Roboto"/>
+              </a:rPr>
+              <a:t>LLMs generate text and answer queries. AI Agents can set or interpret goals, plan and sequence actions, use tools (like web browsers, code, or APIs), make decisions based on feedback and adapt over time to complete tasks.</a:t>
+            </a:r>
+          </a:p>
+        </p:txBody>
+      </p:sp>
+      <p:sp>
+        <p:nvSpPr>
+          <p:cNvPr id="7" name="Rectangle 6"/>
+          <p:cNvSpPr/>
+          <p:nvPr/>
+        </p:nvSpPr>
+        <p:spPr>
+          <a:xfrm>
+            <a:off x="566928" y="1920240"/>
+            <a:ext cx="54864" cy="2606040"/>
+          </a:xfrm>
+          <a:prstGeom prst="rect">
+            <a:avLst/>
+          </a:prstGeom>
+          <a:solidFill>
+            <a:srgbClr val="1B9AAA"/>
+          </a:solidFill>
+          <a:ln>
+            <a:noFill/>
+          </a:ln>
+          <a:effectLst/>
+        </p:spPr>
+        <p:style>
+          <a:lnRef idx="1">
+            <a:schemeClr val="accent1"/>
+          </a:lnRef>
+          <a:fillRef idx="3">
+            <a:schemeClr val="accent1"/>
+          </a:fillRef>
+          <a:effectRef idx="2">
+            <a:schemeClr val="accent1"/>
+          </a:effectRef>
+          <a:fontRef idx="minor">
+            <a:schemeClr val="lt1"/>
+          </a:fontRef>
+        </p:style>
+        <p:txBody>
+          <a:bodyPr rtlCol="0" anchor="ctr"/>
+          <a:lstStyle/>
+          <a:p>
+            <a:pPr algn="ctr"/>
+            <a:endParaRPr/>
+          </a:p>
+        </p:txBody>
+      </p:sp>
+      <p:sp>
+        <p:nvSpPr>
+          <p:cNvPr id="8" name="TextBox 7"/>
+          <p:cNvSpPr txBox="1"/>
+          <p:nvPr/>
+        </p:nvSpPr>
+        <p:spPr>
+          <a:xfrm>
+            <a:off x="777240" y="2011680"/>
+            <a:ext cx="3639312" cy="274320"/>
+          </a:xfrm>
+          <a:prstGeom prst="rect">
+            <a:avLst/>
+          </a:prstGeom>
+          <a:noFill/>
+        </p:spPr>
+        <p:txBody>
+          <a:bodyPr wrap="square" lIns="0" tIns="0" rIns="0" bIns="0" anchor="t">
+            <a:spAutoFit/>
+          </a:bodyPr>
+          <a:lstStyle/>
+          <a:p>
+            <a:pPr algn="l"/>
+            <a:r>
+              <a:rPr sz="1500" b="0">
+                <a:solidFill>
+                  <a:srgbClr val="0D1B2A"/>
+                </a:solidFill>
+                <a:latin typeface="Oswald"/>
+              </a:rPr>
+              <a:t>Generative AI chatbot</a:t>
+            </a:r>
+          </a:p>
+        </p:txBody>
+      </p:sp>
+      <p:sp>
+        <p:nvSpPr>
           <p:cNvPr id="10" name="Rectangle 9"/>
           <p:cNvSpPr/>
           <p:nvPr/>
@@ -33794,154 +33917,13 @@
       </p:sp>
       <p:sp>
         <p:nvSpPr>
-          <p:cNvPr id="12" name="Rounded Rectangle 11"/>
+          <p:cNvPr id="14" name="Oval 13"/>
           <p:cNvSpPr/>
           <p:nvPr/>
         </p:nvSpPr>
         <p:spPr>
           <a:xfrm>
-            <a:off x="777240" y="2304288"/>
-            <a:ext cx="3584448" cy="1481328"/>
-          </a:xfrm>
-          <a:prstGeom prst="roundRect">
-            <a:avLst>
-              <a:gd name="adj" fmla="val 6172"/>
-            </a:avLst>
-          </a:prstGeom>
-          <a:solidFill>
-            <a:srgbClr val="FFFFFF"/>
-          </a:solidFill>
-          <a:ln w="9525">
-            <a:solidFill>
-              <a:srgbClr val="DDE5E9"/>
-            </a:solidFill>
-          </a:ln>
-          <a:effectLst/>
-        </p:spPr>
-        <p:style>
-          <a:lnRef idx="1">
-            <a:schemeClr val="accent1"/>
-          </a:lnRef>
-          <a:fillRef idx="3">
-            <a:schemeClr val="accent1"/>
-          </a:fillRef>
-          <a:effectRef idx="2">
-            <a:schemeClr val="accent1"/>
-          </a:effectRef>
-          <a:fontRef idx="minor">
-            <a:schemeClr val="lt1"/>
-          </a:fontRef>
-        </p:style>
-        <p:txBody>
-          <a:bodyPr rtlCol="0" anchor="ctr"/>
-          <a:lstStyle/>
-          <a:p>
-            <a:pPr algn="ctr"/>
-            <a:endParaRPr/>
-          </a:p>
-        </p:txBody>
-      </p:sp>
-      <p:sp>
-        <p:nvSpPr>
-          <p:cNvPr id="13" name="Rounded Rectangle 12"/>
-          <p:cNvSpPr/>
-          <p:nvPr/>
-        </p:nvSpPr>
-        <p:spPr>
-          <a:xfrm>
-            <a:off x="777240" y="2304288"/>
-            <a:ext cx="3584448" cy="274320"/>
-          </a:xfrm>
-          <a:prstGeom prst="roundRect">
-            <a:avLst>
-              <a:gd name="adj" fmla="val 33333"/>
-            </a:avLst>
-          </a:prstGeom>
-          <a:solidFill>
-            <a:srgbClr val="F4F7F8"/>
-          </a:solidFill>
-          <a:ln>
-            <a:noFill/>
-          </a:ln>
-          <a:effectLst/>
-        </p:spPr>
-        <p:style>
-          <a:lnRef idx="1">
-            <a:schemeClr val="accent1"/>
-          </a:lnRef>
-          <a:fillRef idx="3">
-            <a:schemeClr val="accent1"/>
-          </a:fillRef>
-          <a:effectRef idx="2">
-            <a:schemeClr val="accent1"/>
-          </a:effectRef>
-          <a:fontRef idx="minor">
-            <a:schemeClr val="lt1"/>
-          </a:fontRef>
-        </p:style>
-        <p:txBody>
-          <a:bodyPr rtlCol="0" anchor="ctr"/>
-          <a:lstStyle/>
-          <a:p>
-            <a:pPr algn="ctr"/>
-            <a:endParaRPr/>
-          </a:p>
-        </p:txBody>
-      </p:sp>
-      <p:sp>
-        <p:nvSpPr>
-          <p:cNvPr id="14" name="Rectangle 13"/>
-          <p:cNvSpPr/>
-          <p:nvPr/>
-        </p:nvSpPr>
-        <p:spPr>
-          <a:xfrm>
-            <a:off x="777240" y="2487168"/>
-            <a:ext cx="3584448" cy="91440"/>
-          </a:xfrm>
-          <a:prstGeom prst="rect">
-            <a:avLst/>
-          </a:prstGeom>
-          <a:solidFill>
-            <a:srgbClr val="F4F7F8"/>
-          </a:solidFill>
-          <a:ln>
-            <a:noFill/>
-          </a:ln>
-          <a:effectLst/>
-        </p:spPr>
-        <p:style>
-          <a:lnRef idx="1">
-            <a:schemeClr val="accent1"/>
-          </a:lnRef>
-          <a:fillRef idx="3">
-            <a:schemeClr val="accent1"/>
-          </a:fillRef>
-          <a:effectRef idx="2">
-            <a:schemeClr val="accent1"/>
-          </a:effectRef>
-          <a:fontRef idx="minor">
-            <a:schemeClr val="lt1"/>
-          </a:fontRef>
-        </p:style>
-        <p:txBody>
-          <a:bodyPr rtlCol="0" anchor="ctr"/>
-          <a:lstStyle/>
-          <a:p>
-            <a:pPr algn="ctr"/>
-            <a:endParaRPr/>
-          </a:p>
-        </p:txBody>
-      </p:sp>
-      <p:sp>
-        <p:nvSpPr>
-          <p:cNvPr id="15" name="Oval 14"/>
-          <p:cNvSpPr/>
-          <p:nvPr/>
-        </p:nvSpPr>
-        <p:spPr>
-          <a:xfrm>
-            <a:off x="868680" y="2359152"/>
+            <a:off x="868680" y="2377440"/>
             <a:ext cx="164592" cy="164592"/>
           </a:xfrm>
           <a:prstGeom prst="ellipse">
@@ -33984,13 +33966,13 @@
       </p:sp>
       <p:sp>
         <p:nvSpPr>
-          <p:cNvPr id="16" name="TextBox 15"/>
+          <p:cNvPr id="15" name="TextBox 14"/>
           <p:cNvSpPr txBox="1"/>
           <p:nvPr/>
         </p:nvSpPr>
         <p:spPr>
           <a:xfrm>
-            <a:off x="868680" y="2386584"/>
+            <a:off x="868680" y="2404872"/>
             <a:ext cx="164592" cy="128016"/>
           </a:xfrm>
           <a:prstGeom prst="rect">
@@ -34019,13 +34001,13 @@
       </p:sp>
       <p:sp>
         <p:nvSpPr>
-          <p:cNvPr id="17" name="TextBox 16"/>
+          <p:cNvPr id="16" name="TextBox 15"/>
           <p:cNvSpPr txBox="1"/>
           <p:nvPr/>
         </p:nvSpPr>
         <p:spPr>
           <a:xfrm>
-            <a:off x="1088136" y="2368296"/>
+            <a:off x="1088136" y="2386584"/>
             <a:ext cx="1463040" cy="164592"/>
           </a:xfrm>
           <a:prstGeom prst="rect">
@@ -34054,13 +34036,132 @@
       </p:sp>
       <p:sp>
         <p:nvSpPr>
-          <p:cNvPr id="18" name="Rounded Rectangle 17"/>
+          <p:cNvPr id="19" name="Oval 18"/>
           <p:cNvSpPr/>
           <p:nvPr/>
         </p:nvSpPr>
         <p:spPr>
           <a:xfrm>
-            <a:off x="1344168" y="2688336"/>
+            <a:off x="5001768" y="2377440"/>
+            <a:ext cx="164592" cy="164592"/>
+          </a:xfrm>
+          <a:prstGeom prst="ellipse">
+            <a:avLst/>
+          </a:prstGeom>
+          <a:solidFill>
+            <a:srgbClr val="1B9AAA">
+              <a:alpha val="100000"/>
+            </a:srgbClr>
+          </a:solidFill>
+          <a:ln w="6350">
+            <a:solidFill>
+              <a:srgbClr val="1B9AAA"/>
+            </a:solidFill>
+          </a:ln>
+          <a:effectLst/>
+        </p:spPr>
+        <p:style>
+          <a:lnRef idx="1">
+            <a:schemeClr val="accent1"/>
+          </a:lnRef>
+          <a:fillRef idx="3">
+            <a:schemeClr val="accent1"/>
+          </a:fillRef>
+          <a:effectRef idx="2">
+            <a:schemeClr val="accent1"/>
+          </a:effectRef>
+          <a:fontRef idx="minor">
+            <a:schemeClr val="lt1"/>
+          </a:fontRef>
+        </p:style>
+        <p:txBody>
+          <a:bodyPr rtlCol="0" anchor="ctr"/>
+          <a:lstStyle/>
+          <a:p>
+            <a:pPr algn="ctr"/>
+            <a:endParaRPr/>
+          </a:p>
+        </p:txBody>
+      </p:sp>
+      <p:sp>
+        <p:nvSpPr>
+          <p:cNvPr id="20" name="TextBox 19"/>
+          <p:cNvSpPr txBox="1"/>
+          <p:nvPr/>
+        </p:nvSpPr>
+        <p:spPr>
+          <a:xfrm>
+            <a:off x="5001768" y="2404872"/>
+            <a:ext cx="164592" cy="128016"/>
+          </a:xfrm>
+          <a:prstGeom prst="rect">
+            <a:avLst/>
+          </a:prstGeom>
+          <a:noFill/>
+        </p:spPr>
+        <p:txBody>
+          <a:bodyPr wrap="square" lIns="0" tIns="0" rIns="0" bIns="0" anchor="t">
+            <a:spAutoFit/>
+          </a:bodyPr>
+          <a:lstStyle/>
+          <a:p>
+            <a:pPr algn="ctr"/>
+            <a:r>
+              <a:rPr sz="600" b="0">
+                <a:solidFill>
+                  <a:srgbClr val="FFFFFF"/>
+                </a:solidFill>
+                <a:latin typeface="JetBrains Mono"/>
+              </a:rPr>
+              <a:t>AI</a:t>
+            </a:r>
+          </a:p>
+        </p:txBody>
+      </p:sp>
+      <p:sp>
+        <p:nvSpPr>
+          <p:cNvPr id="21" name="TextBox 20"/>
+          <p:cNvSpPr txBox="1"/>
+          <p:nvPr/>
+        </p:nvSpPr>
+        <p:spPr>
+          <a:xfrm>
+            <a:off x="5221224" y="2386584"/>
+            <a:ext cx="1463040" cy="164592"/>
+          </a:xfrm>
+          <a:prstGeom prst="rect">
+            <a:avLst/>
+          </a:prstGeom>
+          <a:noFill/>
+        </p:spPr>
+        <p:txBody>
+          <a:bodyPr wrap="square" lIns="0" tIns="0" rIns="0" bIns="0" anchor="t">
+            <a:spAutoFit/>
+          </a:bodyPr>
+          <a:lstStyle/>
+          <a:p>
+            <a:pPr algn="l"/>
+            <a:r>
+              <a:rPr sz="900" b="0">
+                <a:solidFill>
+                  <a:srgbClr val="0D1B2A"/>
+                </a:solidFill>
+                <a:latin typeface="Oswald"/>
+              </a:rPr>
+              <a:t>AI assistant</a:t>
+            </a:r>
+          </a:p>
+        </p:txBody>
+      </p:sp>
+      <p:sp>
+        <p:nvSpPr>
+          <p:cNvPr id="22" name="Rounded Rectangle 21"/>
+          <p:cNvSpPr/>
+          <p:nvPr/>
+        </p:nvSpPr>
+        <p:spPr>
+          <a:xfrm>
+            <a:off x="1344168" y="2743200"/>
             <a:ext cx="2606040" cy="292608"/>
           </a:xfrm>
           <a:prstGeom prst="roundRect">
@@ -34109,13 +34210,13 @@
       </p:sp>
       <p:sp>
         <p:nvSpPr>
-          <p:cNvPr id="19" name="Rounded Rectangle 18"/>
+          <p:cNvPr id="23" name="Rounded Rectangle 22"/>
           <p:cNvSpPr/>
           <p:nvPr/>
         </p:nvSpPr>
         <p:spPr>
           <a:xfrm>
-            <a:off x="1179576" y="3054096"/>
+            <a:off x="1179576" y="3145536"/>
             <a:ext cx="2606040" cy="292608"/>
           </a:xfrm>
           <a:prstGeom prst="roundRect">
@@ -34164,13 +34265,13 @@
       </p:sp>
       <p:sp>
         <p:nvSpPr>
-          <p:cNvPr id="20" name="Rounded Rectangle 19"/>
+          <p:cNvPr id="24" name="Rounded Rectangle 23"/>
           <p:cNvSpPr/>
           <p:nvPr/>
         </p:nvSpPr>
         <p:spPr>
           <a:xfrm>
-            <a:off x="1344168" y="3419856"/>
+            <a:off x="1344168" y="3547872"/>
             <a:ext cx="2606040" cy="292608"/>
           </a:xfrm>
           <a:prstGeom prst="roundRect">
@@ -34219,13 +34320,13 @@
       </p:sp>
       <p:sp>
         <p:nvSpPr>
-          <p:cNvPr id="21" name="TextBox 20"/>
+          <p:cNvPr id="25" name="TextBox 24"/>
           <p:cNvSpPr txBox="1"/>
           <p:nvPr/>
         </p:nvSpPr>
         <p:spPr>
           <a:xfrm>
-            <a:off x="777240" y="3840480"/>
+            <a:off x="868680" y="3931920"/>
             <a:ext cx="2286000" cy="182880"/>
           </a:xfrm>
           <a:prstGeom prst="rect">
@@ -34241,7 +34342,7 @@
           <a:p>
             <a:pPr algn="l"/>
             <a:r>
-              <a:rPr sz="950" b="0">
+              <a:rPr sz="900" b="0">
                 <a:solidFill>
                   <a:srgbClr val="6B7B8C"/>
                 </a:solidFill>
@@ -34254,14 +34355,14 @@
       </p:sp>
       <p:sp>
         <p:nvSpPr>
-          <p:cNvPr id="22" name="Rounded Rectangle 21"/>
+          <p:cNvPr id="26" name="Rounded Rectangle 25"/>
           <p:cNvSpPr/>
           <p:nvPr/>
         </p:nvSpPr>
         <p:spPr>
           <a:xfrm>
-            <a:off x="5989320" y="2267712"/>
-            <a:ext cx="2231136" cy="292608"/>
+            <a:off x="5760720" y="2670048"/>
+            <a:ext cx="2231136" cy="246888"/>
           </a:xfrm>
           <a:prstGeom prst="roundRect">
             <a:avLst>
@@ -34309,18 +34410,18 @@
       </p:sp>
       <p:sp>
         <p:nvSpPr>
-          <p:cNvPr id="23" name="Rounded Rectangle 22"/>
+          <p:cNvPr id="27" name="Rounded Rectangle 26"/>
           <p:cNvSpPr/>
           <p:nvPr/>
         </p:nvSpPr>
         <p:spPr>
           <a:xfrm>
-            <a:off x="5184648" y="2615184"/>
-            <a:ext cx="3374136" cy="749808"/>
+            <a:off x="5303520" y="2962656"/>
+            <a:ext cx="3108960" cy="548640"/>
           </a:xfrm>
           <a:prstGeom prst="roundRect">
             <a:avLst>
-              <a:gd name="adj" fmla="val 9756"/>
+              <a:gd name="adj" fmla="val 13333"/>
             </a:avLst>
           </a:prstGeom>
           <a:solidFill>
@@ -34358,14 +34459,14 @@
       </p:sp>
       <p:sp>
         <p:nvSpPr>
-          <p:cNvPr id="24" name="TextBox 23"/>
+          <p:cNvPr id="28" name="TextBox 27"/>
           <p:cNvSpPr txBox="1"/>
           <p:nvPr/>
         </p:nvSpPr>
         <p:spPr>
           <a:xfrm>
-            <a:off x="5230368" y="2660904"/>
-            <a:ext cx="2377440" cy="182880"/>
+            <a:off x="5358383" y="2990088"/>
+            <a:ext cx="2377440" cy="118872"/>
           </a:xfrm>
           <a:prstGeom prst="rect">
             <a:avLst/>
@@ -34380,7 +34481,7 @@
           <a:p>
             <a:pPr algn="l"/>
             <a:r>
-              <a:rPr sz="800" b="0" spc="100">
+              <a:rPr sz="650" b="0" spc="100">
                 <a:solidFill>
                   <a:srgbClr val="1B9AAA"/>
                 </a:solidFill>
@@ -34393,14 +34494,14 @@
       </p:sp>
       <p:sp>
         <p:nvSpPr>
-          <p:cNvPr id="25" name="Rounded Rectangle 24"/>
+          <p:cNvPr id="29" name="Rounded Rectangle 28"/>
           <p:cNvSpPr/>
           <p:nvPr/>
         </p:nvSpPr>
         <p:spPr>
           <a:xfrm>
-            <a:off x="5230368" y="2843784"/>
-            <a:ext cx="923544" cy="274320"/>
+            <a:off x="5358383" y="3127248"/>
+            <a:ext cx="877824" cy="192024"/>
           </a:xfrm>
           <a:prstGeom prst="roundRect">
             <a:avLst>
@@ -34437,7 +34538,7 @@
           <a:p>
             <a:pPr algn="ctr"/>
             <a:r>
-              <a:rPr sz="850">
+              <a:rPr sz="700">
                 <a:solidFill>
                   <a:srgbClr val="0D1B2A"/>
                 </a:solidFill>
@@ -34450,14 +34551,14 @@
       </p:sp>
       <p:cxnSp>
         <p:nvCxnSpPr>
-          <p:cNvPr id="26" name="Connector 25"/>
+          <p:cNvPr id="30" name="Connector 29"/>
           <p:cNvCxnSpPr/>
           <p:nvPr/>
         </p:nvCxnSpPr>
         <p:spPr>
           <a:xfrm>
-            <a:off x="6190488" y="2980944"/>
-            <a:ext cx="173736" cy="0"/>
+            <a:off x="6410378" y="3231968"/>
+            <a:ext cx="109728" cy="0"/>
           </a:xfrm>
           <a:prstGeom prst="line">
             <a:avLst/>
@@ -34486,14 +34587,14 @@
       </p:cxnSp>
       <p:sp>
         <p:nvSpPr>
-          <p:cNvPr id="27" name="Rounded Rectangle 26"/>
+          <p:cNvPr id="31" name="Rounded Rectangle 30"/>
           <p:cNvSpPr/>
           <p:nvPr/>
         </p:nvSpPr>
         <p:spPr>
           <a:xfrm>
-            <a:off x="6409944" y="2843784"/>
-            <a:ext cx="923544" cy="274320"/>
+            <a:off x="6400799" y="3127248"/>
+            <a:ext cx="877824" cy="192024"/>
           </a:xfrm>
           <a:prstGeom prst="roundRect">
             <a:avLst>
@@ -34530,7 +34631,7 @@
           <a:p>
             <a:pPr algn="ctr"/>
             <a:r>
-              <a:rPr sz="850">
+              <a:rPr sz="700">
                 <a:solidFill>
                   <a:srgbClr val="0D1B2A"/>
                 </a:solidFill>
@@ -34543,14 +34644,14 @@
       </p:sp>
       <p:cxnSp>
         <p:nvCxnSpPr>
-          <p:cNvPr id="28" name="Connector 27"/>
+          <p:cNvPr id="32" name="Connector 31"/>
           <p:cNvCxnSpPr/>
           <p:nvPr/>
         </p:nvCxnSpPr>
         <p:spPr>
           <a:xfrm>
-            <a:off x="7370064" y="2980944"/>
-            <a:ext cx="173736" cy="0"/>
+            <a:off x="7452793" y="3231968"/>
+            <a:ext cx="109728" cy="0"/>
           </a:xfrm>
           <a:prstGeom prst="line">
             <a:avLst/>
@@ -34579,14 +34680,14 @@
       </p:cxnSp>
       <p:sp>
         <p:nvSpPr>
-          <p:cNvPr id="29" name="Rounded Rectangle 28"/>
+          <p:cNvPr id="33" name="Rounded Rectangle 32"/>
           <p:cNvSpPr/>
           <p:nvPr/>
         </p:nvSpPr>
         <p:spPr>
           <a:xfrm>
-            <a:off x="7589520" y="2843784"/>
-            <a:ext cx="923544" cy="274320"/>
+            <a:off x="7443215" y="3127248"/>
+            <a:ext cx="877824" cy="192024"/>
           </a:xfrm>
           <a:prstGeom prst="roundRect">
             <a:avLst>
@@ -34623,7 +34724,7 @@
           <a:p>
             <a:pPr algn="ctr"/>
             <a:r>
-              <a:rPr sz="850">
+              <a:rPr sz="700">
                 <a:solidFill>
                   <a:srgbClr val="0D1B2A"/>
                 </a:solidFill>
@@ -34636,14 +34737,14 @@
       </p:sp>
       <p:sp>
         <p:nvSpPr>
-          <p:cNvPr id="30" name="Rounded Rectangle 29"/>
+          <p:cNvPr id="34" name="Rounded Rectangle 33"/>
           <p:cNvSpPr/>
           <p:nvPr/>
         </p:nvSpPr>
         <p:spPr>
           <a:xfrm>
-            <a:off x="6300216" y="3145536"/>
-            <a:ext cx="365760" cy="182880"/>
+            <a:off x="6245786" y="3355412"/>
+            <a:ext cx="365760" cy="118872"/>
           </a:xfrm>
           <a:prstGeom prst="roundRect">
             <a:avLst>
@@ -34678,7 +34779,7 @@
           <a:p>
             <a:pPr algn="ctr"/>
             <a:r>
-              <a:rPr sz="600">
+              <a:rPr sz="550">
                 <a:solidFill>
                   <a:srgbClr val="0D1B2A"/>
                 </a:solidFill>
@@ -34691,14 +34792,14 @@
       </p:sp>
       <p:sp>
         <p:nvSpPr>
-          <p:cNvPr id="31" name="Rounded Rectangle 30"/>
+          <p:cNvPr id="35" name="Rounded Rectangle 34"/>
           <p:cNvSpPr/>
           <p:nvPr/>
         </p:nvSpPr>
         <p:spPr>
           <a:xfrm>
-            <a:off x="6707124" y="3145536"/>
-            <a:ext cx="365760" cy="182880"/>
+            <a:off x="6652694" y="3355412"/>
+            <a:ext cx="365760" cy="118872"/>
           </a:xfrm>
           <a:prstGeom prst="roundRect">
             <a:avLst>
@@ -34733,7 +34834,7 @@
           <a:p>
             <a:pPr algn="ctr"/>
             <a:r>
-              <a:rPr sz="600">
+              <a:rPr sz="550">
                 <a:solidFill>
                   <a:srgbClr val="0D1B2A"/>
                 </a:solidFill>
@@ -34746,14 +34847,14 @@
       </p:sp>
       <p:sp>
         <p:nvSpPr>
-          <p:cNvPr id="32" name="Rounded Rectangle 31"/>
+          <p:cNvPr id="36" name="Rounded Rectangle 35"/>
           <p:cNvSpPr/>
           <p:nvPr/>
         </p:nvSpPr>
         <p:spPr>
           <a:xfrm>
-            <a:off x="7114031" y="3145536"/>
-            <a:ext cx="365760" cy="182880"/>
+            <a:off x="7059602" y="3355412"/>
+            <a:ext cx="365760" cy="118872"/>
           </a:xfrm>
           <a:prstGeom prst="roundRect">
             <a:avLst>
@@ -34788,7 +34889,7 @@
           <a:p>
             <a:pPr algn="ctr"/>
             <a:r>
-              <a:rPr sz="850">
+              <a:rPr sz="700">
                 <a:solidFill>
                   <a:srgbClr val="0D1B2A"/>
                 </a:solidFill>
@@ -34801,18 +34902,18 @@
       </p:sp>
       <p:sp>
         <p:nvSpPr>
-          <p:cNvPr id="33" name="Rounded Rectangle 32"/>
+          <p:cNvPr id="37" name="Rounded Rectangle 36"/>
           <p:cNvSpPr/>
           <p:nvPr/>
         </p:nvSpPr>
         <p:spPr>
           <a:xfrm>
-            <a:off x="5184648" y="3401568"/>
-            <a:ext cx="1764792" cy="548640"/>
+            <a:off x="5303520" y="3566160"/>
+            <a:ext cx="1764792" cy="365760"/>
           </a:xfrm>
           <a:prstGeom prst="roundRect">
             <a:avLst>
-              <a:gd name="adj" fmla="val 10000"/>
+              <a:gd name="adj" fmla="val 15000"/>
             </a:avLst>
           </a:prstGeom>
           <a:solidFill>
@@ -34850,14 +34951,14 @@
       </p:sp>
       <p:sp>
         <p:nvSpPr>
-          <p:cNvPr id="34" name="TextBox 33"/>
+          <p:cNvPr id="38" name="TextBox 37"/>
           <p:cNvSpPr txBox="1"/>
           <p:nvPr/>
         </p:nvSpPr>
         <p:spPr>
           <a:xfrm>
-            <a:off x="5221224" y="3419856"/>
-            <a:ext cx="182880" cy="164592"/>
+            <a:off x="5340096" y="3575303"/>
+            <a:ext cx="182880" cy="146304"/>
           </a:xfrm>
           <a:prstGeom prst="rect">
             <a:avLst/>
@@ -34885,13 +34986,13 @@
       </p:sp>
       <p:sp>
         <p:nvSpPr>
-          <p:cNvPr id="35" name="TextBox 34"/>
+          <p:cNvPr id="39" name="TextBox 38"/>
           <p:cNvSpPr txBox="1"/>
           <p:nvPr/>
         </p:nvSpPr>
         <p:spPr>
           <a:xfrm>
-            <a:off x="5385816" y="3429000"/>
+            <a:off x="5504688" y="3589020"/>
             <a:ext cx="1463040" cy="109728"/>
           </a:xfrm>
           <a:prstGeom prst="rect">
@@ -34913,20 +35014,20 @@
                 </a:solidFill>
                 <a:latin typeface="JetBrains Mono"/>
               </a:rPr>
-              <a:t>Executed 3 tasks</a:t>
+              <a:t>Executed 2 tasks</a:t>
             </a:r>
           </a:p>
         </p:txBody>
       </p:sp>
       <p:cxnSp>
         <p:nvCxnSpPr>
-          <p:cNvPr id="36" name="Connector 35"/>
+          <p:cNvPr id="40" name="Connector 39"/>
           <p:cNvCxnSpPr/>
           <p:nvPr/>
         </p:nvCxnSpPr>
         <p:spPr>
           <a:xfrm>
-            <a:off x="5184648" y="3538728"/>
+            <a:off x="5303520" y="3703320"/>
             <a:ext cx="1755648" cy="0"/>
           </a:xfrm>
           <a:prstGeom prst="line">
@@ -34955,14 +35056,14 @@
       </p:cxnSp>
       <p:sp>
         <p:nvSpPr>
-          <p:cNvPr id="37" name="TextBox 36"/>
+          <p:cNvPr id="41" name="TextBox 40"/>
           <p:cNvSpPr txBox="1"/>
           <p:nvPr/>
         </p:nvSpPr>
         <p:spPr>
           <a:xfrm>
-            <a:off x="5312664" y="3566160"/>
-            <a:ext cx="1463040" cy="91440"/>
+            <a:off x="5431536" y="3730752"/>
+            <a:ext cx="1554480" cy="91440"/>
           </a:xfrm>
           <a:prstGeom prst="rect">
             <a:avLst/>
@@ -34990,14 +35091,14 @@
       </p:sp>
       <p:sp>
         <p:nvSpPr>
-          <p:cNvPr id="38" name="TextBox 37"/>
+          <p:cNvPr id="42" name="TextBox 41"/>
           <p:cNvSpPr txBox="1"/>
           <p:nvPr/>
         </p:nvSpPr>
         <p:spPr>
           <a:xfrm>
-            <a:off x="5312664" y="3703320"/>
-            <a:ext cx="1463040" cy="91440"/>
+            <a:off x="5431536" y="3831336"/>
+            <a:ext cx="1554480" cy="91440"/>
           </a:xfrm>
           <a:prstGeom prst="rect">
             <a:avLst/>
@@ -35025,49 +35126,14 @@
       </p:sp>
       <p:sp>
         <p:nvSpPr>
-          <p:cNvPr id="39" name="TextBox 38"/>
-          <p:cNvSpPr txBox="1"/>
-          <p:nvPr/>
-        </p:nvSpPr>
-        <p:spPr>
-          <a:xfrm>
-            <a:off x="5312664" y="3840480"/>
-            <a:ext cx="1463040" cy="91440"/>
-          </a:xfrm>
-          <a:prstGeom prst="rect">
-            <a:avLst/>
-          </a:prstGeom>
-          <a:noFill/>
-        </p:spPr>
-        <p:txBody>
-          <a:bodyPr wrap="square" lIns="0" tIns="0" rIns="0" bIns="0" anchor="t">
-            <a:spAutoFit/>
-          </a:bodyPr>
-          <a:lstStyle/>
-          <a:p>
-            <a:pPr algn="l"/>
-            <a:r>
-              <a:rPr sz="600" b="0">
-                <a:solidFill>
-                  <a:srgbClr val="1B9AAA"/>
-                </a:solidFill>
-                <a:latin typeface="Roboto"/>
-              </a:rPr>
-              <a:t>✓  Store meeting notes on sharepoint</a:t>
-            </a:r>
-          </a:p>
-        </p:txBody>
-      </p:sp>
-      <p:sp>
-        <p:nvSpPr>
-          <p:cNvPr id="40" name="Rounded Rectangle 39"/>
+          <p:cNvPr id="43" name="Rounded Rectangle 42"/>
           <p:cNvSpPr/>
           <p:nvPr/>
         </p:nvSpPr>
         <p:spPr>
           <a:xfrm>
-            <a:off x="5184648" y="3986784"/>
-            <a:ext cx="3374136" cy="210312"/>
+            <a:off x="5303520" y="3968496"/>
+            <a:ext cx="3108960" cy="164592"/>
           </a:xfrm>
           <a:prstGeom prst="roundRect">
             <a:avLst>
@@ -35115,7 +35181,7 @@
       </p:sp>
       <p:cxnSp>
         <p:nvCxnSpPr>
-          <p:cNvPr id="41" name="Connector 40"/>
+          <p:cNvPr id="44" name="Connector 43"/>
           <p:cNvCxnSpPr/>
           <p:nvPr/>
         </p:nvCxnSpPr>
@@ -35150,7 +35216,7 @@
       </p:cxnSp>
       <p:sp>
         <p:nvSpPr>
-          <p:cNvPr id="42" name="TextBox 41"/>
+          <p:cNvPr id="45" name="TextBox 44"/>
           <p:cNvSpPr txBox="1"/>
           <p:nvPr/>
         </p:nvSpPr>
@@ -35185,7 +35251,7 @@
       </p:sp>
       <p:cxnSp>
         <p:nvCxnSpPr>
-          <p:cNvPr id="43" name="Connector 42"/>
+          <p:cNvPr id="46" name="Connector 45"/>
           <p:cNvCxnSpPr/>
           <p:nvPr/>
         </p:nvCxnSpPr>
@@ -35220,7 +35286,7 @@
       </p:cxnSp>
       <p:sp>
         <p:nvSpPr>
-          <p:cNvPr id="44" name="TextBox 43"/>
+          <p:cNvPr id="47" name="TextBox 46"/>
           <p:cNvSpPr txBox="1"/>
           <p:nvPr/>
         </p:nvSpPr>
@@ -35255,7 +35321,7 @@
       </p:sp>
       <p:sp>
         <p:nvSpPr>
-          <p:cNvPr id="45" name="Rectangle 44"/>
+          <p:cNvPr id="48" name="Rectangle 47"/>
           <p:cNvSpPr/>
           <p:nvPr/>
         </p:nvSpPr>
@@ -35300,7 +35366,7 @@
       </p:sp>
       <p:sp>
         <p:nvSpPr>
-          <p:cNvPr id="46" name="TextBox 45"/>
+          <p:cNvPr id="49" name="TextBox 48"/>
           <p:cNvSpPr txBox="1"/>
           <p:nvPr/>
         </p:nvSpPr>
@@ -35335,7 +35401,7 @@
       </p:sp>
       <p:pic>
         <p:nvPicPr>
-          <p:cNvPr id="47" name="Picture 47"/>
+          <p:cNvPr id="50" name="Picture 50"/>
           <p:cNvPicPr>
             <a:picLocks noChangeAspect="1"/>
           </p:cNvPicPr>
@@ -35355,7 +35421,7 @@
         </p:blipFill>
         <p:spPr>
           <a:xfrm>
-            <a:off x="4014215" y="2679192"/>
+            <a:off x="4014215" y="2734056"/>
             <a:ext cx="310896" cy="310896"/>
           </a:xfrm>
           <a:prstGeom prst="rect">
@@ -35365,7 +35431,7 @@
       </p:pic>
       <p:pic>
         <p:nvPicPr>
-          <p:cNvPr id="48" name="Picture 48"/>
+          <p:cNvPr id="51" name="Picture 51"/>
           <p:cNvPicPr>
             <a:picLocks noChangeAspect="1"/>
           </p:cNvPicPr>
@@ -35385,7 +35451,7 @@
         </p:blipFill>
         <p:spPr>
           <a:xfrm>
-            <a:off x="850392" y="3044952"/>
+            <a:off x="850392" y="3136392"/>
             <a:ext cx="310896" cy="310896"/>
           </a:xfrm>
           <a:prstGeom prst="rect">
@@ -35395,7 +35461,7 @@
       </p:pic>
       <p:pic>
         <p:nvPicPr>
-          <p:cNvPr id="49" name="Picture 49"/>
+          <p:cNvPr id="52" name="Picture 52"/>
           <p:cNvPicPr>
             <a:picLocks noChangeAspect="1"/>
           </p:cNvPicPr>
@@ -35415,7 +35481,7 @@
         </p:blipFill>
         <p:spPr>
           <a:xfrm>
-            <a:off x="4014215" y="3410712"/>
+            <a:off x="4014215" y="3538728"/>
             <a:ext cx="310896" cy="310896"/>
           </a:xfrm>
           <a:prstGeom prst="rect">
@@ -35425,7 +35491,7 @@
       </p:pic>
       <p:pic>
         <p:nvPicPr>
-          <p:cNvPr id="50" name="Picture 50"/>
+          <p:cNvPr id="53" name="Picture 53"/>
           <p:cNvPicPr>
             <a:picLocks noChangeAspect="1"/>
           </p:cNvPicPr>
@@ -35445,7 +35511,7 @@
         </p:blipFill>
         <p:spPr>
           <a:xfrm>
-            <a:off x="8266175" y="2258568"/>
+            <a:off x="8065008" y="2633472"/>
             <a:ext cx="310896" cy="310896"/>
           </a:xfrm>
           <a:prstGeom prst="rect">
@@ -35455,7 +35521,7 @@
       </p:pic>
       <p:pic>
         <p:nvPicPr>
-          <p:cNvPr id="51" name="Picture 51"/>
+          <p:cNvPr id="54" name="Picture 54"/>
           <p:cNvPicPr>
             <a:picLocks noChangeAspect="1"/>
           </p:cNvPicPr>
@@ -35475,7 +35541,7 @@
         </p:blipFill>
         <p:spPr>
           <a:xfrm>
-            <a:off x="4855464" y="3218688"/>
+            <a:off x="4965192" y="3108960"/>
             <a:ext cx="310896" cy="310896"/>
           </a:xfrm>
           <a:prstGeom prst="rect">
@@ -35483,6 +35549,392 @@
           </a:prstGeom>
         </p:spPr>
       </p:pic>
+      <p:sp>
+        <p:nvSpPr>
+          <p:cNvPr id="55" name="Oval 54"/>
+          <p:cNvSpPr/>
+          <p:nvPr/>
+        </p:nvSpPr>
+        <p:spPr>
+          <a:xfrm>
+            <a:off x="3915460" y="2449677"/>
+            <a:ext cx="64008" cy="64008"/>
+          </a:xfrm>
+          <a:prstGeom prst="ellipse">
+            <a:avLst/>
+          </a:prstGeom>
+          <a:solidFill>
+            <a:srgbClr val="8FA6B2">
+              <a:alpha val="100000"/>
+            </a:srgbClr>
+          </a:solidFill>
+          <a:ln w="6350">
+            <a:solidFill>
+              <a:srgbClr val="8FA6B2"/>
+            </a:solidFill>
+          </a:ln>
+          <a:effectLst/>
+        </p:spPr>
+        <p:style>
+          <a:lnRef idx="1">
+            <a:schemeClr val="accent1"/>
+          </a:lnRef>
+          <a:fillRef idx="3">
+            <a:schemeClr val="accent1"/>
+          </a:fillRef>
+          <a:effectRef idx="2">
+            <a:schemeClr val="accent1"/>
+          </a:effectRef>
+          <a:fontRef idx="minor">
+            <a:schemeClr val="lt1"/>
+          </a:fontRef>
+        </p:style>
+        <p:txBody>
+          <a:bodyPr rtlCol="0" anchor="ctr"/>
+          <a:lstStyle/>
+          <a:p>
+            <a:pPr algn="ctr"/>
+            <a:endParaRPr/>
+          </a:p>
+        </p:txBody>
+      </p:sp>
+      <p:sp>
+        <p:nvSpPr>
+          <p:cNvPr id="56" name="Oval 55"/>
+          <p:cNvSpPr/>
+          <p:nvPr/>
+        </p:nvSpPr>
+        <p:spPr>
+          <a:xfrm>
+            <a:off x="4043476" y="2449677"/>
+            <a:ext cx="64008" cy="64008"/>
+          </a:xfrm>
+          <a:prstGeom prst="ellipse">
+            <a:avLst/>
+          </a:prstGeom>
+          <a:solidFill>
+            <a:srgbClr val="8FA6B2">
+              <a:alpha val="100000"/>
+            </a:srgbClr>
+          </a:solidFill>
+          <a:ln w="6350">
+            <a:solidFill>
+              <a:srgbClr val="8FA6B2"/>
+            </a:solidFill>
+          </a:ln>
+          <a:effectLst/>
+        </p:spPr>
+        <p:style>
+          <a:lnRef idx="1">
+            <a:schemeClr val="accent1"/>
+          </a:lnRef>
+          <a:fillRef idx="3">
+            <a:schemeClr val="accent1"/>
+          </a:fillRef>
+          <a:effectRef idx="2">
+            <a:schemeClr val="accent1"/>
+          </a:effectRef>
+          <a:fontRef idx="minor">
+            <a:schemeClr val="lt1"/>
+          </a:fontRef>
+        </p:style>
+        <p:txBody>
+          <a:bodyPr rtlCol="0" anchor="ctr"/>
+          <a:lstStyle/>
+          <a:p>
+            <a:pPr algn="ctr"/>
+            <a:endParaRPr/>
+          </a:p>
+        </p:txBody>
+      </p:sp>
+      <p:sp>
+        <p:nvSpPr>
+          <p:cNvPr id="57" name="Oval 56"/>
+          <p:cNvSpPr/>
+          <p:nvPr/>
+        </p:nvSpPr>
+        <p:spPr>
+          <a:xfrm>
+            <a:off x="4171492" y="2449677"/>
+            <a:ext cx="64008" cy="64008"/>
+          </a:xfrm>
+          <a:prstGeom prst="ellipse">
+            <a:avLst/>
+          </a:prstGeom>
+          <a:solidFill>
+            <a:srgbClr val="8FA6B2">
+              <a:alpha val="100000"/>
+            </a:srgbClr>
+          </a:solidFill>
+          <a:ln w="6350">
+            <a:solidFill>
+              <a:srgbClr val="8FA6B2"/>
+            </a:solidFill>
+          </a:ln>
+          <a:effectLst/>
+        </p:spPr>
+        <p:style>
+          <a:lnRef idx="1">
+            <a:schemeClr val="accent1"/>
+          </a:lnRef>
+          <a:fillRef idx="3">
+            <a:schemeClr val="accent1"/>
+          </a:fillRef>
+          <a:effectRef idx="2">
+            <a:schemeClr val="accent1"/>
+          </a:effectRef>
+          <a:fontRef idx="minor">
+            <a:schemeClr val="lt1"/>
+          </a:fontRef>
+        </p:style>
+        <p:txBody>
+          <a:bodyPr rtlCol="0" anchor="ctr"/>
+          <a:lstStyle/>
+          <a:p>
+            <a:pPr algn="ctr"/>
+            <a:endParaRPr/>
+          </a:p>
+        </p:txBody>
+      </p:sp>
+      <p:sp>
+        <p:nvSpPr>
+          <p:cNvPr id="58" name="Oval 57"/>
+          <p:cNvSpPr/>
+          <p:nvPr/>
+        </p:nvSpPr>
+        <p:spPr>
+          <a:xfrm>
+            <a:off x="8048548" y="2449677"/>
+            <a:ext cx="64008" cy="64008"/>
+          </a:xfrm>
+          <a:prstGeom prst="ellipse">
+            <a:avLst/>
+          </a:prstGeom>
+          <a:solidFill>
+            <a:srgbClr val="8FA6B2">
+              <a:alpha val="100000"/>
+            </a:srgbClr>
+          </a:solidFill>
+          <a:ln w="6350">
+            <a:solidFill>
+              <a:srgbClr val="8FA6B2"/>
+            </a:solidFill>
+          </a:ln>
+          <a:effectLst/>
+        </p:spPr>
+        <p:style>
+          <a:lnRef idx="1">
+            <a:schemeClr val="accent1"/>
+          </a:lnRef>
+          <a:fillRef idx="3">
+            <a:schemeClr val="accent1"/>
+          </a:fillRef>
+          <a:effectRef idx="2">
+            <a:schemeClr val="accent1"/>
+          </a:effectRef>
+          <a:fontRef idx="minor">
+            <a:schemeClr val="lt1"/>
+          </a:fontRef>
+        </p:style>
+        <p:txBody>
+          <a:bodyPr rtlCol="0" anchor="ctr"/>
+          <a:lstStyle/>
+          <a:p>
+            <a:pPr algn="ctr"/>
+            <a:endParaRPr/>
+          </a:p>
+        </p:txBody>
+      </p:sp>
+      <p:sp>
+        <p:nvSpPr>
+          <p:cNvPr id="59" name="Oval 58"/>
+          <p:cNvSpPr/>
+          <p:nvPr/>
+        </p:nvSpPr>
+        <p:spPr>
+          <a:xfrm>
+            <a:off x="8176564" y="2449677"/>
+            <a:ext cx="64008" cy="64008"/>
+          </a:xfrm>
+          <a:prstGeom prst="ellipse">
+            <a:avLst/>
+          </a:prstGeom>
+          <a:solidFill>
+            <a:srgbClr val="8FA6B2">
+              <a:alpha val="100000"/>
+            </a:srgbClr>
+          </a:solidFill>
+          <a:ln w="6350">
+            <a:solidFill>
+              <a:srgbClr val="8FA6B2"/>
+            </a:solidFill>
+          </a:ln>
+          <a:effectLst/>
+        </p:spPr>
+        <p:style>
+          <a:lnRef idx="1">
+            <a:schemeClr val="accent1"/>
+          </a:lnRef>
+          <a:fillRef idx="3">
+            <a:schemeClr val="accent1"/>
+          </a:fillRef>
+          <a:effectRef idx="2">
+            <a:schemeClr val="accent1"/>
+          </a:effectRef>
+          <a:fontRef idx="minor">
+            <a:schemeClr val="lt1"/>
+          </a:fontRef>
+        </p:style>
+        <p:txBody>
+          <a:bodyPr rtlCol="0" anchor="ctr"/>
+          <a:lstStyle/>
+          <a:p>
+            <a:pPr algn="ctr"/>
+            <a:endParaRPr/>
+          </a:p>
+        </p:txBody>
+      </p:sp>
+      <p:sp>
+        <p:nvSpPr>
+          <p:cNvPr id="60" name="Oval 59"/>
+          <p:cNvSpPr/>
+          <p:nvPr/>
+        </p:nvSpPr>
+        <p:spPr>
+          <a:xfrm>
+            <a:off x="8304580" y="2449677"/>
+            <a:ext cx="64008" cy="64008"/>
+          </a:xfrm>
+          <a:prstGeom prst="ellipse">
+            <a:avLst/>
+          </a:prstGeom>
+          <a:solidFill>
+            <a:srgbClr val="8FA6B2">
+              <a:alpha val="100000"/>
+            </a:srgbClr>
+          </a:solidFill>
+          <a:ln w="6350">
+            <a:solidFill>
+              <a:srgbClr val="8FA6B2"/>
+            </a:solidFill>
+          </a:ln>
+          <a:effectLst/>
+        </p:spPr>
+        <p:style>
+          <a:lnRef idx="1">
+            <a:schemeClr val="accent1"/>
+          </a:lnRef>
+          <a:fillRef idx="3">
+            <a:schemeClr val="accent1"/>
+          </a:fillRef>
+          <a:effectRef idx="2">
+            <a:schemeClr val="accent1"/>
+          </a:effectRef>
+          <a:fontRef idx="minor">
+            <a:schemeClr val="lt1"/>
+          </a:fontRef>
+        </p:style>
+        <p:txBody>
+          <a:bodyPr rtlCol="0" anchor="ctr"/>
+          <a:lstStyle/>
+          <a:p>
+            <a:pPr algn="ctr"/>
+            <a:endParaRPr/>
+          </a:p>
+        </p:txBody>
+      </p:sp>
+      <p:cxnSp>
+        <p:nvCxnSpPr>
+          <p:cNvPr id="62" name="Connector 25">
+            <a:extLst>
+              <a:ext uri="{FF2B5EF4-FFF2-40B4-BE49-F238E27FC236}">
+                <a16:creationId xmlns:a16="http://schemas.microsoft.com/office/drawing/2014/main" id="{4D831B6B-D81E-07E5-CD72-E74867C2C652}"/>
+              </a:ext>
+            </a:extLst>
+          </p:cNvPr>
+          <p:cNvCxnSpPr>
+            <a:cxnSpLocks/>
+            <a:stCxn id="29" idx="3"/>
+            <a:endCxn id="31" idx="1"/>
+          </p:cNvCxnSpPr>
+          <p:nvPr/>
+        </p:nvCxnSpPr>
+        <p:spPr>
+          <a:xfrm>
+            <a:off x="6236207" y="3223260"/>
+            <a:ext cx="164592" cy="0"/>
+          </a:xfrm>
+          <a:prstGeom prst="line">
+            <a:avLst/>
+          </a:prstGeom>
+          <a:ln w="22225">
+            <a:solidFill>
+              <a:srgbClr val="1B9AAA"/>
+            </a:solidFill>
+            <a:tailEnd type="triangle" w="med" len="med"/>
+          </a:ln>
+        </p:spPr>
+        <p:style>
+          <a:lnRef idx="2">
+            <a:schemeClr val="accent1"/>
+          </a:lnRef>
+          <a:fillRef idx="0">
+            <a:schemeClr val="accent1"/>
+          </a:fillRef>
+          <a:effectRef idx="1">
+            <a:schemeClr val="accent1"/>
+          </a:effectRef>
+          <a:fontRef idx="minor">
+            <a:schemeClr val="tx1"/>
+          </a:fontRef>
+        </p:style>
+      </p:cxnSp>
+      <p:cxnSp>
+        <p:nvCxnSpPr>
+          <p:cNvPr id="64" name="Connector 25">
+            <a:extLst>
+              <a:ext uri="{FF2B5EF4-FFF2-40B4-BE49-F238E27FC236}">
+                <a16:creationId xmlns:a16="http://schemas.microsoft.com/office/drawing/2014/main" id="{CF38C6AB-82F5-73DA-3D5B-5206A60D2325}"/>
+              </a:ext>
+            </a:extLst>
+          </p:cNvPr>
+          <p:cNvCxnSpPr>
+            <a:cxnSpLocks/>
+            <a:stCxn id="31" idx="3"/>
+            <a:endCxn id="33" idx="1"/>
+          </p:cNvCxnSpPr>
+          <p:nvPr/>
+        </p:nvCxnSpPr>
+        <p:spPr>
+          <a:xfrm>
+            <a:off x="7278623" y="3223260"/>
+            <a:ext cx="164592" cy="0"/>
+          </a:xfrm>
+          <a:prstGeom prst="line">
+            <a:avLst/>
+          </a:prstGeom>
+          <a:ln w="22225">
+            <a:solidFill>
+              <a:srgbClr val="1B9AAA"/>
+            </a:solidFill>
+            <a:tailEnd type="triangle" w="med" len="med"/>
+          </a:ln>
+        </p:spPr>
+        <p:style>
+          <a:lnRef idx="2">
+            <a:schemeClr val="accent1"/>
+          </a:lnRef>
+          <a:fillRef idx="0">
+            <a:schemeClr val="accent1"/>
+          </a:fillRef>
+          <a:effectRef idx="1">
+            <a:schemeClr val="accent1"/>
+          </a:effectRef>
+          <a:fontRef idx="minor">
+            <a:schemeClr val="tx1"/>
+          </a:fontRef>
+        </p:style>
+      </p:cxnSp>
     </p:spTree>
   </p:cSld>
   <p:clrMapOvr>
@@ -37029,7 +37481,7 @@
         <p:spPr>
           <a:xfrm>
             <a:off x="822960" y="1463040"/>
-            <a:ext cx="5669280" cy="1569660"/>
+            <a:ext cx="5669280" cy="1572768"/>
           </a:xfrm>
           <a:prstGeom prst="rect">
             <a:avLst/>
@@ -37044,7 +37496,7 @@
           <a:p>
             <a:pPr algn="l"/>
             <a:r>
-              <a:rPr sz="3400" b="0" dirty="0">
+              <a:rPr sz="3400" b="0">
                 <a:solidFill>
                   <a:srgbClr val="0D1B2A"/>
                 </a:solidFill>
@@ -37056,7 +37508,7 @@
           <a:p>
             <a:pPr algn="l"/>
             <a:r>
-              <a:rPr sz="3400" b="0" dirty="0">
+              <a:rPr sz="3400" b="0">
                 <a:solidFill>
                   <a:srgbClr val="0D1B2A"/>
                 </a:solidFill>
@@ -37068,40 +37520,13 @@
           <a:p>
             <a:pPr algn="l"/>
             <a:r>
-              <a:rPr sz="3400" b="0" dirty="0">
+              <a:rPr sz="3400" b="0">
                 <a:solidFill>
                   <a:srgbClr val="0D1B2A"/>
                 </a:solidFill>
                 <a:latin typeface="Oswald"/>
               </a:rPr>
-              <a:t>agent that </a:t>
-            </a:r>
-            <a:r>
-              <a:rPr lang="de-DE" sz="3400" b="0" dirty="0" err="1">
-                <a:solidFill>
-                  <a:srgbClr val="0D1B2A"/>
-                </a:solidFill>
-                <a:latin typeface="Oswald"/>
-              </a:rPr>
-              <a:t>operates</a:t>
-            </a:r>
-            <a:r>
-              <a:rPr lang="de-DE" sz="3400" b="0" dirty="0">
-                <a:solidFill>
-                  <a:srgbClr val="0D1B2A"/>
-                </a:solidFill>
-                <a:latin typeface="Oswald"/>
-              </a:rPr>
-              <a:t> </a:t>
-            </a:r>
-            <a:r>
-              <a:rPr sz="3400" b="0" dirty="0">
-                <a:solidFill>
-                  <a:srgbClr val="0D1B2A"/>
-                </a:solidFill>
-                <a:latin typeface="Oswald"/>
-              </a:rPr>
-              <a:t>Outlook?</a:t>
+              <a:t>agent that operates Outlook?</a:t>
             </a:r>
           </a:p>
         </p:txBody>
@@ -37147,269 +37572,6 @@
           <a:p>
             <a:pPr algn="ctr"/>
             <a:endParaRPr/>
-          </a:p>
-        </p:txBody>
-      </p:sp>
-      <p:sp>
-        <p:nvSpPr>
-          <p:cNvPr id="8" name="TextBox 7"/>
-          <p:cNvSpPr txBox="1"/>
-          <p:nvPr/>
-        </p:nvSpPr>
-        <p:spPr>
-          <a:xfrm>
-            <a:off x="822960" y="3703320"/>
-            <a:ext cx="2743200" cy="201168"/>
-          </a:xfrm>
-          <a:prstGeom prst="rect">
-            <a:avLst/>
-          </a:prstGeom>
-          <a:noFill/>
-        </p:spPr>
-        <p:txBody>
-          <a:bodyPr wrap="square" lIns="0" tIns="0" rIns="0" bIns="0" anchor="t">
-            <a:spAutoFit/>
-          </a:bodyPr>
-          <a:lstStyle/>
-          <a:p>
-            <a:pPr algn="l"/>
-            <a:r>
-              <a:rPr sz="1100" b="0">
-                <a:solidFill>
-                  <a:srgbClr val="6B7B8C"/>
-                </a:solidFill>
-                <a:latin typeface="Roboto"/>
-              </a:rPr>
-              <a:t>Four pieces are still missing:</a:t>
-            </a:r>
-          </a:p>
-        </p:txBody>
-      </p:sp>
-      <p:sp>
-        <p:nvSpPr>
-          <p:cNvPr id="9" name="Rounded Rectangle 8"/>
-          <p:cNvSpPr/>
-          <p:nvPr/>
-        </p:nvSpPr>
-        <p:spPr>
-          <a:xfrm>
-            <a:off x="822960" y="3968496"/>
-            <a:ext cx="2093976" cy="310896"/>
-          </a:xfrm>
-          <a:prstGeom prst="roundRect">
-            <a:avLst>
-              <a:gd name="adj" fmla="val 18000"/>
-            </a:avLst>
-          </a:prstGeom>
-          <a:solidFill>
-            <a:srgbClr val="FFFFFF"/>
-          </a:solidFill>
-          <a:ln w="9525">
-            <a:solidFill>
-              <a:srgbClr val="DDE5E9"/>
-            </a:solidFill>
-          </a:ln>
-          <a:effectLst/>
-        </p:spPr>
-        <p:style>
-          <a:lnRef idx="1">
-            <a:schemeClr val="accent1"/>
-          </a:lnRef>
-          <a:fillRef idx="3">
-            <a:schemeClr val="accent1"/>
-          </a:fillRef>
-          <a:effectRef idx="2">
-            <a:schemeClr val="accent1"/>
-          </a:effectRef>
-          <a:fontRef idx="minor">
-            <a:schemeClr val="lt1"/>
-          </a:fontRef>
-        </p:style>
-        <p:txBody>
-          <a:bodyPr wrap="none" lIns="0" tIns="0" rIns="0" bIns="0" rtlCol="0" anchor="ctr"/>
-          <a:lstStyle/>
-          <a:p>
-            <a:pPr algn="ctr"/>
-            <a:r>
-              <a:rPr sz="1000" dirty="0">
-                <a:solidFill>
-                  <a:srgbClr val="0D1B2A"/>
-                </a:solidFill>
-                <a:latin typeface="Roboto"/>
-              </a:rPr>
-              <a:t>Knowledge it never learned</a:t>
-            </a:r>
-          </a:p>
-        </p:txBody>
-      </p:sp>
-      <p:sp>
-        <p:nvSpPr>
-          <p:cNvPr id="10" name="Rounded Rectangle 9"/>
-          <p:cNvSpPr/>
-          <p:nvPr/>
-        </p:nvSpPr>
-        <p:spPr>
-          <a:xfrm>
-            <a:off x="3026664" y="3968496"/>
-            <a:ext cx="1476756" cy="310896"/>
-          </a:xfrm>
-          <a:prstGeom prst="roundRect">
-            <a:avLst>
-              <a:gd name="adj" fmla="val 18000"/>
-            </a:avLst>
-          </a:prstGeom>
-          <a:solidFill>
-            <a:srgbClr val="FFFFFF"/>
-          </a:solidFill>
-          <a:ln w="9525">
-            <a:solidFill>
-              <a:srgbClr val="DDE5E9"/>
-            </a:solidFill>
-          </a:ln>
-          <a:effectLst/>
-        </p:spPr>
-        <p:style>
-          <a:lnRef idx="1">
-            <a:schemeClr val="accent1"/>
-          </a:lnRef>
-          <a:fillRef idx="3">
-            <a:schemeClr val="accent1"/>
-          </a:fillRef>
-          <a:effectRef idx="2">
-            <a:schemeClr val="accent1"/>
-          </a:effectRef>
-          <a:fontRef idx="minor">
-            <a:schemeClr val="lt1"/>
-          </a:fontRef>
-        </p:style>
-        <p:txBody>
-          <a:bodyPr wrap="none" lIns="0" tIns="0" rIns="0" bIns="0" rtlCol="0" anchor="ctr"/>
-          <a:lstStyle/>
-          <a:p>
-            <a:pPr algn="ctr"/>
-            <a:r>
-              <a:rPr sz="1000">
-                <a:solidFill>
-                  <a:srgbClr val="0D1B2A"/>
-                </a:solidFill>
-                <a:latin typeface="Roboto"/>
-              </a:rPr>
-              <a:t>Hands to act with</a:t>
-            </a:r>
-          </a:p>
-        </p:txBody>
-      </p:sp>
-      <p:sp>
-        <p:nvSpPr>
-          <p:cNvPr id="11" name="Rounded Rectangle 10"/>
-          <p:cNvSpPr/>
-          <p:nvPr/>
-        </p:nvSpPr>
-        <p:spPr>
-          <a:xfrm>
-            <a:off x="4613148" y="3968496"/>
-            <a:ext cx="1339596" cy="310896"/>
-          </a:xfrm>
-          <a:prstGeom prst="roundRect">
-            <a:avLst>
-              <a:gd name="adj" fmla="val 18000"/>
-            </a:avLst>
-          </a:prstGeom>
-          <a:solidFill>
-            <a:srgbClr val="FFFFFF"/>
-          </a:solidFill>
-          <a:ln w="9525">
-            <a:solidFill>
-              <a:srgbClr val="DDE5E9"/>
-            </a:solidFill>
-          </a:ln>
-          <a:effectLst/>
-        </p:spPr>
-        <p:style>
-          <a:lnRef idx="1">
-            <a:schemeClr val="accent1"/>
-          </a:lnRef>
-          <a:fillRef idx="3">
-            <a:schemeClr val="accent1"/>
-          </a:fillRef>
-          <a:effectRef idx="2">
-            <a:schemeClr val="accent1"/>
-          </a:effectRef>
-          <a:fontRef idx="minor">
-            <a:schemeClr val="lt1"/>
-          </a:fontRef>
-        </p:style>
-        <p:txBody>
-          <a:bodyPr wrap="none" lIns="0" tIns="0" rIns="0" bIns="0" rtlCol="0" anchor="ctr"/>
-          <a:lstStyle/>
-          <a:p>
-            <a:pPr algn="ctr"/>
-            <a:r>
-              <a:rPr sz="1000">
-                <a:solidFill>
-                  <a:srgbClr val="0D1B2A"/>
-                </a:solidFill>
-                <a:latin typeface="Roboto"/>
-              </a:rPr>
-              <a:t>One common plug</a:t>
-            </a:r>
-          </a:p>
-        </p:txBody>
-      </p:sp>
-      <p:sp>
-        <p:nvSpPr>
-          <p:cNvPr id="12" name="Rounded Rectangle 11"/>
-          <p:cNvSpPr/>
-          <p:nvPr/>
-        </p:nvSpPr>
-        <p:spPr>
-          <a:xfrm>
-            <a:off x="6062472" y="3968496"/>
-            <a:ext cx="1682496" cy="310896"/>
-          </a:xfrm>
-          <a:prstGeom prst="roundRect">
-            <a:avLst>
-              <a:gd name="adj" fmla="val 18000"/>
-            </a:avLst>
-          </a:prstGeom>
-          <a:solidFill>
-            <a:srgbClr val="FFFFFF"/>
-          </a:solidFill>
-          <a:ln w="9525">
-            <a:solidFill>
-              <a:srgbClr val="DDE5E9"/>
-            </a:solidFill>
-          </a:ln>
-          <a:effectLst/>
-        </p:spPr>
-        <p:style>
-          <a:lnRef idx="1">
-            <a:schemeClr val="accent1"/>
-          </a:lnRef>
-          <a:fillRef idx="3">
-            <a:schemeClr val="accent1"/>
-          </a:fillRef>
-          <a:effectRef idx="2">
-            <a:schemeClr val="accent1"/>
-          </a:effectRef>
-          <a:fontRef idx="minor">
-            <a:schemeClr val="lt1"/>
-          </a:fontRef>
-        </p:style>
-        <p:txBody>
-          <a:bodyPr wrap="none" lIns="0" tIns="0" rIns="0" bIns="0" rtlCol="0" anchor="ctr"/>
-          <a:lstStyle/>
-          <a:p>
-            <a:pPr algn="ctr"/>
-            <a:r>
-              <a:rPr sz="1000">
-                <a:solidFill>
-                  <a:srgbClr val="0D1B2A"/>
-                </a:solidFill>
-                <a:latin typeface="Roboto"/>
-              </a:rPr>
-              <a:t>A loop kept in check</a:t>
-            </a:r>
           </a:p>
         </p:txBody>
       </p:sp>
@@ -38862,7 +39024,7 @@
                 </a:solidFill>
                 <a:latin typeface="Roboto"/>
               </a:rPr>
-              <a:t>Each step filled one gap. Together they turn a model that talks into an agent that works.</a:t>
+              <a:t>Each step solved a problem. Together they turn a model that talks into an agent that works.</a:t>
             </a:r>
           </a:p>
         </p:txBody>
@@ -39107,8 +39269,8 @@
         </p:nvSpPr>
         <p:spPr>
           <a:xfrm>
-            <a:off x="777240" y="3502152"/>
-            <a:ext cx="1572768" cy="411480"/>
+            <a:off x="777240" y="3483864"/>
+            <a:ext cx="914400" cy="228600"/>
           </a:xfrm>
           <a:prstGeom prst="rect">
             <a:avLst/>
@@ -39123,62 +39285,27 @@
           <a:p>
             <a:pPr algn="l"/>
             <a:r>
-              <a:rPr sz="850" b="0">
+              <a:rPr sz="750" b="0" spc="100">
                 <a:solidFill>
                   <a:srgbClr val="6B7B8C"/>
                 </a:solidFill>
-                <a:latin typeface="Roboto"/>
-              </a:rPr>
-              <a:t>2020: a paper by Facebook AI (today Meta) names the method.</a:t>
-            </a:r>
-          </a:p>
-        </p:txBody>
-      </p:sp>
-      <p:sp>
-        <p:nvSpPr>
-          <p:cNvPr id="13" name="TextBox 12"/>
-          <p:cNvSpPr txBox="1"/>
-          <p:nvPr/>
-        </p:nvSpPr>
-        <p:spPr>
-          <a:xfrm>
-            <a:off x="777240" y="3913632"/>
-            <a:ext cx="914400" cy="228600"/>
-          </a:xfrm>
-          <a:prstGeom prst="rect">
-            <a:avLst/>
-          </a:prstGeom>
-          <a:noFill/>
-        </p:spPr>
-        <p:txBody>
-          <a:bodyPr wrap="square" lIns="0" tIns="0" rIns="0" bIns="0" anchor="t">
-            <a:spAutoFit/>
-          </a:bodyPr>
-          <a:lstStyle/>
-          <a:p>
-            <a:pPr algn="l"/>
-            <a:r>
-              <a:rPr sz="750" b="0" spc="100">
-                <a:solidFill>
-                  <a:srgbClr val="6B7B8C"/>
-                </a:solidFill>
                 <a:latin typeface="JetBrains Mono"/>
               </a:rPr>
-              <a:t>FILLS</a:t>
-            </a:r>
-          </a:p>
-        </p:txBody>
-      </p:sp>
-      <p:sp>
-        <p:nvSpPr>
-          <p:cNvPr id="14" name="Rounded Rectangle 13"/>
+              <a:t>SOLVES</a:t>
+            </a:r>
+          </a:p>
+        </p:txBody>
+      </p:sp>
+      <p:sp>
+        <p:nvSpPr>
+          <p:cNvPr id="13" name="Rounded Rectangle 12"/>
           <p:cNvSpPr/>
           <p:nvPr/>
         </p:nvSpPr>
         <p:spPr>
           <a:xfrm>
-            <a:off x="777240" y="4087368"/>
-            <a:ext cx="1554480" cy="237744"/>
+            <a:off x="731520" y="3657600"/>
+            <a:ext cx="1645920" cy="228600"/>
           </a:xfrm>
           <a:prstGeom prst="roundRect">
             <a:avLst>
@@ -39213,20 +39340,130 @@
           <a:p>
             <a:pPr algn="ctr"/>
             <a:r>
-              <a:rPr sz="850">
+              <a:rPr sz="750">
                 <a:solidFill>
                   <a:srgbClr val="0D1B2A"/>
                 </a:solidFill>
                 <a:latin typeface="Roboto"/>
               </a:rPr>
-              <a:t>Knowledge it never learned</a:t>
-            </a:r>
-          </a:p>
-        </p:txBody>
-      </p:sp>
-      <p:sp>
-        <p:nvSpPr>
-          <p:cNvPr id="15" name="Rectangle 14"/>
+              <a:t>Its facts are approximate</a:t>
+            </a:r>
+          </a:p>
+        </p:txBody>
+      </p:sp>
+      <p:sp>
+        <p:nvSpPr>
+          <p:cNvPr id="14" name="Rounded Rectangle 13"/>
+          <p:cNvSpPr/>
+          <p:nvPr/>
+        </p:nvSpPr>
+        <p:spPr>
+          <a:xfrm>
+            <a:off x="731520" y="3922776"/>
+            <a:ext cx="1645920" cy="228600"/>
+          </a:xfrm>
+          <a:prstGeom prst="roundRect">
+            <a:avLst>
+              <a:gd name="adj" fmla="val 18000"/>
+            </a:avLst>
+          </a:prstGeom>
+          <a:solidFill>
+            <a:srgbClr val="CFF5EA"/>
+          </a:solidFill>
+          <a:ln>
+            <a:noFill/>
+          </a:ln>
+          <a:effectLst/>
+        </p:spPr>
+        <p:style>
+          <a:lnRef idx="1">
+            <a:schemeClr val="accent1"/>
+          </a:lnRef>
+          <a:fillRef idx="3">
+            <a:schemeClr val="accent1"/>
+          </a:fillRef>
+          <a:effectRef idx="2">
+            <a:schemeClr val="accent1"/>
+          </a:effectRef>
+          <a:fontRef idx="minor">
+            <a:schemeClr val="lt1"/>
+          </a:fontRef>
+        </p:style>
+        <p:txBody>
+          <a:bodyPr wrap="none" lIns="0" tIns="0" rIns="0" bIns="0" rtlCol="0" anchor="ctr"/>
+          <a:lstStyle/>
+          <a:p>
+            <a:pPr algn="ctr"/>
+            <a:r>
+              <a:rPr sz="750">
+                <a:solidFill>
+                  <a:srgbClr val="0D1B2A"/>
+                </a:solidFill>
+                <a:latin typeface="Roboto"/>
+              </a:rPr>
+              <a:t>Its knowledge stops at a date</a:t>
+            </a:r>
+          </a:p>
+        </p:txBody>
+      </p:sp>
+      <p:sp>
+        <p:nvSpPr>
+          <p:cNvPr id="15" name="Rounded Rectangle 14"/>
+          <p:cNvSpPr/>
+          <p:nvPr/>
+        </p:nvSpPr>
+        <p:spPr>
+          <a:xfrm>
+            <a:off x="731520" y="4187952"/>
+            <a:ext cx="1645920" cy="228600"/>
+          </a:xfrm>
+          <a:prstGeom prst="roundRect">
+            <a:avLst>
+              <a:gd name="adj" fmla="val 18000"/>
+            </a:avLst>
+          </a:prstGeom>
+          <a:solidFill>
+            <a:srgbClr val="CFF5EA"/>
+          </a:solidFill>
+          <a:ln>
+            <a:noFill/>
+          </a:ln>
+          <a:effectLst/>
+        </p:spPr>
+        <p:style>
+          <a:lnRef idx="1">
+            <a:schemeClr val="accent1"/>
+          </a:lnRef>
+          <a:fillRef idx="3">
+            <a:schemeClr val="accent1"/>
+          </a:fillRef>
+          <a:effectRef idx="2">
+            <a:schemeClr val="accent1"/>
+          </a:effectRef>
+          <a:fontRef idx="minor">
+            <a:schemeClr val="lt1"/>
+          </a:fontRef>
+        </p:style>
+        <p:txBody>
+          <a:bodyPr wrap="none" lIns="0" tIns="0" rIns="0" bIns="0" rtlCol="0" anchor="ctr"/>
+          <a:lstStyle/>
+          <a:p>
+            <a:pPr algn="ctr"/>
+            <a:r>
+              <a:rPr sz="750">
+                <a:solidFill>
+                  <a:srgbClr val="0D1B2A"/>
+                </a:solidFill>
+                <a:latin typeface="Roboto"/>
+              </a:rPr>
+              <a:t>It has never seen proprietary data</a:t>
+            </a:r>
+          </a:p>
+        </p:txBody>
+      </p:sp>
+      <p:sp>
+        <p:nvSpPr>
+          <p:cNvPr id="16" name="Rectangle 15"/>
           <p:cNvSpPr/>
           <p:nvPr/>
         </p:nvSpPr>
@@ -39273,7 +39510,7 @@
       </p:sp>
       <p:sp>
         <p:nvSpPr>
-          <p:cNvPr id="16" name="Rectangle 15"/>
+          <p:cNvPr id="17" name="Rectangle 16"/>
           <p:cNvSpPr/>
           <p:nvPr/>
         </p:nvSpPr>
@@ -39318,7 +39555,7 @@
       </p:sp>
       <p:sp>
         <p:nvSpPr>
-          <p:cNvPr id="17" name="TextBox 16"/>
+          <p:cNvPr id="18" name="TextBox 17"/>
           <p:cNvSpPr txBox="1"/>
           <p:nvPr/>
         </p:nvSpPr>
@@ -39353,7 +39590,7 @@
       </p:sp>
       <p:sp>
         <p:nvSpPr>
-          <p:cNvPr id="18" name="TextBox 17"/>
+          <p:cNvPr id="19" name="TextBox 18"/>
           <p:cNvSpPr txBox="1"/>
           <p:nvPr/>
         </p:nvSpPr>
@@ -39388,7 +39625,7 @@
       </p:sp>
       <p:sp>
         <p:nvSpPr>
-          <p:cNvPr id="19" name="TextBox 18"/>
+          <p:cNvPr id="20" name="TextBox 19"/>
           <p:cNvSpPr txBox="1"/>
           <p:nvPr/>
         </p:nvSpPr>
@@ -39423,7 +39660,7 @@
       </p:sp>
       <p:sp>
         <p:nvSpPr>
-          <p:cNvPr id="20" name="TextBox 19"/>
+          <p:cNvPr id="21" name="TextBox 20"/>
           <p:cNvSpPr txBox="1"/>
           <p:nvPr/>
         </p:nvSpPr>
@@ -39458,14 +39695,14 @@
       </p:sp>
       <p:sp>
         <p:nvSpPr>
-          <p:cNvPr id="21" name="TextBox 20"/>
+          <p:cNvPr id="22" name="TextBox 21"/>
           <p:cNvSpPr txBox="1"/>
           <p:nvPr/>
         </p:nvSpPr>
         <p:spPr>
           <a:xfrm>
-            <a:off x="2843784" y="3502152"/>
-            <a:ext cx="1572768" cy="411480"/>
+            <a:off x="2843784" y="3483864"/>
+            <a:ext cx="914400" cy="228600"/>
           </a:xfrm>
           <a:prstGeom prst="rect">
             <a:avLst/>
@@ -39480,48 +39717,13 @@
           <a:p>
             <a:pPr algn="l"/>
             <a:r>
-              <a:rPr sz="850" b="0">
+              <a:rPr sz="750" b="0" spc="100">
                 <a:solidFill>
                   <a:srgbClr val="6B7B8C"/>
                 </a:solidFill>
-                <a:latin typeface="Roboto"/>
-              </a:rPr>
-              <a:t>2023: OpenAI adds function calling to its developer platform.</a:t>
-            </a:r>
-          </a:p>
-        </p:txBody>
-      </p:sp>
-      <p:sp>
-        <p:nvSpPr>
-          <p:cNvPr id="22" name="TextBox 21"/>
-          <p:cNvSpPr txBox="1"/>
-          <p:nvPr/>
-        </p:nvSpPr>
-        <p:spPr>
-          <a:xfrm>
-            <a:off x="2843784" y="3913632"/>
-            <a:ext cx="914400" cy="228600"/>
-          </a:xfrm>
-          <a:prstGeom prst="rect">
-            <a:avLst/>
-          </a:prstGeom>
-          <a:noFill/>
-        </p:spPr>
-        <p:txBody>
-          <a:bodyPr wrap="square" lIns="0" tIns="0" rIns="0" bIns="0" anchor="t">
-            <a:spAutoFit/>
-          </a:bodyPr>
-          <a:lstStyle/>
-          <a:p>
-            <a:pPr algn="l"/>
-            <a:r>
-              <a:rPr sz="750" b="0" spc="100">
-                <a:solidFill>
-                  <a:srgbClr val="6B7B8C"/>
-                </a:solidFill>
                 <a:latin typeface="JetBrains Mono"/>
               </a:rPr>
-              <a:t>FILLS</a:t>
+              <a:t>SOLVES</a:t>
             </a:r>
           </a:p>
         </p:txBody>
@@ -39534,8 +39736,8 @@
         </p:nvSpPr>
         <p:spPr>
           <a:xfrm>
-            <a:off x="2843784" y="4087368"/>
-            <a:ext cx="1554480" cy="237744"/>
+            <a:off x="2798064" y="3657600"/>
+            <a:ext cx="1645920" cy="228600"/>
           </a:xfrm>
           <a:prstGeom prst="roundRect">
             <a:avLst>
@@ -39570,13 +39772,13 @@
           <a:p>
             <a:pPr algn="ctr"/>
             <a:r>
-              <a:rPr sz="850">
+              <a:rPr sz="750">
                 <a:solidFill>
                   <a:srgbClr val="0D1B2A"/>
                 </a:solidFill>
                 <a:latin typeface="Roboto"/>
               </a:rPr>
-              <a:t>Hands to act with</a:t>
+              <a:t>It cannot act</a:t>
             </a:r>
           </a:p>
         </p:txBody>
@@ -39821,8 +40023,8 @@
         </p:nvSpPr>
         <p:spPr>
           <a:xfrm>
-            <a:off x="4910328" y="3502152"/>
-            <a:ext cx="1572768" cy="411480"/>
+            <a:off x="4910328" y="3483864"/>
+            <a:ext cx="914400" cy="228600"/>
           </a:xfrm>
           <a:prstGeom prst="rect">
             <a:avLst/>
@@ -39837,62 +40039,27 @@
           <a:p>
             <a:pPr algn="l"/>
             <a:r>
-              <a:rPr sz="850" b="0">
+              <a:rPr sz="750" b="0" spc="100">
                 <a:solidFill>
                   <a:srgbClr val="6B7B8C"/>
                 </a:solidFill>
-                <a:latin typeface="Roboto"/>
-              </a:rPr>
-              <a:t>2023: first experiments like AutoGPT. 2024: “agentic AI” takes off.</a:t>
-            </a:r>
-          </a:p>
-        </p:txBody>
-      </p:sp>
-      <p:sp>
-        <p:nvSpPr>
-          <p:cNvPr id="31" name="TextBox 30"/>
-          <p:cNvSpPr txBox="1"/>
-          <p:nvPr/>
-        </p:nvSpPr>
-        <p:spPr>
-          <a:xfrm>
-            <a:off x="4910328" y="3913632"/>
-            <a:ext cx="914400" cy="228600"/>
-          </a:xfrm>
-          <a:prstGeom prst="rect">
-            <a:avLst/>
-          </a:prstGeom>
-          <a:noFill/>
-        </p:spPr>
-        <p:txBody>
-          <a:bodyPr wrap="square" lIns="0" tIns="0" rIns="0" bIns="0" anchor="t">
-            <a:spAutoFit/>
-          </a:bodyPr>
-          <a:lstStyle/>
-          <a:p>
-            <a:pPr algn="l"/>
-            <a:r>
-              <a:rPr sz="750" b="0" spc="100">
-                <a:solidFill>
-                  <a:srgbClr val="6B7B8C"/>
-                </a:solidFill>
                 <a:latin typeface="JetBrains Mono"/>
               </a:rPr>
-              <a:t>FILLS</a:t>
-            </a:r>
-          </a:p>
-        </p:txBody>
-      </p:sp>
-      <p:sp>
-        <p:nvSpPr>
-          <p:cNvPr id="32" name="Rounded Rectangle 31"/>
+              <a:t>SOLVES</a:t>
+            </a:r>
+          </a:p>
+        </p:txBody>
+      </p:sp>
+      <p:sp>
+        <p:nvSpPr>
+          <p:cNvPr id="31" name="Rounded Rectangle 30"/>
           <p:cNvSpPr/>
           <p:nvPr/>
         </p:nvSpPr>
         <p:spPr>
           <a:xfrm>
-            <a:off x="4910328" y="4087368"/>
-            <a:ext cx="1554480" cy="237744"/>
+            <a:off x="4864608" y="3657600"/>
+            <a:ext cx="1645920" cy="228600"/>
           </a:xfrm>
           <a:prstGeom prst="roundRect">
             <a:avLst>
@@ -39927,20 +40094,20 @@
           <a:p>
             <a:pPr algn="ctr"/>
             <a:r>
-              <a:rPr sz="850">
+              <a:rPr sz="750">
                 <a:solidFill>
                   <a:srgbClr val="0D1B2A"/>
                 </a:solidFill>
                 <a:latin typeface="Roboto"/>
               </a:rPr>
-              <a:t>A loop kept in check</a:t>
-            </a:r>
-          </a:p>
-        </p:txBody>
-      </p:sp>
-      <p:sp>
-        <p:nvSpPr>
-          <p:cNvPr id="33" name="Rectangle 32"/>
+              <a:t>It cannot do multi-step tasks</a:t>
+            </a:r>
+          </a:p>
+        </p:txBody>
+      </p:sp>
+      <p:sp>
+        <p:nvSpPr>
+          <p:cNvPr id="32" name="Rectangle 31"/>
           <p:cNvSpPr/>
           <p:nvPr/>
         </p:nvSpPr>
@@ -39987,7 +40154,7 @@
       </p:sp>
       <p:sp>
         <p:nvSpPr>
-          <p:cNvPr id="34" name="Rectangle 33"/>
+          <p:cNvPr id="33" name="Rectangle 32"/>
           <p:cNvSpPr/>
           <p:nvPr/>
         </p:nvSpPr>
@@ -40032,7 +40199,7 @@
       </p:sp>
       <p:sp>
         <p:nvSpPr>
-          <p:cNvPr id="35" name="TextBox 34"/>
+          <p:cNvPr id="34" name="TextBox 33"/>
           <p:cNvSpPr txBox="1"/>
           <p:nvPr/>
         </p:nvSpPr>
@@ -40067,7 +40234,7 @@
       </p:sp>
       <p:sp>
         <p:nvSpPr>
-          <p:cNvPr id="36" name="TextBox 35"/>
+          <p:cNvPr id="35" name="TextBox 34"/>
           <p:cNvSpPr txBox="1"/>
           <p:nvPr/>
         </p:nvSpPr>
@@ -40102,7 +40269,7 @@
       </p:sp>
       <p:sp>
         <p:nvSpPr>
-          <p:cNvPr id="37" name="TextBox 36"/>
+          <p:cNvPr id="36" name="TextBox 35"/>
           <p:cNvSpPr txBox="1"/>
           <p:nvPr/>
         </p:nvSpPr>
@@ -40137,7 +40304,7 @@
       </p:sp>
       <p:sp>
         <p:nvSpPr>
-          <p:cNvPr id="38" name="TextBox 37"/>
+          <p:cNvPr id="37" name="TextBox 36"/>
           <p:cNvSpPr txBox="1"/>
           <p:nvPr/>
         </p:nvSpPr>
@@ -40172,14 +40339,14 @@
       </p:sp>
       <p:sp>
         <p:nvSpPr>
-          <p:cNvPr id="39" name="TextBox 38"/>
+          <p:cNvPr id="38" name="TextBox 37"/>
           <p:cNvSpPr txBox="1"/>
           <p:nvPr/>
         </p:nvSpPr>
         <p:spPr>
           <a:xfrm>
-            <a:off x="6976872" y="3502152"/>
-            <a:ext cx="1572768" cy="411480"/>
+            <a:off x="6976872" y="3483864"/>
+            <a:ext cx="914400" cy="228600"/>
           </a:xfrm>
           <a:prstGeom prst="rect">
             <a:avLst/>
@@ -40194,62 +40361,27 @@
           <a:p>
             <a:pPr algn="l"/>
             <a:r>
-              <a:rPr sz="850" b="0">
+              <a:rPr sz="750" b="0" spc="100">
                 <a:solidFill>
                   <a:srgbClr val="6B7B8C"/>
                 </a:solidFill>
-                <a:latin typeface="Roboto"/>
-              </a:rPr>
-              <a:t>Published by Anthropic, adopted by OpenAI, Google and Microsoft in 2025.</a:t>
-            </a:r>
-          </a:p>
-        </p:txBody>
-      </p:sp>
-      <p:sp>
-        <p:nvSpPr>
-          <p:cNvPr id="40" name="TextBox 39"/>
-          <p:cNvSpPr txBox="1"/>
-          <p:nvPr/>
-        </p:nvSpPr>
-        <p:spPr>
-          <a:xfrm>
-            <a:off x="6976872" y="3913632"/>
-            <a:ext cx="914400" cy="228600"/>
-          </a:xfrm>
-          <a:prstGeom prst="rect">
-            <a:avLst/>
-          </a:prstGeom>
-          <a:noFill/>
-        </p:spPr>
-        <p:txBody>
-          <a:bodyPr wrap="square" lIns="0" tIns="0" rIns="0" bIns="0" anchor="t">
-            <a:spAutoFit/>
-          </a:bodyPr>
-          <a:lstStyle/>
-          <a:p>
-            <a:pPr algn="l"/>
-            <a:r>
-              <a:rPr sz="750" b="0" spc="100">
-                <a:solidFill>
-                  <a:srgbClr val="6B7B8C"/>
-                </a:solidFill>
                 <a:latin typeface="JetBrains Mono"/>
               </a:rPr>
-              <a:t>FILLS</a:t>
-            </a:r>
-          </a:p>
-        </p:txBody>
-      </p:sp>
-      <p:sp>
-        <p:nvSpPr>
-          <p:cNvPr id="41" name="Rounded Rectangle 40"/>
+              <a:t>SOLVES</a:t>
+            </a:r>
+          </a:p>
+        </p:txBody>
+      </p:sp>
+      <p:sp>
+        <p:nvSpPr>
+          <p:cNvPr id="39" name="Rounded Rectangle 38"/>
           <p:cNvSpPr/>
           <p:nvPr/>
         </p:nvSpPr>
         <p:spPr>
           <a:xfrm>
-            <a:off x="6976872" y="4087368"/>
-            <a:ext cx="1554480" cy="237744"/>
+            <a:off x="6931152" y="3657600"/>
+            <a:ext cx="1645920" cy="228600"/>
           </a:xfrm>
           <a:prstGeom prst="roundRect">
             <a:avLst>
@@ -40284,20 +40416,20 @@
           <a:p>
             <a:pPr algn="ctr"/>
             <a:r>
-              <a:rPr sz="850">
+              <a:rPr sz="750">
                 <a:solidFill>
                   <a:srgbClr val="0D1B2A"/>
                 </a:solidFill>
                 <a:latin typeface="Roboto"/>
               </a:rPr>
-              <a:t>One common plug</a:t>
+              <a:t>Every tool needs its own connection</a:t>
             </a:r>
           </a:p>
         </p:txBody>
       </p:sp>
       <p:cxnSp>
         <p:nvCxnSpPr>
-          <p:cNvPr id="42" name="Connector 41"/>
+          <p:cNvPr id="40" name="Connector 39"/>
           <p:cNvCxnSpPr/>
           <p:nvPr/>
         </p:nvCxnSpPr>
@@ -40333,7 +40465,7 @@
       </p:cxnSp>
       <p:sp>
         <p:nvSpPr>
-          <p:cNvPr id="43" name="Oval 42"/>
+          <p:cNvPr id="41" name="Oval 40"/>
           <p:cNvSpPr/>
           <p:nvPr/>
         </p:nvSpPr>
@@ -40382,7 +40514,7 @@
       </p:sp>
       <p:sp>
         <p:nvSpPr>
-          <p:cNvPr id="44" name="Oval 43"/>
+          <p:cNvPr id="42" name="Oval 41"/>
           <p:cNvSpPr/>
           <p:nvPr/>
         </p:nvSpPr>
@@ -40431,7 +40563,7 @@
       </p:sp>
       <p:sp>
         <p:nvSpPr>
-          <p:cNvPr id="45" name="Oval 44"/>
+          <p:cNvPr id="43" name="Oval 42"/>
           <p:cNvSpPr/>
           <p:nvPr/>
         </p:nvSpPr>
@@ -40480,7 +40612,7 @@
       </p:sp>
       <p:sp>
         <p:nvSpPr>
-          <p:cNvPr id="46" name="Oval 45"/>
+          <p:cNvPr id="44" name="Oval 43"/>
           <p:cNvSpPr/>
           <p:nvPr/>
         </p:nvSpPr>
@@ -40529,7 +40661,7 @@
       </p:sp>
       <p:sp>
         <p:nvSpPr>
-          <p:cNvPr id="47" name="Rectangle 46"/>
+          <p:cNvPr id="45" name="Rectangle 44"/>
           <p:cNvSpPr/>
           <p:nvPr/>
         </p:nvSpPr>
@@ -40574,7 +40706,7 @@
       </p:sp>
       <p:sp>
         <p:nvSpPr>
-          <p:cNvPr id="48" name="TextBox 47"/>
+          <p:cNvPr id="46" name="TextBox 45"/>
           <p:cNvSpPr txBox="1"/>
           <p:nvPr/>
         </p:nvSpPr>
@@ -43127,7 +43259,7 @@
 
 <file path=ppt/slides/slide3.xml><?xml version="1.0" encoding="utf-8"?>
 <p:sld xmlns:a="http://schemas.openxmlformats.org/drawingml/2006/main" xmlns:r="http://schemas.openxmlformats.org/officeDocument/2006/relationships" xmlns:p="http://schemas.openxmlformats.org/presentationml/2006/main">
-  <p:cSld name="Slide 2">
+  <p:cSld>
     <p:bg>
       <p:bgPr>
         <a:solidFill>
@@ -43152,7 +43284,7 @@
       </p:grpSpPr>
       <p:sp>
         <p:nvSpPr>
-          <p:cNvPr id="2" name="Shape 0"/>
+          <p:cNvPr id="2" name="Rectangle 1"/>
           <p:cNvSpPr/>
           <p:nvPr/>
         </p:nvSpPr>
@@ -43167,59 +43299,73 @@
           <a:solidFill>
             <a:srgbClr val="0D1B2A"/>
           </a:solidFill>
-          <a:ln/>
-        </p:spPr>
-        <p:txBody>
-          <a:bodyPr/>
-          <a:lstStyle/>
-          <a:p>
-            <a:endParaRPr lang="en-US"/>
-          </a:p>
-        </p:txBody>
-      </p:sp>
-      <p:sp>
-        <p:nvSpPr>
-          <p:cNvPr id="3" name="Text 1"/>
-          <p:cNvSpPr/>
+          <a:ln>
+            <a:noFill/>
+          </a:ln>
+          <a:effectLst/>
+        </p:spPr>
+        <p:style>
+          <a:lnRef idx="1">
+            <a:schemeClr val="accent1"/>
+          </a:lnRef>
+          <a:fillRef idx="3">
+            <a:schemeClr val="accent1"/>
+          </a:fillRef>
+          <a:effectRef idx="2">
+            <a:schemeClr val="accent1"/>
+          </a:effectRef>
+          <a:fontRef idx="minor">
+            <a:schemeClr val="lt1"/>
+          </a:fontRef>
+        </p:style>
+        <p:txBody>
+          <a:bodyPr rtlCol="0" anchor="ctr"/>
+          <a:lstStyle/>
+          <a:p>
+            <a:pPr algn="ctr"/>
+            <a:endParaRPr/>
+          </a:p>
+        </p:txBody>
+      </p:sp>
+      <p:sp>
+        <p:nvSpPr>
+          <p:cNvPr id="3" name="TextBox 2"/>
+          <p:cNvSpPr txBox="1"/>
           <p:nvPr/>
         </p:nvSpPr>
         <p:spPr>
           <a:xfrm>
             <a:off x="566928" y="329184"/>
-            <a:ext cx="8138160" cy="256032"/>
+            <a:ext cx="8138160" cy="274320"/>
           </a:xfrm>
           <a:prstGeom prst="rect">
             <a:avLst/>
           </a:prstGeom>
           <a:noFill/>
-          <a:ln/>
-        </p:spPr>
-        <p:txBody>
-          <a:bodyPr wrap="square" lIns="0" tIns="0" rIns="0" bIns="0" rtlCol="0" anchor="ctr"/>
-          <a:lstStyle/>
-          <a:p>
-            <a:pPr marL="0" indent="0">
-              <a:buNone/>
-            </a:pPr>
-            <a:r>
-              <a:rPr lang="en-US" sz="1050" kern="0" spc="200" dirty="0">
+        </p:spPr>
+        <p:txBody>
+          <a:bodyPr wrap="square" lIns="0" tIns="0" rIns="0" bIns="0" anchor="t">
+            <a:spAutoFit/>
+          </a:bodyPr>
+          <a:lstStyle/>
+          <a:p>
+            <a:pPr algn="l"/>
+            <a:r>
+              <a:rPr sz="1100" b="0" spc="300">
                 <a:solidFill>
                   <a:srgbClr val="1B9AAA"/>
                 </a:solidFill>
-                <a:latin typeface="JetBrains Mono" pitchFamily="34" charset="0"/>
-                <a:ea typeface="JetBrains Mono" pitchFamily="34" charset="-122"/>
-                <a:cs typeface="JetBrains Mono" pitchFamily="34" charset="-120"/>
+                <a:latin typeface="JetBrains Mono"/>
               </a:rPr>
               <a:t>FOUNDATIONS · 1955–2024</a:t>
             </a:r>
-            <a:endParaRPr lang="en-US" sz="1050" dirty="0"/>
-          </a:p>
-        </p:txBody>
-      </p:sp>
-      <p:sp>
-        <p:nvSpPr>
-          <p:cNvPr id="4" name="Text 2"/>
-          <p:cNvSpPr/>
+          </a:p>
+        </p:txBody>
+      </p:sp>
+      <p:sp>
+        <p:nvSpPr>
+          <p:cNvPr id="4" name="slide-foundations"/>
+          <p:cNvSpPr txBox="1"/>
           <p:nvPr/>
         </p:nvSpPr>
         <p:spPr>
@@ -43231,405 +43377,1365 @@
             <a:avLst/>
           </a:prstGeom>
           <a:noFill/>
-          <a:ln/>
-        </p:spPr>
-        <p:txBody>
-          <a:bodyPr wrap="square" lIns="0" tIns="0" rIns="0" bIns="0" rtlCol="0" anchor="ctr"/>
-          <a:lstStyle/>
-          <a:p>
-            <a:pPr marL="0" indent="0">
-              <a:buNone/>
-            </a:pPr>
-            <a:r>
-              <a:rPr lang="en-US" sz="3200" dirty="0">
+        </p:spPr>
+        <p:txBody>
+          <a:bodyPr wrap="square" lIns="0" tIns="0" rIns="0" bIns="0" anchor="t">
+            <a:spAutoFit/>
+          </a:bodyPr>
+          <a:lstStyle/>
+          <a:p>
+            <a:pPr algn="l"/>
+            <a:r>
+              <a:rPr sz="3200" b="0">
                 <a:solidFill>
                   <a:srgbClr val="0D1B2A"/>
                 </a:solidFill>
-                <a:latin typeface="Oswald" pitchFamily="34" charset="0"/>
-                <a:ea typeface="Oswald" pitchFamily="34" charset="-122"/>
-                <a:cs typeface="Oswald" pitchFamily="34" charset="-120"/>
+                <a:latin typeface="Oswald"/>
               </a:rPr>
               <a:t>Five nested ideas, seventy years</a:t>
             </a:r>
-            <a:endParaRPr lang="en-US" sz="3200" dirty="0"/>
-          </a:p>
-        </p:txBody>
-      </p:sp>
-      <p:sp>
-        <p:nvSpPr>
-          <p:cNvPr id="5" name="Shape 3"/>
+          </a:p>
+        </p:txBody>
+      </p:sp>
+      <p:sp>
+        <p:nvSpPr>
+          <p:cNvPr id="5" name="TextBox 4"/>
+          <p:cNvSpPr txBox="1"/>
+          <p:nvPr/>
+        </p:nvSpPr>
+        <p:spPr>
+          <a:xfrm>
+            <a:off x="566928" y="1298448"/>
+            <a:ext cx="8138160" cy="457200"/>
+          </a:xfrm>
+          <a:prstGeom prst="rect">
+            <a:avLst/>
+          </a:prstGeom>
+          <a:noFill/>
+        </p:spPr>
+        <p:txBody>
+          <a:bodyPr wrap="square" lIns="0" tIns="0" rIns="0" bIns="0" anchor="t">
+            <a:spAutoFit/>
+          </a:bodyPr>
+          <a:lstStyle/>
+          <a:p>
+            <a:pPr algn="l"/>
+            <a:r>
+              <a:rPr sz="1400" b="0">
+                <a:solidFill>
+                  <a:srgbClr val="14293D"/>
+                </a:solidFill>
+                <a:latin typeface="Roboto"/>
+              </a:rPr>
+              <a:t>Each idea is a part of the one around it, not a replacement for it.</a:t>
+            </a:r>
+          </a:p>
+        </p:txBody>
+      </p:sp>
+      <p:sp>
+        <p:nvSpPr>
+          <p:cNvPr id="6" name="Oval 5"/>
           <p:cNvSpPr/>
           <p:nvPr/>
         </p:nvSpPr>
         <p:spPr>
           <a:xfrm>
-            <a:off x="640080" y="1463040"/>
-            <a:ext cx="3703320" cy="3127248"/>
-          </a:xfrm>
-          <a:prstGeom prst="rect">
+            <a:off x="571500" y="1783080"/>
+            <a:ext cx="2697480" cy="2697480"/>
+          </a:xfrm>
+          <a:prstGeom prst="ellipse">
             <a:avLst/>
           </a:prstGeom>
           <a:solidFill>
             <a:srgbClr val="1B9AAA">
-              <a:alpha val="7000"/>
+              <a:alpha val="8000"/>
             </a:srgbClr>
           </a:solidFill>
           <a:ln w="9525">
             <a:solidFill>
-              <a:srgbClr val="14293D"/>
+              <a:srgbClr val="1B9AAA"/>
             </a:solidFill>
-            <a:prstDash val="solid"/>
-          </a:ln>
-        </p:spPr>
-        <p:txBody>
-          <a:bodyPr/>
-          <a:lstStyle/>
-          <a:p>
-            <a:endParaRPr lang="en-US"/>
-          </a:p>
-        </p:txBody>
-      </p:sp>
-      <p:sp>
-        <p:nvSpPr>
-          <p:cNvPr id="6" name="Text 4"/>
+          </a:ln>
+          <a:effectLst/>
+        </p:spPr>
+        <p:style>
+          <a:lnRef idx="1">
+            <a:schemeClr val="accent1"/>
+          </a:lnRef>
+          <a:fillRef idx="3">
+            <a:schemeClr val="accent1"/>
+          </a:fillRef>
+          <a:effectRef idx="2">
+            <a:schemeClr val="accent1"/>
+          </a:effectRef>
+          <a:fontRef idx="minor">
+            <a:schemeClr val="lt1"/>
+          </a:fontRef>
+        </p:style>
+        <p:txBody>
+          <a:bodyPr rtlCol="0" anchor="ctr"/>
+          <a:lstStyle/>
+          <a:p>
+            <a:pPr algn="ctr"/>
+            <a:endParaRPr/>
+          </a:p>
+        </p:txBody>
+      </p:sp>
+      <p:sp>
+        <p:nvSpPr>
+          <p:cNvPr id="7" name="TextBox 6"/>
+          <p:cNvSpPr txBox="1"/>
+          <p:nvPr/>
+        </p:nvSpPr>
+        <p:spPr>
+          <a:xfrm>
+            <a:off x="1005840" y="1965960"/>
+            <a:ext cx="1828800" cy="201168"/>
+          </a:xfrm>
+          <a:prstGeom prst="rect">
+            <a:avLst/>
+          </a:prstGeom>
+          <a:noFill/>
+        </p:spPr>
+        <p:txBody>
+          <a:bodyPr wrap="square" lIns="0" tIns="0" rIns="0" bIns="0" anchor="t">
+            <a:spAutoFit/>
+          </a:bodyPr>
+          <a:lstStyle/>
+          <a:p>
+            <a:pPr algn="ctr"/>
+            <a:r>
+              <a:rPr sz="1100" b="0">
+                <a:solidFill>
+                  <a:srgbClr val="0D1B2A"/>
+                </a:solidFill>
+                <a:latin typeface="Oswald"/>
+              </a:rPr>
+              <a:t>Artificial Intelligence</a:t>
+            </a:r>
+          </a:p>
+        </p:txBody>
+      </p:sp>
+      <p:sp>
+        <p:nvSpPr>
+          <p:cNvPr id="8" name="Oval 7"/>
           <p:cNvSpPr/>
           <p:nvPr/>
         </p:nvSpPr>
         <p:spPr>
           <a:xfrm>
-            <a:off x="768096" y="1572768"/>
-            <a:ext cx="3447288" cy="237744"/>
-          </a:xfrm>
-          <a:prstGeom prst="rect">
-            <a:avLst/>
-          </a:prstGeom>
-          <a:noFill/>
-          <a:ln/>
-        </p:spPr>
-        <p:txBody>
-          <a:bodyPr wrap="square" lIns="0" tIns="0" rIns="0" bIns="0" rtlCol="0" anchor="ctr"/>
-          <a:lstStyle/>
-          <a:p>
-            <a:pPr marL="0" indent="0">
-              <a:buNone/>
-            </a:pPr>
-            <a:r>
-              <a:rPr lang="en-US" sz="1200" dirty="0">
-                <a:solidFill>
-                  <a:srgbClr val="0D1B2A"/>
-                </a:solidFill>
-                <a:latin typeface="Oswald" pitchFamily="34" charset="0"/>
-                <a:ea typeface="Oswald" pitchFamily="34" charset="-122"/>
-                <a:cs typeface="Oswald" pitchFamily="34" charset="-120"/>
-              </a:rPr>
-              <a:t>Artificial Intelligence</a:t>
-            </a:r>
-            <a:endParaRPr lang="en-US" sz="1200" dirty="0"/>
-          </a:p>
-        </p:txBody>
-      </p:sp>
-      <p:sp>
-        <p:nvSpPr>
-          <p:cNvPr id="7" name="Shape 5"/>
-          <p:cNvSpPr/>
-          <p:nvPr/>
-        </p:nvSpPr>
-        <p:spPr>
-          <a:xfrm>
-            <a:off x="896112" y="1810512"/>
-            <a:ext cx="3200400" cy="2542032"/>
-          </a:xfrm>
-          <a:prstGeom prst="rect">
+            <a:off x="845820" y="2331720"/>
+            <a:ext cx="2148840" cy="2148840"/>
+          </a:xfrm>
+          <a:prstGeom prst="ellipse">
             <a:avLst/>
           </a:prstGeom>
           <a:solidFill>
             <a:srgbClr val="1B9AAA">
-              <a:alpha val="7000"/>
+              <a:alpha val="12000"/>
             </a:srgbClr>
           </a:solidFill>
           <a:ln w="9525">
             <a:solidFill>
-              <a:srgbClr val="14293D"/>
+              <a:srgbClr val="1B9AAA"/>
             </a:solidFill>
-            <a:prstDash val="solid"/>
-          </a:ln>
-        </p:spPr>
-        <p:txBody>
-          <a:bodyPr/>
-          <a:lstStyle/>
-          <a:p>
-            <a:endParaRPr lang="en-US"/>
-          </a:p>
-        </p:txBody>
-      </p:sp>
-      <p:sp>
-        <p:nvSpPr>
-          <p:cNvPr id="8" name="Text 6"/>
+          </a:ln>
+          <a:effectLst/>
+        </p:spPr>
+        <p:style>
+          <a:lnRef idx="1">
+            <a:schemeClr val="accent1"/>
+          </a:lnRef>
+          <a:fillRef idx="3">
+            <a:schemeClr val="accent1"/>
+          </a:fillRef>
+          <a:effectRef idx="2">
+            <a:schemeClr val="accent1"/>
+          </a:effectRef>
+          <a:fontRef idx="minor">
+            <a:schemeClr val="lt1"/>
+          </a:fontRef>
+        </p:style>
+        <p:txBody>
+          <a:bodyPr rtlCol="0" anchor="ctr"/>
+          <a:lstStyle/>
+          <a:p>
+            <a:pPr algn="ctr"/>
+            <a:endParaRPr/>
+          </a:p>
+        </p:txBody>
+      </p:sp>
+      <p:sp>
+        <p:nvSpPr>
+          <p:cNvPr id="9" name="TextBox 8"/>
+          <p:cNvSpPr txBox="1"/>
+          <p:nvPr/>
+        </p:nvSpPr>
+        <p:spPr>
+          <a:xfrm>
+            <a:off x="1005840" y="2514600"/>
+            <a:ext cx="1828800" cy="201168"/>
+          </a:xfrm>
+          <a:prstGeom prst="rect">
+            <a:avLst/>
+          </a:prstGeom>
+          <a:noFill/>
+        </p:spPr>
+        <p:txBody>
+          <a:bodyPr wrap="square" lIns="0" tIns="0" rIns="0" bIns="0" anchor="t">
+            <a:spAutoFit/>
+          </a:bodyPr>
+          <a:lstStyle/>
+          <a:p>
+            <a:pPr algn="ctr"/>
+            <a:r>
+              <a:rPr sz="1100" b="0">
+                <a:solidFill>
+                  <a:srgbClr val="0D1B2A"/>
+                </a:solidFill>
+                <a:latin typeface="Oswald"/>
+              </a:rPr>
+              <a:t>Machine Learning</a:t>
+            </a:r>
+          </a:p>
+        </p:txBody>
+      </p:sp>
+      <p:sp>
+        <p:nvSpPr>
+          <p:cNvPr id="10" name="Oval 9"/>
           <p:cNvSpPr/>
           <p:nvPr/>
         </p:nvSpPr>
         <p:spPr>
           <a:xfrm>
-            <a:off x="1024128" y="1920240"/>
-            <a:ext cx="2944368" cy="237744"/>
-          </a:xfrm>
-          <a:prstGeom prst="rect">
-            <a:avLst/>
-          </a:prstGeom>
-          <a:noFill/>
-          <a:ln/>
-        </p:spPr>
-        <p:txBody>
-          <a:bodyPr wrap="square" lIns="0" tIns="0" rIns="0" bIns="0" rtlCol="0" anchor="ctr"/>
-          <a:lstStyle/>
-          <a:p>
-            <a:pPr marL="0" indent="0">
-              <a:buNone/>
-            </a:pPr>
-            <a:r>
-              <a:rPr lang="en-US" sz="1200" dirty="0">
-                <a:solidFill>
-                  <a:srgbClr val="0D1B2A"/>
-                </a:solidFill>
-                <a:latin typeface="Oswald" pitchFamily="34" charset="0"/>
-                <a:ea typeface="Oswald" pitchFamily="34" charset="-122"/>
-                <a:cs typeface="Oswald" pitchFamily="34" charset="-120"/>
-              </a:rPr>
-              <a:t>Machine Learning</a:t>
-            </a:r>
-            <a:endParaRPr lang="en-US" sz="1200" dirty="0"/>
-          </a:p>
-        </p:txBody>
-      </p:sp>
-      <p:sp>
-        <p:nvSpPr>
-          <p:cNvPr id="9" name="Shape 7"/>
-          <p:cNvSpPr/>
-          <p:nvPr/>
-        </p:nvSpPr>
-        <p:spPr>
-          <a:xfrm>
-            <a:off x="1152144" y="2157984"/>
-            <a:ext cx="2697480" cy="1975104"/>
-          </a:xfrm>
-          <a:prstGeom prst="rect">
+            <a:off x="1120140" y="2880360"/>
+            <a:ext cx="1600200" cy="1600200"/>
+          </a:xfrm>
+          <a:prstGeom prst="ellipse">
             <a:avLst/>
           </a:prstGeom>
           <a:solidFill>
             <a:srgbClr val="1B9AAA">
-              <a:alpha val="7000"/>
+              <a:alpha val="16000"/>
             </a:srgbClr>
           </a:solidFill>
           <a:ln w="9525">
             <a:solidFill>
-              <a:srgbClr val="14293D"/>
+              <a:srgbClr val="1B9AAA"/>
             </a:solidFill>
-            <a:prstDash val="solid"/>
-          </a:ln>
-        </p:spPr>
-        <p:txBody>
-          <a:bodyPr/>
-          <a:lstStyle/>
-          <a:p>
-            <a:endParaRPr lang="en-US"/>
-          </a:p>
-        </p:txBody>
-      </p:sp>
-      <p:sp>
-        <p:nvSpPr>
-          <p:cNvPr id="10" name="Text 8"/>
+          </a:ln>
+          <a:effectLst/>
+        </p:spPr>
+        <p:style>
+          <a:lnRef idx="1">
+            <a:schemeClr val="accent1"/>
+          </a:lnRef>
+          <a:fillRef idx="3">
+            <a:schemeClr val="accent1"/>
+          </a:fillRef>
+          <a:effectRef idx="2">
+            <a:schemeClr val="accent1"/>
+          </a:effectRef>
+          <a:fontRef idx="minor">
+            <a:schemeClr val="lt1"/>
+          </a:fontRef>
+        </p:style>
+        <p:txBody>
+          <a:bodyPr rtlCol="0" anchor="ctr"/>
+          <a:lstStyle/>
+          <a:p>
+            <a:pPr algn="ctr"/>
+            <a:endParaRPr/>
+          </a:p>
+        </p:txBody>
+      </p:sp>
+      <p:sp>
+        <p:nvSpPr>
+          <p:cNvPr id="11" name="TextBox 10"/>
+          <p:cNvSpPr txBox="1"/>
+          <p:nvPr/>
+        </p:nvSpPr>
+        <p:spPr>
+          <a:xfrm>
+            <a:off x="1005840" y="3063240"/>
+            <a:ext cx="1828800" cy="201168"/>
+          </a:xfrm>
+          <a:prstGeom prst="rect">
+            <a:avLst/>
+          </a:prstGeom>
+          <a:noFill/>
+        </p:spPr>
+        <p:txBody>
+          <a:bodyPr wrap="square" lIns="0" tIns="0" rIns="0" bIns="0" anchor="t">
+            <a:spAutoFit/>
+          </a:bodyPr>
+          <a:lstStyle/>
+          <a:p>
+            <a:pPr algn="ctr"/>
+            <a:r>
+              <a:rPr sz="1100" b="0">
+                <a:solidFill>
+                  <a:srgbClr val="0D1B2A"/>
+                </a:solidFill>
+                <a:latin typeface="Oswald"/>
+              </a:rPr>
+              <a:t>Deep Learning</a:t>
+            </a:r>
+          </a:p>
+        </p:txBody>
+      </p:sp>
+      <p:sp>
+        <p:nvSpPr>
+          <p:cNvPr id="12" name="Oval 11"/>
           <p:cNvSpPr/>
           <p:nvPr/>
         </p:nvSpPr>
         <p:spPr>
           <a:xfrm>
-            <a:off x="1280160" y="2267712"/>
-            <a:ext cx="2441448" cy="237744"/>
-          </a:xfrm>
-          <a:prstGeom prst="rect">
-            <a:avLst/>
-          </a:prstGeom>
-          <a:noFill/>
-          <a:ln/>
-        </p:spPr>
-        <p:txBody>
-          <a:bodyPr wrap="square" lIns="0" tIns="0" rIns="0" bIns="0" rtlCol="0" anchor="ctr"/>
-          <a:lstStyle/>
-          <a:p>
-            <a:pPr marL="0" indent="0">
-              <a:buNone/>
-            </a:pPr>
-            <a:r>
-              <a:rPr lang="en-US" sz="1200" dirty="0">
-                <a:solidFill>
-                  <a:srgbClr val="0D1B2A"/>
-                </a:solidFill>
-                <a:latin typeface="Oswald" pitchFamily="34" charset="0"/>
-                <a:ea typeface="Oswald" pitchFamily="34" charset="-122"/>
-                <a:cs typeface="Oswald" pitchFamily="34" charset="-120"/>
-              </a:rPr>
-              <a:t>Deep Learning</a:t>
-            </a:r>
-            <a:endParaRPr lang="en-US" sz="1200" dirty="0"/>
-          </a:p>
-        </p:txBody>
-      </p:sp>
-      <p:sp>
-        <p:nvSpPr>
-          <p:cNvPr id="11" name="Shape 9"/>
-          <p:cNvSpPr/>
-          <p:nvPr/>
-        </p:nvSpPr>
-        <p:spPr>
-          <a:xfrm>
-            <a:off x="1408176" y="2780465"/>
-            <a:ext cx="1011890" cy="941832"/>
-          </a:xfrm>
-          <a:prstGeom prst="rect">
+            <a:off x="1271016" y="3506724"/>
+            <a:ext cx="676656" cy="676656"/>
+          </a:xfrm>
+          <a:prstGeom prst="ellipse">
             <a:avLst/>
           </a:prstGeom>
           <a:solidFill>
             <a:srgbClr val="1B9AAA">
-              <a:alpha val="7000"/>
+              <a:alpha val="35000"/>
             </a:srgbClr>
           </a:solidFill>
           <a:ln w="9525">
             <a:solidFill>
-              <a:srgbClr val="14293D"/>
+              <a:srgbClr val="1B9AAA"/>
             </a:solidFill>
-            <a:prstDash val="solid"/>
-          </a:ln>
-        </p:spPr>
-        <p:txBody>
-          <a:bodyPr/>
-          <a:lstStyle/>
-          <a:p>
-            <a:endParaRPr lang="en-US"/>
-          </a:p>
-        </p:txBody>
-      </p:sp>
-      <p:sp>
-        <p:nvSpPr>
-          <p:cNvPr id="12" name="Text 10"/>
+          </a:ln>
+          <a:effectLst/>
+        </p:spPr>
+        <p:style>
+          <a:lnRef idx="1">
+            <a:schemeClr val="accent1"/>
+          </a:lnRef>
+          <a:fillRef idx="3">
+            <a:schemeClr val="accent1"/>
+          </a:fillRef>
+          <a:effectRef idx="2">
+            <a:schemeClr val="accent1"/>
+          </a:effectRef>
+          <a:fontRef idx="minor">
+            <a:schemeClr val="lt1"/>
+          </a:fontRef>
+        </p:style>
+        <p:txBody>
+          <a:bodyPr rtlCol="0" anchor="ctr"/>
+          <a:lstStyle/>
+          <a:p>
+            <a:pPr algn="ctr"/>
+            <a:endParaRPr/>
+          </a:p>
+        </p:txBody>
+      </p:sp>
+      <p:sp>
+        <p:nvSpPr>
+          <p:cNvPr id="13" name="TextBox 12"/>
+          <p:cNvSpPr txBox="1"/>
+          <p:nvPr/>
+        </p:nvSpPr>
+        <p:spPr>
+          <a:xfrm>
+            <a:off x="1271016" y="3506724"/>
+            <a:ext cx="676656" cy="676656"/>
+          </a:xfrm>
+          <a:prstGeom prst="rect">
+            <a:avLst/>
+          </a:prstGeom>
+          <a:noFill/>
+        </p:spPr>
+        <p:txBody>
+          <a:bodyPr wrap="square" lIns="0" tIns="0" rIns="0" bIns="0" anchor="ctr">
+            <a:spAutoFit/>
+          </a:bodyPr>
+          <a:lstStyle/>
+          <a:p>
+            <a:pPr algn="ctr"/>
+            <a:r>
+              <a:rPr sz="900" b="0">
+                <a:solidFill>
+                  <a:srgbClr val="0D1B2A"/>
+                </a:solidFill>
+                <a:latin typeface="Oswald"/>
+              </a:rPr>
+              <a:t>Generative</a:t>
+            </a:r>
+          </a:p>
+          <a:p>
+            <a:pPr algn="ctr"/>
+            <a:r>
+              <a:rPr sz="900" b="0">
+                <a:solidFill>
+                  <a:srgbClr val="0D1B2A"/>
+                </a:solidFill>
+                <a:latin typeface="Oswald"/>
+              </a:rPr>
+              <a:t>AI</a:t>
+            </a:r>
+          </a:p>
+        </p:txBody>
+      </p:sp>
+      <p:sp>
+        <p:nvSpPr>
+          <p:cNvPr id="14" name="Oval 13"/>
           <p:cNvSpPr/>
           <p:nvPr/>
         </p:nvSpPr>
         <p:spPr>
           <a:xfrm>
-            <a:off x="1527048" y="2881049"/>
-            <a:ext cx="1225296" cy="237744"/>
-          </a:xfrm>
-          <a:prstGeom prst="rect">
-            <a:avLst/>
-          </a:prstGeom>
-          <a:noFill/>
-          <a:ln/>
-        </p:spPr>
-        <p:txBody>
-          <a:bodyPr wrap="square" lIns="0" tIns="0" rIns="0" bIns="0" rtlCol="0" anchor="ctr"/>
-          <a:lstStyle/>
-          <a:p>
-            <a:pPr marL="0" indent="0">
-              <a:buNone/>
-            </a:pPr>
-            <a:r>
-              <a:rPr lang="en-US" sz="1100" dirty="0">
-                <a:solidFill>
-                  <a:srgbClr val="0D1B2A"/>
-                </a:solidFill>
-                <a:latin typeface="Oswald" pitchFamily="34" charset="0"/>
-                <a:ea typeface="Oswald" pitchFamily="34" charset="-122"/>
-                <a:cs typeface="Oswald" pitchFamily="34" charset="-120"/>
-              </a:rPr>
-              <a:t>Generative AI</a:t>
-            </a:r>
-            <a:endParaRPr lang="en-US" sz="1100" dirty="0"/>
-          </a:p>
-        </p:txBody>
-      </p:sp>
-      <p:sp>
-        <p:nvSpPr>
-          <p:cNvPr id="13" name="Shape 11"/>
-          <p:cNvSpPr/>
-          <p:nvPr/>
-        </p:nvSpPr>
-        <p:spPr>
-          <a:xfrm>
-            <a:off x="2548082" y="2789609"/>
-            <a:ext cx="1011890" cy="941832"/>
-          </a:xfrm>
-          <a:prstGeom prst="rect">
+            <a:off x="1892807" y="3506724"/>
+            <a:ext cx="676656" cy="676656"/>
+          </a:xfrm>
+          <a:prstGeom prst="ellipse">
             <a:avLst/>
           </a:prstGeom>
           <a:solidFill>
             <a:srgbClr val="06D6A0">
-              <a:alpha val="18000"/>
+              <a:alpha val="40000"/>
             </a:srgbClr>
           </a:solidFill>
-          <a:ln w="12700">
+          <a:ln w="9525">
             <a:solidFill>
-              <a:srgbClr val="0D1B2A"/>
+              <a:srgbClr val="06D6A0"/>
             </a:solidFill>
-            <a:prstDash val="solid"/>
-          </a:ln>
-        </p:spPr>
-        <p:txBody>
-          <a:bodyPr/>
-          <a:lstStyle/>
-          <a:p>
-            <a:endParaRPr lang="en-US"/>
-          </a:p>
-        </p:txBody>
-      </p:sp>
-      <p:sp>
-        <p:nvSpPr>
-          <p:cNvPr id="14" name="Text 12"/>
+          </a:ln>
+          <a:effectLst/>
+        </p:spPr>
+        <p:style>
+          <a:lnRef idx="1">
+            <a:schemeClr val="accent1"/>
+          </a:lnRef>
+          <a:fillRef idx="3">
+            <a:schemeClr val="accent1"/>
+          </a:fillRef>
+          <a:effectRef idx="2">
+            <a:schemeClr val="accent1"/>
+          </a:effectRef>
+          <a:fontRef idx="minor">
+            <a:schemeClr val="lt1"/>
+          </a:fontRef>
+        </p:style>
+        <p:txBody>
+          <a:bodyPr rtlCol="0" anchor="ctr"/>
+          <a:lstStyle/>
+          <a:p>
+            <a:pPr algn="ctr"/>
+            <a:endParaRPr/>
+          </a:p>
+        </p:txBody>
+      </p:sp>
+      <p:sp>
+        <p:nvSpPr>
+          <p:cNvPr id="15" name="TextBox 14"/>
+          <p:cNvSpPr txBox="1"/>
+          <p:nvPr/>
+        </p:nvSpPr>
+        <p:spPr>
+          <a:xfrm>
+            <a:off x="1892807" y="3506724"/>
+            <a:ext cx="676656" cy="676656"/>
+          </a:xfrm>
+          <a:prstGeom prst="rect">
+            <a:avLst/>
+          </a:prstGeom>
+          <a:noFill/>
+        </p:spPr>
+        <p:txBody>
+          <a:bodyPr wrap="square" lIns="0" tIns="0" rIns="0" bIns="0" anchor="ctr">
+            <a:spAutoFit/>
+          </a:bodyPr>
+          <a:lstStyle/>
+          <a:p>
+            <a:pPr algn="ctr"/>
+            <a:r>
+              <a:rPr sz="900" b="0">
+                <a:solidFill>
+                  <a:srgbClr val="0D1B2A"/>
+                </a:solidFill>
+                <a:latin typeface="Oswald"/>
+              </a:rPr>
+              <a:t>Agentic</a:t>
+            </a:r>
+          </a:p>
+          <a:p>
+            <a:pPr algn="ctr"/>
+            <a:r>
+              <a:rPr sz="900" b="0">
+                <a:solidFill>
+                  <a:srgbClr val="0D1B2A"/>
+                </a:solidFill>
+                <a:latin typeface="Oswald"/>
+              </a:rPr>
+              <a:t>AI</a:t>
+            </a:r>
+          </a:p>
+        </p:txBody>
+      </p:sp>
+      <p:cxnSp>
+        <p:nvCxnSpPr>
+          <p:cNvPr id="16" name="Connector 15"/>
+          <p:cNvCxnSpPr/>
+          <p:nvPr/>
+        </p:nvCxnSpPr>
+        <p:spPr>
+          <a:xfrm>
+            <a:off x="3931920" y="1965960"/>
+            <a:ext cx="0" cy="2194560"/>
+          </a:xfrm>
+          <a:prstGeom prst="line">
+            <a:avLst/>
+          </a:prstGeom>
+          <a:ln w="19050">
+            <a:solidFill>
+              <a:srgbClr val="DDE5E9"/>
+            </a:solidFill>
+          </a:ln>
+        </p:spPr>
+        <p:style>
+          <a:lnRef idx="2">
+            <a:schemeClr val="accent1"/>
+          </a:lnRef>
+          <a:fillRef idx="0">
+            <a:schemeClr val="accent1"/>
+          </a:fillRef>
+          <a:effectRef idx="1">
+            <a:schemeClr val="accent1"/>
+          </a:effectRef>
+          <a:fontRef idx="minor">
+            <a:schemeClr val="tx1"/>
+          </a:fontRef>
+        </p:style>
+      </p:cxnSp>
+      <p:sp>
+        <p:nvSpPr>
+          <p:cNvPr id="17" name="Oval 16"/>
           <p:cNvSpPr/>
           <p:nvPr/>
         </p:nvSpPr>
         <p:spPr>
           <a:xfrm>
-            <a:off x="2638044" y="2881049"/>
-            <a:ext cx="1280160" cy="237744"/>
+            <a:off x="3867911" y="1901952"/>
+            <a:ext cx="128016" cy="128016"/>
+          </a:xfrm>
+          <a:prstGeom prst="ellipse">
+            <a:avLst/>
+          </a:prstGeom>
+          <a:solidFill>
+            <a:srgbClr val="1B9AAA">
+              <a:alpha val="100000"/>
+            </a:srgbClr>
+          </a:solidFill>
+          <a:ln w="9525">
+            <a:solidFill>
+              <a:srgbClr val="1B9AAA"/>
+            </a:solidFill>
+          </a:ln>
+          <a:effectLst/>
+        </p:spPr>
+        <p:style>
+          <a:lnRef idx="1">
+            <a:schemeClr val="accent1"/>
+          </a:lnRef>
+          <a:fillRef idx="3">
+            <a:schemeClr val="accent1"/>
+          </a:fillRef>
+          <a:effectRef idx="2">
+            <a:schemeClr val="accent1"/>
+          </a:effectRef>
+          <a:fontRef idx="minor">
+            <a:schemeClr val="lt1"/>
+          </a:fontRef>
+        </p:style>
+        <p:txBody>
+          <a:bodyPr rtlCol="0" anchor="ctr"/>
+          <a:lstStyle/>
+          <a:p>
+            <a:pPr algn="ctr"/>
+            <a:endParaRPr/>
+          </a:p>
+        </p:txBody>
+      </p:sp>
+      <p:sp>
+        <p:nvSpPr>
+          <p:cNvPr id="18" name="TextBox 17"/>
+          <p:cNvSpPr txBox="1"/>
+          <p:nvPr/>
+        </p:nvSpPr>
+        <p:spPr>
+          <a:xfrm>
+            <a:off x="4160520" y="1801368"/>
+            <a:ext cx="1508760" cy="146304"/>
           </a:xfrm>
           <a:prstGeom prst="rect">
             <a:avLst/>
           </a:prstGeom>
           <a:noFill/>
-          <a:ln/>
-        </p:spPr>
-        <p:txBody>
-          <a:bodyPr wrap="square" lIns="0" tIns="0" rIns="0" bIns="0" rtlCol="0" anchor="ctr"/>
-          <a:lstStyle/>
-          <a:p>
-            <a:pPr marL="0" indent="0">
-              <a:buNone/>
-            </a:pPr>
-            <a:r>
-              <a:rPr lang="en-US" sz="1100" dirty="0">
+        </p:spPr>
+        <p:txBody>
+          <a:bodyPr wrap="none" lIns="0" tIns="0" rIns="0" bIns="0">
+            <a:spAutoFit/>
+          </a:bodyPr>
+          <a:lstStyle/>
+          <a:p>
+            <a:pPr algn="l"/>
+            <a:r>
+              <a:rPr sz="800" spc="100">
+                <a:solidFill>
+                  <a:srgbClr val="1B9AAA"/>
+                </a:solidFill>
+                <a:latin typeface="JetBrains Mono"/>
+              </a:rPr>
+              <a:t>1955</a:t>
+            </a:r>
+            <a:r>
+              <a:rPr sz="800" spc="100">
+                <a:solidFill>
+                  <a:srgbClr val="6B7B8C"/>
+                </a:solidFill>
+                <a:latin typeface="JetBrains Mono"/>
+              </a:rPr>
+              <a:t>  ·  TERM COINED</a:t>
+            </a:r>
+          </a:p>
+        </p:txBody>
+      </p:sp>
+      <p:sp>
+        <p:nvSpPr>
+          <p:cNvPr id="19" name="TextBox 18"/>
+          <p:cNvSpPr txBox="1"/>
+          <p:nvPr/>
+        </p:nvSpPr>
+        <p:spPr>
+          <a:xfrm>
+            <a:off x="4160520" y="1965960"/>
+            <a:ext cx="1463040" cy="274320"/>
+          </a:xfrm>
+          <a:prstGeom prst="rect">
+            <a:avLst/>
+          </a:prstGeom>
+          <a:noFill/>
+        </p:spPr>
+        <p:txBody>
+          <a:bodyPr wrap="square" lIns="0" tIns="0" rIns="0" bIns="0" anchor="t">
+            <a:spAutoFit/>
+          </a:bodyPr>
+          <a:lstStyle/>
+          <a:p>
+            <a:pPr algn="l"/>
+            <a:r>
+              <a:rPr sz="1300" b="0">
                 <a:solidFill>
                   <a:srgbClr val="0D1B2A"/>
                 </a:solidFill>
-                <a:latin typeface="Oswald" pitchFamily="34" charset="0"/>
-                <a:ea typeface="Oswald" pitchFamily="34" charset="-122"/>
-                <a:cs typeface="Oswald" pitchFamily="34" charset="-120"/>
+                <a:latin typeface="Oswald"/>
+              </a:rPr>
+              <a:t>Artificial Intelligence</a:t>
+            </a:r>
+          </a:p>
+        </p:txBody>
+      </p:sp>
+      <p:sp>
+        <p:nvSpPr>
+          <p:cNvPr id="20" name="TextBox 19"/>
+          <p:cNvSpPr txBox="1"/>
+          <p:nvPr/>
+        </p:nvSpPr>
+        <p:spPr>
+          <a:xfrm>
+            <a:off x="5669280" y="1810512"/>
+            <a:ext cx="3035808" cy="502920"/>
+          </a:xfrm>
+          <a:prstGeom prst="rect">
+            <a:avLst/>
+          </a:prstGeom>
+          <a:noFill/>
+        </p:spPr>
+        <p:txBody>
+          <a:bodyPr wrap="square" lIns="0" tIns="0" rIns="0" bIns="0" anchor="t">
+            <a:spAutoFit/>
+          </a:bodyPr>
+          <a:lstStyle/>
+          <a:p>
+            <a:pPr algn="l"/>
+            <a:r>
+              <a:rPr sz="900" b="0">
+                <a:solidFill>
+                  <a:srgbClr val="6B7B8C"/>
+                </a:solidFill>
+                <a:latin typeface="Roboto"/>
+              </a:rPr>
+              <a:t>The overarching field: machines performing tasks that require human-like intelligence.</a:t>
+            </a:r>
+          </a:p>
+        </p:txBody>
+      </p:sp>
+      <p:sp>
+        <p:nvSpPr>
+          <p:cNvPr id="21" name="Oval 20"/>
+          <p:cNvSpPr/>
+          <p:nvPr/>
+        </p:nvSpPr>
+        <p:spPr>
+          <a:xfrm>
+            <a:off x="3867911" y="2450591"/>
+            <a:ext cx="128016" cy="128016"/>
+          </a:xfrm>
+          <a:prstGeom prst="ellipse">
+            <a:avLst/>
+          </a:prstGeom>
+          <a:solidFill>
+            <a:srgbClr val="1B9AAA">
+              <a:alpha val="100000"/>
+            </a:srgbClr>
+          </a:solidFill>
+          <a:ln w="9525">
+            <a:solidFill>
+              <a:srgbClr val="1B9AAA"/>
+            </a:solidFill>
+          </a:ln>
+          <a:effectLst/>
+        </p:spPr>
+        <p:style>
+          <a:lnRef idx="1">
+            <a:schemeClr val="accent1"/>
+          </a:lnRef>
+          <a:fillRef idx="3">
+            <a:schemeClr val="accent1"/>
+          </a:fillRef>
+          <a:effectRef idx="2">
+            <a:schemeClr val="accent1"/>
+          </a:effectRef>
+          <a:fontRef idx="minor">
+            <a:schemeClr val="lt1"/>
+          </a:fontRef>
+        </p:style>
+        <p:txBody>
+          <a:bodyPr rtlCol="0" anchor="ctr"/>
+          <a:lstStyle/>
+          <a:p>
+            <a:pPr algn="ctr"/>
+            <a:endParaRPr/>
+          </a:p>
+        </p:txBody>
+      </p:sp>
+      <p:sp>
+        <p:nvSpPr>
+          <p:cNvPr id="22" name="TextBox 21"/>
+          <p:cNvSpPr txBox="1"/>
+          <p:nvPr/>
+        </p:nvSpPr>
+        <p:spPr>
+          <a:xfrm>
+            <a:off x="4160520" y="2350008"/>
+            <a:ext cx="1508760" cy="146304"/>
+          </a:xfrm>
+          <a:prstGeom prst="rect">
+            <a:avLst/>
+          </a:prstGeom>
+          <a:noFill/>
+        </p:spPr>
+        <p:txBody>
+          <a:bodyPr wrap="none" lIns="0" tIns="0" rIns="0" bIns="0">
+            <a:spAutoFit/>
+          </a:bodyPr>
+          <a:lstStyle/>
+          <a:p>
+            <a:pPr algn="l"/>
+            <a:r>
+              <a:rPr sz="800" spc="100">
+                <a:solidFill>
+                  <a:srgbClr val="1B9AAA"/>
+                </a:solidFill>
+                <a:latin typeface="JetBrains Mono"/>
+              </a:rPr>
+              <a:t>1959</a:t>
+            </a:r>
+            <a:r>
+              <a:rPr sz="800" spc="100">
+                <a:solidFill>
+                  <a:srgbClr val="6B7B8C"/>
+                </a:solidFill>
+                <a:latin typeface="JetBrains Mono"/>
+              </a:rPr>
+              <a:t>  ·  ARTHUR SAMUEL</a:t>
+            </a:r>
+          </a:p>
+        </p:txBody>
+      </p:sp>
+      <p:sp>
+        <p:nvSpPr>
+          <p:cNvPr id="23" name="TextBox 22"/>
+          <p:cNvSpPr txBox="1"/>
+          <p:nvPr/>
+        </p:nvSpPr>
+        <p:spPr>
+          <a:xfrm>
+            <a:off x="4160520" y="2514600"/>
+            <a:ext cx="1463040" cy="274320"/>
+          </a:xfrm>
+          <a:prstGeom prst="rect">
+            <a:avLst/>
+          </a:prstGeom>
+          <a:noFill/>
+        </p:spPr>
+        <p:txBody>
+          <a:bodyPr wrap="square" lIns="0" tIns="0" rIns="0" bIns="0" anchor="t">
+            <a:spAutoFit/>
+          </a:bodyPr>
+          <a:lstStyle/>
+          <a:p>
+            <a:pPr algn="l"/>
+            <a:r>
+              <a:rPr sz="1300" b="0">
+                <a:solidFill>
+                  <a:srgbClr val="0D1B2A"/>
+                </a:solidFill>
+                <a:latin typeface="Oswald"/>
+              </a:rPr>
+              <a:t>Machine Learning</a:t>
+            </a:r>
+          </a:p>
+        </p:txBody>
+      </p:sp>
+      <p:sp>
+        <p:nvSpPr>
+          <p:cNvPr id="24" name="TextBox 23"/>
+          <p:cNvSpPr txBox="1"/>
+          <p:nvPr/>
+        </p:nvSpPr>
+        <p:spPr>
+          <a:xfrm>
+            <a:off x="5669280" y="2359151"/>
+            <a:ext cx="3035808" cy="502920"/>
+          </a:xfrm>
+          <a:prstGeom prst="rect">
+            <a:avLst/>
+          </a:prstGeom>
+          <a:noFill/>
+        </p:spPr>
+        <p:txBody>
+          <a:bodyPr wrap="square" lIns="0" tIns="0" rIns="0" bIns="0" anchor="t">
+            <a:spAutoFit/>
+          </a:bodyPr>
+          <a:lstStyle/>
+          <a:p>
+            <a:pPr algn="l"/>
+            <a:r>
+              <a:rPr sz="900" b="0">
+                <a:solidFill>
+                  <a:srgbClr val="6B7B8C"/>
+                </a:solidFill>
+                <a:latin typeface="Roboto"/>
+              </a:rPr>
+              <a:t>A subset of AI: learning from data instead of explicit programming, to predict, classify or detect patterns.</a:t>
+            </a:r>
+          </a:p>
+        </p:txBody>
+      </p:sp>
+      <p:sp>
+        <p:nvSpPr>
+          <p:cNvPr id="25" name="Oval 24"/>
+          <p:cNvSpPr/>
+          <p:nvPr/>
+        </p:nvSpPr>
+        <p:spPr>
+          <a:xfrm>
+            <a:off x="3867911" y="2999232"/>
+            <a:ext cx="128016" cy="128016"/>
+          </a:xfrm>
+          <a:prstGeom prst="ellipse">
+            <a:avLst/>
+          </a:prstGeom>
+          <a:solidFill>
+            <a:srgbClr val="1B9AAA">
+              <a:alpha val="100000"/>
+            </a:srgbClr>
+          </a:solidFill>
+          <a:ln w="9525">
+            <a:solidFill>
+              <a:srgbClr val="1B9AAA"/>
+            </a:solidFill>
+          </a:ln>
+          <a:effectLst/>
+        </p:spPr>
+        <p:style>
+          <a:lnRef idx="1">
+            <a:schemeClr val="accent1"/>
+          </a:lnRef>
+          <a:fillRef idx="3">
+            <a:schemeClr val="accent1"/>
+          </a:fillRef>
+          <a:effectRef idx="2">
+            <a:schemeClr val="accent1"/>
+          </a:effectRef>
+          <a:fontRef idx="minor">
+            <a:schemeClr val="lt1"/>
+          </a:fontRef>
+        </p:style>
+        <p:txBody>
+          <a:bodyPr rtlCol="0" anchor="ctr"/>
+          <a:lstStyle/>
+          <a:p>
+            <a:pPr algn="ctr"/>
+            <a:endParaRPr/>
+          </a:p>
+        </p:txBody>
+      </p:sp>
+      <p:sp>
+        <p:nvSpPr>
+          <p:cNvPr id="26" name="TextBox 25"/>
+          <p:cNvSpPr txBox="1"/>
+          <p:nvPr/>
+        </p:nvSpPr>
+        <p:spPr>
+          <a:xfrm>
+            <a:off x="4160520" y="2898648"/>
+            <a:ext cx="1508760" cy="146304"/>
+          </a:xfrm>
+          <a:prstGeom prst="rect">
+            <a:avLst/>
+          </a:prstGeom>
+          <a:noFill/>
+        </p:spPr>
+        <p:txBody>
+          <a:bodyPr wrap="none" lIns="0" tIns="0" rIns="0" bIns="0">
+            <a:spAutoFit/>
+          </a:bodyPr>
+          <a:lstStyle/>
+          <a:p>
+            <a:pPr algn="l"/>
+            <a:r>
+              <a:rPr sz="800" spc="100">
+                <a:solidFill>
+                  <a:srgbClr val="1B9AAA"/>
+                </a:solidFill>
+                <a:latin typeface="JetBrains Mono"/>
+              </a:rPr>
+              <a:t>2012</a:t>
+            </a:r>
+            <a:r>
+              <a:rPr sz="800" spc="100">
+                <a:solidFill>
+                  <a:srgbClr val="6B7B8C"/>
+                </a:solidFill>
+                <a:latin typeface="JetBrains Mono"/>
+              </a:rPr>
+              <a:t>  ·  ALEXNET</a:t>
+            </a:r>
+          </a:p>
+        </p:txBody>
+      </p:sp>
+      <p:sp>
+        <p:nvSpPr>
+          <p:cNvPr id="27" name="TextBox 26"/>
+          <p:cNvSpPr txBox="1"/>
+          <p:nvPr/>
+        </p:nvSpPr>
+        <p:spPr>
+          <a:xfrm>
+            <a:off x="4160520" y="3063240"/>
+            <a:ext cx="1463040" cy="274320"/>
+          </a:xfrm>
+          <a:prstGeom prst="rect">
+            <a:avLst/>
+          </a:prstGeom>
+          <a:noFill/>
+        </p:spPr>
+        <p:txBody>
+          <a:bodyPr wrap="square" lIns="0" tIns="0" rIns="0" bIns="0" anchor="t">
+            <a:spAutoFit/>
+          </a:bodyPr>
+          <a:lstStyle/>
+          <a:p>
+            <a:pPr algn="l"/>
+            <a:r>
+              <a:rPr sz="1300" b="0">
+                <a:solidFill>
+                  <a:srgbClr val="0D1B2A"/>
+                </a:solidFill>
+                <a:latin typeface="Oswald"/>
+              </a:rPr>
+              <a:t>Deep Learning</a:t>
+            </a:r>
+          </a:p>
+        </p:txBody>
+      </p:sp>
+      <p:sp>
+        <p:nvSpPr>
+          <p:cNvPr id="28" name="TextBox 27"/>
+          <p:cNvSpPr txBox="1"/>
+          <p:nvPr/>
+        </p:nvSpPr>
+        <p:spPr>
+          <a:xfrm>
+            <a:off x="5669280" y="2907791"/>
+            <a:ext cx="3035808" cy="502920"/>
+          </a:xfrm>
+          <a:prstGeom prst="rect">
+            <a:avLst/>
+          </a:prstGeom>
+          <a:noFill/>
+        </p:spPr>
+        <p:txBody>
+          <a:bodyPr wrap="square" lIns="0" tIns="0" rIns="0" bIns="0" anchor="t">
+            <a:spAutoFit/>
+          </a:bodyPr>
+          <a:lstStyle/>
+          <a:p>
+            <a:pPr algn="l"/>
+            <a:r>
+              <a:rPr sz="900" b="0">
+                <a:solidFill>
+                  <a:srgbClr val="6B7B8C"/>
+                </a:solidFill>
+                <a:latin typeface="Roboto"/>
+              </a:rPr>
+              <a:t>A subset of ML using many-layered neural networks to find complex patterns in large, unstructured data — text, images, audio, video.</a:t>
+            </a:r>
+          </a:p>
+        </p:txBody>
+      </p:sp>
+      <p:sp>
+        <p:nvSpPr>
+          <p:cNvPr id="29" name="Oval 28"/>
+          <p:cNvSpPr/>
+          <p:nvPr/>
+        </p:nvSpPr>
+        <p:spPr>
+          <a:xfrm>
+            <a:off x="3867911" y="3547872"/>
+            <a:ext cx="128016" cy="128016"/>
+          </a:xfrm>
+          <a:prstGeom prst="ellipse">
+            <a:avLst/>
+          </a:prstGeom>
+          <a:solidFill>
+            <a:srgbClr val="1B9AAA">
+              <a:alpha val="100000"/>
+            </a:srgbClr>
+          </a:solidFill>
+          <a:ln w="9525">
+            <a:solidFill>
+              <a:srgbClr val="1B9AAA"/>
+            </a:solidFill>
+          </a:ln>
+          <a:effectLst/>
+        </p:spPr>
+        <p:style>
+          <a:lnRef idx="1">
+            <a:schemeClr val="accent1"/>
+          </a:lnRef>
+          <a:fillRef idx="3">
+            <a:schemeClr val="accent1"/>
+          </a:fillRef>
+          <a:effectRef idx="2">
+            <a:schemeClr val="accent1"/>
+          </a:effectRef>
+          <a:fontRef idx="minor">
+            <a:schemeClr val="lt1"/>
+          </a:fontRef>
+        </p:style>
+        <p:txBody>
+          <a:bodyPr rtlCol="0" anchor="ctr"/>
+          <a:lstStyle/>
+          <a:p>
+            <a:pPr algn="ctr"/>
+            <a:endParaRPr/>
+          </a:p>
+        </p:txBody>
+      </p:sp>
+      <p:sp>
+        <p:nvSpPr>
+          <p:cNvPr id="30" name="TextBox 29"/>
+          <p:cNvSpPr txBox="1"/>
+          <p:nvPr/>
+        </p:nvSpPr>
+        <p:spPr>
+          <a:xfrm>
+            <a:off x="4160520" y="3447288"/>
+            <a:ext cx="1508760" cy="146304"/>
+          </a:xfrm>
+          <a:prstGeom prst="rect">
+            <a:avLst/>
+          </a:prstGeom>
+          <a:noFill/>
+        </p:spPr>
+        <p:txBody>
+          <a:bodyPr wrap="none" lIns="0" tIns="0" rIns="0" bIns="0">
+            <a:spAutoFit/>
+          </a:bodyPr>
+          <a:lstStyle/>
+          <a:p>
+            <a:pPr algn="l"/>
+            <a:r>
+              <a:rPr sz="800" spc="100">
+                <a:solidFill>
+                  <a:srgbClr val="1B9AAA"/>
+                </a:solidFill>
+                <a:latin typeface="JetBrains Mono"/>
+              </a:rPr>
+              <a:t>2018</a:t>
+            </a:r>
+            <a:r>
+              <a:rPr sz="800" spc="100">
+                <a:solidFill>
+                  <a:srgbClr val="6B7B8C"/>
+                </a:solidFill>
+                <a:latin typeface="JetBrains Mono"/>
+              </a:rPr>
+              <a:t>  ·  THE FIRST GPT</a:t>
+            </a:r>
+          </a:p>
+        </p:txBody>
+      </p:sp>
+      <p:sp>
+        <p:nvSpPr>
+          <p:cNvPr id="31" name="TextBox 30"/>
+          <p:cNvSpPr txBox="1"/>
+          <p:nvPr/>
+        </p:nvSpPr>
+        <p:spPr>
+          <a:xfrm>
+            <a:off x="4160520" y="3611880"/>
+            <a:ext cx="1463040" cy="274320"/>
+          </a:xfrm>
+          <a:prstGeom prst="rect">
+            <a:avLst/>
+          </a:prstGeom>
+          <a:noFill/>
+        </p:spPr>
+        <p:txBody>
+          <a:bodyPr wrap="square" lIns="0" tIns="0" rIns="0" bIns="0" anchor="t">
+            <a:spAutoFit/>
+          </a:bodyPr>
+          <a:lstStyle/>
+          <a:p>
+            <a:pPr algn="l"/>
+            <a:r>
+              <a:rPr sz="1300" b="0">
+                <a:solidFill>
+                  <a:srgbClr val="0D1B2A"/>
+                </a:solidFill>
+                <a:latin typeface="Oswald"/>
+              </a:rPr>
+              <a:t>Generative AI</a:t>
+            </a:r>
+          </a:p>
+        </p:txBody>
+      </p:sp>
+      <p:sp>
+        <p:nvSpPr>
+          <p:cNvPr id="32" name="TextBox 31"/>
+          <p:cNvSpPr txBox="1"/>
+          <p:nvPr/>
+        </p:nvSpPr>
+        <p:spPr>
+          <a:xfrm>
+            <a:off x="5669280" y="3456432"/>
+            <a:ext cx="3035808" cy="502920"/>
+          </a:xfrm>
+          <a:prstGeom prst="rect">
+            <a:avLst/>
+          </a:prstGeom>
+          <a:noFill/>
+        </p:spPr>
+        <p:txBody>
+          <a:bodyPr wrap="square" lIns="0" tIns="0" rIns="0" bIns="0" anchor="t">
+            <a:spAutoFit/>
+          </a:bodyPr>
+          <a:lstStyle/>
+          <a:p>
+            <a:pPr algn="l"/>
+            <a:r>
+              <a:rPr sz="900" b="0">
+                <a:solidFill>
+                  <a:srgbClr val="6B7B8C"/>
+                </a:solidFill>
+                <a:latin typeface="Roboto"/>
+              </a:rPr>
+              <a:t>A branch of AI that creates new content — text, images, video, audio, code — by learning patterns from massive datasets.</a:t>
+            </a:r>
+          </a:p>
+        </p:txBody>
+      </p:sp>
+      <p:sp>
+        <p:nvSpPr>
+          <p:cNvPr id="33" name="Oval 32"/>
+          <p:cNvSpPr/>
+          <p:nvPr/>
+        </p:nvSpPr>
+        <p:spPr>
+          <a:xfrm>
+            <a:off x="3867911" y="4096511"/>
+            <a:ext cx="128016" cy="128016"/>
+          </a:xfrm>
+          <a:prstGeom prst="ellipse">
+            <a:avLst/>
+          </a:prstGeom>
+          <a:solidFill>
+            <a:srgbClr val="06D6A0">
+              <a:alpha val="100000"/>
+            </a:srgbClr>
+          </a:solidFill>
+          <a:ln w="9525">
+            <a:solidFill>
+              <a:srgbClr val="06D6A0"/>
+            </a:solidFill>
+          </a:ln>
+          <a:effectLst/>
+        </p:spPr>
+        <p:style>
+          <a:lnRef idx="1">
+            <a:schemeClr val="accent1"/>
+          </a:lnRef>
+          <a:fillRef idx="3">
+            <a:schemeClr val="accent1"/>
+          </a:fillRef>
+          <a:effectRef idx="2">
+            <a:schemeClr val="accent1"/>
+          </a:effectRef>
+          <a:fontRef idx="minor">
+            <a:schemeClr val="lt1"/>
+          </a:fontRef>
+        </p:style>
+        <p:txBody>
+          <a:bodyPr rtlCol="0" anchor="ctr"/>
+          <a:lstStyle/>
+          <a:p>
+            <a:pPr algn="ctr"/>
+            <a:endParaRPr/>
+          </a:p>
+        </p:txBody>
+      </p:sp>
+      <p:sp>
+        <p:nvSpPr>
+          <p:cNvPr id="34" name="TextBox 33"/>
+          <p:cNvSpPr txBox="1"/>
+          <p:nvPr/>
+        </p:nvSpPr>
+        <p:spPr>
+          <a:xfrm>
+            <a:off x="4160520" y="3995927"/>
+            <a:ext cx="1508760" cy="146304"/>
+          </a:xfrm>
+          <a:prstGeom prst="rect">
+            <a:avLst/>
+          </a:prstGeom>
+          <a:noFill/>
+        </p:spPr>
+        <p:txBody>
+          <a:bodyPr wrap="none" lIns="0" tIns="0" rIns="0" bIns="0">
+            <a:spAutoFit/>
+          </a:bodyPr>
+          <a:lstStyle/>
+          <a:p>
+            <a:pPr algn="l"/>
+            <a:r>
+              <a:rPr sz="800" spc="100">
+                <a:solidFill>
+                  <a:srgbClr val="06D6A0"/>
+                </a:solidFill>
+                <a:latin typeface="JetBrains Mono"/>
+              </a:rPr>
+              <a:t>2024</a:t>
+            </a:r>
+            <a:r>
+              <a:rPr sz="800" spc="100">
+                <a:solidFill>
+                  <a:srgbClr val="6B7B8C"/>
+                </a:solidFill>
+                <a:latin typeface="JetBrains Mono"/>
+              </a:rPr>
+              <a:t>  ·  AGENTS TAKE OFF</a:t>
+            </a:r>
+          </a:p>
+        </p:txBody>
+      </p:sp>
+      <p:sp>
+        <p:nvSpPr>
+          <p:cNvPr id="35" name="TextBox 34"/>
+          <p:cNvSpPr txBox="1"/>
+          <p:nvPr/>
+        </p:nvSpPr>
+        <p:spPr>
+          <a:xfrm>
+            <a:off x="4160520" y="4160520"/>
+            <a:ext cx="1463040" cy="274320"/>
+          </a:xfrm>
+          <a:prstGeom prst="rect">
+            <a:avLst/>
+          </a:prstGeom>
+          <a:noFill/>
+        </p:spPr>
+        <p:txBody>
+          <a:bodyPr wrap="square" lIns="0" tIns="0" rIns="0" bIns="0" anchor="t">
+            <a:spAutoFit/>
+          </a:bodyPr>
+          <a:lstStyle/>
+          <a:p>
+            <a:pPr algn="l"/>
+            <a:r>
+              <a:rPr sz="1300" b="0">
+                <a:solidFill>
+                  <a:srgbClr val="0D1B2A"/>
+                </a:solidFill>
+                <a:latin typeface="Oswald"/>
               </a:rPr>
               <a:t>Agentic AI</a:t>
             </a:r>
-            <a:endParaRPr lang="en-US" sz="1100" dirty="0"/>
-          </a:p>
-        </p:txBody>
-      </p:sp>
-      <p:sp>
-        <p:nvSpPr>
-          <p:cNvPr id="16" name="Shape 14"/>
+          </a:p>
+        </p:txBody>
+      </p:sp>
+      <p:sp>
+        <p:nvSpPr>
+          <p:cNvPr id="36" name="TextBox 35"/>
+          <p:cNvSpPr txBox="1"/>
+          <p:nvPr/>
+        </p:nvSpPr>
+        <p:spPr>
+          <a:xfrm>
+            <a:off x="5669280" y="4005072"/>
+            <a:ext cx="3035808" cy="502920"/>
+          </a:xfrm>
+          <a:prstGeom prst="rect">
+            <a:avLst/>
+          </a:prstGeom>
+          <a:noFill/>
+        </p:spPr>
+        <p:txBody>
+          <a:bodyPr wrap="square" lIns="0" tIns="0" rIns="0" bIns="0" anchor="t">
+            <a:spAutoFit/>
+          </a:bodyPr>
+          <a:lstStyle/>
+          <a:p>
+            <a:pPr algn="l"/>
+            <a:r>
+              <a:rPr sz="900" b="0">
+                <a:solidFill>
+                  <a:srgbClr val="6B7B8C"/>
+                </a:solidFill>
+                <a:latin typeface="Roboto"/>
+              </a:rPr>
+              <a:t>Builds on generative models by adding tool/API use, memory and planning in a closed loop, enabling autonomous goal pursuit beyond content creation.</a:t>
+            </a:r>
+          </a:p>
+        </p:txBody>
+      </p:sp>
+      <p:sp>
+        <p:nvSpPr>
+          <p:cNvPr id="37" name="Rectangle 36"/>
           <p:cNvSpPr/>
           <p:nvPr/>
         </p:nvSpPr>
         <p:spPr>
           <a:xfrm>
-            <a:off x="4617720" y="1463040"/>
-            <a:ext cx="566928" cy="237744"/>
+            <a:off x="566928" y="4608575"/>
+            <a:ext cx="45720" cy="219456"/>
           </a:xfrm>
           <a:prstGeom prst="rect">
             <a:avLst/>
@@ -43637,706 +44743,66 @@
           <a:solidFill>
             <a:srgbClr val="1B9AAA"/>
           </a:solidFill>
-          <a:ln/>
-        </p:spPr>
-        <p:txBody>
-          <a:bodyPr/>
-          <a:lstStyle/>
-          <a:p>
-            <a:endParaRPr lang="en-US"/>
-          </a:p>
-        </p:txBody>
-      </p:sp>
-      <p:sp>
-        <p:nvSpPr>
-          <p:cNvPr id="17" name="Text 15"/>
-          <p:cNvSpPr/>
-          <p:nvPr/>
-        </p:nvSpPr>
-        <p:spPr>
-          <a:xfrm>
-            <a:off x="4617720" y="1495044"/>
-            <a:ext cx="566928" cy="182880"/>
+          <a:ln>
+            <a:noFill/>
+          </a:ln>
+          <a:effectLst/>
+        </p:spPr>
+        <p:style>
+          <a:lnRef idx="1">
+            <a:schemeClr val="accent1"/>
+          </a:lnRef>
+          <a:fillRef idx="3">
+            <a:schemeClr val="accent1"/>
+          </a:fillRef>
+          <a:effectRef idx="2">
+            <a:schemeClr val="accent1"/>
+          </a:effectRef>
+          <a:fontRef idx="minor">
+            <a:schemeClr val="lt1"/>
+          </a:fontRef>
+        </p:style>
+        <p:txBody>
+          <a:bodyPr rtlCol="0" anchor="ctr"/>
+          <a:lstStyle/>
+          <a:p>
+            <a:pPr algn="ctr"/>
+            <a:endParaRPr/>
+          </a:p>
+        </p:txBody>
+      </p:sp>
+      <p:sp>
+        <p:nvSpPr>
+          <p:cNvPr id="38" name="TextBox 37"/>
+          <p:cNvSpPr txBox="1"/>
+          <p:nvPr/>
+        </p:nvSpPr>
+        <p:spPr>
+          <a:xfrm>
+            <a:off x="713232" y="4590288"/>
+            <a:ext cx="7991856" cy="274320"/>
           </a:xfrm>
           <a:prstGeom prst="rect">
             <a:avLst/>
           </a:prstGeom>
           <a:noFill/>
-          <a:ln/>
-        </p:spPr>
-        <p:txBody>
-          <a:bodyPr wrap="square" lIns="0" tIns="0" rIns="0" bIns="0" rtlCol="0" anchor="ctr"/>
-          <a:lstStyle/>
-          <a:p>
-            <a:pPr marL="0" indent="0" algn="ctr">
-              <a:buNone/>
-            </a:pPr>
-            <a:r>
-              <a:rPr lang="en-US" sz="950" dirty="0">
-                <a:solidFill>
-                  <a:srgbClr val="FFFFFF"/>
-                </a:solidFill>
-                <a:latin typeface="JetBrains Mono" pitchFamily="34" charset="0"/>
-                <a:ea typeface="JetBrains Mono" pitchFamily="34" charset="-122"/>
-                <a:cs typeface="JetBrains Mono" pitchFamily="34" charset="-120"/>
-              </a:rPr>
-              <a:t>1955</a:t>
-            </a:r>
-            <a:endParaRPr lang="en-US" sz="950" dirty="0"/>
-          </a:p>
-        </p:txBody>
-      </p:sp>
-      <p:sp>
-        <p:nvSpPr>
-          <p:cNvPr id="18" name="Text 16"/>
-          <p:cNvSpPr/>
-          <p:nvPr/>
-        </p:nvSpPr>
-        <p:spPr>
-          <a:xfrm>
-            <a:off x="5303520" y="1467612"/>
-            <a:ext cx="3291840" cy="237744"/>
-          </a:xfrm>
-          <a:prstGeom prst="rect">
-            <a:avLst/>
-          </a:prstGeom>
-          <a:noFill/>
-          <a:ln/>
-        </p:spPr>
-        <p:txBody>
-          <a:bodyPr wrap="square" lIns="0" tIns="0" rIns="0" bIns="0" rtlCol="0" anchor="ctr"/>
-          <a:lstStyle/>
-          <a:p>
-            <a:pPr marL="0" indent="0">
-              <a:buNone/>
-            </a:pPr>
-            <a:r>
-              <a:rPr lang="en-US" sz="1400" dirty="0">
+        </p:spPr>
+        <p:txBody>
+          <a:bodyPr wrap="square" lIns="0" tIns="0" rIns="0" bIns="0" anchor="t">
+            <a:spAutoFit/>
+          </a:bodyPr>
+          <a:lstStyle/>
+          <a:p>
+            <a:pPr algn="l"/>
+            <a:r>
+              <a:rPr sz="1200" b="0">
                 <a:solidFill>
                   <a:srgbClr val="0D1B2A"/>
                 </a:solidFill>
-                <a:latin typeface="Oswald" pitchFamily="34" charset="0"/>
-                <a:ea typeface="Oswald" pitchFamily="34" charset="-122"/>
-                <a:cs typeface="Oswald" pitchFamily="34" charset="-120"/>
-              </a:rPr>
-              <a:t>Artificial Intelligence</a:t>
-            </a:r>
-            <a:endParaRPr lang="en-US" sz="1400" dirty="0"/>
-          </a:p>
-        </p:txBody>
-      </p:sp>
-      <p:sp>
-        <p:nvSpPr>
-          <p:cNvPr id="19" name="Text 17"/>
-          <p:cNvSpPr/>
-          <p:nvPr/>
-        </p:nvSpPr>
-        <p:spPr>
-          <a:xfrm>
-            <a:off x="5303520" y="1728216"/>
-            <a:ext cx="3310128" cy="365760"/>
-          </a:xfrm>
-          <a:prstGeom prst="rect">
-            <a:avLst/>
-          </a:prstGeom>
-          <a:noFill/>
-          <a:ln/>
-        </p:spPr>
-        <p:txBody>
-          <a:bodyPr wrap="square" lIns="0" tIns="0" rIns="0" bIns="0" rtlCol="0" anchor="ctr"/>
-          <a:lstStyle/>
-          <a:p>
-            <a:pPr marL="0" indent="0">
-              <a:buNone/>
-            </a:pPr>
-            <a:r>
-              <a:rPr lang="en-US" sz="950" dirty="0">
-                <a:solidFill>
-                  <a:srgbClr val="6B7B8C"/>
-                </a:solidFill>
-                <a:latin typeface="Roboto" pitchFamily="34" charset="0"/>
-                <a:ea typeface="Roboto" pitchFamily="34" charset="-122"/>
-                <a:cs typeface="Roboto" pitchFamily="34" charset="-120"/>
-              </a:rPr>
-              <a:t>The overarching field: machines performing tasks that require human-like intelligence.</a:t>
-            </a:r>
-            <a:endParaRPr lang="en-US" sz="950" dirty="0"/>
-          </a:p>
-        </p:txBody>
-      </p:sp>
-      <p:sp>
-        <p:nvSpPr>
-          <p:cNvPr id="20" name="Shape 18"/>
-          <p:cNvSpPr/>
-          <p:nvPr/>
-        </p:nvSpPr>
-        <p:spPr>
-          <a:xfrm>
-            <a:off x="4617720" y="2103120"/>
-            <a:ext cx="566928" cy="237744"/>
-          </a:xfrm>
-          <a:prstGeom prst="rect">
-            <a:avLst/>
-          </a:prstGeom>
-          <a:solidFill>
-            <a:srgbClr val="1B9AAA"/>
-          </a:solidFill>
-          <a:ln/>
-        </p:spPr>
-        <p:txBody>
-          <a:bodyPr/>
-          <a:lstStyle/>
-          <a:p>
-            <a:endParaRPr lang="en-US"/>
-          </a:p>
-        </p:txBody>
-      </p:sp>
-      <p:sp>
-        <p:nvSpPr>
-          <p:cNvPr id="21" name="Text 19"/>
-          <p:cNvSpPr/>
-          <p:nvPr/>
-        </p:nvSpPr>
-        <p:spPr>
-          <a:xfrm>
-            <a:off x="4617720" y="2135124"/>
-            <a:ext cx="566928" cy="182880"/>
-          </a:xfrm>
-          <a:prstGeom prst="rect">
-            <a:avLst/>
-          </a:prstGeom>
-          <a:noFill/>
-          <a:ln/>
-        </p:spPr>
-        <p:txBody>
-          <a:bodyPr wrap="square" lIns="0" tIns="0" rIns="0" bIns="0" rtlCol="0" anchor="ctr"/>
-          <a:lstStyle/>
-          <a:p>
-            <a:pPr marL="0" indent="0" algn="ctr">
-              <a:buNone/>
-            </a:pPr>
-            <a:r>
-              <a:rPr lang="en-US" sz="950" dirty="0">
-                <a:solidFill>
-                  <a:srgbClr val="FFFFFF"/>
-                </a:solidFill>
-                <a:latin typeface="JetBrains Mono" pitchFamily="34" charset="0"/>
-                <a:ea typeface="JetBrains Mono" pitchFamily="34" charset="-122"/>
-                <a:cs typeface="JetBrains Mono" pitchFamily="34" charset="-120"/>
-              </a:rPr>
-              <a:t>1959</a:t>
-            </a:r>
-            <a:endParaRPr lang="en-US" sz="950" dirty="0"/>
-          </a:p>
-        </p:txBody>
-      </p:sp>
-      <p:sp>
-        <p:nvSpPr>
-          <p:cNvPr id="22" name="Text 20"/>
-          <p:cNvSpPr/>
-          <p:nvPr/>
-        </p:nvSpPr>
-        <p:spPr>
-          <a:xfrm>
-            <a:off x="5303520" y="2107692"/>
-            <a:ext cx="3291840" cy="237744"/>
-          </a:xfrm>
-          <a:prstGeom prst="rect">
-            <a:avLst/>
-          </a:prstGeom>
-          <a:noFill/>
-          <a:ln/>
-        </p:spPr>
-        <p:txBody>
-          <a:bodyPr wrap="square" lIns="0" tIns="0" rIns="0" bIns="0" rtlCol="0" anchor="ctr"/>
-          <a:lstStyle/>
-          <a:p>
-            <a:pPr marL="0" indent="0">
-              <a:buNone/>
-            </a:pPr>
-            <a:r>
-              <a:rPr lang="en-US" sz="1400" dirty="0">
-                <a:solidFill>
-                  <a:srgbClr val="0D1B2A"/>
-                </a:solidFill>
-                <a:latin typeface="Oswald" pitchFamily="34" charset="0"/>
-                <a:ea typeface="Oswald" pitchFamily="34" charset="-122"/>
-                <a:cs typeface="Oswald" pitchFamily="34" charset="-120"/>
-              </a:rPr>
-              <a:t>Machine Learning</a:t>
-            </a:r>
-            <a:endParaRPr lang="en-US" sz="1400" dirty="0"/>
-          </a:p>
-        </p:txBody>
-      </p:sp>
-      <p:sp>
-        <p:nvSpPr>
-          <p:cNvPr id="23" name="Text 21"/>
-          <p:cNvSpPr/>
-          <p:nvPr/>
-        </p:nvSpPr>
-        <p:spPr>
-          <a:xfrm>
-            <a:off x="5303520" y="2368296"/>
-            <a:ext cx="3310128" cy="365760"/>
-          </a:xfrm>
-          <a:prstGeom prst="rect">
-            <a:avLst/>
-          </a:prstGeom>
-          <a:noFill/>
-          <a:ln/>
-        </p:spPr>
-        <p:txBody>
-          <a:bodyPr wrap="square" lIns="0" tIns="0" rIns="0" bIns="0" rtlCol="0" anchor="ctr"/>
-          <a:lstStyle/>
-          <a:p>
-            <a:pPr marL="0" indent="0">
-              <a:buNone/>
-            </a:pPr>
-            <a:r>
-              <a:rPr lang="en-US" sz="950" dirty="0">
-                <a:solidFill>
-                  <a:srgbClr val="6B7B8C"/>
-                </a:solidFill>
-                <a:latin typeface="Roboto" pitchFamily="34" charset="0"/>
-                <a:ea typeface="Roboto" pitchFamily="34" charset="-122"/>
-                <a:cs typeface="Roboto" pitchFamily="34" charset="-120"/>
-              </a:rPr>
-              <a:t>A subset of AI: learning from data instead of explicit programming, to predict, classify or detect patterns.</a:t>
-            </a:r>
-            <a:endParaRPr lang="en-US" sz="950" dirty="0"/>
-          </a:p>
-        </p:txBody>
-      </p:sp>
-      <p:sp>
-        <p:nvSpPr>
-          <p:cNvPr id="24" name="Shape 22"/>
-          <p:cNvSpPr/>
-          <p:nvPr/>
-        </p:nvSpPr>
-        <p:spPr>
-          <a:xfrm>
-            <a:off x="4617720" y="2743200"/>
-            <a:ext cx="566928" cy="237744"/>
-          </a:xfrm>
-          <a:prstGeom prst="rect">
-            <a:avLst/>
-          </a:prstGeom>
-          <a:solidFill>
-            <a:srgbClr val="1B9AAA"/>
-          </a:solidFill>
-          <a:ln/>
-        </p:spPr>
-        <p:txBody>
-          <a:bodyPr/>
-          <a:lstStyle/>
-          <a:p>
-            <a:endParaRPr lang="en-US"/>
-          </a:p>
-        </p:txBody>
-      </p:sp>
-      <p:sp>
-        <p:nvSpPr>
-          <p:cNvPr id="25" name="Text 23"/>
-          <p:cNvSpPr/>
-          <p:nvPr/>
-        </p:nvSpPr>
-        <p:spPr>
-          <a:xfrm>
-            <a:off x="4617720" y="2775204"/>
-            <a:ext cx="566928" cy="182880"/>
-          </a:xfrm>
-          <a:prstGeom prst="rect">
-            <a:avLst/>
-          </a:prstGeom>
-          <a:noFill/>
-          <a:ln/>
-        </p:spPr>
-        <p:txBody>
-          <a:bodyPr wrap="square" lIns="0" tIns="0" rIns="0" bIns="0" rtlCol="0" anchor="ctr"/>
-          <a:lstStyle/>
-          <a:p>
-            <a:pPr marL="0" indent="0" algn="ctr">
-              <a:buNone/>
-            </a:pPr>
-            <a:r>
-              <a:rPr lang="en-US" sz="950" dirty="0">
-                <a:solidFill>
-                  <a:srgbClr val="FFFFFF"/>
-                </a:solidFill>
-                <a:latin typeface="JetBrains Mono" pitchFamily="34" charset="0"/>
-                <a:ea typeface="JetBrains Mono" pitchFamily="34" charset="-122"/>
-                <a:cs typeface="JetBrains Mono" pitchFamily="34" charset="-120"/>
-              </a:rPr>
-              <a:t>2012</a:t>
-            </a:r>
-            <a:endParaRPr lang="en-US" sz="950" dirty="0"/>
-          </a:p>
-        </p:txBody>
-      </p:sp>
-      <p:sp>
-        <p:nvSpPr>
-          <p:cNvPr id="26" name="Text 24"/>
-          <p:cNvSpPr/>
-          <p:nvPr/>
-        </p:nvSpPr>
-        <p:spPr>
-          <a:xfrm>
-            <a:off x="5303520" y="2747772"/>
-            <a:ext cx="3291840" cy="237744"/>
-          </a:xfrm>
-          <a:prstGeom prst="rect">
-            <a:avLst/>
-          </a:prstGeom>
-          <a:noFill/>
-          <a:ln/>
-        </p:spPr>
-        <p:txBody>
-          <a:bodyPr wrap="square" lIns="0" tIns="0" rIns="0" bIns="0" rtlCol="0" anchor="ctr"/>
-          <a:lstStyle/>
-          <a:p>
-            <a:pPr marL="0" indent="0">
-              <a:buNone/>
-            </a:pPr>
-            <a:r>
-              <a:rPr lang="en-US" sz="1400" dirty="0">
-                <a:solidFill>
-                  <a:srgbClr val="0D1B2A"/>
-                </a:solidFill>
-                <a:latin typeface="Oswald" pitchFamily="34" charset="0"/>
-                <a:ea typeface="Oswald" pitchFamily="34" charset="-122"/>
-                <a:cs typeface="Oswald" pitchFamily="34" charset="-120"/>
-              </a:rPr>
-              <a:t>Deep Learning</a:t>
-            </a:r>
-            <a:endParaRPr lang="en-US" sz="1400" dirty="0"/>
-          </a:p>
-        </p:txBody>
-      </p:sp>
-      <p:sp>
-        <p:nvSpPr>
-          <p:cNvPr id="27" name="Text 25"/>
-          <p:cNvSpPr/>
-          <p:nvPr/>
-        </p:nvSpPr>
-        <p:spPr>
-          <a:xfrm>
-            <a:off x="5303520" y="3008376"/>
-            <a:ext cx="3310128" cy="365760"/>
-          </a:xfrm>
-          <a:prstGeom prst="rect">
-            <a:avLst/>
-          </a:prstGeom>
-          <a:noFill/>
-          <a:ln/>
-        </p:spPr>
-        <p:txBody>
-          <a:bodyPr wrap="square" lIns="0" tIns="0" rIns="0" bIns="0" rtlCol="0" anchor="ctr"/>
-          <a:lstStyle/>
-          <a:p>
-            <a:pPr marL="0" indent="0">
-              <a:buNone/>
-            </a:pPr>
-            <a:r>
-              <a:rPr lang="en-US" sz="950" dirty="0">
-                <a:solidFill>
-                  <a:srgbClr val="6B7B8C"/>
-                </a:solidFill>
-                <a:latin typeface="Roboto" pitchFamily="34" charset="0"/>
-                <a:ea typeface="Roboto" pitchFamily="34" charset="-122"/>
-                <a:cs typeface="Roboto" pitchFamily="34" charset="-120"/>
-              </a:rPr>
-              <a:t>A subset of ML using many-layered neural networks to find complex patterns in large, unstructured data — text, images, audio, video.</a:t>
-            </a:r>
-            <a:endParaRPr lang="en-US" sz="950" dirty="0"/>
-          </a:p>
-        </p:txBody>
-      </p:sp>
-      <p:sp>
-        <p:nvSpPr>
-          <p:cNvPr id="28" name="Shape 26"/>
-          <p:cNvSpPr/>
-          <p:nvPr/>
-        </p:nvSpPr>
-        <p:spPr>
-          <a:xfrm>
-            <a:off x="4617720" y="3383280"/>
-            <a:ext cx="566928" cy="237744"/>
-          </a:xfrm>
-          <a:prstGeom prst="rect">
-            <a:avLst/>
-          </a:prstGeom>
-          <a:solidFill>
-            <a:srgbClr val="1B9AAA"/>
-          </a:solidFill>
-          <a:ln/>
-        </p:spPr>
-        <p:txBody>
-          <a:bodyPr/>
-          <a:lstStyle/>
-          <a:p>
-            <a:endParaRPr lang="en-US"/>
-          </a:p>
-        </p:txBody>
-      </p:sp>
-      <p:sp>
-        <p:nvSpPr>
-          <p:cNvPr id="29" name="Text 27"/>
-          <p:cNvSpPr/>
-          <p:nvPr/>
-        </p:nvSpPr>
-        <p:spPr>
-          <a:xfrm>
-            <a:off x="4617720" y="3415284"/>
-            <a:ext cx="566928" cy="182880"/>
-          </a:xfrm>
-          <a:prstGeom prst="rect">
-            <a:avLst/>
-          </a:prstGeom>
-          <a:noFill/>
-          <a:ln/>
-        </p:spPr>
-        <p:txBody>
-          <a:bodyPr wrap="square" lIns="0" tIns="0" rIns="0" bIns="0" rtlCol="0" anchor="ctr"/>
-          <a:lstStyle/>
-          <a:p>
-            <a:pPr marL="0" indent="0" algn="ctr">
-              <a:buNone/>
-            </a:pPr>
-            <a:r>
-              <a:rPr lang="en-US" sz="950" dirty="0">
-                <a:solidFill>
-                  <a:srgbClr val="FFFFFF"/>
-                </a:solidFill>
-                <a:latin typeface="JetBrains Mono" pitchFamily="34" charset="0"/>
-                <a:ea typeface="JetBrains Mono" pitchFamily="34" charset="-122"/>
-                <a:cs typeface="JetBrains Mono" pitchFamily="34" charset="-120"/>
-              </a:rPr>
-              <a:t>2018</a:t>
-            </a:r>
-            <a:endParaRPr lang="en-US" sz="950" dirty="0"/>
-          </a:p>
-        </p:txBody>
-      </p:sp>
-      <p:sp>
-        <p:nvSpPr>
-          <p:cNvPr id="30" name="Text 28"/>
-          <p:cNvSpPr/>
-          <p:nvPr/>
-        </p:nvSpPr>
-        <p:spPr>
-          <a:xfrm>
-            <a:off x="5303520" y="3387852"/>
-            <a:ext cx="3291840" cy="237744"/>
-          </a:xfrm>
-          <a:prstGeom prst="rect">
-            <a:avLst/>
-          </a:prstGeom>
-          <a:noFill/>
-          <a:ln/>
-        </p:spPr>
-        <p:txBody>
-          <a:bodyPr wrap="square" lIns="0" tIns="0" rIns="0" bIns="0" rtlCol="0" anchor="ctr"/>
-          <a:lstStyle/>
-          <a:p>
-            <a:pPr marL="0" indent="0">
-              <a:buNone/>
-            </a:pPr>
-            <a:r>
-              <a:rPr lang="en-US" sz="1400" dirty="0">
-                <a:solidFill>
-                  <a:srgbClr val="0D1B2A"/>
-                </a:solidFill>
-                <a:latin typeface="Oswald" pitchFamily="34" charset="0"/>
-                <a:ea typeface="Oswald" pitchFamily="34" charset="-122"/>
-                <a:cs typeface="Oswald" pitchFamily="34" charset="-120"/>
-              </a:rPr>
-              <a:t>Generative AI</a:t>
-            </a:r>
-            <a:endParaRPr lang="en-US" sz="1400" dirty="0"/>
-          </a:p>
-        </p:txBody>
-      </p:sp>
-      <p:sp>
-        <p:nvSpPr>
-          <p:cNvPr id="31" name="Text 29"/>
-          <p:cNvSpPr/>
-          <p:nvPr/>
-        </p:nvSpPr>
-        <p:spPr>
-          <a:xfrm>
-            <a:off x="5303520" y="3648456"/>
-            <a:ext cx="3310128" cy="365760"/>
-          </a:xfrm>
-          <a:prstGeom prst="rect">
-            <a:avLst/>
-          </a:prstGeom>
-          <a:noFill/>
-          <a:ln/>
-        </p:spPr>
-        <p:txBody>
-          <a:bodyPr wrap="square" lIns="0" tIns="0" rIns="0" bIns="0" rtlCol="0" anchor="ctr"/>
-          <a:lstStyle/>
-          <a:p>
-            <a:pPr marL="0" indent="0">
-              <a:buNone/>
-            </a:pPr>
-            <a:r>
-              <a:rPr lang="en-US" sz="950" dirty="0">
-                <a:solidFill>
-                  <a:srgbClr val="6B7B8C"/>
-                </a:solidFill>
-                <a:latin typeface="Roboto" pitchFamily="34" charset="0"/>
-                <a:ea typeface="Roboto" pitchFamily="34" charset="-122"/>
-                <a:cs typeface="Roboto" pitchFamily="34" charset="-120"/>
-              </a:rPr>
-              <a:t>A branch of AI that creates new content — text, images, video, audio, code — by learning patterns from massive datasets.</a:t>
-            </a:r>
-            <a:endParaRPr lang="en-US" sz="950" dirty="0"/>
-          </a:p>
-        </p:txBody>
-      </p:sp>
-      <p:sp>
-        <p:nvSpPr>
-          <p:cNvPr id="32" name="Shape 30"/>
-          <p:cNvSpPr/>
-          <p:nvPr/>
-        </p:nvSpPr>
-        <p:spPr>
-          <a:xfrm>
-            <a:off x="4617720" y="4023360"/>
-            <a:ext cx="566928" cy="237744"/>
-          </a:xfrm>
-          <a:prstGeom prst="rect">
-            <a:avLst/>
-          </a:prstGeom>
-          <a:solidFill>
-            <a:srgbClr val="06D6A0"/>
-          </a:solidFill>
-          <a:ln/>
-        </p:spPr>
-        <p:txBody>
-          <a:bodyPr/>
-          <a:lstStyle/>
-          <a:p>
-            <a:endParaRPr lang="en-US"/>
-          </a:p>
-        </p:txBody>
-      </p:sp>
-      <p:sp>
-        <p:nvSpPr>
-          <p:cNvPr id="33" name="Text 31"/>
-          <p:cNvSpPr/>
-          <p:nvPr/>
-        </p:nvSpPr>
-        <p:spPr>
-          <a:xfrm>
-            <a:off x="4617720" y="4055364"/>
-            <a:ext cx="566928" cy="182880"/>
-          </a:xfrm>
-          <a:prstGeom prst="rect">
-            <a:avLst/>
-          </a:prstGeom>
-          <a:noFill/>
-          <a:ln/>
-        </p:spPr>
-        <p:txBody>
-          <a:bodyPr wrap="square" lIns="0" tIns="0" rIns="0" bIns="0" rtlCol="0" anchor="ctr"/>
-          <a:lstStyle/>
-          <a:p>
-            <a:pPr marL="0" indent="0" algn="ctr">
-              <a:buNone/>
-            </a:pPr>
-            <a:r>
-              <a:rPr lang="en-US" sz="950" dirty="0">
-                <a:solidFill>
-                  <a:srgbClr val="0D1B2A"/>
-                </a:solidFill>
-                <a:latin typeface="JetBrains Mono" pitchFamily="34" charset="0"/>
-                <a:ea typeface="JetBrains Mono" pitchFamily="34" charset="-122"/>
-                <a:cs typeface="JetBrains Mono" pitchFamily="34" charset="-120"/>
-              </a:rPr>
-              <a:t>2024</a:t>
-            </a:r>
-            <a:endParaRPr lang="en-US" sz="950" dirty="0"/>
-          </a:p>
-        </p:txBody>
-      </p:sp>
-      <p:sp>
-        <p:nvSpPr>
-          <p:cNvPr id="34" name="Text 32"/>
-          <p:cNvSpPr/>
-          <p:nvPr/>
-        </p:nvSpPr>
-        <p:spPr>
-          <a:xfrm>
-            <a:off x="5303520" y="4027932"/>
-            <a:ext cx="3291840" cy="237744"/>
-          </a:xfrm>
-          <a:prstGeom prst="rect">
-            <a:avLst/>
-          </a:prstGeom>
-          <a:noFill/>
-          <a:ln/>
-        </p:spPr>
-        <p:txBody>
-          <a:bodyPr wrap="square" lIns="0" tIns="0" rIns="0" bIns="0" rtlCol="0" anchor="ctr"/>
-          <a:lstStyle/>
-          <a:p>
-            <a:pPr marL="0" indent="0">
-              <a:buNone/>
-            </a:pPr>
-            <a:r>
-              <a:rPr lang="en-US" sz="1400" dirty="0">
-                <a:solidFill>
-                  <a:srgbClr val="0D1B2A"/>
-                </a:solidFill>
-                <a:latin typeface="Oswald" pitchFamily="34" charset="0"/>
-                <a:ea typeface="Oswald" pitchFamily="34" charset="-122"/>
-                <a:cs typeface="Oswald" pitchFamily="34" charset="-120"/>
-              </a:rPr>
-              <a:t>Agentic AI</a:t>
-            </a:r>
-            <a:endParaRPr lang="en-US" sz="1400" dirty="0"/>
-          </a:p>
-        </p:txBody>
-      </p:sp>
-      <p:sp>
-        <p:nvSpPr>
-          <p:cNvPr id="35" name="Text 33"/>
-          <p:cNvSpPr/>
-          <p:nvPr/>
-        </p:nvSpPr>
-        <p:spPr>
-          <a:xfrm>
-            <a:off x="5303520" y="4288536"/>
-            <a:ext cx="3310128" cy="365760"/>
-          </a:xfrm>
-          <a:prstGeom prst="rect">
-            <a:avLst/>
-          </a:prstGeom>
-          <a:noFill/>
-          <a:ln/>
-        </p:spPr>
-        <p:txBody>
-          <a:bodyPr wrap="square" lIns="0" tIns="0" rIns="0" bIns="0" rtlCol="0" anchor="ctr"/>
-          <a:lstStyle/>
-          <a:p>
-            <a:pPr marL="0" indent="0">
-              <a:buNone/>
-            </a:pPr>
-            <a:r>
-              <a:rPr lang="en-US" sz="950" dirty="0">
-                <a:solidFill>
-                  <a:srgbClr val="6B7B8C"/>
-                </a:solidFill>
-                <a:latin typeface="Roboto" pitchFamily="34" charset="0"/>
-                <a:ea typeface="Roboto" pitchFamily="34" charset="-122"/>
-                <a:cs typeface="Roboto" pitchFamily="34" charset="-120"/>
-              </a:rPr>
-              <a:t>Builds on generative models by adding tool/API use, memory and planning in a closed loop, enabling autonomous goal pursuit beyond content creation.</a:t>
-            </a:r>
-            <a:endParaRPr lang="en-US" sz="950" dirty="0"/>
+                <a:latin typeface="Roboto"/>
+              </a:rPr>
+              <a:t>Deep learning is a method within machine learning, not a synonym for all of AI.</a:t>
+            </a:r>
           </a:p>
         </p:txBody>
       </p:sp>
@@ -53006,13 +53472,13 @@
       </p:sp>
       <p:sp>
         <p:nvSpPr>
-          <p:cNvPr id="6" name="Rectangle 5"/>
+          <p:cNvPr id="5" name="Rectangle 4"/>
           <p:cNvSpPr/>
           <p:nvPr/>
         </p:nvSpPr>
         <p:spPr>
           <a:xfrm>
-            <a:off x="566928" y="1405393"/>
+            <a:off x="566928" y="1408176"/>
             <a:ext cx="8138160" cy="566928"/>
           </a:xfrm>
           <a:prstGeom prst="rect">
@@ -53051,13 +53517,13 @@
       </p:sp>
       <p:sp>
         <p:nvSpPr>
-          <p:cNvPr id="7" name="Rectangle 6"/>
+          <p:cNvPr id="6" name="Rectangle 5"/>
           <p:cNvSpPr/>
           <p:nvPr/>
         </p:nvSpPr>
         <p:spPr>
           <a:xfrm>
-            <a:off x="566928" y="1405393"/>
+            <a:off x="566928" y="1408176"/>
             <a:ext cx="54864" cy="566928"/>
           </a:xfrm>
           <a:prstGeom prst="rect">
@@ -53096,13 +53562,13 @@
       </p:sp>
       <p:sp>
         <p:nvSpPr>
-          <p:cNvPr id="8" name="TextBox 7"/>
+          <p:cNvPr id="7" name="TextBox 6"/>
           <p:cNvSpPr txBox="1"/>
           <p:nvPr/>
         </p:nvSpPr>
         <p:spPr>
           <a:xfrm>
-            <a:off x="795528" y="1469401"/>
+            <a:off x="795528" y="1472184"/>
             <a:ext cx="1920240" cy="292608"/>
           </a:xfrm>
           <a:prstGeom prst="rect">
@@ -53131,13 +53597,13 @@
       </p:sp>
       <p:sp>
         <p:nvSpPr>
-          <p:cNvPr id="9" name="TextBox 8"/>
+          <p:cNvPr id="8" name="TextBox 7"/>
           <p:cNvSpPr txBox="1"/>
           <p:nvPr/>
         </p:nvSpPr>
         <p:spPr>
           <a:xfrm>
-            <a:off x="795528" y="1771153"/>
+            <a:off x="795528" y="1773936"/>
             <a:ext cx="1828800" cy="228600"/>
           </a:xfrm>
           <a:prstGeom prst="rect">
@@ -53166,13 +53632,13 @@
       </p:sp>
       <p:sp>
         <p:nvSpPr>
-          <p:cNvPr id="10" name="TextBox 9"/>
+          <p:cNvPr id="9" name="TextBox 8"/>
           <p:cNvSpPr txBox="1"/>
           <p:nvPr/>
         </p:nvSpPr>
         <p:spPr>
           <a:xfrm>
-            <a:off x="2606040" y="1405393"/>
+            <a:off x="2606040" y="1408176"/>
             <a:ext cx="3977639" cy="566928"/>
           </a:xfrm>
           <a:prstGeom prst="rect">
@@ -53201,13 +53667,13 @@
       </p:sp>
       <p:sp>
         <p:nvSpPr>
-          <p:cNvPr id="11" name="Rounded Rectangle 10"/>
+          <p:cNvPr id="10" name="Rounded Rectangle 9"/>
           <p:cNvSpPr/>
           <p:nvPr/>
         </p:nvSpPr>
         <p:spPr>
           <a:xfrm>
-            <a:off x="6720840" y="1560841"/>
+            <a:off x="6720840" y="1563624"/>
             <a:ext cx="1783080" cy="256032"/>
           </a:xfrm>
           <a:prstGeom prst="roundRect">
@@ -53249,20 +53715,20 @@
                 </a:solidFill>
                 <a:latin typeface="Roboto"/>
               </a:rPr>
-              <a:t>A loop kept in check</a:t>
-            </a:r>
-          </a:p>
-        </p:txBody>
-      </p:sp>
-      <p:sp>
-        <p:nvSpPr>
-          <p:cNvPr id="12" name="Rectangle 11"/>
+              <a:t>Multi-step tasks</a:t>
+            </a:r>
+          </a:p>
+        </p:txBody>
+      </p:sp>
+      <p:sp>
+        <p:nvSpPr>
+          <p:cNvPr id="11" name="Rectangle 10"/>
           <p:cNvSpPr/>
           <p:nvPr/>
         </p:nvSpPr>
         <p:spPr>
           <a:xfrm>
-            <a:off x="566928" y="2063761"/>
+            <a:off x="566928" y="2066543"/>
             <a:ext cx="8138160" cy="566928"/>
           </a:xfrm>
           <a:prstGeom prst="rect">
@@ -53303,13 +53769,13 @@
       </p:sp>
       <p:sp>
         <p:nvSpPr>
-          <p:cNvPr id="13" name="Rectangle 12"/>
+          <p:cNvPr id="12" name="Rectangle 11"/>
           <p:cNvSpPr/>
           <p:nvPr/>
         </p:nvSpPr>
         <p:spPr>
           <a:xfrm>
-            <a:off x="566928" y="2063761"/>
+            <a:off x="566928" y="2066543"/>
             <a:ext cx="54864" cy="566928"/>
           </a:xfrm>
           <a:prstGeom prst="rect">
@@ -53348,13 +53814,13 @@
       </p:sp>
       <p:sp>
         <p:nvSpPr>
-          <p:cNvPr id="14" name="TextBox 13"/>
+          <p:cNvPr id="13" name="TextBox 12"/>
           <p:cNvSpPr txBox="1"/>
           <p:nvPr/>
         </p:nvSpPr>
         <p:spPr>
           <a:xfrm>
-            <a:off x="795528" y="2127769"/>
+            <a:off x="795528" y="2130551"/>
             <a:ext cx="1920240" cy="292608"/>
           </a:xfrm>
           <a:prstGeom prst="rect">
@@ -53383,13 +53849,13 @@
       </p:sp>
       <p:sp>
         <p:nvSpPr>
-          <p:cNvPr id="15" name="TextBox 14"/>
+          <p:cNvPr id="14" name="TextBox 13"/>
           <p:cNvSpPr txBox="1"/>
           <p:nvPr/>
         </p:nvSpPr>
         <p:spPr>
           <a:xfrm>
-            <a:off x="795528" y="2429521"/>
+            <a:off x="795528" y="2432303"/>
             <a:ext cx="1828800" cy="228600"/>
           </a:xfrm>
           <a:prstGeom prst="rect">
@@ -53418,13 +53884,13 @@
       </p:sp>
       <p:sp>
         <p:nvSpPr>
-          <p:cNvPr id="16" name="TextBox 15"/>
+          <p:cNvPr id="15" name="TextBox 14"/>
           <p:cNvSpPr txBox="1"/>
           <p:nvPr/>
         </p:nvSpPr>
         <p:spPr>
           <a:xfrm>
-            <a:off x="2606040" y="2063761"/>
+            <a:off x="2606040" y="2066543"/>
             <a:ext cx="3977639" cy="566928"/>
           </a:xfrm>
           <a:prstGeom prst="rect">
@@ -53453,13 +53919,13 @@
       </p:sp>
       <p:sp>
         <p:nvSpPr>
-          <p:cNvPr id="17" name="Rounded Rectangle 16"/>
+          <p:cNvPr id="16" name="Rounded Rectangle 15"/>
           <p:cNvSpPr/>
           <p:nvPr/>
         </p:nvSpPr>
         <p:spPr>
           <a:xfrm>
-            <a:off x="6720840" y="2219209"/>
+            <a:off x="6720840" y="2221991"/>
             <a:ext cx="1783080" cy="256032"/>
           </a:xfrm>
           <a:prstGeom prst="roundRect">
@@ -53501,20 +53967,20 @@
                 </a:solidFill>
                 <a:latin typeface="Roboto"/>
               </a:rPr>
-              <a:t>Knowledge · hands</a:t>
-            </a:r>
-          </a:p>
-        </p:txBody>
-      </p:sp>
-      <p:sp>
-        <p:nvSpPr>
-          <p:cNvPr id="18" name="Rectangle 17"/>
+              <a:t>Knowledge · actions</a:t>
+            </a:r>
+          </a:p>
+        </p:txBody>
+      </p:sp>
+      <p:sp>
+        <p:nvSpPr>
+          <p:cNvPr id="17" name="Rectangle 16"/>
           <p:cNvSpPr/>
           <p:nvPr/>
         </p:nvSpPr>
         <p:spPr>
           <a:xfrm>
-            <a:off x="566928" y="2722128"/>
+            <a:off x="566928" y="2724912"/>
             <a:ext cx="8138160" cy="566928"/>
           </a:xfrm>
           <a:prstGeom prst="rect">
@@ -53555,13 +54021,13 @@
       </p:sp>
       <p:sp>
         <p:nvSpPr>
-          <p:cNvPr id="19" name="Rectangle 18"/>
+          <p:cNvPr id="18" name="Rectangle 17"/>
           <p:cNvSpPr/>
           <p:nvPr/>
         </p:nvSpPr>
         <p:spPr>
           <a:xfrm>
-            <a:off x="566928" y="2722128"/>
+            <a:off x="566928" y="2724912"/>
             <a:ext cx="54864" cy="566928"/>
           </a:xfrm>
           <a:prstGeom prst="rect">
@@ -53600,13 +54066,13 @@
       </p:sp>
       <p:sp>
         <p:nvSpPr>
-          <p:cNvPr id="20" name="TextBox 19"/>
+          <p:cNvPr id="19" name="TextBox 18"/>
           <p:cNvSpPr txBox="1"/>
           <p:nvPr/>
         </p:nvSpPr>
         <p:spPr>
           <a:xfrm>
-            <a:off x="795528" y="2786136"/>
+            <a:off x="795528" y="2788920"/>
             <a:ext cx="1920240" cy="292608"/>
           </a:xfrm>
           <a:prstGeom prst="rect">
@@ -53635,13 +54101,13 @@
       </p:sp>
       <p:sp>
         <p:nvSpPr>
-          <p:cNvPr id="21" name="TextBox 20"/>
+          <p:cNvPr id="20" name="TextBox 19"/>
           <p:cNvSpPr txBox="1"/>
           <p:nvPr/>
         </p:nvSpPr>
         <p:spPr>
           <a:xfrm>
-            <a:off x="795528" y="3087888"/>
+            <a:off x="795528" y="3090672"/>
             <a:ext cx="1828800" cy="228600"/>
           </a:xfrm>
           <a:prstGeom prst="rect">
@@ -53670,13 +54136,13 @@
       </p:sp>
       <p:sp>
         <p:nvSpPr>
-          <p:cNvPr id="22" name="TextBox 21"/>
+          <p:cNvPr id="21" name="TextBox 20"/>
           <p:cNvSpPr txBox="1"/>
           <p:nvPr/>
         </p:nvSpPr>
         <p:spPr>
           <a:xfrm>
-            <a:off x="2606040" y="2722128"/>
+            <a:off x="2606040" y="2724912"/>
             <a:ext cx="3977639" cy="566928"/>
           </a:xfrm>
           <a:prstGeom prst="rect">
@@ -53705,13 +54171,13 @@
       </p:sp>
       <p:sp>
         <p:nvSpPr>
-          <p:cNvPr id="23" name="Rounded Rectangle 22"/>
+          <p:cNvPr id="22" name="Rounded Rectangle 21"/>
           <p:cNvSpPr/>
           <p:nvPr/>
         </p:nvSpPr>
         <p:spPr>
           <a:xfrm>
-            <a:off x="6720840" y="2877576"/>
+            <a:off x="6720840" y="2880360"/>
             <a:ext cx="1783080" cy="256032"/>
           </a:xfrm>
           <a:prstGeom prst="roundRect">
@@ -53753,20 +54219,20 @@
                 </a:solidFill>
                 <a:latin typeface="Roboto"/>
               </a:rPr>
-              <a:t>One common plug</a:t>
-            </a:r>
-          </a:p>
-        </p:txBody>
-      </p:sp>
-      <p:sp>
-        <p:nvSpPr>
-          <p:cNvPr id="24" name="Rectangle 23"/>
+              <a:t>One standard connection</a:t>
+            </a:r>
+          </a:p>
+        </p:txBody>
+      </p:sp>
+      <p:sp>
+        <p:nvSpPr>
+          <p:cNvPr id="23" name="Rectangle 22"/>
           <p:cNvSpPr/>
           <p:nvPr/>
         </p:nvSpPr>
         <p:spPr>
           <a:xfrm>
-            <a:off x="566928" y="3380497"/>
+            <a:off x="566928" y="3383280"/>
             <a:ext cx="8138160" cy="566928"/>
           </a:xfrm>
           <a:prstGeom prst="rect">
@@ -53807,13 +54273,13 @@
       </p:sp>
       <p:sp>
         <p:nvSpPr>
-          <p:cNvPr id="25" name="Rectangle 24"/>
+          <p:cNvPr id="24" name="Rectangle 23"/>
           <p:cNvSpPr/>
           <p:nvPr/>
         </p:nvSpPr>
         <p:spPr>
           <a:xfrm>
-            <a:off x="566928" y="3380497"/>
+            <a:off x="566928" y="3383280"/>
             <a:ext cx="54864" cy="566928"/>
           </a:xfrm>
           <a:prstGeom prst="rect">
@@ -53852,13 +54318,13 @@
       </p:sp>
       <p:sp>
         <p:nvSpPr>
-          <p:cNvPr id="26" name="TextBox 25"/>
+          <p:cNvPr id="25" name="TextBox 24"/>
           <p:cNvSpPr txBox="1"/>
           <p:nvPr/>
         </p:nvSpPr>
         <p:spPr>
           <a:xfrm>
-            <a:off x="795528" y="3444505"/>
+            <a:off x="795528" y="3447288"/>
             <a:ext cx="1920240" cy="292608"/>
           </a:xfrm>
           <a:prstGeom prst="rect">
@@ -53887,13 +54353,13 @@
       </p:sp>
       <p:sp>
         <p:nvSpPr>
-          <p:cNvPr id="27" name="TextBox 26"/>
+          <p:cNvPr id="26" name="TextBox 25"/>
           <p:cNvSpPr txBox="1"/>
           <p:nvPr/>
         </p:nvSpPr>
         <p:spPr>
           <a:xfrm>
-            <a:off x="795528" y="3746257"/>
+            <a:off x="795528" y="3749040"/>
             <a:ext cx="1828800" cy="228600"/>
           </a:xfrm>
           <a:prstGeom prst="rect">
@@ -53922,13 +54388,13 @@
       </p:sp>
       <p:sp>
         <p:nvSpPr>
-          <p:cNvPr id="28" name="TextBox 27"/>
+          <p:cNvPr id="27" name="TextBox 26"/>
           <p:cNvSpPr txBox="1"/>
           <p:nvPr/>
         </p:nvSpPr>
         <p:spPr>
           <a:xfrm>
-            <a:off x="2606040" y="3380497"/>
+            <a:off x="2606040" y="3383280"/>
             <a:ext cx="3977639" cy="566928"/>
           </a:xfrm>
           <a:prstGeom prst="rect">
@@ -53957,13 +54423,13 @@
       </p:sp>
       <p:sp>
         <p:nvSpPr>
-          <p:cNvPr id="29" name="Rounded Rectangle 28"/>
+          <p:cNvPr id="28" name="Rounded Rectangle 27"/>
           <p:cNvSpPr/>
           <p:nvPr/>
         </p:nvSpPr>
         <p:spPr>
           <a:xfrm>
-            <a:off x="6720840" y="3535945"/>
+            <a:off x="6720840" y="3538728"/>
             <a:ext cx="1783080" cy="256032"/>
           </a:xfrm>
           <a:prstGeom prst="roundRect">
@@ -54012,13 +54478,13 @@
       </p:sp>
       <p:sp>
         <p:nvSpPr>
-          <p:cNvPr id="31" name="Rectangle 30"/>
+          <p:cNvPr id="29" name="Rectangle 28"/>
           <p:cNvSpPr/>
           <p:nvPr/>
         </p:nvSpPr>
         <p:spPr>
           <a:xfrm>
-            <a:off x="566928" y="4230888"/>
+            <a:off x="566928" y="4233672"/>
             <a:ext cx="45720" cy="219456"/>
           </a:xfrm>
           <a:prstGeom prst="rect">
@@ -54057,13 +54523,13 @@
       </p:sp>
       <p:sp>
         <p:nvSpPr>
-          <p:cNvPr id="32" name="TextBox 31"/>
+          <p:cNvPr id="30" name="TextBox 29"/>
           <p:cNvSpPr txBox="1"/>
           <p:nvPr/>
         </p:nvSpPr>
         <p:spPr>
           <a:xfrm>
-            <a:off x="713232" y="4212601"/>
+            <a:off x="713232" y="4215384"/>
             <a:ext cx="7991856" cy="274320"/>
           </a:xfrm>
           <a:prstGeom prst="rect">
